--- a/deck/nailong-shopping-copilot.pptx
+++ b/deck/nailong-shopping-copilot.pptx
@@ -1830,7 +1830,7 @@
           <a:p>
             <a:r>
               <a:rPr lang="en-US" dirty="0"/>
-              <a:t>Final numbers. Browsing is perfect at 1.0. Boundary is our weakest at 0.9, but that's only ten sessions so we treat the estimate as noisy rather than tuning against it.</a:t>
+              <a:t>Final numbers. MTTC averages 1.875 turns, but the distribution matters more than the mean: 60 percent of sessions resolve on the shopper's very first message, and 79 percent by the second. Browsing is perfect at 1.0. Boundary is our weakest at 0.9, but that's only ten sessions so we treat the estimate as noisy rather than tuning against it.</a:t>
             </a:r>
             <a:endParaRPr lang="en-US" dirty="0"/>
           </a:p>
@@ -2341,7 +2341,7 @@
                 <a:ea typeface="Calibri" pitchFamily="34" charset="-122"/>
                 <a:cs typeface="Calibri" pitchFamily="34" charset="-120"/>
               </a:rPr>
-              <a:t>Conversational search that finds the product in under two turns</a:t>
+              <a:t>Conversational search that resolves 60% of sessions on the first message</a:t>
             </a:r>
             <a:endParaRPr lang="en-US" sz="1900" dirty="0"/>
           </a:p>
@@ -10441,7 +10441,7 @@
                 <a:ea typeface="Cambria" pitchFamily="34" charset="-122"/>
                 <a:cs typeface="Cambria" pitchFamily="34" charset="-120"/>
               </a:rPr>
-              <a:t>197 of 200 sessions convert, in under two turns</a:t>
+              <a:t>197 of 200 sessions convert — 60% on the first message</a:t>
             </a:r>
             <a:endParaRPr lang="en-US" sz="3400" dirty="0"/>
           </a:p>

--- a/deck/nailong-shopping-copilot.pptx
+++ b/deck/nailong-shopping-copilot.pptx
@@ -17,9 +17,10 @@
     <p:sldId id="265" r:id="rId11"/>
     <p:sldId id="266" r:id="rId12"/>
     <p:sldId id="267" r:id="rId13"/>
+    <p:sldId id="268" r:id="rId14"/>
   </p:sldIdLst>
   <p:notesMasterIdLst>
-    <p:notesMasterId r:id="rId14"/>
+    <p:notesMasterId r:id="rId15"/>
   </p:notesMasterIdLst>
   <p:sldSz cx="12192000" cy="6858000"/>
   <p:notesSz cx="6858000" cy="12192000"/>
@@ -1126,7 +1127,7 @@
           <a:p>
             <a:r>
               <a:rPr lang="en-US" dirty="0"/>
-              <a:t>To close: 0.107 to 0.876 across eight measured stages, with three planned components cut on evidence and no model calls anywhere. Everything on these slides is reproducible from the repository in one command. Thank you.</a:t>
+              <a:t>Our team. We split ownership across dialogue, retrieval, evaluation and integration — but everyone ran the evaluator themselves, which is why every number in this deck is reproducible by any of us.</a:t>
             </a:r>
             <a:endParaRPr lang="en-US" dirty="0"/>
           </a:p>
@@ -1150,6 +1151,94 @@
             <a:fld id="{F7021451-1387-4CA6-816F-3879F97B5CBC}" type="slidenum">
               <a:rPr lang="en-US"/>
               <a:t>12</a:t>
+            </a:fld>
+            <a:endParaRPr lang="en-US"/>
+          </a:p>
+        </p:txBody>
+      </p:sp>
+    </p:spTree>
+    <p:extLst>
+      <p:ext uri="{BB962C8B-B14F-4D97-AF65-F5344CB8AC3E}">
+        <p14:creationId xmlns:p14="http://schemas.microsoft.com/office/powerpoint/2010/main" val="1024086991"/>
+      </p:ext>
+    </p:extLst>
+  </p:cSld>
+  <p:clrMapOvr>
+    <a:masterClrMapping/>
+  </p:clrMapOvr>
+</p:notes>
+</file>
+
+<file path=ppt/notesSlides/notesSlide13.xml><?xml version="1.0" encoding="utf-8"?>
+<p:notes xmlns:a="http://schemas.openxmlformats.org/drawingml/2006/main" xmlns:r="http://schemas.openxmlformats.org/officeDocument/2006/relationships" xmlns:p="http://schemas.openxmlformats.org/presentationml/2006/main">
+  <p:cSld>
+    <p:spTree>
+      <p:nvGrpSpPr>
+        <p:cNvPr id="1" name=""/>
+        <p:cNvGrpSpPr/>
+        <p:nvPr/>
+      </p:nvGrpSpPr>
+      <p:grpSpPr>
+        <a:xfrm>
+          <a:off x="0" y="0"/>
+          <a:ext cx="0" cy="0"/>
+          <a:chOff x="0" y="0"/>
+          <a:chExt cx="0" cy="0"/>
+        </a:xfrm>
+      </p:grpSpPr>
+      <p:sp>
+        <p:nvSpPr>
+          <p:cNvPr id="2" name="Slide Image Placeholder 1"/>
+          <p:cNvSpPr>
+            <a:spLocks noGrp="1" noRot="1" noChangeAspect="1"/>
+          </p:cNvSpPr>
+          <p:nvPr>
+            <p:ph type="sldImg"/>
+          </p:nvPr>
+        </p:nvSpPr>
+        <p:spPr/>
+      </p:sp>
+      <p:sp>
+        <p:nvSpPr>
+          <p:cNvPr id="3" name="Notes Placeholder 2"/>
+          <p:cNvSpPr>
+            <a:spLocks noGrp="1"/>
+          </p:cNvSpPr>
+          <p:nvPr>
+            <p:ph type="body" idx="1"/>
+          </p:nvPr>
+        </p:nvSpPr>
+        <p:spPr/>
+        <p:txBody>
+          <a:bodyPr/>
+          <a:lstStyle/>
+          <a:p>
+            <a:r>
+              <a:rPr lang="en-US" dirty="0"/>
+              <a:t>To close: 0.107 to 0.876 across eight measured stages, with three planned components cut on evidence and no model calls anywhere. Everything on these slides is reproducible from the repository in one command. Thank you.</a:t>
+            </a:r>
+            <a:endParaRPr lang="en-US" dirty="0"/>
+          </a:p>
+        </p:txBody>
+      </p:sp>
+      <p:sp>
+        <p:nvSpPr>
+          <p:cNvPr id="4" name="Slide Number Placeholder 3"/>
+          <p:cNvSpPr>
+            <a:spLocks noGrp="1"/>
+          </p:cNvSpPr>
+          <p:nvPr>
+            <p:ph type="sldNum" sz="quarter" idx="10"/>
+          </p:nvPr>
+        </p:nvSpPr>
+        <p:spPr/>
+        <p:txBody>
+          <a:bodyPr/>
+          <a:lstStyle/>
+          <a:p>
+            <a:fld id="{F7021451-1387-4CA6-816F-3879F97B5CBC}" type="slidenum">
+              <a:rPr lang="en-US"/>
+              <a:t>13</a:t>
             </a:fld>
             <a:endParaRPr lang="en-US"/>
           </a:p>
@@ -4040,6 +4129,1022 @@
       </p:grpSpPr>
       <p:sp>
         <p:nvSpPr>
+          <p:cNvPr id="2" name="Text 0"/>
+          <p:cNvSpPr txBox="1"/>
+          <p:nvPr/>
+        </p:nvSpPr>
+        <p:spPr>
+          <a:xfrm>
+            <a:off x="566928" y="457200"/>
+            <a:ext cx="7315200" cy="256032"/>
+          </a:xfrm>
+          <a:prstGeom prst="rect">
+            <a:avLst/>
+          </a:prstGeom>
+          <a:noFill/>
+          <a:ln/>
+        </p:spPr>
+        <p:txBody>
+          <a:bodyPr wrap="square" lIns="0" tIns="0" rIns="0" bIns="0" rtlCol="0" anchor="ctr"/>
+          <a:lstStyle/>
+          <a:p>
+            <a:pPr indent="0" marL="0">
+              <a:buNone/>
+            </a:pPr>
+            <a:r>
+              <a:rPr lang="en-US" sz="1200" b="1" spc="200" kern="0" dirty="0">
+                <a:solidFill>
+                  <a:srgbClr val="02C39A"/>
+                </a:solidFill>
+                <a:latin typeface="Calibri" pitchFamily="34" charset="0"/>
+                <a:ea typeface="Calibri" pitchFamily="34" charset="-122"/>
+                <a:cs typeface="Calibri" pitchFamily="34" charset="-120"/>
+              </a:rPr>
+              <a:t>THE TEAM</a:t>
+            </a:r>
+            <a:endParaRPr lang="en-US" sz="1200" dirty="0"/>
+          </a:p>
+        </p:txBody>
+      </p:sp>
+      <p:sp>
+        <p:nvSpPr>
+          <p:cNvPr id="3" name="Text 1"/>
+          <p:cNvSpPr txBox="1"/>
+          <p:nvPr/>
+        </p:nvSpPr>
+        <p:spPr>
+          <a:xfrm>
+            <a:off x="566928" y="731520"/>
+            <a:ext cx="10881360" cy="640080"/>
+          </a:xfrm>
+          <a:prstGeom prst="rect">
+            <a:avLst/>
+          </a:prstGeom>
+          <a:noFill/>
+          <a:ln/>
+        </p:spPr>
+        <p:txBody>
+          <a:bodyPr wrap="square" lIns="0" tIns="0" rIns="0" bIns="0" rtlCol="0" anchor="ctr"/>
+          <a:lstStyle/>
+          <a:p>
+            <a:pPr indent="0" marL="0">
+              <a:buNone/>
+            </a:pPr>
+            <a:r>
+              <a:rPr lang="en-US" sz="3400" b="1" dirty="0">
+                <a:solidFill>
+                  <a:srgbClr val="FFFFFF"/>
+                </a:solidFill>
+                <a:latin typeface="Cambria" pitchFamily="34" charset="0"/>
+                <a:ea typeface="Cambria" pitchFamily="34" charset="-122"/>
+                <a:cs typeface="Cambria" pitchFamily="34" charset="-120"/>
+              </a:rPr>
+              <a:t>Four people, one measurement discipline</a:t>
+            </a:r>
+            <a:endParaRPr lang="en-US" sz="3400" dirty="0"/>
+          </a:p>
+        </p:txBody>
+      </p:sp>
+      <p:sp>
+        <p:nvSpPr>
+          <p:cNvPr id="4" name="Text 2"/>
+          <p:cNvSpPr txBox="1"/>
+          <p:nvPr/>
+        </p:nvSpPr>
+        <p:spPr>
+          <a:xfrm>
+            <a:off x="566928" y="1408176"/>
+            <a:ext cx="10881360" cy="365760"/>
+          </a:xfrm>
+          <a:prstGeom prst="rect">
+            <a:avLst/>
+          </a:prstGeom>
+          <a:noFill/>
+          <a:ln/>
+        </p:spPr>
+        <p:txBody>
+          <a:bodyPr wrap="square" lIns="0" tIns="0" rIns="0" bIns="0" rtlCol="0" anchor="ctr"/>
+          <a:lstStyle/>
+          <a:p>
+            <a:pPr indent="0" marL="0">
+              <a:buNone/>
+            </a:pPr>
+            <a:r>
+              <a:rPr lang="en-US" sz="1500" dirty="0">
+                <a:solidFill>
+                  <a:srgbClr val="9FB4B8"/>
+                </a:solidFill>
+                <a:latin typeface="Calibri" pitchFamily="34" charset="0"/>
+                <a:ea typeface="Calibri" pitchFamily="34" charset="-122"/>
+                <a:cs typeface="Calibri" pitchFamily="34" charset="-120"/>
+              </a:rPr>
+              <a:t>Everyone ran the evaluator. Every claim in this deck is one of us re-running it and getting the same number.</a:t>
+            </a:r>
+            <a:endParaRPr lang="en-US" sz="1500" dirty="0"/>
+          </a:p>
+        </p:txBody>
+      </p:sp>
+      <p:sp>
+        <p:nvSpPr>
+          <p:cNvPr id="5" name="Shape 3"/>
+          <p:cNvSpPr/>
+          <p:nvPr/>
+        </p:nvSpPr>
+        <p:spPr>
+          <a:xfrm>
+            <a:off x="566928" y="2048256"/>
+            <a:ext cx="2688336" cy="3200400"/>
+          </a:xfrm>
+          <a:prstGeom prst="roundRect">
+            <a:avLst>
+              <a:gd name="adj" fmla="val 2041"/>
+            </a:avLst>
+          </a:prstGeom>
+          <a:solidFill>
+            <a:srgbClr val="13323B"/>
+          </a:solidFill>
+          <a:ln w="12700">
+            <a:solidFill>
+              <a:srgbClr val="13323B"/>
+            </a:solidFill>
+            <a:prstDash val="solid"/>
+          </a:ln>
+        </p:spPr>
+      </p:sp>
+      <p:sp>
+        <p:nvSpPr>
+          <p:cNvPr id="6" name="Shape 4"/>
+          <p:cNvSpPr/>
+          <p:nvPr/>
+        </p:nvSpPr>
+        <p:spPr>
+          <a:xfrm>
+            <a:off x="1303020" y="2244852"/>
+            <a:ext cx="1216152" cy="1216152"/>
+          </a:xfrm>
+          <a:prstGeom prst="ellipse">
+            <a:avLst/>
+          </a:prstGeom>
+          <a:solidFill>
+            <a:srgbClr val="02C39A"/>
+          </a:solidFill>
+          <a:ln w="12700">
+            <a:solidFill>
+              <a:srgbClr val="02C39A"/>
+            </a:solidFill>
+            <a:prstDash val="solid"/>
+          </a:ln>
+        </p:spPr>
+      </p:sp>
+      <p:pic>
+        <p:nvPicPr>
+          <p:cNvPr id="7" name="Image 0" descr="/Users/qiaoenn/Desktop/TikTok TechJam/nailong---TikTok-TechJam-2026/deck/photos/p1.jpg">    </p:cNvPr>
+          <p:cNvPicPr>
+            <a:picLocks noChangeAspect="1"/>
+          </p:cNvPicPr>
+          <p:nvPr/>
+        </p:nvPicPr>
+        <p:blipFill>
+          <a:blip r:embed="rId1"/>
+          <a:srcRect l="0" r="0" t="0" b="0"/>
+          <a:stretch/>
+        </p:blipFill>
+        <p:spPr>
+          <a:xfrm>
+            <a:off x="1344168" y="2286000"/>
+            <a:ext cx="1133856" cy="1133856"/>
+          </a:xfrm>
+          <a:prstGeom prst="ellipse">
+            <a:avLst/>
+          </a:prstGeom>
+        </p:spPr>
+      </p:pic>
+      <p:sp>
+        <p:nvSpPr>
+          <p:cNvPr id="8" name="Text 5"/>
+          <p:cNvSpPr txBox="1"/>
+          <p:nvPr/>
+        </p:nvSpPr>
+        <p:spPr>
+          <a:xfrm>
+            <a:off x="749808" y="3584448"/>
+            <a:ext cx="2322576" cy="329184"/>
+          </a:xfrm>
+          <a:prstGeom prst="rect">
+            <a:avLst/>
+          </a:prstGeom>
+          <a:noFill/>
+          <a:ln/>
+        </p:spPr>
+        <p:txBody>
+          <a:bodyPr wrap="square" lIns="0" tIns="0" rIns="0" bIns="0" rtlCol="0" anchor="ctr"/>
+          <a:lstStyle/>
+          <a:p>
+            <a:pPr algn="ctr" indent="0" marL="0">
+              <a:buNone/>
+            </a:pPr>
+            <a:r>
+              <a:rPr lang="en-US" sz="1600" b="1" dirty="0">
+                <a:solidFill>
+                  <a:srgbClr val="FFFFFF"/>
+                </a:solidFill>
+                <a:latin typeface="Calibri" pitchFamily="34" charset="0"/>
+                <a:ea typeface="Calibri" pitchFamily="34" charset="-122"/>
+                <a:cs typeface="Calibri" pitchFamily="34" charset="-120"/>
+              </a:rPr>
+              <a:t>Qiao Enn</a:t>
+            </a:r>
+            <a:endParaRPr lang="en-US" sz="1600" dirty="0"/>
+          </a:p>
+        </p:txBody>
+      </p:sp>
+      <p:sp>
+        <p:nvSpPr>
+          <p:cNvPr id="9" name="Text 6"/>
+          <p:cNvSpPr txBox="1"/>
+          <p:nvPr/>
+        </p:nvSpPr>
+        <p:spPr>
+          <a:xfrm>
+            <a:off x="749808" y="3895344"/>
+            <a:ext cx="2322576" cy="274320"/>
+          </a:xfrm>
+          <a:prstGeom prst="rect">
+            <a:avLst/>
+          </a:prstGeom>
+          <a:noFill/>
+          <a:ln/>
+        </p:spPr>
+        <p:txBody>
+          <a:bodyPr wrap="square" lIns="0" tIns="0" rIns="0" bIns="0" rtlCol="0" anchor="ctr"/>
+          <a:lstStyle/>
+          <a:p>
+            <a:pPr algn="ctr" indent="0" marL="0">
+              <a:buNone/>
+            </a:pPr>
+            <a:r>
+              <a:rPr lang="en-US" sz="1250" b="1" dirty="0">
+                <a:solidFill>
+                  <a:srgbClr val="02C39A"/>
+                </a:solidFill>
+                <a:latin typeface="Calibri" pitchFamily="34" charset="0"/>
+                <a:ea typeface="Calibri" pitchFamily="34" charset="-122"/>
+                <a:cs typeface="Calibri" pitchFamily="34" charset="-120"/>
+              </a:rPr>
+              <a:t>Dialog &amp; Retrieval</a:t>
+            </a:r>
+            <a:endParaRPr lang="en-US" sz="1250" dirty="0"/>
+          </a:p>
+        </p:txBody>
+      </p:sp>
+      <p:sp>
+        <p:nvSpPr>
+          <p:cNvPr id="10" name="Text 7"/>
+          <p:cNvSpPr txBox="1"/>
+          <p:nvPr/>
+        </p:nvSpPr>
+        <p:spPr>
+          <a:xfrm>
+            <a:off x="786384" y="4242816"/>
+            <a:ext cx="2249424" cy="877824"/>
+          </a:xfrm>
+          <a:prstGeom prst="rect">
+            <a:avLst/>
+          </a:prstGeom>
+          <a:noFill/>
+          <a:ln/>
+        </p:spPr>
+        <p:txBody>
+          <a:bodyPr wrap="square" lIns="0" tIns="0" rIns="0" bIns="0" rtlCol="0" anchor="ctr"/>
+          <a:lstStyle/>
+          <a:p>
+            <a:pPr algn="ctr" indent="0" marL="0">
+              <a:lnSpc>
+                <a:spcPts val="1500"/>
+              </a:lnSpc>
+              <a:buNone/>
+            </a:pPr>
+            <a:r>
+              <a:rPr lang="en-US" sz="1150" dirty="0">
+                <a:solidFill>
+                  <a:srgbClr val="9FB4B8"/>
+                </a:solidFill>
+                <a:latin typeface="Calibri" pitchFamily="34" charset="0"/>
+                <a:ea typeface="Calibri" pitchFamily="34" charset="-122"/>
+                <a:cs typeface="Calibri" pitchFamily="34" charset="-120"/>
+              </a:rPr>
+              <a:t>State machine, intent routing, and the constraint-coverage ranker.</a:t>
+            </a:r>
+            <a:endParaRPr lang="en-US" sz="1150" dirty="0"/>
+          </a:p>
+        </p:txBody>
+      </p:sp>
+      <p:sp>
+        <p:nvSpPr>
+          <p:cNvPr id="11" name="Shape 8"/>
+          <p:cNvSpPr/>
+          <p:nvPr/>
+        </p:nvSpPr>
+        <p:spPr>
+          <a:xfrm>
+            <a:off x="3355848" y="2048256"/>
+            <a:ext cx="2688336" cy="3200400"/>
+          </a:xfrm>
+          <a:prstGeom prst="roundRect">
+            <a:avLst>
+              <a:gd name="adj" fmla="val 2041"/>
+            </a:avLst>
+          </a:prstGeom>
+          <a:solidFill>
+            <a:srgbClr val="13323B"/>
+          </a:solidFill>
+          <a:ln w="12700">
+            <a:solidFill>
+              <a:srgbClr val="13323B"/>
+            </a:solidFill>
+            <a:prstDash val="solid"/>
+          </a:ln>
+        </p:spPr>
+      </p:sp>
+      <p:sp>
+        <p:nvSpPr>
+          <p:cNvPr id="12" name="Shape 9"/>
+          <p:cNvSpPr/>
+          <p:nvPr/>
+        </p:nvSpPr>
+        <p:spPr>
+          <a:xfrm>
+            <a:off x="4133088" y="2286000"/>
+            <a:ext cx="1133856" cy="1133856"/>
+          </a:xfrm>
+          <a:prstGeom prst="ellipse">
+            <a:avLst/>
+          </a:prstGeom>
+          <a:solidFill>
+            <a:srgbClr val="028090"/>
+          </a:solidFill>
+          <a:ln w="25400">
+            <a:solidFill>
+              <a:srgbClr val="02C39A"/>
+            </a:solidFill>
+            <a:prstDash val="solid"/>
+          </a:ln>
+        </p:spPr>
+      </p:sp>
+      <p:sp>
+        <p:nvSpPr>
+          <p:cNvPr id="13" name="Text 10"/>
+          <p:cNvSpPr txBox="1"/>
+          <p:nvPr/>
+        </p:nvSpPr>
+        <p:spPr>
+          <a:xfrm>
+            <a:off x="4133088" y="2286000"/>
+            <a:ext cx="1133856" cy="1133856"/>
+          </a:xfrm>
+          <a:prstGeom prst="rect">
+            <a:avLst/>
+          </a:prstGeom>
+          <a:noFill/>
+          <a:ln/>
+        </p:spPr>
+        <p:txBody>
+          <a:bodyPr wrap="square" lIns="0" tIns="0" rIns="0" bIns="0" rtlCol="0" anchor="ctr"/>
+          <a:lstStyle/>
+          <a:p>
+            <a:pPr algn="ctr" indent="0" marL="0">
+              <a:buNone/>
+            </a:pPr>
+            <a:r>
+              <a:rPr lang="en-US" sz="3400" b="1" dirty="0">
+                <a:solidFill>
+                  <a:srgbClr val="FFFFFF"/>
+                </a:solidFill>
+                <a:latin typeface="Cambria" pitchFamily="34" charset="0"/>
+                <a:ea typeface="Cambria" pitchFamily="34" charset="-122"/>
+                <a:cs typeface="Cambria" pitchFamily="34" charset="-120"/>
+              </a:rPr>
+              <a:t>T2</a:t>
+            </a:r>
+            <a:endParaRPr lang="en-US" sz="3400" dirty="0"/>
+          </a:p>
+        </p:txBody>
+      </p:sp>
+      <p:sp>
+        <p:nvSpPr>
+          <p:cNvPr id="14" name="Text 11"/>
+          <p:cNvSpPr txBox="1"/>
+          <p:nvPr/>
+        </p:nvSpPr>
+        <p:spPr>
+          <a:xfrm>
+            <a:off x="3538728" y="3584448"/>
+            <a:ext cx="2322576" cy="329184"/>
+          </a:xfrm>
+          <a:prstGeom prst="rect">
+            <a:avLst/>
+          </a:prstGeom>
+          <a:noFill/>
+          <a:ln/>
+        </p:spPr>
+        <p:txBody>
+          <a:bodyPr wrap="square" lIns="0" tIns="0" rIns="0" bIns="0" rtlCol="0" anchor="ctr"/>
+          <a:lstStyle/>
+          <a:p>
+            <a:pPr algn="ctr" indent="0" marL="0">
+              <a:buNone/>
+            </a:pPr>
+            <a:r>
+              <a:rPr lang="en-US" sz="1600" b="1" dirty="0">
+                <a:solidFill>
+                  <a:srgbClr val="FFFFFF"/>
+                </a:solidFill>
+                <a:latin typeface="Calibri" pitchFamily="34" charset="0"/>
+                <a:ea typeface="Calibri" pitchFamily="34" charset="-122"/>
+                <a:cs typeface="Calibri" pitchFamily="34" charset="-120"/>
+              </a:rPr>
+              <a:t>Teammate 2</a:t>
+            </a:r>
+            <a:endParaRPr lang="en-US" sz="1600" dirty="0"/>
+          </a:p>
+        </p:txBody>
+      </p:sp>
+      <p:sp>
+        <p:nvSpPr>
+          <p:cNvPr id="15" name="Text 12"/>
+          <p:cNvSpPr txBox="1"/>
+          <p:nvPr/>
+        </p:nvSpPr>
+        <p:spPr>
+          <a:xfrm>
+            <a:off x="3538728" y="3895344"/>
+            <a:ext cx="2322576" cy="274320"/>
+          </a:xfrm>
+          <a:prstGeom prst="rect">
+            <a:avLst/>
+          </a:prstGeom>
+          <a:noFill/>
+          <a:ln/>
+        </p:spPr>
+        <p:txBody>
+          <a:bodyPr wrap="square" lIns="0" tIns="0" rIns="0" bIns="0" rtlCol="0" anchor="ctr"/>
+          <a:lstStyle/>
+          <a:p>
+            <a:pPr algn="ctr" indent="0" marL="0">
+              <a:buNone/>
+            </a:pPr>
+            <a:r>
+              <a:rPr lang="en-US" sz="1250" b="1" dirty="0">
+                <a:solidFill>
+                  <a:srgbClr val="02C39A"/>
+                </a:solidFill>
+                <a:latin typeface="Calibri" pitchFamily="34" charset="0"/>
+                <a:ea typeface="Calibri" pitchFamily="34" charset="-122"/>
+                <a:cs typeface="Calibri" pitchFamily="34" charset="-120"/>
+              </a:rPr>
+              <a:t>Evaluation</a:t>
+            </a:r>
+            <a:endParaRPr lang="en-US" sz="1250" dirty="0"/>
+          </a:p>
+        </p:txBody>
+      </p:sp>
+      <p:sp>
+        <p:nvSpPr>
+          <p:cNvPr id="16" name="Text 13"/>
+          <p:cNvSpPr txBox="1"/>
+          <p:nvPr/>
+        </p:nvSpPr>
+        <p:spPr>
+          <a:xfrm>
+            <a:off x="3575304" y="4242816"/>
+            <a:ext cx="2249424" cy="877824"/>
+          </a:xfrm>
+          <a:prstGeom prst="rect">
+            <a:avLst/>
+          </a:prstGeom>
+          <a:noFill/>
+          <a:ln/>
+        </p:spPr>
+        <p:txBody>
+          <a:bodyPr wrap="square" lIns="0" tIns="0" rIns="0" bIns="0" rtlCol="0" anchor="ctr"/>
+          <a:lstStyle/>
+          <a:p>
+            <a:pPr algn="ctr" indent="0" marL="0">
+              <a:lnSpc>
+                <a:spcPts val="1500"/>
+              </a:lnSpc>
+              <a:buNone/>
+            </a:pPr>
+            <a:r>
+              <a:rPr lang="en-US" sz="1150" dirty="0">
+                <a:solidFill>
+                  <a:srgbClr val="9FB4B8"/>
+                </a:solidFill>
+                <a:latin typeface="Calibri" pitchFamily="34" charset="0"/>
+                <a:ea typeface="Calibri" pitchFamily="34" charset="-122"/>
+                <a:cs typeface="Calibri" pitchFamily="34" charset="-120"/>
+              </a:rPr>
+              <a:t>Metric analysis, weight sweeps, and the LLM rerank experiment.</a:t>
+            </a:r>
+            <a:endParaRPr lang="en-US" sz="1150" dirty="0"/>
+          </a:p>
+        </p:txBody>
+      </p:sp>
+      <p:sp>
+        <p:nvSpPr>
+          <p:cNvPr id="17" name="Shape 14"/>
+          <p:cNvSpPr/>
+          <p:nvPr/>
+        </p:nvSpPr>
+        <p:spPr>
+          <a:xfrm>
+            <a:off x="6144768" y="2048256"/>
+            <a:ext cx="2688336" cy="3200400"/>
+          </a:xfrm>
+          <a:prstGeom prst="roundRect">
+            <a:avLst>
+              <a:gd name="adj" fmla="val 2041"/>
+            </a:avLst>
+          </a:prstGeom>
+          <a:solidFill>
+            <a:srgbClr val="13323B"/>
+          </a:solidFill>
+          <a:ln w="12700">
+            <a:solidFill>
+              <a:srgbClr val="13323B"/>
+            </a:solidFill>
+            <a:prstDash val="solid"/>
+          </a:ln>
+        </p:spPr>
+      </p:sp>
+      <p:sp>
+        <p:nvSpPr>
+          <p:cNvPr id="18" name="Shape 15"/>
+          <p:cNvSpPr/>
+          <p:nvPr/>
+        </p:nvSpPr>
+        <p:spPr>
+          <a:xfrm>
+            <a:off x="6922008" y="2286000"/>
+            <a:ext cx="1133856" cy="1133856"/>
+          </a:xfrm>
+          <a:prstGeom prst="ellipse">
+            <a:avLst/>
+          </a:prstGeom>
+          <a:solidFill>
+            <a:srgbClr val="028090"/>
+          </a:solidFill>
+          <a:ln w="25400">
+            <a:solidFill>
+              <a:srgbClr val="02C39A"/>
+            </a:solidFill>
+            <a:prstDash val="solid"/>
+          </a:ln>
+        </p:spPr>
+      </p:sp>
+      <p:sp>
+        <p:nvSpPr>
+          <p:cNvPr id="19" name="Text 16"/>
+          <p:cNvSpPr txBox="1"/>
+          <p:nvPr/>
+        </p:nvSpPr>
+        <p:spPr>
+          <a:xfrm>
+            <a:off x="6922008" y="2286000"/>
+            <a:ext cx="1133856" cy="1133856"/>
+          </a:xfrm>
+          <a:prstGeom prst="rect">
+            <a:avLst/>
+          </a:prstGeom>
+          <a:noFill/>
+          <a:ln/>
+        </p:spPr>
+        <p:txBody>
+          <a:bodyPr wrap="square" lIns="0" tIns="0" rIns="0" bIns="0" rtlCol="0" anchor="ctr"/>
+          <a:lstStyle/>
+          <a:p>
+            <a:pPr algn="ctr" indent="0" marL="0">
+              <a:buNone/>
+            </a:pPr>
+            <a:r>
+              <a:rPr lang="en-US" sz="3400" b="1" dirty="0">
+                <a:solidFill>
+                  <a:srgbClr val="FFFFFF"/>
+                </a:solidFill>
+                <a:latin typeface="Cambria" pitchFamily="34" charset="0"/>
+                <a:ea typeface="Cambria" pitchFamily="34" charset="-122"/>
+                <a:cs typeface="Cambria" pitchFamily="34" charset="-120"/>
+              </a:rPr>
+              <a:t>T3</a:t>
+            </a:r>
+            <a:endParaRPr lang="en-US" sz="3400" dirty="0"/>
+          </a:p>
+        </p:txBody>
+      </p:sp>
+      <p:sp>
+        <p:nvSpPr>
+          <p:cNvPr id="20" name="Text 17"/>
+          <p:cNvSpPr txBox="1"/>
+          <p:nvPr/>
+        </p:nvSpPr>
+        <p:spPr>
+          <a:xfrm>
+            <a:off x="6327648" y="3584448"/>
+            <a:ext cx="2322576" cy="329184"/>
+          </a:xfrm>
+          <a:prstGeom prst="rect">
+            <a:avLst/>
+          </a:prstGeom>
+          <a:noFill/>
+          <a:ln/>
+        </p:spPr>
+        <p:txBody>
+          <a:bodyPr wrap="square" lIns="0" tIns="0" rIns="0" bIns="0" rtlCol="0" anchor="ctr"/>
+          <a:lstStyle/>
+          <a:p>
+            <a:pPr algn="ctr" indent="0" marL="0">
+              <a:buNone/>
+            </a:pPr>
+            <a:r>
+              <a:rPr lang="en-US" sz="1600" b="1" dirty="0">
+                <a:solidFill>
+                  <a:srgbClr val="FFFFFF"/>
+                </a:solidFill>
+                <a:latin typeface="Calibri" pitchFamily="34" charset="0"/>
+                <a:ea typeface="Calibri" pitchFamily="34" charset="-122"/>
+                <a:cs typeface="Calibri" pitchFamily="34" charset="-120"/>
+              </a:rPr>
+              <a:t>Teammate 3</a:t>
+            </a:r>
+            <a:endParaRPr lang="en-US" sz="1600" dirty="0"/>
+          </a:p>
+        </p:txBody>
+      </p:sp>
+      <p:sp>
+        <p:nvSpPr>
+          <p:cNvPr id="21" name="Text 18"/>
+          <p:cNvSpPr txBox="1"/>
+          <p:nvPr/>
+        </p:nvSpPr>
+        <p:spPr>
+          <a:xfrm>
+            <a:off x="6327648" y="3895344"/>
+            <a:ext cx="2322576" cy="274320"/>
+          </a:xfrm>
+          <a:prstGeom prst="rect">
+            <a:avLst/>
+          </a:prstGeom>
+          <a:noFill/>
+          <a:ln/>
+        </p:spPr>
+        <p:txBody>
+          <a:bodyPr wrap="square" lIns="0" tIns="0" rIns="0" bIns="0" rtlCol="0" anchor="ctr"/>
+          <a:lstStyle/>
+          <a:p>
+            <a:pPr algn="ctr" indent="0" marL="0">
+              <a:buNone/>
+            </a:pPr>
+            <a:r>
+              <a:rPr lang="en-US" sz="1250" b="1" dirty="0">
+                <a:solidFill>
+                  <a:srgbClr val="02C39A"/>
+                </a:solidFill>
+                <a:latin typeface="Calibri" pitchFamily="34" charset="0"/>
+                <a:ea typeface="Calibri" pitchFamily="34" charset="-122"/>
+                <a:cs typeface="Calibri" pitchFamily="34" charset="-120"/>
+              </a:rPr>
+              <a:t>Retrieval &amp; Ranking</a:t>
+            </a:r>
+            <a:endParaRPr lang="en-US" sz="1250" dirty="0"/>
+          </a:p>
+        </p:txBody>
+      </p:sp>
+      <p:sp>
+        <p:nvSpPr>
+          <p:cNvPr id="22" name="Text 19"/>
+          <p:cNvSpPr txBox="1"/>
+          <p:nvPr/>
+        </p:nvSpPr>
+        <p:spPr>
+          <a:xfrm>
+            <a:off x="6364224" y="4242816"/>
+            <a:ext cx="2249424" cy="877824"/>
+          </a:xfrm>
+          <a:prstGeom prst="rect">
+            <a:avLst/>
+          </a:prstGeom>
+          <a:noFill/>
+          <a:ln/>
+        </p:spPr>
+        <p:txBody>
+          <a:bodyPr wrap="square" lIns="0" tIns="0" rIns="0" bIns="0" rtlCol="0" anchor="ctr"/>
+          <a:lstStyle/>
+          <a:p>
+            <a:pPr algn="ctr" indent="0" marL="0">
+              <a:lnSpc>
+                <a:spcPts val="1500"/>
+              </a:lnSpc>
+              <a:buNone/>
+            </a:pPr>
+            <a:r>
+              <a:rPr lang="en-US" sz="1150" dirty="0">
+                <a:solidFill>
+                  <a:srgbClr val="9FB4B8"/>
+                </a:solidFill>
+                <a:latin typeface="Calibri" pitchFamily="34" charset="0"/>
+                <a:ea typeface="Calibri" pitchFamily="34" charset="-122"/>
+                <a:cs typeface="Calibri" pitchFamily="34" charset="-120"/>
+              </a:rPr>
+              <a:t>Catalogue index, attribute extraction, popularity and category priors.</a:t>
+            </a:r>
+            <a:endParaRPr lang="en-US" sz="1150" dirty="0"/>
+          </a:p>
+        </p:txBody>
+      </p:sp>
+      <p:sp>
+        <p:nvSpPr>
+          <p:cNvPr id="23" name="Shape 20"/>
+          <p:cNvSpPr/>
+          <p:nvPr/>
+        </p:nvSpPr>
+        <p:spPr>
+          <a:xfrm>
+            <a:off x="8933688" y="2048256"/>
+            <a:ext cx="2688336" cy="3200400"/>
+          </a:xfrm>
+          <a:prstGeom prst="roundRect">
+            <a:avLst>
+              <a:gd name="adj" fmla="val 2041"/>
+            </a:avLst>
+          </a:prstGeom>
+          <a:solidFill>
+            <a:srgbClr val="13323B"/>
+          </a:solidFill>
+          <a:ln w="12700">
+            <a:solidFill>
+              <a:srgbClr val="13323B"/>
+            </a:solidFill>
+            <a:prstDash val="solid"/>
+          </a:ln>
+        </p:spPr>
+      </p:sp>
+      <p:sp>
+        <p:nvSpPr>
+          <p:cNvPr id="24" name="Shape 21"/>
+          <p:cNvSpPr/>
+          <p:nvPr/>
+        </p:nvSpPr>
+        <p:spPr>
+          <a:xfrm>
+            <a:off x="9710928" y="2286000"/>
+            <a:ext cx="1133856" cy="1133856"/>
+          </a:xfrm>
+          <a:prstGeom prst="ellipse">
+            <a:avLst/>
+          </a:prstGeom>
+          <a:solidFill>
+            <a:srgbClr val="028090"/>
+          </a:solidFill>
+          <a:ln w="25400">
+            <a:solidFill>
+              <a:srgbClr val="02C39A"/>
+            </a:solidFill>
+            <a:prstDash val="solid"/>
+          </a:ln>
+        </p:spPr>
+      </p:sp>
+      <p:sp>
+        <p:nvSpPr>
+          <p:cNvPr id="25" name="Text 22"/>
+          <p:cNvSpPr txBox="1"/>
+          <p:nvPr/>
+        </p:nvSpPr>
+        <p:spPr>
+          <a:xfrm>
+            <a:off x="9710928" y="2286000"/>
+            <a:ext cx="1133856" cy="1133856"/>
+          </a:xfrm>
+          <a:prstGeom prst="rect">
+            <a:avLst/>
+          </a:prstGeom>
+          <a:noFill/>
+          <a:ln/>
+        </p:spPr>
+        <p:txBody>
+          <a:bodyPr wrap="square" lIns="0" tIns="0" rIns="0" bIns="0" rtlCol="0" anchor="ctr"/>
+          <a:lstStyle/>
+          <a:p>
+            <a:pPr algn="ctr" indent="0" marL="0">
+              <a:buNone/>
+            </a:pPr>
+            <a:r>
+              <a:rPr lang="en-US" sz="3400" b="1" dirty="0">
+                <a:solidFill>
+                  <a:srgbClr val="FFFFFF"/>
+                </a:solidFill>
+                <a:latin typeface="Cambria" pitchFamily="34" charset="0"/>
+                <a:ea typeface="Cambria" pitchFamily="34" charset="-122"/>
+                <a:cs typeface="Cambria" pitchFamily="34" charset="-120"/>
+              </a:rPr>
+              <a:t>T4</a:t>
+            </a:r>
+            <a:endParaRPr lang="en-US" sz="3400" dirty="0"/>
+          </a:p>
+        </p:txBody>
+      </p:sp>
+      <p:sp>
+        <p:nvSpPr>
+          <p:cNvPr id="26" name="Text 23"/>
+          <p:cNvSpPr txBox="1"/>
+          <p:nvPr/>
+        </p:nvSpPr>
+        <p:spPr>
+          <a:xfrm>
+            <a:off x="9116568" y="3584448"/>
+            <a:ext cx="2322576" cy="329184"/>
+          </a:xfrm>
+          <a:prstGeom prst="rect">
+            <a:avLst/>
+          </a:prstGeom>
+          <a:noFill/>
+          <a:ln/>
+        </p:spPr>
+        <p:txBody>
+          <a:bodyPr wrap="square" lIns="0" tIns="0" rIns="0" bIns="0" rtlCol="0" anchor="ctr"/>
+          <a:lstStyle/>
+          <a:p>
+            <a:pPr algn="ctr" indent="0" marL="0">
+              <a:buNone/>
+            </a:pPr>
+            <a:r>
+              <a:rPr lang="en-US" sz="1600" b="1" dirty="0">
+                <a:solidFill>
+                  <a:srgbClr val="FFFFFF"/>
+                </a:solidFill>
+                <a:latin typeface="Calibri" pitchFamily="34" charset="0"/>
+                <a:ea typeface="Calibri" pitchFamily="34" charset="-122"/>
+                <a:cs typeface="Calibri" pitchFamily="34" charset="-120"/>
+              </a:rPr>
+              <a:t>Teammate 4</a:t>
+            </a:r>
+            <a:endParaRPr lang="en-US" sz="1600" dirty="0"/>
+          </a:p>
+        </p:txBody>
+      </p:sp>
+      <p:sp>
+        <p:nvSpPr>
+          <p:cNvPr id="27" name="Text 24"/>
+          <p:cNvSpPr txBox="1"/>
+          <p:nvPr/>
+        </p:nvSpPr>
+        <p:spPr>
+          <a:xfrm>
+            <a:off x="9116568" y="3895344"/>
+            <a:ext cx="2322576" cy="274320"/>
+          </a:xfrm>
+          <a:prstGeom prst="rect">
+            <a:avLst/>
+          </a:prstGeom>
+          <a:noFill/>
+          <a:ln/>
+        </p:spPr>
+        <p:txBody>
+          <a:bodyPr wrap="square" lIns="0" tIns="0" rIns="0" bIns="0" rtlCol="0" anchor="ctr"/>
+          <a:lstStyle/>
+          <a:p>
+            <a:pPr algn="ctr" indent="0" marL="0">
+              <a:buNone/>
+            </a:pPr>
+            <a:r>
+              <a:rPr lang="en-US" sz="1250" b="1" dirty="0">
+                <a:solidFill>
+                  <a:srgbClr val="02C39A"/>
+                </a:solidFill>
+                <a:latin typeface="Calibri" pitchFamily="34" charset="0"/>
+                <a:ea typeface="Calibri" pitchFamily="34" charset="-122"/>
+                <a:cs typeface="Calibri" pitchFamily="34" charset="-120"/>
+              </a:rPr>
+              <a:t>Integration</a:t>
+            </a:r>
+            <a:endParaRPr lang="en-US" sz="1250" dirty="0"/>
+          </a:p>
+        </p:txBody>
+      </p:sp>
+      <p:sp>
+        <p:nvSpPr>
+          <p:cNvPr id="28" name="Text 25"/>
+          <p:cNvSpPr txBox="1"/>
+          <p:nvPr/>
+        </p:nvSpPr>
+        <p:spPr>
+          <a:xfrm>
+            <a:off x="9153144" y="4242816"/>
+            <a:ext cx="2249424" cy="877824"/>
+          </a:xfrm>
+          <a:prstGeom prst="rect">
+            <a:avLst/>
+          </a:prstGeom>
+          <a:noFill/>
+          <a:ln/>
+        </p:spPr>
+        <p:txBody>
+          <a:bodyPr wrap="square" lIns="0" tIns="0" rIns="0" bIns="0" rtlCol="0" anchor="ctr"/>
+          <a:lstStyle/>
+          <a:p>
+            <a:pPr algn="ctr" indent="0" marL="0">
+              <a:lnSpc>
+                <a:spcPts val="1500"/>
+              </a:lnSpc>
+              <a:buNone/>
+            </a:pPr>
+            <a:r>
+              <a:rPr lang="en-US" sz="1150" dirty="0">
+                <a:solidFill>
+                  <a:srgbClr val="9FB4B8"/>
+                </a:solidFill>
+                <a:latin typeface="Calibri" pitchFamily="34" charset="0"/>
+                <a:ea typeface="Calibri" pitchFamily="34" charset="-122"/>
+                <a:cs typeface="Calibri" pitchFamily="34" charset="-120"/>
+              </a:rPr>
+              <a:t>Agent glue, API contract conformance, tests, and submission.</a:t>
+            </a:r>
+            <a:endParaRPr lang="en-US" sz="1150" dirty="0"/>
+          </a:p>
+        </p:txBody>
+      </p:sp>
+      <p:sp>
+        <p:nvSpPr>
+          <p:cNvPr id="29" name="Text 26"/>
+          <p:cNvSpPr txBox="1"/>
+          <p:nvPr/>
+        </p:nvSpPr>
+        <p:spPr>
+          <a:xfrm>
+            <a:off x="566928" y="5541264"/>
+            <a:ext cx="11064240" cy="402336"/>
+          </a:xfrm>
+          <a:prstGeom prst="rect">
+            <a:avLst/>
+          </a:prstGeom>
+          <a:noFill/>
+          <a:ln/>
+        </p:spPr>
+        <p:txBody>
+          <a:bodyPr wrap="square" lIns="0" tIns="0" rIns="0" bIns="0" rtlCol="0" anchor="ctr"/>
+          <a:lstStyle/>
+          <a:p>
+            <a:pPr indent="0" marL="0">
+              <a:buNone/>
+            </a:pPr>
+            <a:r>
+              <a:rPr lang="en-US" sz="1350" i="1" dirty="0">
+                <a:solidFill>
+                  <a:srgbClr val="9FB4B8"/>
+                </a:solidFill>
+                <a:latin typeface="Calibri" pitchFamily="34" charset="0"/>
+                <a:ea typeface="Calibri" pitchFamily="34" charset="-122"/>
+                <a:cs typeface="Calibri" pitchFamily="34" charset="-120"/>
+              </a:rPr>
+              <a:t>No one owned a silo. The two costliest bugs were found by replaying sessions together, not by reading each other's diffs.</a:t>
+            </a:r>
+            <a:endParaRPr lang="en-US" sz="1350" dirty="0"/>
+          </a:p>
+        </p:txBody>
+      </p:sp>
+    </p:spTree>
+  </p:cSld>
+  <p:clrMapOvr>
+    <a:masterClrMapping/>
+  </p:clrMapOvr>
+</p:sld>
+</file>
+
+<file path=ppt/slides/slide13.xml><?xml version="1.0" encoding="utf-8"?>
+<p:sld xmlns:a="http://schemas.openxmlformats.org/drawingml/2006/main" xmlns:r="http://schemas.openxmlformats.org/officeDocument/2006/relationships" xmlns:p="http://schemas.openxmlformats.org/presentationml/2006/main">
+  <p:cSld name="Slide 13">
+    <p:bg>
+      <p:bgPr>
+        <a:solidFill>
+          <a:srgbClr val="0B2027"/>
+        </a:solidFill>
+      </p:bgPr>
+    </p:bg>
+    <p:spTree>
+      <p:nvGrpSpPr>
+        <p:cNvPr id="1" name=""/>
+        <p:cNvGrpSpPr/>
+        <p:nvPr/>
+      </p:nvGrpSpPr>
+      <p:grpSpPr>
+        <a:xfrm>
+          <a:off x="0" y="0"/>
+          <a:ext cx="0" cy="0"/>
+          <a:chOff x="0" y="0"/>
+          <a:chExt cx="0" cy="0"/>
+        </a:xfrm>
+      </p:grpSpPr>
+      <p:sp>
+        <p:nvSpPr>
           <p:cNvPr id="2" name="Shape 0"/>
           <p:cNvSpPr/>
           <p:nvPr/>

--- a/deck/nailong-shopping-copilot.pptx
+++ b/deck/nailong-shopping-copilot.pptx
@@ -4,6 +4,9 @@
   <p:sldMasterIdLst>
     <p:sldMasterId id="2147483648" r:id="rId1"/>
   </p:sldMasterIdLst>
+  <p:notesMasterIdLst>
+    <p:notesMasterId r:id="rId15"/>
+  </p:notesMasterIdLst>
   <p:sldIdLst>
     <p:sldId id="256" r:id="rId2"/>
     <p:sldId id="257" r:id="rId3"/>
@@ -19,9 +22,6 @@
     <p:sldId id="267" r:id="rId13"/>
     <p:sldId id="268" r:id="rId14"/>
   </p:sldIdLst>
-  <p:notesMasterIdLst>
-    <p:notesMasterId r:id="rId15"/>
-  </p:notesMasterIdLst>
   <p:sldSz cx="12192000" cy="6858000"/>
   <p:notesSz cx="6858000" cy="12192000"/>
   <p:defaultTextStyle>
@@ -116,13 +116,20 @@
       </a:defRPr>
     </a:lvl9pPr>
   </p:defaultTextStyle>
+  <p:extLst>
+    <p:ext uri="{EFAFB233-063F-42B5-8137-9DF3F51BA10A}">
+      <p15:sldGuideLst xmlns:p15="http://schemas.microsoft.com/office/powerpoint/2012/main"/>
+    </p:ext>
+  </p:extLst>
 </p:presentation>
 </file>
 
 <file path=ppt/charts/chart1.xml><?xml version="1.0" encoding="utf-8"?>
-<c:chartSpace xmlns:c="http://schemas.openxmlformats.org/drawingml/2006/chart" xmlns:a="http://schemas.openxmlformats.org/drawingml/2006/main" xmlns:r="http://schemas.openxmlformats.org/officeDocument/2006/relationships">
+<c:chartSpace xmlns:c="http://schemas.openxmlformats.org/drawingml/2006/chart" xmlns:a="http://schemas.openxmlformats.org/drawingml/2006/main" xmlns:r="http://schemas.openxmlformats.org/officeDocument/2006/relationships" xmlns:c16r2="http://schemas.microsoft.com/office/drawing/2015/06/chart">
   <c:date1904 val="0"/>
+  <c:lang val="en-US"/>
   <c:roundedCorners val="1"/>
+  <c:style val="2"/>
   <c:chart>
     <c:autoTitleDeleted val="1"/>
     <c:plotArea>
@@ -152,40 +159,15 @@
             <a:effectLst/>
           </c:spPr>
           <c:invertIfNegative val="0"/>
-          <c:dLbls>
-            <c:numFmt formatCode="0.000" sourceLinked="0"/>
-            <c:txPr>
-              <a:bodyPr/>
-              <a:lstStyle/>
-              <a:p>
-                <a:pPr>
-                  <a:defRPr b="0" i="0" strike="noStrike" sz="1050" u="none">
-                    <a:solidFill>
-                      <a:srgbClr val="0B2027"/>
-                    </a:solidFill>
-                    <a:latin typeface="Calibri"/>
-                  </a:defRPr>
-                </a:pPr>
-              </a:p>
-            </c:txPr>
-            <c:showLegendKey val="0"/>
-            <c:showVal val="1"/>
-            <c:showCatName val="0"/>
-            <c:showSerName val="0"/>
-            <c:showPercent val="0"/>
-            <c:showBubbleSize val="0"/>
-            <c:showLeaderLines val="0"/>
-          </c:dLbls>
           <c:dPt>
             <c:idx val="0"/>
             <c:invertIfNegative val="0"/>
             <c:bubble3D val="0"/>
-            <c:spPr>
-              <a:solidFill>
-                <a:srgbClr val="028090"/>
-              </a:solidFill>
-              <a:effectLst/>
-            </c:spPr>
+            <c:extLst>
+              <c:ext xmlns:c16="http://schemas.microsoft.com/office/drawing/2014/chart" uri="{C3380CC4-5D6E-409C-BE32-E72D297353CC}">
+                <c16:uniqueId val="{00000001-8890-3547-BD20-152DCF5DDCC9}"/>
+              </c:ext>
+            </c:extLst>
           </c:dPt>
           <c:dPt>
             <c:idx val="1"/>
@@ -197,6 +179,11 @@
               </a:solidFill>
               <a:effectLst/>
             </c:spPr>
+            <c:extLst>
+              <c:ext xmlns:c16="http://schemas.microsoft.com/office/drawing/2014/chart" uri="{C3380CC4-5D6E-409C-BE32-E72D297353CC}">
+                <c16:uniqueId val="{00000003-8890-3547-BD20-152DCF5DDCC9}"/>
+              </c:ext>
+            </c:extLst>
           </c:dPt>
           <c:dPt>
             <c:idx val="2"/>
@@ -208,6 +195,11 @@
               </a:solidFill>
               <a:effectLst/>
             </c:spPr>
+            <c:extLst>
+              <c:ext xmlns:c16="http://schemas.microsoft.com/office/drawing/2014/chart" uri="{C3380CC4-5D6E-409C-BE32-E72D297353CC}">
+                <c16:uniqueId val="{00000005-8890-3547-BD20-152DCF5DDCC9}"/>
+              </c:ext>
+            </c:extLst>
           </c:dPt>
           <c:dPt>
             <c:idx val="3"/>
@@ -219,6 +211,11 @@
               </a:solidFill>
               <a:effectLst/>
             </c:spPr>
+            <c:extLst>
+              <c:ext xmlns:c16="http://schemas.microsoft.com/office/drawing/2014/chart" uri="{C3380CC4-5D6E-409C-BE32-E72D297353CC}">
+                <c16:uniqueId val="{00000007-8890-3547-BD20-152DCF5DDCC9}"/>
+              </c:ext>
+            </c:extLst>
           </c:dPt>
           <c:dPt>
             <c:idx val="4"/>
@@ -230,6 +227,11 @@
               </a:solidFill>
               <a:effectLst/>
             </c:spPr>
+            <c:extLst>
+              <c:ext xmlns:c16="http://schemas.microsoft.com/office/drawing/2014/chart" uri="{C3380CC4-5D6E-409C-BE32-E72D297353CC}">
+                <c16:uniqueId val="{00000009-8890-3547-BD20-152DCF5DDCC9}"/>
+              </c:ext>
+            </c:extLst>
           </c:dPt>
           <c:dPt>
             <c:idx val="5"/>
@@ -241,6 +243,11 @@
               </a:solidFill>
               <a:effectLst/>
             </c:spPr>
+            <c:extLst>
+              <c:ext xmlns:c16="http://schemas.microsoft.com/office/drawing/2014/chart" uri="{C3380CC4-5D6E-409C-BE32-E72D297353CC}">
+                <c16:uniqueId val="{0000000B-8890-3547-BD20-152DCF5DDCC9}"/>
+              </c:ext>
+            </c:extLst>
           </c:dPt>
           <c:dPt>
             <c:idx val="6"/>
@@ -252,43 +259,83 @@
               </a:solidFill>
               <a:effectLst/>
             </c:spPr>
+            <c:extLst>
+              <c:ext xmlns:c16="http://schemas.microsoft.com/office/drawing/2014/chart" uri="{C3380CC4-5D6E-409C-BE32-E72D297353CC}">
+                <c16:uniqueId val="{0000000D-8890-3547-BD20-152DCF5DDCC9}"/>
+              </c:ext>
+            </c:extLst>
           </c:dPt>
+          <c:dLbls>
+            <c:numFmt formatCode="0.000" sourceLinked="0"/>
+            <c:spPr>
+              <a:noFill/>
+              <a:ln>
+                <a:noFill/>
+              </a:ln>
+              <a:effectLst/>
+            </c:spPr>
+            <c:txPr>
+              <a:bodyPr/>
+              <a:lstStyle/>
+              <a:p>
+                <a:pPr>
+                  <a:defRPr sz="1050" b="0" i="0" u="none" strike="noStrike">
+                    <a:solidFill>
+                      <a:srgbClr val="0B2027"/>
+                    </a:solidFill>
+                    <a:latin typeface="Calibri"/>
+                  </a:defRPr>
+                </a:pPr>
+                <a:endParaRPr lang="en-US"/>
+              </a:p>
+            </c:txPr>
+            <c:showLegendKey val="0"/>
+            <c:showVal val="1"/>
+            <c:showCatName val="0"/>
+            <c:showSerName val="0"/>
+            <c:showPercent val="0"/>
+            <c:showBubbleSize val="0"/>
+            <c:showLeaderLines val="0"/>
+            <c:extLst>
+              <c:ext xmlns:c15="http://schemas.microsoft.com/office/drawing/2012/chart" uri="{CE6537A1-D6FC-4f65-9D91-7224C49458BB}">
+                <c15:showLeaderLines val="0"/>
+              </c:ext>
+            </c:extLst>
+          </c:dLbls>
           <c:cat>
-            <c:multiLvlStrRef>
+            <c:strRef>
               <c:f>Sheet1!$A$2:$A$8</c:f>
-              <c:multiLvlStrCache>
+              <c:strCache>
                 <c:ptCount val="7"/>
-                <c:lvl>
-                  <c:pt idx="0">
-                    <c:v>Baseline</c:v>
-                  </c:pt>
-                  <c:pt idx="1">
-                    <c:v>Working
+                <c:pt idx="0">
+                  <c:v>Baseline</c:v>
+                </c:pt>
+                <c:pt idx="1">
+                  <c:v>Working
 agent</c:v>
-                  </c:pt>
-                  <c:pt idx="2">
-                    <c:v>Bucket
+                </c:pt>
+                <c:pt idx="2">
+                  <c:v>Bucket
 fix</c:v>
-                  </c:pt>
-                  <c:pt idx="3">
-                    <c:v>Override
+                </c:pt>
+                <c:pt idx="3">
+                  <c:v>Override
 fix</c:v>
-                  </c:pt>
-                  <c:pt idx="4">
-                    <c:v>Constraint
+                </c:pt>
+                <c:pt idx="4">
+                  <c:v>Constraint
 coverage</c:v>
-                  </c:pt>
-                  <c:pt idx="5">
-                    <c:v>Popularity
+                </c:pt>
+                <c:pt idx="5">
+                  <c:v>Popularity
 prior</c:v>
-                  </c:pt>
-                  <c:pt idx="6">
-                    <c:v>Category
+                </c:pt>
+                <c:pt idx="6">
+                  <c:v>Category
 match</c:v>
-                  </c:pt>
-                </c:lvl>
-              </c:multiLvlStrCache>
-            </c:multiLvlStrRef>
+                </c:pt>
+              </c:strCache>
+            </c:strRef>
           </c:cat>
           <c:val>
             <c:numRef>
@@ -300,19 +347,19 @@
                   <c:v>0.107</c:v>
                 </c:pt>
                 <c:pt idx="1">
-                  <c:v>0.562</c:v>
+                  <c:v>0.56200000000000006</c:v>
                 </c:pt>
                 <c:pt idx="2">
-                  <c:v>0.728</c:v>
+                  <c:v>0.72799999999999998</c:v>
                 </c:pt>
                 <c:pt idx="3">
-                  <c:v>0.744</c:v>
+                  <c:v>0.74399999999999999</c:v>
                 </c:pt>
                 <c:pt idx="4">
                   <c:v>0.79</c:v>
                 </c:pt>
                 <c:pt idx="5">
-                  <c:v>0.859</c:v>
+                  <c:v>0.85899999999999999</c:v>
                 </c:pt>
                 <c:pt idx="6">
                   <c:v>0.876</c:v>
@@ -320,36 +367,23 @@
               </c:numCache>
             </c:numRef>
           </c:val>
+          <c:extLst>
+            <c:ext xmlns:c16="http://schemas.microsoft.com/office/drawing/2014/chart" uri="{C3380CC4-5D6E-409C-BE32-E72D297353CC}">
+              <c16:uniqueId val="{0000000E-8890-3547-BD20-152DCF5DDCC9}"/>
+            </c:ext>
+          </c:extLst>
         </c:ser>
         <c:dLbls>
-          <c:numFmt formatCode="0.000" sourceLinked="0"/>
-          <c:txPr>
-            <a:bodyPr/>
-            <a:lstStyle/>
-            <a:p>
-              <a:pPr>
-                <a:defRPr b="0" i="0" strike="noStrike" sz="1050" u="none">
-                  <a:solidFill>
-                    <a:srgbClr val="0B2027"/>
-                  </a:solidFill>
-                  <a:latin typeface="Calibri"/>
-                </a:defRPr>
-              </a:pPr>
-            </a:p>
-          </c:txPr>
           <c:showLegendKey val="0"/>
           <c:showVal val="1"/>
           <c:showCatName val="0"/>
           <c:showSerName val="0"/>
           <c:showPercent val="0"/>
           <c:showBubbleSize val="0"/>
-          <c:showLeaderLines val="0"/>
         </c:dLbls>
         <c:gapWidth val="150"/>
-        <c:overlap val="0"/>
         <c:axId val="2094734554"/>
         <c:axId val="2094734552"/>
-        <c:axId val="2094734556"/>
       </c:barChart>
       <c:catAx>
         <c:axId val="2094734554"/>
@@ -390,6 +424,7 @@
         <c:crosses val="autoZero"/>
         <c:auto val="1"/>
         <c:lblAlgn val="ctr"/>
+        <c:lblOffset val="100"/>
         <c:noMultiLvlLbl val="1"/>
       </c:catAx>
       <c:valAx>
@@ -454,6 +489,7 @@
     </c:plotArea>
     <c:plotVisOnly val="1"/>
     <c:dispBlanksAs val="span"/>
+    <c:showDLblsOverMax val="1"/>
   </c:chart>
   <c:spPr>
     <a:noFill/>
@@ -490,234 +526,10 @@
           <a:chExt cx="0" cy="0"/>
         </a:xfrm>
       </p:grpSpPr>
-      <p:sp>
-        <p:nvSpPr>
-          <p:cNvPr id="2" name="Header Placeholder 1"/>
-          <p:cNvSpPr>
-            <a:spLocks noGrp="1"/>
-          </p:cNvSpPr>
-          <p:nvPr>
-            <p:ph type="hdr" sz="quarter"/>
-          </p:nvPr>
-        </p:nvSpPr>
-        <p:spPr>
-          <a:xfrm>
-            <a:off x="0" y="0"/>
-            <a:ext cx="2971800" cy="458788"/>
-          </a:xfrm>
-          <a:prstGeom prst="rect">
-            <a:avLst/>
-          </a:prstGeom>
-        </p:spPr>
-        <p:txBody>
-          <a:bodyPr vert="horz" lIns="91440" tIns="45720" rIns="91440" bIns="45720" rtlCol="0"/>
-          <a:lstStyle>
-            <a:lvl1pPr algn="l">
-              <a:defRPr sz="1200"/>
-            </a:lvl1pPr>
-          </a:lstStyle>
-          <a:p>
-            <a:endParaRPr lang="en-US"/>
-          </a:p>
-        </p:txBody>
-      </p:sp>
-      <p:sp>
-        <p:nvSpPr>
-          <p:cNvPr id="3" name="Date Placeholder 2"/>
-          <p:cNvSpPr>
-            <a:spLocks noGrp="1"/>
-          </p:cNvSpPr>
-          <p:nvPr>
-            <p:ph type="dt" idx="1"/>
-          </p:nvPr>
-        </p:nvSpPr>
-        <p:spPr>
-          <a:xfrm>
-            <a:off x="3884613" y="0"/>
-            <a:ext cx="2971800" cy="458788"/>
-          </a:xfrm>
-          <a:prstGeom prst="rect">
-            <a:avLst/>
-          </a:prstGeom>
-        </p:spPr>
-        <p:txBody>
-          <a:bodyPr vert="horz" lIns="91440" tIns="45720" rIns="91440" bIns="45720" rtlCol="0"/>
-          <a:lstStyle>
-            <a:lvl1pPr algn="r">
-              <a:defRPr sz="1200"/>
-            </a:lvl1pPr>
-          </a:lstStyle>
-          <a:p>
-            <a:fld id="{5282F153-3F37-0F45-9E97-73ACFA13230C}" type="datetimeFigureOut">
-              <a:rPr lang="en-US"/>
-              <a:t>7/23/19</a:t>
-            </a:fld>
-            <a:endParaRPr lang="en-US"/>
-          </a:p>
-        </p:txBody>
-      </p:sp>
-      <p:sp>
-        <p:nvSpPr>
-          <p:cNvPr id="4" name="Slide Image Placeholder 3"/>
-          <p:cNvSpPr>
-            <a:spLocks noGrp="1" noRot="1" noChangeAspect="1"/>
-          </p:cNvSpPr>
-          <p:nvPr>
-            <p:ph type="sldImg" idx="2"/>
-          </p:nvPr>
-        </p:nvSpPr>
-        <p:spPr>
-          <a:xfrm>
-            <a:off x="685800" y="1143000"/>
-            <a:ext cx="5486400" cy="3086100"/>
-          </a:xfrm>
-          <a:prstGeom prst="rect">
-            <a:avLst/>
-          </a:prstGeom>
-          <a:noFill/>
-          <a:ln w="12700">
-            <a:solidFill>
-              <a:prstClr val="black"/>
-            </a:solidFill>
-          </a:ln>
-        </p:spPr>
-        <p:txBody>
-          <a:bodyPr vert="horz" lIns="91440" tIns="45720" rIns="91440" bIns="45720" rtlCol="0" anchor="ctr"/>
-          <a:lstStyle/>
-          <a:p>
-            <a:endParaRPr lang="en-US"/>
-          </a:p>
-        </p:txBody>
-      </p:sp>
-      <p:sp>
-        <p:nvSpPr>
-          <p:cNvPr id="5" name="Notes Placeholder 4"/>
-          <p:cNvSpPr>
-            <a:spLocks noGrp="1"/>
-          </p:cNvSpPr>
-          <p:nvPr>
-            <p:ph type="body" sz="quarter" idx="3"/>
-          </p:nvPr>
-        </p:nvSpPr>
-        <p:spPr>
-          <a:xfrm>
-            <a:off x="685800" y="4400550"/>
-            <a:ext cx="5486400" cy="3600450"/>
-          </a:xfrm>
-          <a:prstGeom prst="rect">
-            <a:avLst/>
-          </a:prstGeom>
-        </p:spPr>
-        <p:txBody>
-          <a:bodyPr vert="horz" lIns="91440" tIns="45720" rIns="91440" bIns="45720" rtlCol="0"/>
-          <a:lstStyle/>
-          <a:p>
-            <a:pPr lvl="0"/>
-            <a:r>
-              <a:rPr lang="en-US"/>
-              <a:t>Click to edit Master text styles</a:t>
-            </a:r>
-          </a:p>
-          <a:p>
-            <a:pPr lvl="1"/>
-            <a:r>
-              <a:rPr lang="en-US"/>
-              <a:t>Second level</a:t>
-            </a:r>
-          </a:p>
-          <a:p>
-            <a:pPr lvl="2"/>
-            <a:r>
-              <a:rPr lang="en-US"/>
-              <a:t>Third level</a:t>
-            </a:r>
-          </a:p>
-          <a:p>
-            <a:pPr lvl="3"/>
-            <a:r>
-              <a:rPr lang="en-US"/>
-              <a:t>Fourth level</a:t>
-            </a:r>
-          </a:p>
-          <a:p>
-            <a:pPr lvl="4"/>
-            <a:r>
-              <a:rPr lang="en-US"/>
-              <a:t>Fifth level</a:t>
-            </a:r>
-          </a:p>
-        </p:txBody>
-      </p:sp>
-      <p:sp>
-        <p:nvSpPr>
-          <p:cNvPr id="6" name="Footer Placeholder 5"/>
-          <p:cNvSpPr>
-            <a:spLocks noGrp="1"/>
-          </p:cNvSpPr>
-          <p:nvPr>
-            <p:ph type="ftr" sz="quarter" idx="4"/>
-          </p:nvPr>
-        </p:nvSpPr>
-        <p:spPr>
-          <a:xfrm>
-            <a:off x="0" y="8685213"/>
-            <a:ext cx="2971800" cy="458787"/>
-          </a:xfrm>
-          <a:prstGeom prst="rect">
-            <a:avLst/>
-          </a:prstGeom>
-        </p:spPr>
-        <p:txBody>
-          <a:bodyPr vert="horz" lIns="91440" tIns="45720" rIns="91440" bIns="45720" rtlCol="0" anchor="b"/>
-          <a:lstStyle>
-            <a:lvl1pPr algn="l">
-              <a:defRPr sz="1200"/>
-            </a:lvl1pPr>
-          </a:lstStyle>
-          <a:p>
-            <a:endParaRPr lang="en-US"/>
-          </a:p>
-        </p:txBody>
-      </p:sp>
-      <p:sp>
-        <p:nvSpPr>
-          <p:cNvPr id="7" name="Slide Number Placeholder 6"/>
-          <p:cNvSpPr>
-            <a:spLocks noGrp="1"/>
-          </p:cNvSpPr>
-          <p:nvPr>
-            <p:ph type="sldNum" sz="quarter" idx="5"/>
-          </p:nvPr>
-        </p:nvSpPr>
-        <p:spPr>
-          <a:xfrm>
-            <a:off x="3884613" y="8685213"/>
-            <a:ext cx="2971800" cy="458787"/>
-          </a:xfrm>
-          <a:prstGeom prst="rect">
-            <a:avLst/>
-          </a:prstGeom>
-        </p:spPr>
-        <p:txBody>
-          <a:bodyPr vert="horz" lIns="91440" tIns="45720" rIns="91440" bIns="45720" rtlCol="0" anchor="b"/>
-          <a:lstStyle>
-            <a:lvl1pPr algn="r">
-              <a:defRPr sz="1200"/>
-            </a:lvl1pPr>
-          </a:lstStyle>
-          <a:p>
-            <a:fld id="{CE5E9CC1-C706-0F49-92D6-E571CC5EEA8F}" type="slidenum">
-              <a:rPr lang="en-US"/>
-              <a:t>‹#›</a:t>
-            </a:fld>
-            <a:endParaRPr lang="en-US"/>
-          </a:p>
-        </p:txBody>
-      </p:sp>
     </p:spTree>
     <p:extLst>
       <p:ext uri="{BB962C8B-B14F-4D97-AF65-F5344CB8AC3E}">
-        <p14:creationId xmlns:p14="http://schemas.microsoft.com/office/powerpoint/2010/main" val="1024086991"/>
+        <p14:creationId xmlns:p14="http://schemas.microsoft.com/office/powerpoint/2010/main" val="267695502"/>
       </p:ext>
     </p:extLst>
   </p:cSld>
@@ -865,7 +677,6 @@
               <a:rPr lang="en-US" dirty="0"/>
               <a:t>Team nailong. We built a conversational shopping agent for Track 4. The provided BM25 baseline scores 0.107; we reached 0.876, an 8.2x improvement, using no LLM at all. Everything you'll see is deterministic and runs fully offline.</a:t>
             </a:r>
-            <a:endParaRPr lang="en-US" dirty="0"/>
           </a:p>
         </p:txBody>
       </p:sp>
@@ -953,7 +764,6 @@
               <a:rPr lang="en-US" dirty="0"/>
               <a:t>Feasibility was a design constraint, not an afterthought. Zero cost, zero network, standard library only. The submission rules warn that network access may be disabled at scoring time — our score is identical either way.</a:t>
             </a:r>
-            <a:endParaRPr lang="en-US" dirty="0"/>
           </a:p>
         </p:txBody>
       </p:sp>
@@ -1041,7 +851,6 @@
               <a:rPr lang="en-US" dirty="0"/>
               <a:t>We think stating our assumptions is part of the engineering. The popularity prior is the one place our ranking leans on how the benchmark was built, and we say so in the repo rather than hoping nobody checks.</a:t>
             </a:r>
-            <a:endParaRPr lang="en-US" dirty="0"/>
           </a:p>
         </p:txBody>
       </p:sp>
@@ -1129,7 +938,6 @@
               <a:rPr lang="en-US" dirty="0"/>
               <a:t>Our team. We split ownership across dialogue, retrieval, evaluation and integration — but everyone ran the evaluator themselves, which is why every number in this deck is reproducible by any of us.</a:t>
             </a:r>
-            <a:endParaRPr lang="en-US" dirty="0"/>
           </a:p>
         </p:txBody>
       </p:sp>
@@ -1217,7 +1025,6 @@
               <a:rPr lang="en-US" dirty="0"/>
               <a:t>To close: 0.107 to 0.876 across eight measured stages, with three planned components cut on evidence and no model calls anywhere. Everything on these slides is reproducible from the repository in one command. Thank you.</a:t>
             </a:r>
-            <a:endParaRPr lang="en-US" dirty="0"/>
           </a:p>
         </p:txBody>
       </p:sp>
@@ -1305,7 +1112,6 @@
               <a:rPr lang="en-US" dirty="0"/>
               <a:t>The baseline never asked a question, so the simulated customer never disclosed anything, and the agent searched only the latest message. It was structurally incapable of learning. Our first move was to read the evaluator source to understand what information was even obtainable.</a:t>
             </a:r>
-            <a:endParaRPr lang="en-US" dirty="0"/>
           </a:p>
         </p:txBody>
       </p:sp>
@@ -1393,7 +1199,6 @@
               <a:rPr lang="en-US" dirty="0"/>
               <a:t>This is the measurement that shaped everything. With only the opening category, we reach 1.7% of targets. With everything the shopper will disclose, 85%. So the bottleneck was dialogue extraction, not clever ranking — and that let us demote two large planned components before building them.</a:t>
             </a:r>
-            <a:endParaRPr lang="en-US" dirty="0"/>
           </a:p>
         </p:txBody>
       </p:sp>
@@ -1481,7 +1286,6 @@
               <a:rPr lang="en-US" dirty="0"/>
               <a:t>Five stages, all deterministic. The key architectural decision is at the bottom: we return recommendations and a question every single turn, because the evaluator scores recommendations first. That makes asking free, which inverts the usual problem — the question isn't when to ask, it's when to stop.</a:t>
             </a:r>
-            <a:endParaRPr lang="en-US" dirty="0"/>
           </a:p>
         </p:txBody>
       </p:sp>
@@ -1569,7 +1373,6 @@
               <a:rPr lang="en-US" dirty="0"/>
               <a:t>Our method was measure-first. Reproduce, diagnose, isolate one change at a time, sweep the weights, and reject ideas on evidence. Worth calling out: two of our most costly bugs passed every unit test and were only visible when we replayed a full session.</a:t>
             </a:r>
-            <a:endParaRPr lang="en-US" dirty="0"/>
           </a:p>
         </p:txBody>
       </p:sp>
@@ -1657,7 +1460,6 @@
               <a:rPr lang="en-US" dirty="0"/>
               <a:t>Seven measured stages from 0.107 to 0.876. The largest single jump after the initial build was the bucket fix, worth 0.166 on its own — I'll explain that one next.</a:t>
             </a:r>
-            <a:endParaRPr lang="en-US" dirty="0"/>
           </a:p>
         </p:txBody>
       </p:sp>
@@ -1745,7 +1547,6 @@
               <a:rPr lang="en-US" dirty="0"/>
               <a:t>Four decisions did most of the work. The second one — measuring which questions actually yield information — is where most of our turn-efficiency comes from. The third was our largest single bug.</a:t>
             </a:r>
-            <a:endParaRPr lang="en-US" dirty="0"/>
           </a:p>
         </p:txBody>
       </p:sp>
@@ -1833,7 +1634,6 @@
               <a:rPr lang="en-US" dirty="0"/>
               <a:t>This slide matters most to us. All three were in our plan. We built enough of each to measure it honestly and then cut it. The LLM reranker is the clearest case: it helped the sessions we were getting wrong but damaged the ones we were already getting right, netting negative. Our system is offline by evidence, not by default.</a:t>
             </a:r>
-            <a:endParaRPr lang="en-US" dirty="0"/>
           </a:p>
         </p:txBody>
       </p:sp>
@@ -1921,7 +1721,6 @@
               <a:rPr lang="en-US" dirty="0"/>
               <a:t>Final numbers. MTTC averages 1.875 turns, but the distribution matters more than the mean: 60 percent of sessions resolve on the shopper's very first message, and 79 percent by the second. Browsing is perfect at 1.0. Boundary is our weakest at 0.9, but that's only ten sessions so we treat the estimate as noisy rather than tuning against it.</a:t>
             </a:r>
-            <a:endParaRPr lang="en-US" dirty="0"/>
           </a:p>
         </p:txBody>
       </p:sp>
@@ -1994,6 +1793,11 @@
 <file path=ppt/slideMasters/slideMaster1.xml><?xml version="1.0" encoding="utf-8"?>
 <p:sldMaster xmlns:a="http://schemas.openxmlformats.org/drawingml/2006/main" xmlns:r="http://schemas.openxmlformats.org/officeDocument/2006/relationships" xmlns:p="http://schemas.openxmlformats.org/presentationml/2006/main">
   <p:cSld>
+    <p:bg>
+      <p:bgRef idx="1001">
+        <a:schemeClr val="bg1"/>
+      </p:bgRef>
+    </p:bg>
     <p:spTree>
       <p:nvGrpSpPr>
         <p:cNvPr id="1" name=""/>
@@ -2276,6 +2080,7 @@
         <a:solidFill>
           <a:srgbClr val="0B2027"/>
         </a:solidFill>
+        <a:effectLst/>
       </p:bgPr>
     </p:bg>
     <p:spTree>
@@ -2318,6 +2123,13 @@
             <a:prstDash val="solid"/>
           </a:ln>
         </p:spPr>
+        <p:txBody>
+          <a:bodyPr/>
+          <a:lstStyle/>
+          <a:p>
+            <a:endParaRPr lang="en-US"/>
+          </a:p>
+        </p:txBody>
       </p:sp>
       <p:sp>
         <p:nvSpPr>
@@ -2340,7 +2152,7 @@
           <a:bodyPr wrap="square" lIns="0" tIns="0" rIns="0" bIns="0" rtlCol="0" anchor="ctr"/>
           <a:lstStyle/>
           <a:p>
-            <a:pPr algn="ctr" indent="0" marL="0">
+            <a:pPr marL="0" indent="0" algn="ctr">
               <a:buNone/>
             </a:pPr>
             <a:r>
@@ -2379,7 +2191,7 @@
           <a:bodyPr wrap="square" lIns="0" tIns="0" rIns="0" bIns="0" rtlCol="0" anchor="ctr"/>
           <a:lstStyle/>
           <a:p>
-            <a:pPr indent="0" marL="0">
+            <a:pPr marL="0" indent="0">
               <a:buNone/>
             </a:pPr>
             <a:r>
@@ -2418,7 +2230,7 @@
           <a:bodyPr wrap="square" lIns="0" tIns="0" rIns="0" bIns="0" rtlCol="0" anchor="ctr"/>
           <a:lstStyle/>
           <a:p>
-            <a:pPr indent="0" marL="0">
+            <a:pPr marL="0" indent="0">
               <a:buNone/>
             </a:pPr>
             <a:r>
@@ -2457,7 +2269,7 @@
           <a:bodyPr wrap="square" lIns="0" tIns="0" rIns="0" bIns="0" rtlCol="0" anchor="ctr"/>
           <a:lstStyle/>
           <a:p>
-            <a:pPr indent="0" marL="0">
+            <a:pPr marL="0" indent="0">
               <a:buNone/>
             </a:pPr>
             <a:r>
@@ -2496,7 +2308,7 @@
           <a:bodyPr wrap="square" lIns="0" tIns="0" rIns="0" bIns="0" rtlCol="0" anchor="ctr"/>
           <a:lstStyle/>
           <a:p>
-            <a:pPr indent="0" marL="0">
+            <a:pPr marL="0" indent="0">
               <a:buNone/>
             </a:pPr>
             <a:r>
@@ -2535,7 +2347,7 @@
           <a:bodyPr wrap="square" lIns="0" tIns="0" rIns="0" bIns="0" rtlCol="0" anchor="ctr"/>
           <a:lstStyle/>
           <a:p>
-            <a:pPr indent="0" marL="0">
+            <a:pPr marL="0" indent="0">
               <a:buNone/>
             </a:pPr>
             <a:r>
@@ -2574,7 +2386,7 @@
           <a:bodyPr wrap="square" lIns="0" tIns="0" rIns="0" bIns="0" rtlCol="0" anchor="ctr"/>
           <a:lstStyle/>
           <a:p>
-            <a:pPr indent="0" marL="0">
+            <a:pPr marL="0" indent="0">
               <a:buNone/>
             </a:pPr>
             <a:r>
@@ -2613,7 +2425,7 @@
           <a:bodyPr wrap="square" lIns="0" tIns="0" rIns="0" bIns="0" rtlCol="0" anchor="ctr"/>
           <a:lstStyle/>
           <a:p>
-            <a:pPr indent="0" marL="0">
+            <a:pPr marL="0" indent="0">
               <a:buNone/>
             </a:pPr>
             <a:r>
@@ -2652,7 +2464,7 @@
           <a:bodyPr wrap="square" lIns="0" tIns="0" rIns="0" bIns="0" rtlCol="0" anchor="ctr"/>
           <a:lstStyle/>
           <a:p>
-            <a:pPr indent="0" marL="0">
+            <a:pPr marL="0" indent="0">
               <a:buNone/>
             </a:pPr>
             <a:r>
@@ -2691,7 +2503,7 @@
           <a:bodyPr wrap="square" lIns="0" tIns="0" rIns="0" bIns="0" rtlCol="0" anchor="ctr"/>
           <a:lstStyle/>
           <a:p>
-            <a:pPr indent="0" marL="0">
+            <a:pPr marL="0" indent="0">
               <a:buNone/>
             </a:pPr>
             <a:r>
@@ -2725,6 +2537,7 @@
         <a:solidFill>
           <a:srgbClr val="FFFFFF"/>
         </a:solidFill>
+        <a:effectLst/>
       </p:bgPr>
     </p:bg>
     <p:spTree>
@@ -2762,11 +2575,11 @@
           <a:bodyPr wrap="square" lIns="0" tIns="0" rIns="0" bIns="0" rtlCol="0" anchor="ctr"/>
           <a:lstStyle/>
           <a:p>
-            <a:pPr indent="0" marL="0">
-              <a:buNone/>
-            </a:pPr>
-            <a:r>
-              <a:rPr lang="en-US" sz="1200" b="1" spc="200" kern="0" dirty="0">
+            <a:pPr marL="0" indent="0">
+              <a:buNone/>
+            </a:pPr>
+            <a:r>
+              <a:rPr lang="en-US" sz="1200" b="1" kern="0" spc="200" dirty="0">
                 <a:solidFill>
                   <a:srgbClr val="028090"/>
                 </a:solidFill>
@@ -2801,7 +2614,7 @@
           <a:bodyPr wrap="square" lIns="0" tIns="0" rIns="0" bIns="0" rtlCol="0" anchor="ctr"/>
           <a:lstStyle/>
           <a:p>
-            <a:pPr indent="0" marL="0">
+            <a:pPr marL="0" indent="0">
               <a:buNone/>
             </a:pPr>
             <a:r>
@@ -2845,13 +2658,20 @@
             <a:prstDash val="solid"/>
           </a:ln>
           <a:effectLst>
-            <a:outerShdw sx="100000" sy="100000" kx="0" ky="0" algn="bl" rotWithShape="0" blurRad="152400" dist="38100" dir="5400000">
+            <a:outerShdw blurRad="152400" dist="38100" dir="5400000" algn="bl" rotWithShape="0">
               <a:srgbClr val="0B2027">
                 <a:alpha val="16000"/>
               </a:srgbClr>
             </a:outerShdw>
           </a:effectLst>
         </p:spPr>
+        <p:txBody>
+          <a:bodyPr/>
+          <a:lstStyle/>
+          <a:p>
+            <a:endParaRPr lang="en-US"/>
+          </a:p>
+        </p:txBody>
       </p:sp>
       <p:sp>
         <p:nvSpPr>
@@ -2874,7 +2694,7 @@
           <a:bodyPr wrap="square" lIns="0" tIns="0" rIns="0" bIns="0" rtlCol="0" anchor="ctr"/>
           <a:lstStyle/>
           <a:p>
-            <a:pPr indent="0" marL="0">
+            <a:pPr marL="0" indent="0">
               <a:buNone/>
             </a:pPr>
             <a:r>
@@ -2913,7 +2733,7 @@
           <a:bodyPr wrap="square" lIns="0" tIns="0" rIns="0" bIns="0" rtlCol="0" anchor="ctr"/>
           <a:lstStyle/>
           <a:p>
-            <a:pPr indent="0" marL="0">
+            <a:pPr marL="0" indent="0">
               <a:buNone/>
             </a:pPr>
             <a:r>
@@ -2952,7 +2772,7 @@
           <a:bodyPr wrap="square" lIns="0" tIns="0" rIns="0" bIns="0" rtlCol="0" anchor="ctr"/>
           <a:lstStyle/>
           <a:p>
-            <a:pPr indent="0" marL="0">
+            <a:pPr marL="0" indent="0">
               <a:lnSpc>
                 <a:spcPts val="1500"/>
               </a:lnSpc>
@@ -2999,13 +2819,20 @@
             <a:prstDash val="solid"/>
           </a:ln>
           <a:effectLst>
-            <a:outerShdw sx="100000" sy="100000" kx="0" ky="0" algn="bl" rotWithShape="0" blurRad="152400" dist="38100" dir="5400000">
+            <a:outerShdw blurRad="152400" dist="38100" dir="5400000" algn="bl" rotWithShape="0">
               <a:srgbClr val="0B2027">
                 <a:alpha val="16000"/>
               </a:srgbClr>
             </a:outerShdw>
           </a:effectLst>
         </p:spPr>
+        <p:txBody>
+          <a:bodyPr/>
+          <a:lstStyle/>
+          <a:p>
+            <a:endParaRPr lang="en-US"/>
+          </a:p>
+        </p:txBody>
       </p:sp>
       <p:sp>
         <p:nvSpPr>
@@ -3028,7 +2855,7 @@
           <a:bodyPr wrap="square" lIns="0" tIns="0" rIns="0" bIns="0" rtlCol="0" anchor="ctr"/>
           <a:lstStyle/>
           <a:p>
-            <a:pPr indent="0" marL="0">
+            <a:pPr marL="0" indent="0">
               <a:buNone/>
             </a:pPr>
             <a:r>
@@ -3067,7 +2894,7 @@
           <a:bodyPr wrap="square" lIns="0" tIns="0" rIns="0" bIns="0" rtlCol="0" anchor="ctr"/>
           <a:lstStyle/>
           <a:p>
-            <a:pPr indent="0" marL="0">
+            <a:pPr marL="0" indent="0">
               <a:buNone/>
             </a:pPr>
             <a:r>
@@ -3106,7 +2933,7 @@
           <a:bodyPr wrap="square" lIns="0" tIns="0" rIns="0" bIns="0" rtlCol="0" anchor="ctr"/>
           <a:lstStyle/>
           <a:p>
-            <a:pPr indent="0" marL="0">
+            <a:pPr marL="0" indent="0">
               <a:lnSpc>
                 <a:spcPts val="1500"/>
               </a:lnSpc>
@@ -3153,13 +2980,20 @@
             <a:prstDash val="solid"/>
           </a:ln>
           <a:effectLst>
-            <a:outerShdw sx="100000" sy="100000" kx="0" ky="0" algn="bl" rotWithShape="0" blurRad="152400" dist="38100" dir="5400000">
+            <a:outerShdw blurRad="152400" dist="38100" dir="5400000" algn="bl" rotWithShape="0">
               <a:srgbClr val="0B2027">
                 <a:alpha val="16000"/>
               </a:srgbClr>
             </a:outerShdw>
           </a:effectLst>
         </p:spPr>
+        <p:txBody>
+          <a:bodyPr/>
+          <a:lstStyle/>
+          <a:p>
+            <a:endParaRPr lang="en-US"/>
+          </a:p>
+        </p:txBody>
       </p:sp>
       <p:sp>
         <p:nvSpPr>
@@ -3182,7 +3016,7 @@
           <a:bodyPr wrap="square" lIns="0" tIns="0" rIns="0" bIns="0" rtlCol="0" anchor="ctr"/>
           <a:lstStyle/>
           <a:p>
-            <a:pPr indent="0" marL="0">
+            <a:pPr marL="0" indent="0">
               <a:buNone/>
             </a:pPr>
             <a:r>
@@ -3221,7 +3055,7 @@
           <a:bodyPr wrap="square" lIns="0" tIns="0" rIns="0" bIns="0" rtlCol="0" anchor="ctr"/>
           <a:lstStyle/>
           <a:p>
-            <a:pPr indent="0" marL="0">
+            <a:pPr marL="0" indent="0">
               <a:buNone/>
             </a:pPr>
             <a:r>
@@ -3260,7 +3094,7 @@
           <a:bodyPr wrap="square" lIns="0" tIns="0" rIns="0" bIns="0" rtlCol="0" anchor="ctr"/>
           <a:lstStyle/>
           <a:p>
-            <a:pPr indent="0" marL="0">
+            <a:pPr marL="0" indent="0">
               <a:lnSpc>
                 <a:spcPts val="1500"/>
               </a:lnSpc>
@@ -3307,13 +3141,20 @@
             <a:prstDash val="solid"/>
           </a:ln>
           <a:effectLst>
-            <a:outerShdw sx="100000" sy="100000" kx="0" ky="0" algn="bl" rotWithShape="0" blurRad="152400" dist="38100" dir="5400000">
+            <a:outerShdw blurRad="152400" dist="38100" dir="5400000" algn="bl" rotWithShape="0">
               <a:srgbClr val="0B2027">
                 <a:alpha val="16000"/>
               </a:srgbClr>
             </a:outerShdw>
           </a:effectLst>
         </p:spPr>
+        <p:txBody>
+          <a:bodyPr/>
+          <a:lstStyle/>
+          <a:p>
+            <a:endParaRPr lang="en-US"/>
+          </a:p>
+        </p:txBody>
       </p:sp>
       <p:sp>
         <p:nvSpPr>
@@ -3336,7 +3177,7 @@
           <a:bodyPr wrap="square" lIns="0" tIns="0" rIns="0" bIns="0" rtlCol="0" anchor="ctr"/>
           <a:lstStyle/>
           <a:p>
-            <a:pPr indent="0" marL="0">
+            <a:pPr marL="0" indent="0">
               <a:buNone/>
             </a:pPr>
             <a:r>
@@ -3375,7 +3216,7 @@
           <a:bodyPr wrap="square" lIns="0" tIns="0" rIns="0" bIns="0" rtlCol="0" anchor="ctr"/>
           <a:lstStyle/>
           <a:p>
-            <a:pPr indent="0" marL="0">
+            <a:pPr marL="0" indent="0">
               <a:buNone/>
             </a:pPr>
             <a:r>
@@ -3414,7 +3255,7 @@
           <a:bodyPr wrap="square" lIns="0" tIns="0" rIns="0" bIns="0" rtlCol="0" anchor="ctr"/>
           <a:lstStyle/>
           <a:p>
-            <a:pPr indent="0" marL="0">
+            <a:pPr marL="0" indent="0">
               <a:lnSpc>
                 <a:spcPts val="1500"/>
               </a:lnSpc>
@@ -3456,7 +3297,7 @@
           <a:bodyPr wrap="square" lIns="0" tIns="0" rIns="0" bIns="0" rtlCol="0" anchor="ctr"/>
           <a:lstStyle/>
           <a:p>
-            <a:pPr indent="0" marL="0">
+            <a:pPr marL="0" indent="0">
               <a:buNone/>
             </a:pPr>
             <a:r>
@@ -3490,6 +3331,7 @@
         <a:solidFill>
           <a:srgbClr val="FFFFFF"/>
         </a:solidFill>
+        <a:effectLst/>
       </p:bgPr>
     </p:bg>
     <p:spTree>
@@ -3527,11 +3369,11 @@
           <a:bodyPr wrap="square" lIns="0" tIns="0" rIns="0" bIns="0" rtlCol="0" anchor="ctr"/>
           <a:lstStyle/>
           <a:p>
-            <a:pPr indent="0" marL="0">
-              <a:buNone/>
-            </a:pPr>
-            <a:r>
-              <a:rPr lang="en-US" sz="1200" b="1" spc="200" kern="0" dirty="0">
+            <a:pPr marL="0" indent="0">
+              <a:buNone/>
+            </a:pPr>
+            <a:r>
+              <a:rPr lang="en-US" sz="1200" b="1" kern="0" spc="200" dirty="0">
                 <a:solidFill>
                   <a:srgbClr val="028090"/>
                 </a:solidFill>
@@ -3566,7 +3408,7 @@
           <a:bodyPr wrap="square" lIns="0" tIns="0" rIns="0" bIns="0" rtlCol="0" anchor="ctr"/>
           <a:lstStyle/>
           <a:p>
-            <a:pPr indent="0" marL="0">
+            <a:pPr marL="0" indent="0">
               <a:buNone/>
             </a:pPr>
             <a:r>
@@ -3610,13 +3452,20 @@
             <a:prstDash val="solid"/>
           </a:ln>
           <a:effectLst>
-            <a:outerShdw sx="100000" sy="100000" kx="0" ky="0" algn="bl" rotWithShape="0" blurRad="152400" dist="38100" dir="5400000">
+            <a:outerShdw blurRad="152400" dist="38100" dir="5400000" algn="bl" rotWithShape="0">
               <a:srgbClr val="0B2027">
                 <a:alpha val="16000"/>
               </a:srgbClr>
             </a:outerShdw>
           </a:effectLst>
         </p:spPr>
+        <p:txBody>
+          <a:bodyPr/>
+          <a:lstStyle/>
+          <a:p>
+            <a:endParaRPr lang="en-US"/>
+          </a:p>
+        </p:txBody>
       </p:sp>
       <p:sp>
         <p:nvSpPr>
@@ -3639,7 +3488,7 @@
           <a:bodyPr wrap="square" lIns="0" tIns="0" rIns="0" bIns="0" rtlCol="0" anchor="ctr"/>
           <a:lstStyle/>
           <a:p>
-            <a:pPr indent="0" marL="0">
+            <a:pPr marL="0" indent="0">
               <a:lnSpc>
                 <a:spcPts val="1800"/>
               </a:lnSpc>
@@ -3681,7 +3530,7 @@
           <a:bodyPr wrap="square" lIns="0" tIns="0" rIns="0" bIns="0" rtlCol="0" anchor="ctr"/>
           <a:lstStyle/>
           <a:p>
-            <a:pPr indent="0" marL="0">
+            <a:pPr marL="0" indent="0">
               <a:lnSpc>
                 <a:spcPts val="1500"/>
               </a:lnSpc>
@@ -3728,13 +3577,20 @@
             <a:prstDash val="solid"/>
           </a:ln>
           <a:effectLst>
-            <a:outerShdw sx="100000" sy="100000" kx="0" ky="0" algn="bl" rotWithShape="0" blurRad="152400" dist="38100" dir="5400000">
+            <a:outerShdw blurRad="152400" dist="38100" dir="5400000" algn="bl" rotWithShape="0">
               <a:srgbClr val="0B2027">
                 <a:alpha val="16000"/>
               </a:srgbClr>
             </a:outerShdw>
           </a:effectLst>
         </p:spPr>
+        <p:txBody>
+          <a:bodyPr/>
+          <a:lstStyle/>
+          <a:p>
+            <a:endParaRPr lang="en-US"/>
+          </a:p>
+        </p:txBody>
       </p:sp>
       <p:sp>
         <p:nvSpPr>
@@ -3757,7 +3613,7 @@
           <a:bodyPr wrap="square" lIns="0" tIns="0" rIns="0" bIns="0" rtlCol="0" anchor="ctr"/>
           <a:lstStyle/>
           <a:p>
-            <a:pPr indent="0" marL="0">
+            <a:pPr marL="0" indent="0">
               <a:lnSpc>
                 <a:spcPts val="1800"/>
               </a:lnSpc>
@@ -3799,7 +3655,7 @@
           <a:bodyPr wrap="square" lIns="0" tIns="0" rIns="0" bIns="0" rtlCol="0" anchor="ctr"/>
           <a:lstStyle/>
           <a:p>
-            <a:pPr indent="0" marL="0">
+            <a:pPr marL="0" indent="0">
               <a:lnSpc>
                 <a:spcPts val="1500"/>
               </a:lnSpc>
@@ -3846,13 +3702,20 @@
             <a:prstDash val="solid"/>
           </a:ln>
           <a:effectLst>
-            <a:outerShdw sx="100000" sy="100000" kx="0" ky="0" algn="bl" rotWithShape="0" blurRad="152400" dist="38100" dir="5400000">
+            <a:outerShdw blurRad="152400" dist="38100" dir="5400000" algn="bl" rotWithShape="0">
               <a:srgbClr val="0B2027">
                 <a:alpha val="16000"/>
               </a:srgbClr>
             </a:outerShdw>
           </a:effectLst>
         </p:spPr>
+        <p:txBody>
+          <a:bodyPr/>
+          <a:lstStyle/>
+          <a:p>
+            <a:endParaRPr lang="en-US"/>
+          </a:p>
+        </p:txBody>
       </p:sp>
       <p:sp>
         <p:nvSpPr>
@@ -3875,7 +3738,7 @@
           <a:bodyPr wrap="square" lIns="0" tIns="0" rIns="0" bIns="0" rtlCol="0" anchor="ctr"/>
           <a:lstStyle/>
           <a:p>
-            <a:pPr indent="0" marL="0">
+            <a:pPr marL="0" indent="0">
               <a:lnSpc>
                 <a:spcPts val="1800"/>
               </a:lnSpc>
@@ -3917,7 +3780,7 @@
           <a:bodyPr wrap="square" lIns="0" tIns="0" rIns="0" bIns="0" rtlCol="0" anchor="ctr"/>
           <a:lstStyle/>
           <a:p>
-            <a:pPr indent="0" marL="0">
+            <a:pPr marL="0" indent="0">
               <a:lnSpc>
                 <a:spcPts val="1500"/>
               </a:lnSpc>
@@ -3964,13 +3827,20 @@
             <a:prstDash val="solid"/>
           </a:ln>
           <a:effectLst>
-            <a:outerShdw sx="100000" sy="100000" kx="0" ky="0" algn="bl" rotWithShape="0" blurRad="152400" dist="38100" dir="5400000">
+            <a:outerShdw blurRad="152400" dist="38100" dir="5400000" algn="bl" rotWithShape="0">
               <a:srgbClr val="0B2027">
                 <a:alpha val="16000"/>
               </a:srgbClr>
             </a:outerShdw>
           </a:effectLst>
         </p:spPr>
+        <p:txBody>
+          <a:bodyPr/>
+          <a:lstStyle/>
+          <a:p>
+            <a:endParaRPr lang="en-US"/>
+          </a:p>
+        </p:txBody>
       </p:sp>
       <p:sp>
         <p:nvSpPr>
@@ -3993,7 +3863,7 @@
           <a:bodyPr wrap="square" lIns="0" tIns="0" rIns="0" bIns="0" rtlCol="0" anchor="ctr"/>
           <a:lstStyle/>
           <a:p>
-            <a:pPr indent="0" marL="0">
+            <a:pPr marL="0" indent="0">
               <a:lnSpc>
                 <a:spcPts val="1800"/>
               </a:lnSpc>
@@ -4035,7 +3905,7 @@
           <a:bodyPr wrap="square" lIns="0" tIns="0" rIns="0" bIns="0" rtlCol="0" anchor="ctr"/>
           <a:lstStyle/>
           <a:p>
-            <a:pPr indent="0" marL="0">
+            <a:pPr marL="0" indent="0">
               <a:lnSpc>
                 <a:spcPts val="1500"/>
               </a:lnSpc>
@@ -4077,7 +3947,7 @@
           <a:bodyPr wrap="square" lIns="0" tIns="0" rIns="0" bIns="0" rtlCol="0" anchor="ctr"/>
           <a:lstStyle/>
           <a:p>
-            <a:pPr indent="0" marL="0">
+            <a:pPr marL="0" indent="0">
               <a:buNone/>
             </a:pPr>
             <a:r>
@@ -4111,6 +3981,7 @@
         <a:solidFill>
           <a:srgbClr val="0B2027"/>
         </a:solidFill>
+        <a:effectLst/>
       </p:bgPr>
     </p:bg>
     <p:spTree>
@@ -4148,11 +4019,11 @@
           <a:bodyPr wrap="square" lIns="0" tIns="0" rIns="0" bIns="0" rtlCol="0" anchor="ctr"/>
           <a:lstStyle/>
           <a:p>
-            <a:pPr indent="0" marL="0">
-              <a:buNone/>
-            </a:pPr>
-            <a:r>
-              <a:rPr lang="en-US" sz="1200" b="1" spc="200" kern="0" dirty="0">
+            <a:pPr marL="0" indent="0">
+              <a:buNone/>
+            </a:pPr>
+            <a:r>
+              <a:rPr lang="en-US" sz="1200" b="1" kern="0" spc="200" dirty="0">
                 <a:solidFill>
                   <a:srgbClr val="02C39A"/>
                 </a:solidFill>
@@ -4187,7 +4058,7 @@
           <a:bodyPr wrap="square" lIns="0" tIns="0" rIns="0" bIns="0" rtlCol="0" anchor="ctr"/>
           <a:lstStyle/>
           <a:p>
-            <a:pPr indent="0" marL="0">
+            <a:pPr marL="0" indent="0">
               <a:buNone/>
             </a:pPr>
             <a:r>
@@ -4226,7 +4097,7 @@
           <a:bodyPr wrap="square" lIns="0" tIns="0" rIns="0" bIns="0" rtlCol="0" anchor="ctr"/>
           <a:lstStyle/>
           <a:p>
-            <a:pPr indent="0" marL="0">
+            <a:pPr marL="0" indent="0">
               <a:buNone/>
             </a:pPr>
             <a:r>
@@ -4234,13 +4105,20 @@
                 <a:solidFill>
                   <a:srgbClr val="9FB4B8"/>
                 </a:solidFill>
-                <a:latin typeface="Calibri" pitchFamily="34" charset="0"/>
-                <a:ea typeface="Calibri" pitchFamily="34" charset="-122"/>
-                <a:cs typeface="Calibri" pitchFamily="34" charset="-120"/>
-              </a:rPr>
-              <a:t>Everyone ran the evaluator. Every claim in this deck is one of us re-running it and getting the same number.</a:t>
-            </a:r>
-            <a:endParaRPr lang="en-US" sz="1500" dirty="0"/>
+                <a:highlight>
+                  <a:srgbClr val="FFFF00"/>
+                </a:highlight>
+                <a:latin typeface="Calibri" pitchFamily="34" charset="0"/>
+                <a:ea typeface="Calibri" pitchFamily="34" charset="-122"/>
+                <a:cs typeface="Calibri" pitchFamily="34" charset="-120"/>
+              </a:rPr>
+              <a:t>PUT PIC + name + NUS major ! </a:t>
+            </a:r>
+            <a:endParaRPr lang="en-US" sz="1500" dirty="0">
+              <a:highlight>
+                <a:srgbClr val="FFFF00"/>
+              </a:highlight>
+            </a:endParaRPr>
           </a:p>
         </p:txBody>
       </p:sp>
@@ -4270,6 +4148,13 @@
             <a:prstDash val="solid"/>
           </a:ln>
         </p:spPr>
+        <p:txBody>
+          <a:bodyPr/>
+          <a:lstStyle/>
+          <a:p>
+            <a:endParaRPr lang="en-US"/>
+          </a:p>
+        </p:txBody>
       </p:sp>
       <p:sp>
         <p:nvSpPr>
@@ -4295,30 +4180,14 @@
             <a:prstDash val="solid"/>
           </a:ln>
         </p:spPr>
-      </p:sp>
-      <p:pic>
-        <p:nvPicPr>
-          <p:cNvPr id="7" name="Image 0" descr="/Users/qiaoenn/Desktop/TikTok TechJam/nailong---TikTok-TechJam-2026/deck/photos/p1.jpg">    </p:cNvPr>
-          <p:cNvPicPr>
-            <a:picLocks noChangeAspect="1"/>
-          </p:cNvPicPr>
-          <p:nvPr/>
-        </p:nvPicPr>
-        <p:blipFill>
-          <a:blip r:embed="rId1"/>
-          <a:srcRect l="0" r="0" t="0" b="0"/>
-          <a:stretch/>
-        </p:blipFill>
-        <p:spPr>
-          <a:xfrm>
-            <a:off x="1344168" y="2286000"/>
-            <a:ext cx="1133856" cy="1133856"/>
-          </a:xfrm>
-          <a:prstGeom prst="ellipse">
-            <a:avLst/>
-          </a:prstGeom>
-        </p:spPr>
-      </p:pic>
+        <p:txBody>
+          <a:bodyPr/>
+          <a:lstStyle/>
+          <a:p>
+            <a:endParaRPr lang="en-US"/>
+          </a:p>
+        </p:txBody>
+      </p:sp>
       <p:sp>
         <p:nvSpPr>
           <p:cNvPr id="8" name="Text 5"/>
@@ -4340,7 +4209,7 @@
           <a:bodyPr wrap="square" lIns="0" tIns="0" rIns="0" bIns="0" rtlCol="0" anchor="ctr"/>
           <a:lstStyle/>
           <a:p>
-            <a:pPr algn="ctr" indent="0" marL="0">
+            <a:pPr marL="0" indent="0" algn="ctr">
               <a:buNone/>
             </a:pPr>
             <a:r>
@@ -4379,7 +4248,7 @@
           <a:bodyPr wrap="square" lIns="0" tIns="0" rIns="0" bIns="0" rtlCol="0" anchor="ctr"/>
           <a:lstStyle/>
           <a:p>
-            <a:pPr algn="ctr" indent="0" marL="0">
+            <a:pPr marL="0" indent="0" algn="ctr">
               <a:buNone/>
             </a:pPr>
             <a:r>
@@ -4418,7 +4287,7 @@
           <a:bodyPr wrap="square" lIns="0" tIns="0" rIns="0" bIns="0" rtlCol="0" anchor="ctr"/>
           <a:lstStyle/>
           <a:p>
-            <a:pPr algn="ctr" indent="0" marL="0">
+            <a:pPr marL="0" indent="0" algn="ctr">
               <a:lnSpc>
                 <a:spcPts val="1500"/>
               </a:lnSpc>
@@ -4465,6 +4334,13 @@
             <a:prstDash val="solid"/>
           </a:ln>
         </p:spPr>
+        <p:txBody>
+          <a:bodyPr/>
+          <a:lstStyle/>
+          <a:p>
+            <a:endParaRPr lang="en-US"/>
+          </a:p>
+        </p:txBody>
       </p:sp>
       <p:sp>
         <p:nvSpPr>
@@ -4490,6 +4366,13 @@
             <a:prstDash val="solid"/>
           </a:ln>
         </p:spPr>
+        <p:txBody>
+          <a:bodyPr/>
+          <a:lstStyle/>
+          <a:p>
+            <a:endParaRPr lang="en-US"/>
+          </a:p>
+        </p:txBody>
       </p:sp>
       <p:sp>
         <p:nvSpPr>
@@ -4512,7 +4395,7 @@
           <a:bodyPr wrap="square" lIns="0" tIns="0" rIns="0" bIns="0" rtlCol="0" anchor="ctr"/>
           <a:lstStyle/>
           <a:p>
-            <a:pPr algn="ctr" indent="0" marL="0">
+            <a:pPr marL="0" indent="0" algn="ctr">
               <a:buNone/>
             </a:pPr>
             <a:r>
@@ -4551,7 +4434,7 @@
           <a:bodyPr wrap="square" lIns="0" tIns="0" rIns="0" bIns="0" rtlCol="0" anchor="ctr"/>
           <a:lstStyle/>
           <a:p>
-            <a:pPr algn="ctr" indent="0" marL="0">
+            <a:pPr marL="0" indent="0" algn="ctr">
               <a:buNone/>
             </a:pPr>
             <a:r>
@@ -4590,7 +4473,7 @@
           <a:bodyPr wrap="square" lIns="0" tIns="0" rIns="0" bIns="0" rtlCol="0" anchor="ctr"/>
           <a:lstStyle/>
           <a:p>
-            <a:pPr algn="ctr" indent="0" marL="0">
+            <a:pPr marL="0" indent="0" algn="ctr">
               <a:buNone/>
             </a:pPr>
             <a:r>
@@ -4629,7 +4512,7 @@
           <a:bodyPr wrap="square" lIns="0" tIns="0" rIns="0" bIns="0" rtlCol="0" anchor="ctr"/>
           <a:lstStyle/>
           <a:p>
-            <a:pPr algn="ctr" indent="0" marL="0">
+            <a:pPr marL="0" indent="0" algn="ctr">
               <a:lnSpc>
                 <a:spcPts val="1500"/>
               </a:lnSpc>
@@ -4676,6 +4559,13 @@
             <a:prstDash val="solid"/>
           </a:ln>
         </p:spPr>
+        <p:txBody>
+          <a:bodyPr/>
+          <a:lstStyle/>
+          <a:p>
+            <a:endParaRPr lang="en-US"/>
+          </a:p>
+        </p:txBody>
       </p:sp>
       <p:sp>
         <p:nvSpPr>
@@ -4701,6 +4591,13 @@
             <a:prstDash val="solid"/>
           </a:ln>
         </p:spPr>
+        <p:txBody>
+          <a:bodyPr/>
+          <a:lstStyle/>
+          <a:p>
+            <a:endParaRPr lang="en-US"/>
+          </a:p>
+        </p:txBody>
       </p:sp>
       <p:sp>
         <p:nvSpPr>
@@ -4723,7 +4620,7 @@
           <a:bodyPr wrap="square" lIns="0" tIns="0" rIns="0" bIns="0" rtlCol="0" anchor="ctr"/>
           <a:lstStyle/>
           <a:p>
-            <a:pPr algn="ctr" indent="0" marL="0">
+            <a:pPr marL="0" indent="0" algn="ctr">
               <a:buNone/>
             </a:pPr>
             <a:r>
@@ -4762,7 +4659,7 @@
           <a:bodyPr wrap="square" lIns="0" tIns="0" rIns="0" bIns="0" rtlCol="0" anchor="ctr"/>
           <a:lstStyle/>
           <a:p>
-            <a:pPr algn="ctr" indent="0" marL="0">
+            <a:pPr marL="0" indent="0" algn="ctr">
               <a:buNone/>
             </a:pPr>
             <a:r>
@@ -4801,7 +4698,7 @@
           <a:bodyPr wrap="square" lIns="0" tIns="0" rIns="0" bIns="0" rtlCol="0" anchor="ctr"/>
           <a:lstStyle/>
           <a:p>
-            <a:pPr algn="ctr" indent="0" marL="0">
+            <a:pPr marL="0" indent="0" algn="ctr">
               <a:buNone/>
             </a:pPr>
             <a:r>
@@ -4840,7 +4737,7 @@
           <a:bodyPr wrap="square" lIns="0" tIns="0" rIns="0" bIns="0" rtlCol="0" anchor="ctr"/>
           <a:lstStyle/>
           <a:p>
-            <a:pPr algn="ctr" indent="0" marL="0">
+            <a:pPr marL="0" indent="0" algn="ctr">
               <a:lnSpc>
                 <a:spcPts val="1500"/>
               </a:lnSpc>
@@ -4887,6 +4784,13 @@
             <a:prstDash val="solid"/>
           </a:ln>
         </p:spPr>
+        <p:txBody>
+          <a:bodyPr/>
+          <a:lstStyle/>
+          <a:p>
+            <a:endParaRPr lang="en-US"/>
+          </a:p>
+        </p:txBody>
       </p:sp>
       <p:sp>
         <p:nvSpPr>
@@ -4912,6 +4816,13 @@
             <a:prstDash val="solid"/>
           </a:ln>
         </p:spPr>
+        <p:txBody>
+          <a:bodyPr/>
+          <a:lstStyle/>
+          <a:p>
+            <a:endParaRPr lang="en-US"/>
+          </a:p>
+        </p:txBody>
       </p:sp>
       <p:sp>
         <p:nvSpPr>
@@ -4934,7 +4845,7 @@
           <a:bodyPr wrap="square" lIns="0" tIns="0" rIns="0" bIns="0" rtlCol="0" anchor="ctr"/>
           <a:lstStyle/>
           <a:p>
-            <a:pPr algn="ctr" indent="0" marL="0">
+            <a:pPr marL="0" indent="0" algn="ctr">
               <a:buNone/>
             </a:pPr>
             <a:r>
@@ -4973,7 +4884,7 @@
           <a:bodyPr wrap="square" lIns="0" tIns="0" rIns="0" bIns="0" rtlCol="0" anchor="ctr"/>
           <a:lstStyle/>
           <a:p>
-            <a:pPr algn="ctr" indent="0" marL="0">
+            <a:pPr marL="0" indent="0" algn="ctr">
               <a:buNone/>
             </a:pPr>
             <a:r>
@@ -5012,7 +4923,7 @@
           <a:bodyPr wrap="square" lIns="0" tIns="0" rIns="0" bIns="0" rtlCol="0" anchor="ctr"/>
           <a:lstStyle/>
           <a:p>
-            <a:pPr algn="ctr" indent="0" marL="0">
+            <a:pPr marL="0" indent="0" algn="ctr">
               <a:buNone/>
             </a:pPr>
             <a:r>
@@ -5051,7 +4962,7 @@
           <a:bodyPr wrap="square" lIns="0" tIns="0" rIns="0" bIns="0" rtlCol="0" anchor="ctr"/>
           <a:lstStyle/>
           <a:p>
-            <a:pPr algn="ctr" indent="0" marL="0">
+            <a:pPr marL="0" indent="0" algn="ctr">
               <a:lnSpc>
                 <a:spcPts val="1500"/>
               </a:lnSpc>
@@ -5074,40 +4985,46 @@
       </p:sp>
       <p:sp>
         <p:nvSpPr>
-          <p:cNvPr id="29" name="Text 26"/>
-          <p:cNvSpPr txBox="1"/>
-          <p:nvPr/>
-        </p:nvSpPr>
-        <p:spPr>
-          <a:xfrm>
-            <a:off x="566928" y="5541264"/>
-            <a:ext cx="11064240" cy="402336"/>
-          </a:xfrm>
-          <a:prstGeom prst="rect">
-            <a:avLst/>
-          </a:prstGeom>
-          <a:noFill/>
-          <a:ln/>
-        </p:spPr>
-        <p:txBody>
-          <a:bodyPr wrap="square" lIns="0" tIns="0" rIns="0" bIns="0" rtlCol="0" anchor="ctr"/>
-          <a:lstStyle/>
-          <a:p>
-            <a:pPr indent="0" marL="0">
-              <a:buNone/>
-            </a:pPr>
-            <a:r>
-              <a:rPr lang="en-US" sz="1350" i="1" dirty="0">
-                <a:solidFill>
-                  <a:srgbClr val="9FB4B8"/>
-                </a:solidFill>
-                <a:latin typeface="Calibri" pitchFamily="34" charset="0"/>
-                <a:ea typeface="Calibri" pitchFamily="34" charset="-122"/>
-                <a:cs typeface="Calibri" pitchFamily="34" charset="-120"/>
-              </a:rPr>
-              <a:t>No one owned a silo. The two costliest bugs were found by replaying sessions together, not by reading each other's diffs.</a:t>
-            </a:r>
-            <a:endParaRPr lang="en-US" sz="1350" dirty="0"/>
+          <p:cNvPr id="31" name="Text 10">
+            <a:extLst>
+              <a:ext uri="{FF2B5EF4-FFF2-40B4-BE49-F238E27FC236}">
+                <a16:creationId xmlns:a16="http://schemas.microsoft.com/office/drawing/2014/main" id="{CDAE1661-0E11-0A37-18D6-C4095F1B4C98}"/>
+              </a:ext>
+            </a:extLst>
+          </p:cNvPr>
+          <p:cNvSpPr txBox="1"/>
+          <p:nvPr/>
+        </p:nvSpPr>
+        <p:spPr>
+          <a:xfrm>
+            <a:off x="1347216" y="2322576"/>
+            <a:ext cx="1133856" cy="1133856"/>
+          </a:xfrm>
+          <a:prstGeom prst="rect">
+            <a:avLst/>
+          </a:prstGeom>
+          <a:noFill/>
+          <a:ln/>
+        </p:spPr>
+        <p:txBody>
+          <a:bodyPr wrap="square" lIns="0" tIns="0" rIns="0" bIns="0" rtlCol="0" anchor="ctr"/>
+          <a:lstStyle/>
+          <a:p>
+            <a:pPr marL="0" indent="0" algn="ctr">
+              <a:buNone/>
+            </a:pPr>
+            <a:r>
+              <a:rPr lang="en-US" sz="3400" b="1" dirty="0">
+                <a:solidFill>
+                  <a:srgbClr val="FFFFFF"/>
+                </a:solidFill>
+                <a:latin typeface="Cambria" pitchFamily="34" charset="0"/>
+                <a:ea typeface="Cambria" pitchFamily="34" charset="-122"/>
+                <a:cs typeface="Cambria" pitchFamily="34" charset="-120"/>
+              </a:rPr>
+              <a:t>T1</a:t>
+            </a:r>
+            <a:endParaRPr lang="en-US" sz="3400" dirty="0"/>
           </a:p>
         </p:txBody>
       </p:sp>
@@ -5127,6 +5044,7 @@
         <a:solidFill>
           <a:srgbClr val="0B2027"/>
         </a:solidFill>
+        <a:effectLst/>
       </p:bgPr>
     </p:bg>
     <p:spTree>
@@ -5169,6 +5087,13 @@
             <a:prstDash val="solid"/>
           </a:ln>
         </p:spPr>
+        <p:txBody>
+          <a:bodyPr/>
+          <a:lstStyle/>
+          <a:p>
+            <a:endParaRPr lang="en-US"/>
+          </a:p>
+        </p:txBody>
       </p:sp>
       <p:sp>
         <p:nvSpPr>
@@ -5191,7 +5116,7 @@
           <a:bodyPr wrap="square" lIns="0" tIns="0" rIns="0" bIns="0" rtlCol="0" anchor="ctr"/>
           <a:lstStyle/>
           <a:p>
-            <a:pPr algn="ctr" indent="0" marL="0">
+            <a:pPr marL="0" indent="0" algn="ctr">
               <a:buNone/>
             </a:pPr>
             <a:r>
@@ -5230,7 +5155,7 @@
           <a:bodyPr wrap="square" lIns="0" tIns="0" rIns="0" bIns="0" rtlCol="0" anchor="ctr"/>
           <a:lstStyle/>
           <a:p>
-            <a:pPr indent="0" marL="0">
+            <a:pPr marL="0" indent="0">
               <a:buNone/>
             </a:pPr>
             <a:r>
@@ -5269,7 +5194,7 @@
           <a:bodyPr wrap="square" lIns="0" tIns="0" rIns="0" bIns="0" rtlCol="0" anchor="ctr"/>
           <a:lstStyle/>
           <a:p>
-            <a:pPr indent="0" marL="0">
+            <a:pPr marL="0" indent="0">
               <a:buNone/>
             </a:pPr>
             <a:r>
@@ -5308,7 +5233,7 @@
           <a:bodyPr wrap="square" lIns="0" tIns="0" rIns="0" bIns="0" rtlCol="0" anchor="ctr"/>
           <a:lstStyle/>
           <a:p>
-            <a:pPr indent="0" marL="0">
+            <a:pPr marL="0" indent="0">
               <a:buNone/>
             </a:pPr>
             <a:r>
@@ -5347,7 +5272,7 @@
           <a:bodyPr wrap="square" lIns="0" tIns="0" rIns="0" bIns="0" rtlCol="0" anchor="ctr"/>
           <a:lstStyle/>
           <a:p>
-            <a:pPr indent="0" marL="0">
+            <a:pPr marL="0" indent="0">
               <a:lnSpc>
                 <a:spcPts val="1700"/>
               </a:lnSpc>
@@ -5389,7 +5314,7 @@
           <a:bodyPr wrap="square" lIns="0" tIns="0" rIns="0" bIns="0" rtlCol="0" anchor="ctr"/>
           <a:lstStyle/>
           <a:p>
-            <a:pPr indent="0" marL="0">
+            <a:pPr marL="0" indent="0">
               <a:buNone/>
             </a:pPr>
             <a:r>
@@ -5428,7 +5353,7 @@
           <a:bodyPr wrap="square" lIns="0" tIns="0" rIns="0" bIns="0" rtlCol="0" anchor="ctr"/>
           <a:lstStyle/>
           <a:p>
-            <a:pPr indent="0" marL="0">
+            <a:pPr marL="0" indent="0">
               <a:lnSpc>
                 <a:spcPts val="1700"/>
               </a:lnSpc>
@@ -5470,7 +5395,7 @@
           <a:bodyPr wrap="square" lIns="0" tIns="0" rIns="0" bIns="0" rtlCol="0" anchor="ctr"/>
           <a:lstStyle/>
           <a:p>
-            <a:pPr indent="0" marL="0">
+            <a:pPr marL="0" indent="0">
               <a:buNone/>
             </a:pPr>
             <a:r>
@@ -5509,7 +5434,7 @@
           <a:bodyPr wrap="square" lIns="0" tIns="0" rIns="0" bIns="0" rtlCol="0" anchor="ctr"/>
           <a:lstStyle/>
           <a:p>
-            <a:pPr indent="0" marL="0">
+            <a:pPr marL="0" indent="0">
               <a:lnSpc>
                 <a:spcPts val="1700"/>
               </a:lnSpc>
@@ -5551,7 +5476,7 @@
           <a:bodyPr wrap="square" lIns="0" tIns="0" rIns="0" bIns="0" rtlCol="0" anchor="ctr"/>
           <a:lstStyle/>
           <a:p>
-            <a:pPr indent="0" marL="0">
+            <a:pPr marL="0" indent="0">
               <a:buNone/>
             </a:pPr>
             <a:r>
@@ -5585,6 +5510,7 @@
         <a:solidFill>
           <a:srgbClr val="FFFFFF"/>
         </a:solidFill>
+        <a:effectLst/>
       </p:bgPr>
     </p:bg>
     <p:spTree>
@@ -5622,11 +5548,11 @@
           <a:bodyPr wrap="square" lIns="0" tIns="0" rIns="0" bIns="0" rtlCol="0" anchor="ctr"/>
           <a:lstStyle/>
           <a:p>
-            <a:pPr indent="0" marL="0">
-              <a:buNone/>
-            </a:pPr>
-            <a:r>
-              <a:rPr lang="en-US" sz="1200" b="1" spc="200" kern="0" dirty="0">
+            <a:pPr marL="0" indent="0">
+              <a:buNone/>
+            </a:pPr>
+            <a:r>
+              <a:rPr lang="en-US" sz="1200" b="1" kern="0" spc="200" dirty="0">
                 <a:solidFill>
                   <a:srgbClr val="028090"/>
                 </a:solidFill>
@@ -5661,7 +5587,7 @@
           <a:bodyPr wrap="square" lIns="0" tIns="0" rIns="0" bIns="0" rtlCol="0" anchor="ctr"/>
           <a:lstStyle/>
           <a:p>
-            <a:pPr indent="0" marL="0">
+            <a:pPr marL="0" indent="0">
               <a:buNone/>
             </a:pPr>
             <a:r>
@@ -5705,13 +5631,20 @@
             <a:prstDash val="solid"/>
           </a:ln>
           <a:effectLst>
-            <a:outerShdw sx="100000" sy="100000" kx="0" ky="0" algn="bl" rotWithShape="0" blurRad="152400" dist="38100" dir="5400000">
+            <a:outerShdw blurRad="152400" dist="38100" dir="5400000" algn="bl" rotWithShape="0">
               <a:srgbClr val="0B2027">
                 <a:alpha val="16000"/>
               </a:srgbClr>
             </a:outerShdw>
           </a:effectLst>
         </p:spPr>
+        <p:txBody>
+          <a:bodyPr/>
+          <a:lstStyle/>
+          <a:p>
+            <a:endParaRPr lang="en-US"/>
+          </a:p>
+        </p:txBody>
       </p:sp>
       <p:sp>
         <p:nvSpPr>
@@ -5734,7 +5667,7 @@
           <a:bodyPr wrap="square" lIns="0" tIns="0" rIns="0" bIns="0" rtlCol="0" anchor="ctr"/>
           <a:lstStyle/>
           <a:p>
-            <a:pPr indent="0" marL="0">
+            <a:pPr marL="0" indent="0">
               <a:buNone/>
             </a:pPr>
             <a:r>
@@ -5869,13 +5802,20 @@
             <a:prstDash val="solid"/>
           </a:ln>
           <a:effectLst>
-            <a:outerShdw sx="100000" sy="100000" kx="0" ky="0" algn="bl" rotWithShape="0" blurRad="152400" dist="38100" dir="5400000">
+            <a:outerShdw blurRad="152400" dist="38100" dir="5400000" algn="bl" rotWithShape="0">
               <a:srgbClr val="0B2027">
                 <a:alpha val="16000"/>
               </a:srgbClr>
             </a:outerShdw>
           </a:effectLst>
         </p:spPr>
+        <p:txBody>
+          <a:bodyPr/>
+          <a:lstStyle/>
+          <a:p>
+            <a:endParaRPr lang="en-US"/>
+          </a:p>
+        </p:txBody>
       </p:sp>
       <p:sp>
         <p:nvSpPr>
@@ -5898,7 +5838,7 @@
           <a:bodyPr wrap="square" lIns="0" tIns="0" rIns="0" bIns="0" rtlCol="0" anchor="ctr"/>
           <a:lstStyle/>
           <a:p>
-            <a:pPr indent="0" marL="0">
+            <a:pPr marL="0" indent="0">
               <a:buNone/>
             </a:pPr>
             <a:r>
@@ -5937,7 +5877,7 @@
           <a:bodyPr wrap="square" lIns="0" tIns="0" rIns="0" bIns="0" rtlCol="0" anchor="ctr"/>
           <a:lstStyle/>
           <a:p>
-            <a:pPr algn="r" indent="0" marL="0">
+            <a:pPr marL="0" indent="0" algn="r">
               <a:buNone/>
             </a:pPr>
             <a:r>
@@ -5981,13 +5921,20 @@
             <a:prstDash val="solid"/>
           </a:ln>
           <a:effectLst>
-            <a:outerShdw sx="100000" sy="100000" kx="0" ky="0" algn="bl" rotWithShape="0" blurRad="152400" dist="38100" dir="5400000">
+            <a:outerShdw blurRad="152400" dist="38100" dir="5400000" algn="bl" rotWithShape="0">
               <a:srgbClr val="0B2027">
                 <a:alpha val="16000"/>
               </a:srgbClr>
             </a:outerShdw>
           </a:effectLst>
         </p:spPr>
+        <p:txBody>
+          <a:bodyPr/>
+          <a:lstStyle/>
+          <a:p>
+            <a:endParaRPr lang="en-US"/>
+          </a:p>
+        </p:txBody>
       </p:sp>
       <p:sp>
         <p:nvSpPr>
@@ -6010,7 +5957,7 @@
           <a:bodyPr wrap="square" lIns="0" tIns="0" rIns="0" bIns="0" rtlCol="0" anchor="ctr"/>
           <a:lstStyle/>
           <a:p>
-            <a:pPr indent="0" marL="0">
+            <a:pPr marL="0" indent="0">
               <a:buNone/>
             </a:pPr>
             <a:r>
@@ -6049,7 +5996,7 @@
           <a:bodyPr wrap="square" lIns="0" tIns="0" rIns="0" bIns="0" rtlCol="0" anchor="ctr"/>
           <a:lstStyle/>
           <a:p>
-            <a:pPr algn="r" indent="0" marL="0">
+            <a:pPr marL="0" indent="0" algn="r">
               <a:buNone/>
             </a:pPr>
             <a:r>
@@ -6093,13 +6040,20 @@
             <a:prstDash val="solid"/>
           </a:ln>
           <a:effectLst>
-            <a:outerShdw sx="100000" sy="100000" kx="0" ky="0" algn="bl" rotWithShape="0" blurRad="152400" dist="38100" dir="5400000">
+            <a:outerShdw blurRad="152400" dist="38100" dir="5400000" algn="bl" rotWithShape="0">
               <a:srgbClr val="0B2027">
                 <a:alpha val="16000"/>
               </a:srgbClr>
             </a:outerShdw>
           </a:effectLst>
         </p:spPr>
+        <p:txBody>
+          <a:bodyPr/>
+          <a:lstStyle/>
+          <a:p>
+            <a:endParaRPr lang="en-US"/>
+          </a:p>
+        </p:txBody>
       </p:sp>
       <p:sp>
         <p:nvSpPr>
@@ -6122,7 +6076,7 @@
           <a:bodyPr wrap="square" lIns="0" tIns="0" rIns="0" bIns="0" rtlCol="0" anchor="ctr"/>
           <a:lstStyle/>
           <a:p>
-            <a:pPr indent="0" marL="0">
+            <a:pPr marL="0" indent="0">
               <a:buNone/>
             </a:pPr>
             <a:r>
@@ -6161,7 +6115,7 @@
           <a:bodyPr wrap="square" lIns="0" tIns="0" rIns="0" bIns="0" rtlCol="0" anchor="ctr"/>
           <a:lstStyle/>
           <a:p>
-            <a:pPr algn="r" indent="0" marL="0">
+            <a:pPr marL="0" indent="0" algn="r">
               <a:buNone/>
             </a:pPr>
             <a:r>
@@ -6200,7 +6154,7 @@
           <a:bodyPr wrap="square" lIns="0" tIns="0" rIns="0" bIns="0" rtlCol="0" anchor="ctr"/>
           <a:lstStyle/>
           <a:p>
-            <a:pPr indent="0" marL="0">
+            <a:pPr marL="0" indent="0">
               <a:buNone/>
             </a:pPr>
             <a:r>
@@ -6239,7 +6193,7 @@
           <a:bodyPr wrap="square" lIns="0" tIns="0" rIns="0" bIns="0" rtlCol="0" anchor="ctr"/>
           <a:lstStyle/>
           <a:p>
-            <a:pPr indent="0" marL="0">
+            <a:pPr marL="0" indent="0">
               <a:buNone/>
             </a:pPr>
             <a:r>
@@ -6273,6 +6227,7 @@
         <a:solidFill>
           <a:srgbClr val="FFFFFF"/>
         </a:solidFill>
+        <a:effectLst/>
       </p:bgPr>
     </p:bg>
     <p:spTree>
@@ -6310,11 +6265,11 @@
           <a:bodyPr wrap="square" lIns="0" tIns="0" rIns="0" bIns="0" rtlCol="0" anchor="ctr"/>
           <a:lstStyle/>
           <a:p>
-            <a:pPr indent="0" marL="0">
-              <a:buNone/>
-            </a:pPr>
-            <a:r>
-              <a:rPr lang="en-US" sz="1200" b="1" spc="200" kern="0" dirty="0">
+            <a:pPr marL="0" indent="0">
+              <a:buNone/>
+            </a:pPr>
+            <a:r>
+              <a:rPr lang="en-US" sz="1200" b="1" kern="0" spc="200" dirty="0">
                 <a:solidFill>
                   <a:srgbClr val="028090"/>
                 </a:solidFill>
@@ -6349,7 +6304,7 @@
           <a:bodyPr wrap="square" lIns="0" tIns="0" rIns="0" bIns="0" rtlCol="0" anchor="ctr"/>
           <a:lstStyle/>
           <a:p>
-            <a:pPr indent="0" marL="0">
+            <a:pPr marL="0" indent="0">
               <a:buNone/>
             </a:pPr>
             <a:r>
@@ -6388,7 +6343,7 @@
           <a:bodyPr wrap="square" lIns="0" tIns="0" rIns="0" bIns="0" rtlCol="0" anchor="ctr"/>
           <a:lstStyle/>
           <a:p>
-            <a:pPr indent="0" marL="0">
+            <a:pPr marL="0" indent="0">
               <a:buNone/>
             </a:pPr>
             <a:r>
@@ -6432,13 +6387,20 @@
             <a:prstDash val="solid"/>
           </a:ln>
           <a:effectLst>
-            <a:outerShdw sx="100000" sy="100000" kx="0" ky="0" algn="bl" rotWithShape="0" blurRad="152400" dist="38100" dir="5400000">
+            <a:outerShdw blurRad="152400" dist="38100" dir="5400000" algn="bl" rotWithShape="0">
               <a:srgbClr val="0B2027">
                 <a:alpha val="16000"/>
               </a:srgbClr>
             </a:outerShdw>
           </a:effectLst>
         </p:spPr>
+        <p:txBody>
+          <a:bodyPr/>
+          <a:lstStyle/>
+          <a:p>
+            <a:endParaRPr lang="en-US"/>
+          </a:p>
+        </p:txBody>
       </p:sp>
       <p:sp>
         <p:nvSpPr>
@@ -6461,7 +6423,7 @@
           <a:bodyPr wrap="square" lIns="0" tIns="0" rIns="0" bIns="0" rtlCol="0" anchor="ctr"/>
           <a:lstStyle/>
           <a:p>
-            <a:pPr indent="0" marL="0">
+            <a:pPr marL="0" indent="0">
               <a:buNone/>
             </a:pPr>
             <a:r>
@@ -6500,7 +6462,7 @@
           <a:bodyPr wrap="square" lIns="0" tIns="0" rIns="0" bIns="0" rtlCol="0" anchor="ctr"/>
           <a:lstStyle/>
           <a:p>
-            <a:pPr indent="0" marL="0">
+            <a:pPr marL="0" indent="0">
               <a:buNone/>
             </a:pPr>
             <a:r>
@@ -6544,13 +6506,20 @@
             <a:prstDash val="solid"/>
           </a:ln>
           <a:effectLst>
-            <a:outerShdw sx="100000" sy="100000" kx="0" ky="0" algn="bl" rotWithShape="0" blurRad="152400" dist="38100" dir="5400000">
+            <a:outerShdw blurRad="152400" dist="38100" dir="5400000" algn="bl" rotWithShape="0">
               <a:srgbClr val="0B2027">
                 <a:alpha val="16000"/>
               </a:srgbClr>
             </a:outerShdw>
           </a:effectLst>
         </p:spPr>
+        <p:txBody>
+          <a:bodyPr/>
+          <a:lstStyle/>
+          <a:p>
+            <a:endParaRPr lang="en-US"/>
+          </a:p>
+        </p:txBody>
       </p:sp>
       <p:sp>
         <p:nvSpPr>
@@ -6573,7 +6542,7 @@
           <a:bodyPr wrap="square" lIns="0" tIns="0" rIns="0" bIns="0" rtlCol="0" anchor="ctr"/>
           <a:lstStyle/>
           <a:p>
-            <a:pPr indent="0" marL="0">
+            <a:pPr marL="0" indent="0">
               <a:buNone/>
             </a:pPr>
             <a:r>
@@ -6612,7 +6581,7 @@
           <a:bodyPr wrap="square" lIns="0" tIns="0" rIns="0" bIns="0" rtlCol="0" anchor="ctr"/>
           <a:lstStyle/>
           <a:p>
-            <a:pPr indent="0" marL="0">
+            <a:pPr marL="0" indent="0">
               <a:buNone/>
             </a:pPr>
             <a:r>
@@ -6651,7 +6620,7 @@
           <a:bodyPr wrap="square" lIns="0" tIns="0" rIns="0" bIns="0" rtlCol="0" anchor="ctr"/>
           <a:lstStyle/>
           <a:p>
-            <a:pPr indent="0" marL="0">
+            <a:pPr marL="0" indent="0">
               <a:lnSpc>
                 <a:spcPts val="2600"/>
               </a:lnSpc>
@@ -6693,7 +6662,7 @@
           <a:bodyPr wrap="square" lIns="0" tIns="0" rIns="0" bIns="0" rtlCol="0" anchor="ctr"/>
           <a:lstStyle/>
           <a:p>
-            <a:pPr indent="0" marL="0">
+            <a:pPr marL="0" indent="0">
               <a:lnSpc>
                 <a:spcPts val="1900"/>
               </a:lnSpc>
@@ -6730,6 +6699,7 @@
         <a:solidFill>
           <a:srgbClr val="FFFFFF"/>
         </a:solidFill>
+        <a:effectLst/>
       </p:bgPr>
     </p:bg>
     <p:spTree>
@@ -6767,11 +6737,11 @@
           <a:bodyPr wrap="square" lIns="0" tIns="0" rIns="0" bIns="0" rtlCol="0" anchor="ctr"/>
           <a:lstStyle/>
           <a:p>
-            <a:pPr indent="0" marL="0">
-              <a:buNone/>
-            </a:pPr>
-            <a:r>
-              <a:rPr lang="en-US" sz="1200" b="1" spc="200" kern="0" dirty="0">
+            <a:pPr marL="0" indent="0">
+              <a:buNone/>
+            </a:pPr>
+            <a:r>
+              <a:rPr lang="en-US" sz="1200" b="1" kern="0" spc="200" dirty="0">
                 <a:solidFill>
                   <a:srgbClr val="028090"/>
                 </a:solidFill>
@@ -6806,7 +6776,7 @@
           <a:bodyPr wrap="square" lIns="0" tIns="0" rIns="0" bIns="0" rtlCol="0" anchor="ctr"/>
           <a:lstStyle/>
           <a:p>
-            <a:pPr indent="0" marL="0">
+            <a:pPr marL="0" indent="0">
               <a:buNone/>
             </a:pPr>
             <a:r>
@@ -6850,13 +6820,20 @@
             <a:prstDash val="solid"/>
           </a:ln>
           <a:effectLst>
-            <a:outerShdw sx="100000" sy="100000" kx="0" ky="0" algn="bl" rotWithShape="0" blurRad="152400" dist="38100" dir="5400000">
+            <a:outerShdw blurRad="152400" dist="38100" dir="5400000" algn="bl" rotWithShape="0">
               <a:srgbClr val="0B2027">
                 <a:alpha val="16000"/>
               </a:srgbClr>
             </a:outerShdw>
           </a:effectLst>
         </p:spPr>
+        <p:txBody>
+          <a:bodyPr/>
+          <a:lstStyle/>
+          <a:p>
+            <a:endParaRPr lang="en-US"/>
+          </a:p>
+        </p:txBody>
       </p:sp>
       <p:sp>
         <p:nvSpPr>
@@ -6884,6 +6861,13 @@
             <a:prstDash val="solid"/>
           </a:ln>
         </p:spPr>
+        <p:txBody>
+          <a:bodyPr/>
+          <a:lstStyle/>
+          <a:p>
+            <a:endParaRPr lang="en-US"/>
+          </a:p>
+        </p:txBody>
       </p:sp>
       <p:sp>
         <p:nvSpPr>
@@ -6906,7 +6890,7 @@
           <a:bodyPr wrap="square" lIns="0" tIns="0" rIns="0" bIns="0" rtlCol="0" anchor="ctr"/>
           <a:lstStyle/>
           <a:p>
-            <a:pPr algn="ctr" indent="0" marL="0">
+            <a:pPr marL="0" indent="0" algn="ctr">
               <a:buNone/>
             </a:pPr>
             <a:r>
@@ -6945,7 +6929,7 @@
           <a:bodyPr wrap="square" lIns="0" tIns="0" rIns="0" bIns="0" rtlCol="0" anchor="ctr"/>
           <a:lstStyle/>
           <a:p>
-            <a:pPr indent="0" marL="0">
+            <a:pPr marL="0" indent="0">
               <a:buNone/>
             </a:pPr>
             <a:r>
@@ -6984,7 +6968,7 @@
           <a:bodyPr wrap="square" lIns="0" tIns="0" rIns="0" bIns="0" rtlCol="0" anchor="ctr"/>
           <a:lstStyle/>
           <a:p>
-            <a:pPr indent="0" marL="0">
+            <a:pPr marL="0" indent="0">
               <a:lnSpc>
                 <a:spcPts val="1400"/>
               </a:lnSpc>
@@ -7004,7 +6988,7 @@
             <a:endParaRPr lang="en-US" sz="1150" dirty="0"/>
           </a:p>
           <a:p>
-            <a:pPr indent="0" marL="0">
+            <a:pPr marL="0" indent="0">
               <a:lnSpc>
                 <a:spcPts val="1400"/>
               </a:lnSpc>
@@ -7024,7 +7008,7 @@
             <a:endParaRPr lang="en-US" sz="1150" dirty="0"/>
           </a:p>
           <a:p>
-            <a:pPr indent="0" marL="0">
+            <a:pPr marL="0" indent="0">
               <a:lnSpc>
                 <a:spcPts val="1400"/>
               </a:lnSpc>
@@ -7066,7 +7050,7 @@
           <a:bodyPr wrap="square" lIns="0" tIns="0" rIns="0" bIns="0" rtlCol="0" anchor="ctr"/>
           <a:lstStyle/>
           <a:p>
-            <a:pPr algn="ctr" indent="0" marL="0">
+            <a:pPr marL="0" indent="0" algn="ctr">
               <a:buNone/>
             </a:pPr>
             <a:r>
@@ -7110,13 +7094,20 @@
             <a:prstDash val="solid"/>
           </a:ln>
           <a:effectLst>
-            <a:outerShdw sx="100000" sy="100000" kx="0" ky="0" algn="bl" rotWithShape="0" blurRad="152400" dist="38100" dir="5400000">
+            <a:outerShdw blurRad="152400" dist="38100" dir="5400000" algn="bl" rotWithShape="0">
               <a:srgbClr val="0B2027">
                 <a:alpha val="16000"/>
               </a:srgbClr>
             </a:outerShdw>
           </a:effectLst>
         </p:spPr>
+        <p:txBody>
+          <a:bodyPr/>
+          <a:lstStyle/>
+          <a:p>
+            <a:endParaRPr lang="en-US"/>
+          </a:p>
+        </p:txBody>
       </p:sp>
       <p:sp>
         <p:nvSpPr>
@@ -7144,6 +7135,13 @@
             <a:prstDash val="solid"/>
           </a:ln>
         </p:spPr>
+        <p:txBody>
+          <a:bodyPr/>
+          <a:lstStyle/>
+          <a:p>
+            <a:endParaRPr lang="en-US"/>
+          </a:p>
+        </p:txBody>
       </p:sp>
       <p:sp>
         <p:nvSpPr>
@@ -7166,7 +7164,7 @@
           <a:bodyPr wrap="square" lIns="0" tIns="0" rIns="0" bIns="0" rtlCol="0" anchor="ctr"/>
           <a:lstStyle/>
           <a:p>
-            <a:pPr algn="ctr" indent="0" marL="0">
+            <a:pPr marL="0" indent="0" algn="ctr">
               <a:buNone/>
             </a:pPr>
             <a:r>
@@ -7205,7 +7203,7 @@
           <a:bodyPr wrap="square" lIns="0" tIns="0" rIns="0" bIns="0" rtlCol="0" anchor="ctr"/>
           <a:lstStyle/>
           <a:p>
-            <a:pPr indent="0" marL="0">
+            <a:pPr marL="0" indent="0">
               <a:buNone/>
             </a:pPr>
             <a:r>
@@ -7244,7 +7242,7 @@
           <a:bodyPr wrap="square" lIns="0" tIns="0" rIns="0" bIns="0" rtlCol="0" anchor="ctr"/>
           <a:lstStyle/>
           <a:p>
-            <a:pPr indent="0" marL="0">
+            <a:pPr marL="0" indent="0">
               <a:lnSpc>
                 <a:spcPts val="1400"/>
               </a:lnSpc>
@@ -7264,7 +7262,7 @@
             <a:endParaRPr lang="en-US" sz="1150" dirty="0"/>
           </a:p>
           <a:p>
-            <a:pPr indent="0" marL="0">
+            <a:pPr marL="0" indent="0">
               <a:lnSpc>
                 <a:spcPts val="1400"/>
               </a:lnSpc>
@@ -7306,7 +7304,7 @@
           <a:bodyPr wrap="square" lIns="0" tIns="0" rIns="0" bIns="0" rtlCol="0" anchor="ctr"/>
           <a:lstStyle/>
           <a:p>
-            <a:pPr algn="ctr" indent="0" marL="0">
+            <a:pPr marL="0" indent="0" algn="ctr">
               <a:buNone/>
             </a:pPr>
             <a:r>
@@ -7350,13 +7348,20 @@
             <a:prstDash val="solid"/>
           </a:ln>
           <a:effectLst>
-            <a:outerShdw sx="100000" sy="100000" kx="0" ky="0" algn="bl" rotWithShape="0" blurRad="152400" dist="38100" dir="5400000">
+            <a:outerShdw blurRad="152400" dist="38100" dir="5400000" algn="bl" rotWithShape="0">
               <a:srgbClr val="0B2027">
                 <a:alpha val="16000"/>
               </a:srgbClr>
             </a:outerShdw>
           </a:effectLst>
         </p:spPr>
+        <p:txBody>
+          <a:bodyPr/>
+          <a:lstStyle/>
+          <a:p>
+            <a:endParaRPr lang="en-US"/>
+          </a:p>
+        </p:txBody>
       </p:sp>
       <p:sp>
         <p:nvSpPr>
@@ -7384,6 +7389,13 @@
             <a:prstDash val="solid"/>
           </a:ln>
         </p:spPr>
+        <p:txBody>
+          <a:bodyPr/>
+          <a:lstStyle/>
+          <a:p>
+            <a:endParaRPr lang="en-US"/>
+          </a:p>
+        </p:txBody>
       </p:sp>
       <p:sp>
         <p:nvSpPr>
@@ -7406,7 +7418,7 @@
           <a:bodyPr wrap="square" lIns="0" tIns="0" rIns="0" bIns="0" rtlCol="0" anchor="ctr"/>
           <a:lstStyle/>
           <a:p>
-            <a:pPr algn="ctr" indent="0" marL="0">
+            <a:pPr marL="0" indent="0" algn="ctr">
               <a:buNone/>
             </a:pPr>
             <a:r>
@@ -7445,7 +7457,7 @@
           <a:bodyPr wrap="square" lIns="0" tIns="0" rIns="0" bIns="0" rtlCol="0" anchor="ctr"/>
           <a:lstStyle/>
           <a:p>
-            <a:pPr indent="0" marL="0">
+            <a:pPr marL="0" indent="0">
               <a:buNone/>
             </a:pPr>
             <a:r>
@@ -7484,7 +7496,7 @@
           <a:bodyPr wrap="square" lIns="0" tIns="0" rIns="0" bIns="0" rtlCol="0" anchor="ctr"/>
           <a:lstStyle/>
           <a:p>
-            <a:pPr indent="0" marL="0">
+            <a:pPr marL="0" indent="0">
               <a:lnSpc>
                 <a:spcPts val="1400"/>
               </a:lnSpc>
@@ -7504,7 +7516,7 @@
             <a:endParaRPr lang="en-US" sz="1150" dirty="0"/>
           </a:p>
           <a:p>
-            <a:pPr indent="0" marL="0">
+            <a:pPr marL="0" indent="0">
               <a:lnSpc>
                 <a:spcPts val="1400"/>
               </a:lnSpc>
@@ -7524,7 +7536,7 @@
             <a:endParaRPr lang="en-US" sz="1150" dirty="0"/>
           </a:p>
           <a:p>
-            <a:pPr indent="0" marL="0">
+            <a:pPr marL="0" indent="0">
               <a:lnSpc>
                 <a:spcPts val="1400"/>
               </a:lnSpc>
@@ -7566,7 +7578,7 @@
           <a:bodyPr wrap="square" lIns="0" tIns="0" rIns="0" bIns="0" rtlCol="0" anchor="ctr"/>
           <a:lstStyle/>
           <a:p>
-            <a:pPr algn="ctr" indent="0" marL="0">
+            <a:pPr marL="0" indent="0" algn="ctr">
               <a:buNone/>
             </a:pPr>
             <a:r>
@@ -7610,13 +7622,20 @@
             <a:prstDash val="solid"/>
           </a:ln>
           <a:effectLst>
-            <a:outerShdw sx="100000" sy="100000" kx="0" ky="0" algn="bl" rotWithShape="0" blurRad="152400" dist="38100" dir="5400000">
+            <a:outerShdw blurRad="152400" dist="38100" dir="5400000" algn="bl" rotWithShape="0">
               <a:srgbClr val="0B2027">
                 <a:alpha val="16000"/>
               </a:srgbClr>
             </a:outerShdw>
           </a:effectLst>
         </p:spPr>
+        <p:txBody>
+          <a:bodyPr/>
+          <a:lstStyle/>
+          <a:p>
+            <a:endParaRPr lang="en-US"/>
+          </a:p>
+        </p:txBody>
       </p:sp>
       <p:sp>
         <p:nvSpPr>
@@ -7644,6 +7663,13 @@
             <a:prstDash val="solid"/>
           </a:ln>
         </p:spPr>
+        <p:txBody>
+          <a:bodyPr/>
+          <a:lstStyle/>
+          <a:p>
+            <a:endParaRPr lang="en-US"/>
+          </a:p>
+        </p:txBody>
       </p:sp>
       <p:sp>
         <p:nvSpPr>
@@ -7666,7 +7692,7 @@
           <a:bodyPr wrap="square" lIns="0" tIns="0" rIns="0" bIns="0" rtlCol="0" anchor="ctr"/>
           <a:lstStyle/>
           <a:p>
-            <a:pPr algn="ctr" indent="0" marL="0">
+            <a:pPr marL="0" indent="0" algn="ctr">
               <a:buNone/>
             </a:pPr>
             <a:r>
@@ -7705,7 +7731,7 @@
           <a:bodyPr wrap="square" lIns="0" tIns="0" rIns="0" bIns="0" rtlCol="0" anchor="ctr"/>
           <a:lstStyle/>
           <a:p>
-            <a:pPr indent="0" marL="0">
+            <a:pPr marL="0" indent="0">
               <a:buNone/>
             </a:pPr>
             <a:r>
@@ -7744,7 +7770,7 @@
           <a:bodyPr wrap="square" lIns="0" tIns="0" rIns="0" bIns="0" rtlCol="0" anchor="ctr"/>
           <a:lstStyle/>
           <a:p>
-            <a:pPr indent="0" marL="0">
+            <a:pPr marL="0" indent="0">
               <a:lnSpc>
                 <a:spcPts val="1400"/>
               </a:lnSpc>
@@ -7764,7 +7790,7 @@
             <a:endParaRPr lang="en-US" sz="1150" dirty="0"/>
           </a:p>
           <a:p>
-            <a:pPr indent="0" marL="0">
+            <a:pPr marL="0" indent="0">
               <a:lnSpc>
                 <a:spcPts val="1400"/>
               </a:lnSpc>
@@ -7784,7 +7810,7 @@
             <a:endParaRPr lang="en-US" sz="1150" dirty="0"/>
           </a:p>
           <a:p>
-            <a:pPr indent="0" marL="0">
+            <a:pPr marL="0" indent="0">
               <a:lnSpc>
                 <a:spcPts val="1400"/>
               </a:lnSpc>
@@ -7826,7 +7852,7 @@
           <a:bodyPr wrap="square" lIns="0" tIns="0" rIns="0" bIns="0" rtlCol="0" anchor="ctr"/>
           <a:lstStyle/>
           <a:p>
-            <a:pPr algn="ctr" indent="0" marL="0">
+            <a:pPr marL="0" indent="0" algn="ctr">
               <a:buNone/>
             </a:pPr>
             <a:r>
@@ -7870,13 +7896,20 @@
             <a:prstDash val="solid"/>
           </a:ln>
           <a:effectLst>
-            <a:outerShdw sx="100000" sy="100000" kx="0" ky="0" algn="bl" rotWithShape="0" blurRad="152400" dist="38100" dir="5400000">
+            <a:outerShdw blurRad="152400" dist="38100" dir="5400000" algn="bl" rotWithShape="0">
               <a:srgbClr val="0B2027">
                 <a:alpha val="16000"/>
               </a:srgbClr>
             </a:outerShdw>
           </a:effectLst>
         </p:spPr>
+        <p:txBody>
+          <a:bodyPr/>
+          <a:lstStyle/>
+          <a:p>
+            <a:endParaRPr lang="en-US"/>
+          </a:p>
+        </p:txBody>
       </p:sp>
       <p:sp>
         <p:nvSpPr>
@@ -7904,6 +7937,13 @@
             <a:prstDash val="solid"/>
           </a:ln>
         </p:spPr>
+        <p:txBody>
+          <a:bodyPr/>
+          <a:lstStyle/>
+          <a:p>
+            <a:endParaRPr lang="en-US"/>
+          </a:p>
+        </p:txBody>
       </p:sp>
       <p:sp>
         <p:nvSpPr>
@@ -7926,7 +7966,7 @@
           <a:bodyPr wrap="square" lIns="0" tIns="0" rIns="0" bIns="0" rtlCol="0" anchor="ctr"/>
           <a:lstStyle/>
           <a:p>
-            <a:pPr algn="ctr" indent="0" marL="0">
+            <a:pPr marL="0" indent="0" algn="ctr">
               <a:buNone/>
             </a:pPr>
             <a:r>
@@ -7965,7 +8005,7 @@
           <a:bodyPr wrap="square" lIns="0" tIns="0" rIns="0" bIns="0" rtlCol="0" anchor="ctr"/>
           <a:lstStyle/>
           <a:p>
-            <a:pPr indent="0" marL="0">
+            <a:pPr marL="0" indent="0">
               <a:buNone/>
             </a:pPr>
             <a:r>
@@ -8004,7 +8044,7 @@
           <a:bodyPr wrap="square" lIns="0" tIns="0" rIns="0" bIns="0" rtlCol="0" anchor="ctr"/>
           <a:lstStyle/>
           <a:p>
-            <a:pPr indent="0" marL="0">
+            <a:pPr marL="0" indent="0">
               <a:lnSpc>
                 <a:spcPts val="1400"/>
               </a:lnSpc>
@@ -8024,7 +8064,7 @@
             <a:endParaRPr lang="en-US" sz="1150" dirty="0"/>
           </a:p>
           <a:p>
-            <a:pPr indent="0" marL="0">
+            <a:pPr marL="0" indent="0">
               <a:lnSpc>
                 <a:spcPts val="1400"/>
               </a:lnSpc>
@@ -8071,13 +8111,20 @@
             <a:prstDash val="solid"/>
           </a:ln>
           <a:effectLst>
-            <a:outerShdw sx="100000" sy="100000" kx="0" ky="0" algn="bl" rotWithShape="0" blurRad="152400" dist="38100" dir="5400000">
+            <a:outerShdw blurRad="152400" dist="38100" dir="5400000" algn="bl" rotWithShape="0">
               <a:srgbClr val="0B2027">
                 <a:alpha val="16000"/>
               </a:srgbClr>
             </a:outerShdw>
           </a:effectLst>
         </p:spPr>
+        <p:txBody>
+          <a:bodyPr/>
+          <a:lstStyle/>
+          <a:p>
+            <a:endParaRPr lang="en-US"/>
+          </a:p>
+        </p:txBody>
       </p:sp>
       <p:sp>
         <p:nvSpPr>
@@ -8100,7 +8147,7 @@
           <a:bodyPr wrap="square" lIns="0" tIns="0" rIns="0" bIns="0" rtlCol="0" anchor="ctr"/>
           <a:lstStyle/>
           <a:p>
-            <a:pPr indent="0" marL="0">
+            <a:pPr marL="0" indent="0">
               <a:buNone/>
             </a:pPr>
             <a:r>
@@ -8139,7 +8186,7 @@
           <a:bodyPr wrap="square" lIns="0" tIns="0" rIns="0" bIns="0" rtlCol="0" anchor="ctr"/>
           <a:lstStyle/>
           <a:p>
-            <a:pPr indent="0" marL="0">
+            <a:pPr marL="0" indent="0">
               <a:buNone/>
             </a:pPr>
             <a:r>
@@ -8178,7 +8225,7 @@
           <a:bodyPr wrap="square" lIns="0" tIns="0" rIns="0" bIns="0" rtlCol="0" anchor="ctr"/>
           <a:lstStyle/>
           <a:p>
-            <a:pPr indent="0" marL="0">
+            <a:pPr marL="0" indent="0">
               <a:buNone/>
             </a:pPr>
             <a:r>
@@ -8212,6 +8259,7 @@
         <a:solidFill>
           <a:srgbClr val="FFFFFF"/>
         </a:solidFill>
+        <a:effectLst/>
       </p:bgPr>
     </p:bg>
     <p:spTree>
@@ -8249,11 +8297,11 @@
           <a:bodyPr wrap="square" lIns="0" tIns="0" rIns="0" bIns="0" rtlCol="0" anchor="ctr"/>
           <a:lstStyle/>
           <a:p>
-            <a:pPr indent="0" marL="0">
-              <a:buNone/>
-            </a:pPr>
-            <a:r>
-              <a:rPr lang="en-US" sz="1200" b="1" spc="200" kern="0" dirty="0">
+            <a:pPr marL="0" indent="0">
+              <a:buNone/>
+            </a:pPr>
+            <a:r>
+              <a:rPr lang="en-US" sz="1200" b="1" kern="0" spc="200" dirty="0">
                 <a:solidFill>
                   <a:srgbClr val="028090"/>
                 </a:solidFill>
@@ -8288,7 +8336,7 @@
           <a:bodyPr wrap="square" lIns="0" tIns="0" rIns="0" bIns="0" rtlCol="0" anchor="ctr"/>
           <a:lstStyle/>
           <a:p>
-            <a:pPr indent="0" marL="0">
+            <a:pPr marL="0" indent="0">
               <a:buNone/>
             </a:pPr>
             <a:r>
@@ -8327,7 +8375,7 @@
           <a:bodyPr wrap="square" lIns="0" tIns="0" rIns="0" bIns="0" rtlCol="0" anchor="ctr"/>
           <a:lstStyle/>
           <a:p>
-            <a:pPr indent="0" marL="0">
+            <a:pPr marL="0" indent="0">
               <a:buNone/>
             </a:pPr>
             <a:r>
@@ -8371,13 +8419,20 @@
             <a:prstDash val="solid"/>
           </a:ln>
           <a:effectLst>
-            <a:outerShdw sx="100000" sy="100000" kx="0" ky="0" algn="bl" rotWithShape="0" blurRad="152400" dist="38100" dir="5400000">
+            <a:outerShdw blurRad="152400" dist="38100" dir="5400000" algn="bl" rotWithShape="0">
               <a:srgbClr val="0B2027">
                 <a:alpha val="16000"/>
               </a:srgbClr>
             </a:outerShdw>
           </a:effectLst>
         </p:spPr>
+        <p:txBody>
+          <a:bodyPr/>
+          <a:lstStyle/>
+          <a:p>
+            <a:endParaRPr lang="en-US"/>
+          </a:p>
+        </p:txBody>
       </p:sp>
       <p:sp>
         <p:nvSpPr>
@@ -8405,6 +8460,13 @@
             <a:prstDash val="solid"/>
           </a:ln>
         </p:spPr>
+        <p:txBody>
+          <a:bodyPr/>
+          <a:lstStyle/>
+          <a:p>
+            <a:endParaRPr lang="en-US"/>
+          </a:p>
+        </p:txBody>
       </p:sp>
       <p:sp>
         <p:nvSpPr>
@@ -8427,7 +8489,7 @@
           <a:bodyPr wrap="square" lIns="0" tIns="0" rIns="0" bIns="0" rtlCol="0" anchor="ctr"/>
           <a:lstStyle/>
           <a:p>
-            <a:pPr algn="ctr" indent="0" marL="0">
+            <a:pPr marL="0" indent="0" algn="ctr">
               <a:buNone/>
             </a:pPr>
             <a:r>
@@ -8466,7 +8528,7 @@
           <a:bodyPr wrap="square" lIns="0" tIns="0" rIns="0" bIns="0" rtlCol="0" anchor="ctr"/>
           <a:lstStyle/>
           <a:p>
-            <a:pPr indent="0" marL="0">
+            <a:pPr marL="0" indent="0">
               <a:buNone/>
             </a:pPr>
             <a:r>
@@ -8505,7 +8567,7 @@
           <a:bodyPr wrap="square" lIns="0" tIns="0" rIns="0" bIns="0" rtlCol="0" anchor="ctr"/>
           <a:lstStyle/>
           <a:p>
-            <a:pPr indent="0" marL="0">
+            <a:pPr marL="0" indent="0">
               <a:buNone/>
             </a:pPr>
             <a:r>
@@ -8549,13 +8611,20 @@
             <a:prstDash val="solid"/>
           </a:ln>
           <a:effectLst>
-            <a:outerShdw sx="100000" sy="100000" kx="0" ky="0" algn="bl" rotWithShape="0" blurRad="152400" dist="38100" dir="5400000">
+            <a:outerShdw blurRad="152400" dist="38100" dir="5400000" algn="bl" rotWithShape="0">
               <a:srgbClr val="0B2027">
                 <a:alpha val="16000"/>
               </a:srgbClr>
             </a:outerShdw>
           </a:effectLst>
         </p:spPr>
+        <p:txBody>
+          <a:bodyPr/>
+          <a:lstStyle/>
+          <a:p>
+            <a:endParaRPr lang="en-US"/>
+          </a:p>
+        </p:txBody>
       </p:sp>
       <p:sp>
         <p:nvSpPr>
@@ -8583,6 +8652,13 @@
             <a:prstDash val="solid"/>
           </a:ln>
         </p:spPr>
+        <p:txBody>
+          <a:bodyPr/>
+          <a:lstStyle/>
+          <a:p>
+            <a:endParaRPr lang="en-US"/>
+          </a:p>
+        </p:txBody>
       </p:sp>
       <p:sp>
         <p:nvSpPr>
@@ -8605,7 +8681,7 @@
           <a:bodyPr wrap="square" lIns="0" tIns="0" rIns="0" bIns="0" rtlCol="0" anchor="ctr"/>
           <a:lstStyle/>
           <a:p>
-            <a:pPr algn="ctr" indent="0" marL="0">
+            <a:pPr marL="0" indent="0" algn="ctr">
               <a:buNone/>
             </a:pPr>
             <a:r>
@@ -8644,7 +8720,7 @@
           <a:bodyPr wrap="square" lIns="0" tIns="0" rIns="0" bIns="0" rtlCol="0" anchor="ctr"/>
           <a:lstStyle/>
           <a:p>
-            <a:pPr indent="0" marL="0">
+            <a:pPr marL="0" indent="0">
               <a:buNone/>
             </a:pPr>
             <a:r>
@@ -8683,7 +8759,7 @@
           <a:bodyPr wrap="square" lIns="0" tIns="0" rIns="0" bIns="0" rtlCol="0" anchor="ctr"/>
           <a:lstStyle/>
           <a:p>
-            <a:pPr indent="0" marL="0">
+            <a:pPr marL="0" indent="0">
               <a:buNone/>
             </a:pPr>
             <a:r>
@@ -8727,13 +8803,20 @@
             <a:prstDash val="solid"/>
           </a:ln>
           <a:effectLst>
-            <a:outerShdw sx="100000" sy="100000" kx="0" ky="0" algn="bl" rotWithShape="0" blurRad="152400" dist="38100" dir="5400000">
+            <a:outerShdw blurRad="152400" dist="38100" dir="5400000" algn="bl" rotWithShape="0">
               <a:srgbClr val="0B2027">
                 <a:alpha val="16000"/>
               </a:srgbClr>
             </a:outerShdw>
           </a:effectLst>
         </p:spPr>
+        <p:txBody>
+          <a:bodyPr/>
+          <a:lstStyle/>
+          <a:p>
+            <a:endParaRPr lang="en-US"/>
+          </a:p>
+        </p:txBody>
       </p:sp>
       <p:sp>
         <p:nvSpPr>
@@ -8761,6 +8844,13 @@
             <a:prstDash val="solid"/>
           </a:ln>
         </p:spPr>
+        <p:txBody>
+          <a:bodyPr/>
+          <a:lstStyle/>
+          <a:p>
+            <a:endParaRPr lang="en-US"/>
+          </a:p>
+        </p:txBody>
       </p:sp>
       <p:sp>
         <p:nvSpPr>
@@ -8783,7 +8873,7 @@
           <a:bodyPr wrap="square" lIns="0" tIns="0" rIns="0" bIns="0" rtlCol="0" anchor="ctr"/>
           <a:lstStyle/>
           <a:p>
-            <a:pPr algn="ctr" indent="0" marL="0">
+            <a:pPr marL="0" indent="0" algn="ctr">
               <a:buNone/>
             </a:pPr>
             <a:r>
@@ -8822,7 +8912,7 @@
           <a:bodyPr wrap="square" lIns="0" tIns="0" rIns="0" bIns="0" rtlCol="0" anchor="ctr"/>
           <a:lstStyle/>
           <a:p>
-            <a:pPr indent="0" marL="0">
+            <a:pPr marL="0" indent="0">
               <a:buNone/>
             </a:pPr>
             <a:r>
@@ -8861,7 +8951,7 @@
           <a:bodyPr wrap="square" lIns="0" tIns="0" rIns="0" bIns="0" rtlCol="0" anchor="ctr"/>
           <a:lstStyle/>
           <a:p>
-            <a:pPr indent="0" marL="0">
+            <a:pPr marL="0" indent="0">
               <a:buNone/>
             </a:pPr>
             <a:r>
@@ -8905,13 +8995,20 @@
             <a:prstDash val="solid"/>
           </a:ln>
           <a:effectLst>
-            <a:outerShdw sx="100000" sy="100000" kx="0" ky="0" algn="bl" rotWithShape="0" blurRad="152400" dist="38100" dir="5400000">
+            <a:outerShdw blurRad="152400" dist="38100" dir="5400000" algn="bl" rotWithShape="0">
               <a:srgbClr val="0B2027">
                 <a:alpha val="16000"/>
               </a:srgbClr>
             </a:outerShdw>
           </a:effectLst>
         </p:spPr>
+        <p:txBody>
+          <a:bodyPr/>
+          <a:lstStyle/>
+          <a:p>
+            <a:endParaRPr lang="en-US"/>
+          </a:p>
+        </p:txBody>
       </p:sp>
       <p:sp>
         <p:nvSpPr>
@@ -8939,6 +9036,13 @@
             <a:prstDash val="solid"/>
           </a:ln>
         </p:spPr>
+        <p:txBody>
+          <a:bodyPr/>
+          <a:lstStyle/>
+          <a:p>
+            <a:endParaRPr lang="en-US"/>
+          </a:p>
+        </p:txBody>
       </p:sp>
       <p:sp>
         <p:nvSpPr>
@@ -8961,7 +9065,7 @@
           <a:bodyPr wrap="square" lIns="0" tIns="0" rIns="0" bIns="0" rtlCol="0" anchor="ctr"/>
           <a:lstStyle/>
           <a:p>
-            <a:pPr algn="ctr" indent="0" marL="0">
+            <a:pPr marL="0" indent="0" algn="ctr">
               <a:buNone/>
             </a:pPr>
             <a:r>
@@ -9000,7 +9104,7 @@
           <a:bodyPr wrap="square" lIns="0" tIns="0" rIns="0" bIns="0" rtlCol="0" anchor="ctr"/>
           <a:lstStyle/>
           <a:p>
-            <a:pPr indent="0" marL="0">
+            <a:pPr marL="0" indent="0">
               <a:buNone/>
             </a:pPr>
             <a:r>
@@ -9039,7 +9143,7 @@
           <a:bodyPr wrap="square" lIns="0" tIns="0" rIns="0" bIns="0" rtlCol="0" anchor="ctr"/>
           <a:lstStyle/>
           <a:p>
-            <a:pPr indent="0" marL="0">
+            <a:pPr marL="0" indent="0">
               <a:buNone/>
             </a:pPr>
             <a:r>
@@ -9083,13 +9187,20 @@
             <a:prstDash val="solid"/>
           </a:ln>
           <a:effectLst>
-            <a:outerShdw sx="100000" sy="100000" kx="0" ky="0" algn="bl" rotWithShape="0" blurRad="152400" dist="38100" dir="5400000">
+            <a:outerShdw blurRad="152400" dist="38100" dir="5400000" algn="bl" rotWithShape="0">
               <a:srgbClr val="0B2027">
                 <a:alpha val="16000"/>
               </a:srgbClr>
             </a:outerShdw>
           </a:effectLst>
         </p:spPr>
+        <p:txBody>
+          <a:bodyPr/>
+          <a:lstStyle/>
+          <a:p>
+            <a:endParaRPr lang="en-US"/>
+          </a:p>
+        </p:txBody>
       </p:sp>
       <p:sp>
         <p:nvSpPr>
@@ -9117,6 +9228,13 @@
             <a:prstDash val="solid"/>
           </a:ln>
         </p:spPr>
+        <p:txBody>
+          <a:bodyPr/>
+          <a:lstStyle/>
+          <a:p>
+            <a:endParaRPr lang="en-US"/>
+          </a:p>
+        </p:txBody>
       </p:sp>
       <p:sp>
         <p:nvSpPr>
@@ -9139,7 +9257,7 @@
           <a:bodyPr wrap="square" lIns="0" tIns="0" rIns="0" bIns="0" rtlCol="0" anchor="ctr"/>
           <a:lstStyle/>
           <a:p>
-            <a:pPr algn="ctr" indent="0" marL="0">
+            <a:pPr marL="0" indent="0" algn="ctr">
               <a:buNone/>
             </a:pPr>
             <a:r>
@@ -9178,7 +9296,7 @@
           <a:bodyPr wrap="square" lIns="0" tIns="0" rIns="0" bIns="0" rtlCol="0" anchor="ctr"/>
           <a:lstStyle/>
           <a:p>
-            <a:pPr indent="0" marL="0">
+            <a:pPr marL="0" indent="0">
               <a:buNone/>
             </a:pPr>
             <a:r>
@@ -9217,7 +9335,7 @@
           <a:bodyPr wrap="square" lIns="0" tIns="0" rIns="0" bIns="0" rtlCol="0" anchor="ctr"/>
           <a:lstStyle/>
           <a:p>
-            <a:pPr indent="0" marL="0">
+            <a:pPr marL="0" indent="0">
               <a:buNone/>
             </a:pPr>
             <a:r>
@@ -9256,7 +9374,7 @@
           <a:bodyPr wrap="square" lIns="0" tIns="0" rIns="0" bIns="0" rtlCol="0" anchor="ctr"/>
           <a:lstStyle/>
           <a:p>
-            <a:pPr indent="0" marL="0">
+            <a:pPr marL="0" indent="0">
               <a:buNone/>
             </a:pPr>
             <a:r>
@@ -9290,6 +9408,7 @@
         <a:solidFill>
           <a:srgbClr val="FFFFFF"/>
         </a:solidFill>
+        <a:effectLst/>
       </p:bgPr>
     </p:bg>
     <p:spTree>
@@ -9327,11 +9446,11 @@
           <a:bodyPr wrap="square" lIns="0" tIns="0" rIns="0" bIns="0" rtlCol="0" anchor="ctr"/>
           <a:lstStyle/>
           <a:p>
-            <a:pPr indent="0" marL="0">
-              <a:buNone/>
-            </a:pPr>
-            <a:r>
-              <a:rPr lang="en-US" sz="1200" b="1" spc="200" kern="0" dirty="0">
+            <a:pPr marL="0" indent="0">
+              <a:buNone/>
+            </a:pPr>
+            <a:r>
+              <a:rPr lang="en-US" sz="1200" b="1" kern="0" spc="200" dirty="0">
                 <a:solidFill>
                   <a:srgbClr val="028090"/>
                 </a:solidFill>
@@ -9366,7 +9485,7 @@
           <a:bodyPr wrap="square" lIns="0" tIns="0" rIns="0" bIns="0" rtlCol="0" anchor="ctr"/>
           <a:lstStyle/>
           <a:p>
-            <a:pPr indent="0" marL="0">
+            <a:pPr marL="0" indent="0">
               <a:buNone/>
             </a:pPr>
             <a:r>
@@ -9386,7 +9505,7 @@
       </p:sp>
       <p:graphicFrame>
         <p:nvGraphicFramePr>
-          <p:cNvPr id="4" name="Chart 0" descr=""/>
+          <p:cNvPr id="4" name="Chart 0"/>
           <p:cNvGraphicFramePr/>
           <p:nvPr/>
         </p:nvGraphicFramePr>
@@ -9394,9 +9513,9 @@
           <a:off x="566928" y="1572768"/>
           <a:ext cx="7452360" cy="4224528"/>
         </p:xfrm>
-        <a:graphic xmlns:a="http://schemas.openxmlformats.org/drawingml/2006/main">
+        <a:graphic>
           <a:graphicData uri="http://schemas.openxmlformats.org/drawingml/2006/chart">
-            <c:chart xmlns:c="http://schemas.openxmlformats.org/drawingml/2006/chart" r:id="rId1"/>
+            <c:chart xmlns:c="http://schemas.openxmlformats.org/drawingml/2006/chart" xmlns:r="http://schemas.openxmlformats.org/officeDocument/2006/relationships" r:id="rId3"/>
           </a:graphicData>
         </a:graphic>
       </p:graphicFrame>
@@ -9426,13 +9545,20 @@
             <a:prstDash val="solid"/>
           </a:ln>
           <a:effectLst>
-            <a:outerShdw sx="100000" sy="100000" kx="0" ky="0" algn="bl" rotWithShape="0" blurRad="152400" dist="38100" dir="5400000">
+            <a:outerShdw blurRad="152400" dist="38100" dir="5400000" algn="bl" rotWithShape="0">
               <a:srgbClr val="0B2027">
                 <a:alpha val="16000"/>
               </a:srgbClr>
             </a:outerShdw>
           </a:effectLst>
         </p:spPr>
+        <p:txBody>
+          <a:bodyPr/>
+          <a:lstStyle/>
+          <a:p>
+            <a:endParaRPr lang="en-US"/>
+          </a:p>
+        </p:txBody>
       </p:sp>
       <p:sp>
         <p:nvSpPr>
@@ -9455,7 +9581,7 @@
           <a:bodyPr wrap="square" lIns="0" tIns="0" rIns="0" bIns="0" rtlCol="0" anchor="ctr"/>
           <a:lstStyle/>
           <a:p>
-            <a:pPr indent="0" marL="0">
+            <a:pPr marL="0" indent="0">
               <a:buNone/>
             </a:pPr>
             <a:r>
@@ -9494,7 +9620,7 @@
           <a:bodyPr wrap="square" lIns="0" tIns="0" rIns="0" bIns="0" rtlCol="0" anchor="ctr"/>
           <a:lstStyle/>
           <a:p>
-            <a:pPr indent="0" marL="0">
+            <a:pPr marL="0" indent="0">
               <a:buNone/>
             </a:pPr>
             <a:r>
@@ -9533,7 +9659,7 @@
           <a:bodyPr wrap="square" lIns="0" tIns="0" rIns="0" bIns="0" rtlCol="0" anchor="ctr"/>
           <a:lstStyle/>
           <a:p>
-            <a:pPr indent="0" marL="0">
+            <a:pPr marL="0" indent="0">
               <a:lnSpc>
                 <a:spcPts val="1300"/>
               </a:lnSpc>
@@ -9580,13 +9706,20 @@
             <a:prstDash val="solid"/>
           </a:ln>
           <a:effectLst>
-            <a:outerShdw sx="100000" sy="100000" kx="0" ky="0" algn="bl" rotWithShape="0" blurRad="152400" dist="38100" dir="5400000">
+            <a:outerShdw blurRad="152400" dist="38100" dir="5400000" algn="bl" rotWithShape="0">
               <a:srgbClr val="0B2027">
                 <a:alpha val="16000"/>
               </a:srgbClr>
             </a:outerShdw>
           </a:effectLst>
         </p:spPr>
+        <p:txBody>
+          <a:bodyPr/>
+          <a:lstStyle/>
+          <a:p>
+            <a:endParaRPr lang="en-US"/>
+          </a:p>
+        </p:txBody>
       </p:sp>
       <p:sp>
         <p:nvSpPr>
@@ -9609,7 +9742,7 @@
           <a:bodyPr wrap="square" lIns="0" tIns="0" rIns="0" bIns="0" rtlCol="0" anchor="ctr"/>
           <a:lstStyle/>
           <a:p>
-            <a:pPr indent="0" marL="0">
+            <a:pPr marL="0" indent="0">
               <a:buNone/>
             </a:pPr>
             <a:r>
@@ -9648,7 +9781,7 @@
           <a:bodyPr wrap="square" lIns="0" tIns="0" rIns="0" bIns="0" rtlCol="0" anchor="ctr"/>
           <a:lstStyle/>
           <a:p>
-            <a:pPr indent="0" marL="0">
+            <a:pPr marL="0" indent="0">
               <a:buNone/>
             </a:pPr>
             <a:r>
@@ -9687,7 +9820,7 @@
           <a:bodyPr wrap="square" lIns="0" tIns="0" rIns="0" bIns="0" rtlCol="0" anchor="ctr"/>
           <a:lstStyle/>
           <a:p>
-            <a:pPr indent="0" marL="0">
+            <a:pPr marL="0" indent="0">
               <a:lnSpc>
                 <a:spcPts val="1300"/>
               </a:lnSpc>
@@ -9734,13 +9867,20 @@
             <a:prstDash val="solid"/>
           </a:ln>
           <a:effectLst>
-            <a:outerShdw sx="100000" sy="100000" kx="0" ky="0" algn="bl" rotWithShape="0" blurRad="152400" dist="38100" dir="5400000">
+            <a:outerShdw blurRad="152400" dist="38100" dir="5400000" algn="bl" rotWithShape="0">
               <a:srgbClr val="0B2027">
                 <a:alpha val="16000"/>
               </a:srgbClr>
             </a:outerShdw>
           </a:effectLst>
         </p:spPr>
+        <p:txBody>
+          <a:bodyPr/>
+          <a:lstStyle/>
+          <a:p>
+            <a:endParaRPr lang="en-US"/>
+          </a:p>
+        </p:txBody>
       </p:sp>
       <p:sp>
         <p:nvSpPr>
@@ -9763,7 +9903,7 @@
           <a:bodyPr wrap="square" lIns="0" tIns="0" rIns="0" bIns="0" rtlCol="0" anchor="ctr"/>
           <a:lstStyle/>
           <a:p>
-            <a:pPr indent="0" marL="0">
+            <a:pPr marL="0" indent="0">
               <a:buNone/>
             </a:pPr>
             <a:r>
@@ -9802,7 +9942,7 @@
           <a:bodyPr wrap="square" lIns="0" tIns="0" rIns="0" bIns="0" rtlCol="0" anchor="ctr"/>
           <a:lstStyle/>
           <a:p>
-            <a:pPr indent="0" marL="0">
+            <a:pPr marL="0" indent="0">
               <a:buNone/>
             </a:pPr>
             <a:r>
@@ -9841,7 +9981,7 @@
           <a:bodyPr wrap="square" lIns="0" tIns="0" rIns="0" bIns="0" rtlCol="0" anchor="ctr"/>
           <a:lstStyle/>
           <a:p>
-            <a:pPr indent="0" marL="0">
+            <a:pPr marL="0" indent="0">
               <a:lnSpc>
                 <a:spcPts val="1300"/>
               </a:lnSpc>
@@ -9883,7 +10023,7 @@
           <a:bodyPr wrap="square" lIns="0" tIns="0" rIns="0" bIns="0" rtlCol="0" anchor="ctr"/>
           <a:lstStyle/>
           <a:p>
-            <a:pPr indent="0" marL="0">
+            <a:pPr marL="0" indent="0">
               <a:buNone/>
             </a:pPr>
             <a:r>
@@ -9917,6 +10057,7 @@
         <a:solidFill>
           <a:srgbClr val="FFFFFF"/>
         </a:solidFill>
+        <a:effectLst/>
       </p:bgPr>
     </p:bg>
     <p:spTree>
@@ -9954,11 +10095,11 @@
           <a:bodyPr wrap="square" lIns="0" tIns="0" rIns="0" bIns="0" rtlCol="0" anchor="ctr"/>
           <a:lstStyle/>
           <a:p>
-            <a:pPr indent="0" marL="0">
-              <a:buNone/>
-            </a:pPr>
-            <a:r>
-              <a:rPr lang="en-US" sz="1200" b="1" spc="200" kern="0" dirty="0">
+            <a:pPr marL="0" indent="0">
+              <a:buNone/>
+            </a:pPr>
+            <a:r>
+              <a:rPr lang="en-US" sz="1200" b="1" kern="0" spc="200" dirty="0">
                 <a:solidFill>
                   <a:srgbClr val="028090"/>
                 </a:solidFill>
@@ -9993,7 +10134,7 @@
           <a:bodyPr wrap="square" lIns="0" tIns="0" rIns="0" bIns="0" rtlCol="0" anchor="ctr"/>
           <a:lstStyle/>
           <a:p>
-            <a:pPr indent="0" marL="0">
+            <a:pPr marL="0" indent="0">
               <a:buNone/>
             </a:pPr>
             <a:r>
@@ -10037,13 +10178,20 @@
             <a:prstDash val="solid"/>
           </a:ln>
           <a:effectLst>
-            <a:outerShdw sx="100000" sy="100000" kx="0" ky="0" algn="bl" rotWithShape="0" blurRad="152400" dist="38100" dir="5400000">
+            <a:outerShdw blurRad="152400" dist="38100" dir="5400000" algn="bl" rotWithShape="0">
               <a:srgbClr val="0B2027">
                 <a:alpha val="16000"/>
               </a:srgbClr>
             </a:outerShdw>
           </a:effectLst>
         </p:spPr>
+        <p:txBody>
+          <a:bodyPr/>
+          <a:lstStyle/>
+          <a:p>
+            <a:endParaRPr lang="en-US"/>
+          </a:p>
+        </p:txBody>
       </p:sp>
       <p:sp>
         <p:nvSpPr>
@@ -10071,6 +10219,13 @@
             <a:prstDash val="solid"/>
           </a:ln>
         </p:spPr>
+        <p:txBody>
+          <a:bodyPr/>
+          <a:lstStyle/>
+          <a:p>
+            <a:endParaRPr lang="en-US"/>
+          </a:p>
+        </p:txBody>
       </p:sp>
       <p:sp>
         <p:nvSpPr>
@@ -10093,7 +10248,7 @@
           <a:bodyPr wrap="square" lIns="0" tIns="0" rIns="0" bIns="0" rtlCol="0" anchor="ctr"/>
           <a:lstStyle/>
           <a:p>
-            <a:pPr algn="ctr" indent="0" marL="0">
+            <a:pPr marL="0" indent="0" algn="ctr">
               <a:buNone/>
             </a:pPr>
             <a:r>
@@ -10132,7 +10287,7 @@
           <a:bodyPr wrap="square" lIns="0" tIns="0" rIns="0" bIns="0" rtlCol="0" anchor="ctr"/>
           <a:lstStyle/>
           <a:p>
-            <a:pPr indent="0" marL="0">
+            <a:pPr marL="0" indent="0">
               <a:buNone/>
             </a:pPr>
             <a:r>
@@ -10171,7 +10326,7 @@
           <a:bodyPr wrap="square" lIns="0" tIns="0" rIns="0" bIns="0" rtlCol="0" anchor="ctr"/>
           <a:lstStyle/>
           <a:p>
-            <a:pPr indent="0" marL="0">
+            <a:pPr marL="0" indent="0">
               <a:lnSpc>
                 <a:spcPts val="1500"/>
               </a:lnSpc>
@@ -10218,13 +10373,20 @@
             <a:prstDash val="solid"/>
           </a:ln>
           <a:effectLst>
-            <a:outerShdw sx="100000" sy="100000" kx="0" ky="0" algn="bl" rotWithShape="0" blurRad="152400" dist="38100" dir="5400000">
+            <a:outerShdw blurRad="152400" dist="38100" dir="5400000" algn="bl" rotWithShape="0">
               <a:srgbClr val="0B2027">
                 <a:alpha val="16000"/>
               </a:srgbClr>
             </a:outerShdw>
           </a:effectLst>
         </p:spPr>
+        <p:txBody>
+          <a:bodyPr/>
+          <a:lstStyle/>
+          <a:p>
+            <a:endParaRPr lang="en-US"/>
+          </a:p>
+        </p:txBody>
       </p:sp>
       <p:sp>
         <p:nvSpPr>
@@ -10252,6 +10414,13 @@
             <a:prstDash val="solid"/>
           </a:ln>
         </p:spPr>
+        <p:txBody>
+          <a:bodyPr/>
+          <a:lstStyle/>
+          <a:p>
+            <a:endParaRPr lang="en-US"/>
+          </a:p>
+        </p:txBody>
       </p:sp>
       <p:sp>
         <p:nvSpPr>
@@ -10274,7 +10443,7 @@
           <a:bodyPr wrap="square" lIns="0" tIns="0" rIns="0" bIns="0" rtlCol="0" anchor="ctr"/>
           <a:lstStyle/>
           <a:p>
-            <a:pPr algn="ctr" indent="0" marL="0">
+            <a:pPr marL="0" indent="0" algn="ctr">
               <a:buNone/>
             </a:pPr>
             <a:r>
@@ -10313,7 +10482,7 @@
           <a:bodyPr wrap="square" lIns="0" tIns="0" rIns="0" bIns="0" rtlCol="0" anchor="ctr"/>
           <a:lstStyle/>
           <a:p>
-            <a:pPr indent="0" marL="0">
+            <a:pPr marL="0" indent="0">
               <a:buNone/>
             </a:pPr>
             <a:r>
@@ -10352,7 +10521,7 @@
           <a:bodyPr wrap="square" lIns="0" tIns="0" rIns="0" bIns="0" rtlCol="0" anchor="ctr"/>
           <a:lstStyle/>
           <a:p>
-            <a:pPr indent="0" marL="0">
+            <a:pPr marL="0" indent="0">
               <a:lnSpc>
                 <a:spcPts val="1500"/>
               </a:lnSpc>
@@ -10399,13 +10568,20 @@
             <a:prstDash val="solid"/>
           </a:ln>
           <a:effectLst>
-            <a:outerShdw sx="100000" sy="100000" kx="0" ky="0" algn="bl" rotWithShape="0" blurRad="152400" dist="38100" dir="5400000">
+            <a:outerShdw blurRad="152400" dist="38100" dir="5400000" algn="bl" rotWithShape="0">
               <a:srgbClr val="0B2027">
                 <a:alpha val="16000"/>
               </a:srgbClr>
             </a:outerShdw>
           </a:effectLst>
         </p:spPr>
+        <p:txBody>
+          <a:bodyPr/>
+          <a:lstStyle/>
+          <a:p>
+            <a:endParaRPr lang="en-US"/>
+          </a:p>
+        </p:txBody>
       </p:sp>
       <p:sp>
         <p:nvSpPr>
@@ -10433,6 +10609,13 @@
             <a:prstDash val="solid"/>
           </a:ln>
         </p:spPr>
+        <p:txBody>
+          <a:bodyPr/>
+          <a:lstStyle/>
+          <a:p>
+            <a:endParaRPr lang="en-US"/>
+          </a:p>
+        </p:txBody>
       </p:sp>
       <p:sp>
         <p:nvSpPr>
@@ -10455,7 +10638,7 @@
           <a:bodyPr wrap="square" lIns="0" tIns="0" rIns="0" bIns="0" rtlCol="0" anchor="ctr"/>
           <a:lstStyle/>
           <a:p>
-            <a:pPr algn="ctr" indent="0" marL="0">
+            <a:pPr marL="0" indent="0" algn="ctr">
               <a:buNone/>
             </a:pPr>
             <a:r>
@@ -10494,7 +10677,7 @@
           <a:bodyPr wrap="square" lIns="0" tIns="0" rIns="0" bIns="0" rtlCol="0" anchor="ctr"/>
           <a:lstStyle/>
           <a:p>
-            <a:pPr indent="0" marL="0">
+            <a:pPr marL="0" indent="0">
               <a:buNone/>
             </a:pPr>
             <a:r>
@@ -10533,7 +10716,7 @@
           <a:bodyPr wrap="square" lIns="0" tIns="0" rIns="0" bIns="0" rtlCol="0" anchor="ctr"/>
           <a:lstStyle/>
           <a:p>
-            <a:pPr indent="0" marL="0">
+            <a:pPr marL="0" indent="0">
               <a:lnSpc>
                 <a:spcPts val="1500"/>
               </a:lnSpc>
@@ -10580,13 +10763,20 @@
             <a:prstDash val="solid"/>
           </a:ln>
           <a:effectLst>
-            <a:outerShdw sx="100000" sy="100000" kx="0" ky="0" algn="bl" rotWithShape="0" blurRad="152400" dist="38100" dir="5400000">
+            <a:outerShdw blurRad="152400" dist="38100" dir="5400000" algn="bl" rotWithShape="0">
               <a:srgbClr val="0B2027">
                 <a:alpha val="16000"/>
               </a:srgbClr>
             </a:outerShdw>
           </a:effectLst>
         </p:spPr>
+        <p:txBody>
+          <a:bodyPr/>
+          <a:lstStyle/>
+          <a:p>
+            <a:endParaRPr lang="en-US"/>
+          </a:p>
+        </p:txBody>
       </p:sp>
       <p:sp>
         <p:nvSpPr>
@@ -10614,6 +10804,13 @@
             <a:prstDash val="solid"/>
           </a:ln>
         </p:spPr>
+        <p:txBody>
+          <a:bodyPr/>
+          <a:lstStyle/>
+          <a:p>
+            <a:endParaRPr lang="en-US"/>
+          </a:p>
+        </p:txBody>
       </p:sp>
       <p:sp>
         <p:nvSpPr>
@@ -10636,7 +10833,7 @@
           <a:bodyPr wrap="square" lIns="0" tIns="0" rIns="0" bIns="0" rtlCol="0" anchor="ctr"/>
           <a:lstStyle/>
           <a:p>
-            <a:pPr algn="ctr" indent="0" marL="0">
+            <a:pPr marL="0" indent="0" algn="ctr">
               <a:buNone/>
             </a:pPr>
             <a:r>
@@ -10675,7 +10872,7 @@
           <a:bodyPr wrap="square" lIns="0" tIns="0" rIns="0" bIns="0" rtlCol="0" anchor="ctr"/>
           <a:lstStyle/>
           <a:p>
-            <a:pPr indent="0" marL="0">
+            <a:pPr marL="0" indent="0">
               <a:buNone/>
             </a:pPr>
             <a:r>
@@ -10714,7 +10911,7 @@
           <a:bodyPr wrap="square" lIns="0" tIns="0" rIns="0" bIns="0" rtlCol="0" anchor="ctr"/>
           <a:lstStyle/>
           <a:p>
-            <a:pPr indent="0" marL="0">
+            <a:pPr marL="0" indent="0">
               <a:lnSpc>
                 <a:spcPts val="1500"/>
               </a:lnSpc>
@@ -10756,7 +10953,7 @@
           <a:bodyPr wrap="square" lIns="0" tIns="0" rIns="0" bIns="0" rtlCol="0" anchor="ctr"/>
           <a:lstStyle/>
           <a:p>
-            <a:pPr indent="0" marL="0">
+            <a:pPr marL="0" indent="0">
               <a:buNone/>
             </a:pPr>
             <a:r>
@@ -10790,6 +10987,7 @@
         <a:solidFill>
           <a:srgbClr val="0B2027"/>
         </a:solidFill>
+        <a:effectLst/>
       </p:bgPr>
     </p:bg>
     <p:spTree>
@@ -10827,11 +11025,11 @@
           <a:bodyPr wrap="square" lIns="0" tIns="0" rIns="0" bIns="0" rtlCol="0" anchor="ctr"/>
           <a:lstStyle/>
           <a:p>
-            <a:pPr indent="0" marL="0">
-              <a:buNone/>
-            </a:pPr>
-            <a:r>
-              <a:rPr lang="en-US" sz="1200" b="1" spc="200" kern="0" dirty="0">
+            <a:pPr marL="0" indent="0">
+              <a:buNone/>
+            </a:pPr>
+            <a:r>
+              <a:rPr lang="en-US" sz="1200" b="1" kern="0" spc="200" dirty="0">
                 <a:solidFill>
                   <a:srgbClr val="02C39A"/>
                 </a:solidFill>
@@ -10866,7 +11064,7 @@
           <a:bodyPr wrap="square" lIns="0" tIns="0" rIns="0" bIns="0" rtlCol="0" anchor="ctr"/>
           <a:lstStyle/>
           <a:p>
-            <a:pPr indent="0" marL="0">
+            <a:pPr marL="0" indent="0">
               <a:buNone/>
             </a:pPr>
             <a:r>
@@ -10905,7 +11103,7 @@
           <a:bodyPr wrap="square" lIns="0" tIns="0" rIns="0" bIns="0" rtlCol="0" anchor="ctr"/>
           <a:lstStyle/>
           <a:p>
-            <a:pPr indent="0" marL="0">
+            <a:pPr marL="0" indent="0">
               <a:buNone/>
             </a:pPr>
             <a:r>
@@ -10949,6 +11147,13 @@
             <a:prstDash val="solid"/>
           </a:ln>
         </p:spPr>
+        <p:txBody>
+          <a:bodyPr/>
+          <a:lstStyle/>
+          <a:p>
+            <a:endParaRPr lang="en-US"/>
+          </a:p>
+        </p:txBody>
       </p:sp>
       <p:sp>
         <p:nvSpPr>
@@ -10971,7 +11176,7 @@
           <a:bodyPr wrap="square" lIns="0" tIns="0" rIns="0" bIns="0" rtlCol="0" anchor="ctr"/>
           <a:lstStyle/>
           <a:p>
-            <a:pPr indent="0" marL="0">
+            <a:pPr marL="0" indent="0">
               <a:buNone/>
             </a:pPr>
             <a:r>
@@ -11010,7 +11215,7 @@
           <a:bodyPr wrap="square" lIns="0" tIns="0" rIns="0" bIns="0" rtlCol="0" anchor="ctr"/>
           <a:lstStyle/>
           <a:p>
-            <a:pPr indent="0" marL="0">
+            <a:pPr marL="0" indent="0">
               <a:buNone/>
             </a:pPr>
             <a:r>
@@ -11049,7 +11254,7 @@
           <a:bodyPr wrap="square" lIns="0" tIns="0" rIns="0" bIns="0" rtlCol="0" anchor="ctr"/>
           <a:lstStyle/>
           <a:p>
-            <a:pPr indent="0" marL="0">
+            <a:pPr marL="0" indent="0">
               <a:lnSpc>
                 <a:spcPts val="1500"/>
               </a:lnSpc>
@@ -11096,6 +11301,13 @@
             <a:prstDash val="solid"/>
           </a:ln>
         </p:spPr>
+        <p:txBody>
+          <a:bodyPr/>
+          <a:lstStyle/>
+          <a:p>
+            <a:endParaRPr lang="en-US"/>
+          </a:p>
+        </p:txBody>
       </p:sp>
       <p:sp>
         <p:nvSpPr>
@@ -11118,7 +11330,7 @@
           <a:bodyPr wrap="square" lIns="0" tIns="0" rIns="0" bIns="0" rtlCol="0" anchor="ctr"/>
           <a:lstStyle/>
           <a:p>
-            <a:pPr indent="0" marL="0">
+            <a:pPr marL="0" indent="0">
               <a:buNone/>
             </a:pPr>
             <a:r>
@@ -11157,7 +11369,7 @@
           <a:bodyPr wrap="square" lIns="0" tIns="0" rIns="0" bIns="0" rtlCol="0" anchor="ctr"/>
           <a:lstStyle/>
           <a:p>
-            <a:pPr indent="0" marL="0">
+            <a:pPr marL="0" indent="0">
               <a:buNone/>
             </a:pPr>
             <a:r>
@@ -11196,7 +11408,7 @@
           <a:bodyPr wrap="square" lIns="0" tIns="0" rIns="0" bIns="0" rtlCol="0" anchor="ctr"/>
           <a:lstStyle/>
           <a:p>
-            <a:pPr indent="0" marL="0">
+            <a:pPr marL="0" indent="0">
               <a:lnSpc>
                 <a:spcPts val="1500"/>
               </a:lnSpc>
@@ -11243,6 +11455,13 @@
             <a:prstDash val="solid"/>
           </a:ln>
         </p:spPr>
+        <p:txBody>
+          <a:bodyPr/>
+          <a:lstStyle/>
+          <a:p>
+            <a:endParaRPr lang="en-US"/>
+          </a:p>
+        </p:txBody>
       </p:sp>
       <p:sp>
         <p:nvSpPr>
@@ -11265,7 +11484,7 @@
           <a:bodyPr wrap="square" lIns="0" tIns="0" rIns="0" bIns="0" rtlCol="0" anchor="ctr"/>
           <a:lstStyle/>
           <a:p>
-            <a:pPr indent="0" marL="0">
+            <a:pPr marL="0" indent="0">
               <a:buNone/>
             </a:pPr>
             <a:r>
@@ -11304,7 +11523,7 @@
           <a:bodyPr wrap="square" lIns="0" tIns="0" rIns="0" bIns="0" rtlCol="0" anchor="ctr"/>
           <a:lstStyle/>
           <a:p>
-            <a:pPr indent="0" marL="0">
+            <a:pPr marL="0" indent="0">
               <a:buNone/>
             </a:pPr>
             <a:r>
@@ -11343,7 +11562,7 @@
           <a:bodyPr wrap="square" lIns="0" tIns="0" rIns="0" bIns="0" rtlCol="0" anchor="ctr"/>
           <a:lstStyle/>
           <a:p>
-            <a:pPr indent="0" marL="0">
+            <a:pPr marL="0" indent="0">
               <a:lnSpc>
                 <a:spcPts val="1500"/>
               </a:lnSpc>
@@ -11385,7 +11604,7 @@
           <a:bodyPr wrap="square" lIns="0" tIns="0" rIns="0" bIns="0" rtlCol="0" anchor="ctr"/>
           <a:lstStyle/>
           <a:p>
-            <a:pPr indent="0" marL="0">
+            <a:pPr marL="0" indent="0">
               <a:buNone/>
             </a:pPr>
             <a:r>
@@ -11424,7 +11643,7 @@
           <a:bodyPr wrap="square" lIns="0" tIns="0" rIns="0" bIns="0" rtlCol="0" anchor="ctr"/>
           <a:lstStyle/>
           <a:p>
-            <a:pPr indent="0" marL="0">
+            <a:pPr marL="0" indent="0">
               <a:buNone/>
             </a:pPr>
             <a:r>
@@ -11458,6 +11677,7 @@
         <a:solidFill>
           <a:srgbClr val="FFFFFF"/>
         </a:solidFill>
+        <a:effectLst/>
       </p:bgPr>
     </p:bg>
     <p:spTree>
@@ -11495,11 +11715,11 @@
           <a:bodyPr wrap="square" lIns="0" tIns="0" rIns="0" bIns="0" rtlCol="0" anchor="ctr"/>
           <a:lstStyle/>
           <a:p>
-            <a:pPr indent="0" marL="0">
-              <a:buNone/>
-            </a:pPr>
-            <a:r>
-              <a:rPr lang="en-US" sz="1200" b="1" spc="200" kern="0" dirty="0">
+            <a:pPr marL="0" indent="0">
+              <a:buNone/>
+            </a:pPr>
+            <a:r>
+              <a:rPr lang="en-US" sz="1200" b="1" kern="0" spc="200" dirty="0">
                 <a:solidFill>
                   <a:srgbClr val="028090"/>
                 </a:solidFill>
@@ -11534,7 +11754,7 @@
           <a:bodyPr wrap="square" lIns="0" tIns="0" rIns="0" bIns="0" rtlCol="0" anchor="ctr"/>
           <a:lstStyle/>
           <a:p>
-            <a:pPr indent="0" marL="0">
+            <a:pPr marL="0" indent="0">
               <a:buNone/>
             </a:pPr>
             <a:r>
@@ -11578,13 +11798,20 @@
             <a:prstDash val="solid"/>
           </a:ln>
           <a:effectLst>
-            <a:outerShdw sx="100000" sy="100000" kx="0" ky="0" algn="bl" rotWithShape="0" blurRad="152400" dist="38100" dir="5400000">
+            <a:outerShdw blurRad="152400" dist="38100" dir="5400000" algn="bl" rotWithShape="0">
               <a:srgbClr val="0B2027">
                 <a:alpha val="16000"/>
               </a:srgbClr>
             </a:outerShdw>
           </a:effectLst>
         </p:spPr>
+        <p:txBody>
+          <a:bodyPr/>
+          <a:lstStyle/>
+          <a:p>
+            <a:endParaRPr lang="en-US"/>
+          </a:p>
+        </p:txBody>
       </p:sp>
       <p:sp>
         <p:nvSpPr>
@@ -11607,7 +11834,7 @@
           <a:bodyPr wrap="square" lIns="0" tIns="0" rIns="0" bIns="0" rtlCol="0" anchor="ctr"/>
           <a:lstStyle/>
           <a:p>
-            <a:pPr indent="0" marL="0">
+            <a:pPr marL="0" indent="0">
               <a:buNone/>
             </a:pPr>
             <a:r>
@@ -11646,7 +11873,7 @@
           <a:bodyPr wrap="square" lIns="0" tIns="0" rIns="0" bIns="0" rtlCol="0" anchor="ctr"/>
           <a:lstStyle/>
           <a:p>
-            <a:pPr indent="0" marL="0">
+            <a:pPr marL="0" indent="0">
               <a:buNone/>
             </a:pPr>
             <a:r>
@@ -11685,7 +11912,7 @@
           <a:bodyPr wrap="square" lIns="0" tIns="0" rIns="0" bIns="0" rtlCol="0" anchor="ctr"/>
           <a:lstStyle/>
           <a:p>
-            <a:pPr indent="0" marL="0">
+            <a:pPr marL="0" indent="0">
               <a:buNone/>
             </a:pPr>
             <a:r>
@@ -11729,13 +11956,20 @@
             <a:prstDash val="solid"/>
           </a:ln>
           <a:effectLst>
-            <a:outerShdw sx="100000" sy="100000" kx="0" ky="0" algn="bl" rotWithShape="0" blurRad="152400" dist="38100" dir="5400000">
+            <a:outerShdw blurRad="152400" dist="38100" dir="5400000" algn="bl" rotWithShape="0">
               <a:srgbClr val="0B2027">
                 <a:alpha val="16000"/>
               </a:srgbClr>
             </a:outerShdw>
           </a:effectLst>
         </p:spPr>
+        <p:txBody>
+          <a:bodyPr/>
+          <a:lstStyle/>
+          <a:p>
+            <a:endParaRPr lang="en-US"/>
+          </a:p>
+        </p:txBody>
       </p:sp>
       <p:sp>
         <p:nvSpPr>
@@ -11758,7 +11992,7 @@
           <a:bodyPr wrap="square" lIns="0" tIns="0" rIns="0" bIns="0" rtlCol="0" anchor="ctr"/>
           <a:lstStyle/>
           <a:p>
-            <a:pPr indent="0" marL="0">
+            <a:pPr marL="0" indent="0">
               <a:buNone/>
             </a:pPr>
             <a:r>
@@ -11797,7 +12031,7 @@
           <a:bodyPr wrap="square" lIns="0" tIns="0" rIns="0" bIns="0" rtlCol="0" anchor="ctr"/>
           <a:lstStyle/>
           <a:p>
-            <a:pPr indent="0" marL="0">
+            <a:pPr marL="0" indent="0">
               <a:buNone/>
             </a:pPr>
             <a:r>
@@ -11836,7 +12070,7 @@
           <a:bodyPr wrap="square" lIns="0" tIns="0" rIns="0" bIns="0" rtlCol="0" anchor="ctr"/>
           <a:lstStyle/>
           <a:p>
-            <a:pPr indent="0" marL="0">
+            <a:pPr marL="0" indent="0">
               <a:buNone/>
             </a:pPr>
             <a:r>
@@ -11880,13 +12114,20 @@
             <a:prstDash val="solid"/>
           </a:ln>
           <a:effectLst>
-            <a:outerShdw sx="100000" sy="100000" kx="0" ky="0" algn="bl" rotWithShape="0" blurRad="152400" dist="38100" dir="5400000">
+            <a:outerShdw blurRad="152400" dist="38100" dir="5400000" algn="bl" rotWithShape="0">
               <a:srgbClr val="0B2027">
                 <a:alpha val="16000"/>
               </a:srgbClr>
             </a:outerShdw>
           </a:effectLst>
         </p:spPr>
+        <p:txBody>
+          <a:bodyPr/>
+          <a:lstStyle/>
+          <a:p>
+            <a:endParaRPr lang="en-US"/>
+          </a:p>
+        </p:txBody>
       </p:sp>
       <p:sp>
         <p:nvSpPr>
@@ -11909,7 +12150,7 @@
           <a:bodyPr wrap="square" lIns="0" tIns="0" rIns="0" bIns="0" rtlCol="0" anchor="ctr"/>
           <a:lstStyle/>
           <a:p>
-            <a:pPr indent="0" marL="0">
+            <a:pPr marL="0" indent="0">
               <a:buNone/>
             </a:pPr>
             <a:r>
@@ -11948,7 +12189,7 @@
           <a:bodyPr wrap="square" lIns="0" tIns="0" rIns="0" bIns="0" rtlCol="0" anchor="ctr"/>
           <a:lstStyle/>
           <a:p>
-            <a:pPr indent="0" marL="0">
+            <a:pPr marL="0" indent="0">
               <a:buNone/>
             </a:pPr>
             <a:r>
@@ -11987,7 +12228,7 @@
           <a:bodyPr wrap="square" lIns="0" tIns="0" rIns="0" bIns="0" rtlCol="0" anchor="ctr"/>
           <a:lstStyle/>
           <a:p>
-            <a:pPr indent="0" marL="0">
+            <a:pPr marL="0" indent="0">
               <a:buNone/>
             </a:pPr>
             <a:r>
@@ -12031,13 +12272,20 @@
             <a:prstDash val="solid"/>
           </a:ln>
           <a:effectLst>
-            <a:outerShdw sx="100000" sy="100000" kx="0" ky="0" algn="bl" rotWithShape="0" blurRad="152400" dist="38100" dir="5400000">
+            <a:outerShdw blurRad="152400" dist="38100" dir="5400000" algn="bl" rotWithShape="0">
               <a:srgbClr val="0B2027">
                 <a:alpha val="16000"/>
               </a:srgbClr>
             </a:outerShdw>
           </a:effectLst>
         </p:spPr>
+        <p:txBody>
+          <a:bodyPr/>
+          <a:lstStyle/>
+          <a:p>
+            <a:endParaRPr lang="en-US"/>
+          </a:p>
+        </p:txBody>
       </p:sp>
       <p:sp>
         <p:nvSpPr>
@@ -12060,7 +12308,7 @@
           <a:bodyPr wrap="square" lIns="0" tIns="0" rIns="0" bIns="0" rtlCol="0" anchor="ctr"/>
           <a:lstStyle/>
           <a:p>
-            <a:pPr indent="0" marL="0">
+            <a:pPr marL="0" indent="0">
               <a:buNone/>
             </a:pPr>
             <a:r>
@@ -12099,7 +12347,7 @@
           <a:bodyPr wrap="square" lIns="0" tIns="0" rIns="0" bIns="0" rtlCol="0" anchor="ctr"/>
           <a:lstStyle/>
           <a:p>
-            <a:pPr indent="0" marL="0">
+            <a:pPr marL="0" indent="0">
               <a:buNone/>
             </a:pPr>
             <a:r>
@@ -12138,7 +12386,7 @@
           <a:bodyPr wrap="square" lIns="0" tIns="0" rIns="0" bIns="0" rtlCol="0" anchor="ctr"/>
           <a:lstStyle/>
           <a:p>
-            <a:pPr indent="0" marL="0">
+            <a:pPr marL="0" indent="0">
               <a:buNone/>
             </a:pPr>
             <a:r>
@@ -12177,7 +12425,7 @@
           <a:bodyPr wrap="square" lIns="0" tIns="0" rIns="0" bIns="0" rtlCol="0" anchor="ctr"/>
           <a:lstStyle/>
           <a:p>
-            <a:pPr indent="0" marL="0">
+            <a:pPr marL="0" indent="0">
               <a:buNone/>
             </a:pPr>
             <a:r>
@@ -12216,7 +12464,7 @@
           <a:bodyPr wrap="square" lIns="0" tIns="0" rIns="0" bIns="0" rtlCol="0" anchor="ctr"/>
           <a:lstStyle/>
           <a:p>
-            <a:pPr indent="0" marL="0">
+            <a:pPr marL="0" indent="0">
               <a:buNone/>
             </a:pPr>
             <a:r>
@@ -12260,6 +12508,13 @@
             <a:prstDash val="solid"/>
           </a:ln>
         </p:spPr>
+        <p:txBody>
+          <a:bodyPr/>
+          <a:lstStyle/>
+          <a:p>
+            <a:endParaRPr lang="en-US"/>
+          </a:p>
+        </p:txBody>
       </p:sp>
       <p:sp>
         <p:nvSpPr>
@@ -12287,6 +12542,13 @@
             <a:prstDash val="solid"/>
           </a:ln>
         </p:spPr>
+        <p:txBody>
+          <a:bodyPr/>
+          <a:lstStyle/>
+          <a:p>
+            <a:endParaRPr lang="en-US"/>
+          </a:p>
+        </p:txBody>
       </p:sp>
       <p:sp>
         <p:nvSpPr>
@@ -12309,7 +12571,7 @@
           <a:bodyPr wrap="square" lIns="0" tIns="0" rIns="0" bIns="0" rtlCol="0" anchor="ctr"/>
           <a:lstStyle/>
           <a:p>
-            <a:pPr indent="0" marL="0">
+            <a:pPr marL="0" indent="0">
               <a:buNone/>
             </a:pPr>
             <a:r>
@@ -12348,7 +12610,7 @@
           <a:bodyPr wrap="square" lIns="0" tIns="0" rIns="0" bIns="0" rtlCol="0" anchor="ctr"/>
           <a:lstStyle/>
           <a:p>
-            <a:pPr indent="0" marL="0">
+            <a:pPr marL="0" indent="0">
               <a:buNone/>
             </a:pPr>
             <a:r>
@@ -12387,7 +12649,7 @@
           <a:bodyPr wrap="square" lIns="0" tIns="0" rIns="0" bIns="0" rtlCol="0" anchor="ctr"/>
           <a:lstStyle/>
           <a:p>
-            <a:pPr indent="0" marL="0">
+            <a:pPr marL="0" indent="0">
               <a:buNone/>
             </a:pPr>
             <a:r>
@@ -12431,6 +12693,13 @@
             <a:prstDash val="solid"/>
           </a:ln>
         </p:spPr>
+        <p:txBody>
+          <a:bodyPr/>
+          <a:lstStyle/>
+          <a:p>
+            <a:endParaRPr lang="en-US"/>
+          </a:p>
+        </p:txBody>
       </p:sp>
       <p:sp>
         <p:nvSpPr>
@@ -12458,6 +12727,13 @@
             <a:prstDash val="solid"/>
           </a:ln>
         </p:spPr>
+        <p:txBody>
+          <a:bodyPr/>
+          <a:lstStyle/>
+          <a:p>
+            <a:endParaRPr lang="en-US"/>
+          </a:p>
+        </p:txBody>
       </p:sp>
       <p:sp>
         <p:nvSpPr>
@@ -12480,7 +12756,7 @@
           <a:bodyPr wrap="square" lIns="0" tIns="0" rIns="0" bIns="0" rtlCol="0" anchor="ctr"/>
           <a:lstStyle/>
           <a:p>
-            <a:pPr indent="0" marL="0">
+            <a:pPr marL="0" indent="0">
               <a:buNone/>
             </a:pPr>
             <a:r>
@@ -12519,7 +12795,7 @@
           <a:bodyPr wrap="square" lIns="0" tIns="0" rIns="0" bIns="0" rtlCol="0" anchor="ctr"/>
           <a:lstStyle/>
           <a:p>
-            <a:pPr indent="0" marL="0">
+            <a:pPr marL="0" indent="0">
               <a:buNone/>
             </a:pPr>
             <a:r>
@@ -12558,7 +12834,7 @@
           <a:bodyPr wrap="square" lIns="0" tIns="0" rIns="0" bIns="0" rtlCol="0" anchor="ctr"/>
           <a:lstStyle/>
           <a:p>
-            <a:pPr indent="0" marL="0">
+            <a:pPr marL="0" indent="0">
               <a:buNone/>
             </a:pPr>
             <a:r>
@@ -12602,6 +12878,13 @@
             <a:prstDash val="solid"/>
           </a:ln>
         </p:spPr>
+        <p:txBody>
+          <a:bodyPr/>
+          <a:lstStyle/>
+          <a:p>
+            <a:endParaRPr lang="en-US"/>
+          </a:p>
+        </p:txBody>
       </p:sp>
       <p:sp>
         <p:nvSpPr>
@@ -12629,6 +12912,13 @@
             <a:prstDash val="solid"/>
           </a:ln>
         </p:spPr>
+        <p:txBody>
+          <a:bodyPr/>
+          <a:lstStyle/>
+          <a:p>
+            <a:endParaRPr lang="en-US"/>
+          </a:p>
+        </p:txBody>
       </p:sp>
       <p:sp>
         <p:nvSpPr>
@@ -12651,7 +12941,7 @@
           <a:bodyPr wrap="square" lIns="0" tIns="0" rIns="0" bIns="0" rtlCol="0" anchor="ctr"/>
           <a:lstStyle/>
           <a:p>
-            <a:pPr indent="0" marL="0">
+            <a:pPr marL="0" indent="0">
               <a:buNone/>
             </a:pPr>
             <a:r>
@@ -12690,7 +12980,7 @@
           <a:bodyPr wrap="square" lIns="0" tIns="0" rIns="0" bIns="0" rtlCol="0" anchor="ctr"/>
           <a:lstStyle/>
           <a:p>
-            <a:pPr indent="0" marL="0">
+            <a:pPr marL="0" indent="0">
               <a:buNone/>
             </a:pPr>
             <a:r>
@@ -12729,7 +13019,7 @@
           <a:bodyPr wrap="square" lIns="0" tIns="0" rIns="0" bIns="0" rtlCol="0" anchor="ctr"/>
           <a:lstStyle/>
           <a:p>
-            <a:pPr indent="0" marL="0">
+            <a:pPr marL="0" indent="0">
               <a:buNone/>
             </a:pPr>
             <a:r>
@@ -12773,6 +13063,13 @@
             <a:prstDash val="solid"/>
           </a:ln>
         </p:spPr>
+        <p:txBody>
+          <a:bodyPr/>
+          <a:lstStyle/>
+          <a:p>
+            <a:endParaRPr lang="en-US"/>
+          </a:p>
+        </p:txBody>
       </p:sp>
       <p:sp>
         <p:nvSpPr>
@@ -12800,6 +13097,13 @@
             <a:prstDash val="solid"/>
           </a:ln>
         </p:spPr>
+        <p:txBody>
+          <a:bodyPr/>
+          <a:lstStyle/>
+          <a:p>
+            <a:endParaRPr lang="en-US"/>
+          </a:p>
+        </p:txBody>
       </p:sp>
       <p:sp>
         <p:nvSpPr>
@@ -12822,7 +13126,7 @@
           <a:bodyPr wrap="square" lIns="0" tIns="0" rIns="0" bIns="0" rtlCol="0" anchor="ctr"/>
           <a:lstStyle/>
           <a:p>
-            <a:pPr indent="0" marL="0">
+            <a:pPr marL="0" indent="0">
               <a:buNone/>
             </a:pPr>
             <a:r>
@@ -12861,7 +13165,7 @@
           <a:bodyPr wrap="square" lIns="0" tIns="0" rIns="0" bIns="0" rtlCol="0" anchor="ctr"/>
           <a:lstStyle/>
           <a:p>
-            <a:pPr indent="0" marL="0">
+            <a:pPr marL="0" indent="0">
               <a:buNone/>
             </a:pPr>
             <a:r>
@@ -13180,4 +13484,319 @@
     </a:ext>
   </a:extLst>
 </a:theme>
+</file>
+
+<file path=ppt/theme/theme2.xml><?xml version="1.0" encoding="utf-8"?>
+<a:theme xmlns:a="http://schemas.openxmlformats.org/drawingml/2006/main" name="Office Theme">
+  <a:themeElements>
+    <a:clrScheme name="Office">
+      <a:dk1>
+        <a:sysClr val="windowText" lastClr="000000"/>
+      </a:dk1>
+      <a:lt1>
+        <a:sysClr val="window" lastClr="FFFFFF"/>
+      </a:lt1>
+      <a:dk2>
+        <a:srgbClr val="0E2841"/>
+      </a:dk2>
+      <a:lt2>
+        <a:srgbClr val="E8E8E8"/>
+      </a:lt2>
+      <a:accent1>
+        <a:srgbClr val="156082"/>
+      </a:accent1>
+      <a:accent2>
+        <a:srgbClr val="E97132"/>
+      </a:accent2>
+      <a:accent3>
+        <a:srgbClr val="196B24"/>
+      </a:accent3>
+      <a:accent4>
+        <a:srgbClr val="0F9ED5"/>
+      </a:accent4>
+      <a:accent5>
+        <a:srgbClr val="A02B93"/>
+      </a:accent5>
+      <a:accent6>
+        <a:srgbClr val="4EA72E"/>
+      </a:accent6>
+      <a:hlink>
+        <a:srgbClr val="467886"/>
+      </a:hlink>
+      <a:folHlink>
+        <a:srgbClr val="96607D"/>
+      </a:folHlink>
+    </a:clrScheme>
+    <a:fontScheme name="Office">
+      <a:majorFont>
+        <a:latin typeface="Aptos Display" panose="02110004020202020204"/>
+        <a:ea typeface=""/>
+        <a:cs typeface=""/>
+        <a:font script="Jpan" typeface="游ゴシック Light"/>
+        <a:font script="Hang" typeface="맑은 고딕"/>
+        <a:font script="Hans" typeface="等线 Light"/>
+        <a:font script="Hant" typeface="新細明體"/>
+        <a:font script="Arab" typeface="Times New Roman"/>
+        <a:font script="Hebr" typeface="Times New Roman"/>
+        <a:font script="Thai" typeface="Angsana New"/>
+        <a:font script="Ethi" typeface="Nyala"/>
+        <a:font script="Beng" typeface="Vrinda"/>
+        <a:font script="Gujr" typeface="Shruti"/>
+        <a:font script="Khmr" typeface="MoolBoran"/>
+        <a:font script="Knda" typeface="Tunga"/>
+        <a:font script="Guru" typeface="Raavi"/>
+        <a:font script="Cans" typeface="Euphemia"/>
+        <a:font script="Cher" typeface="Plantagenet Cherokee"/>
+        <a:font script="Yiii" typeface="Microsoft Yi Baiti"/>
+        <a:font script="Tibt" typeface="Microsoft Himalaya"/>
+        <a:font script="Thaa" typeface="MV Boli"/>
+        <a:font script="Deva" typeface="Mangal"/>
+        <a:font script="Telu" typeface="Gautami"/>
+        <a:font script="Taml" typeface="Latha"/>
+        <a:font script="Syrc" typeface="Estrangelo Edessa"/>
+        <a:font script="Orya" typeface="Kalinga"/>
+        <a:font script="Mlym" typeface="Kartika"/>
+        <a:font script="Laoo" typeface="DokChampa"/>
+        <a:font script="Sinh" typeface="Iskoola Pota"/>
+        <a:font script="Mong" typeface="Mongolian Baiti"/>
+        <a:font script="Viet" typeface="Times New Roman"/>
+        <a:font script="Uigh" typeface="Microsoft Uighur"/>
+        <a:font script="Geor" typeface="Sylfaen"/>
+        <a:font script="Armn" typeface="Arial"/>
+        <a:font script="Bugi" typeface="Leelawadee UI"/>
+        <a:font script="Bopo" typeface="Microsoft JhengHei"/>
+        <a:font script="Java" typeface="Javanese Text"/>
+        <a:font script="Lisu" typeface="Segoe UI"/>
+        <a:font script="Mymr" typeface="Myanmar Text"/>
+        <a:font script="Nkoo" typeface="Ebrima"/>
+        <a:font script="Olck" typeface="Nirmala UI"/>
+        <a:font script="Osma" typeface="Ebrima"/>
+        <a:font script="Phag" typeface="Phagspa"/>
+        <a:font script="Syrn" typeface="Estrangelo Edessa"/>
+        <a:font script="Syrj" typeface="Estrangelo Edessa"/>
+        <a:font script="Syre" typeface="Estrangelo Edessa"/>
+        <a:font script="Sora" typeface="Nirmala UI"/>
+        <a:font script="Tale" typeface="Microsoft Tai Le"/>
+        <a:font script="Talu" typeface="Microsoft New Tai Lue"/>
+        <a:font script="Tfng" typeface="Ebrima"/>
+      </a:majorFont>
+      <a:minorFont>
+        <a:latin typeface="Aptos" panose="02110004020202020204"/>
+        <a:ea typeface=""/>
+        <a:cs typeface=""/>
+        <a:font script="Jpan" typeface="游ゴシック"/>
+        <a:font script="Hang" typeface="맑은 고딕"/>
+        <a:font script="Hans" typeface="等线"/>
+        <a:font script="Hant" typeface="新細明體"/>
+        <a:font script="Arab" typeface="Arial"/>
+        <a:font script="Hebr" typeface="Arial"/>
+        <a:font script="Thai" typeface="Cordia New"/>
+        <a:font script="Ethi" typeface="Nyala"/>
+        <a:font script="Beng" typeface="Vrinda"/>
+        <a:font script="Gujr" typeface="Shruti"/>
+        <a:font script="Khmr" typeface="DaunPenh"/>
+        <a:font script="Knda" typeface="Tunga"/>
+        <a:font script="Guru" typeface="Raavi"/>
+        <a:font script="Cans" typeface="Euphemia"/>
+        <a:font script="Cher" typeface="Plantagenet Cherokee"/>
+        <a:font script="Yiii" typeface="Microsoft Yi Baiti"/>
+        <a:font script="Tibt" typeface="Microsoft Himalaya"/>
+        <a:font script="Thaa" typeface="MV Boli"/>
+        <a:font script="Deva" typeface="Mangal"/>
+        <a:font script="Telu" typeface="Gautami"/>
+        <a:font script="Taml" typeface="Latha"/>
+        <a:font script="Syrc" typeface="Estrangelo Edessa"/>
+        <a:font script="Orya" typeface="Kalinga"/>
+        <a:font script="Mlym" typeface="Kartika"/>
+        <a:font script="Laoo" typeface="DokChampa"/>
+        <a:font script="Sinh" typeface="Iskoola Pota"/>
+        <a:font script="Mong" typeface="Mongolian Baiti"/>
+        <a:font script="Viet" typeface="Arial"/>
+        <a:font script="Uigh" typeface="Microsoft Uighur"/>
+        <a:font script="Geor" typeface="Sylfaen"/>
+        <a:font script="Armn" typeface="Arial"/>
+        <a:font script="Bugi" typeface="Leelawadee UI"/>
+        <a:font script="Bopo" typeface="Microsoft JhengHei"/>
+        <a:font script="Java" typeface="Javanese Text"/>
+        <a:font script="Lisu" typeface="Segoe UI"/>
+        <a:font script="Mymr" typeface="Myanmar Text"/>
+        <a:font script="Nkoo" typeface="Ebrima"/>
+        <a:font script="Olck" typeface="Nirmala UI"/>
+        <a:font script="Osma" typeface="Ebrima"/>
+        <a:font script="Phag" typeface="Phagspa"/>
+        <a:font script="Syrn" typeface="Estrangelo Edessa"/>
+        <a:font script="Syrj" typeface="Estrangelo Edessa"/>
+        <a:font script="Syre" typeface="Estrangelo Edessa"/>
+        <a:font script="Sora" typeface="Nirmala UI"/>
+        <a:font script="Tale" typeface="Microsoft Tai Le"/>
+        <a:font script="Talu" typeface="Microsoft New Tai Lue"/>
+        <a:font script="Tfng" typeface="Ebrima"/>
+      </a:minorFont>
+    </a:fontScheme>
+    <a:fmtScheme name="Office">
+      <a:fillStyleLst>
+        <a:solidFill>
+          <a:schemeClr val="phClr"/>
+        </a:solidFill>
+        <a:gradFill rotWithShape="1">
+          <a:gsLst>
+            <a:gs pos="0">
+              <a:schemeClr val="phClr">
+                <a:lumMod val="110000"/>
+                <a:satMod val="105000"/>
+                <a:tint val="67000"/>
+              </a:schemeClr>
+            </a:gs>
+            <a:gs pos="50000">
+              <a:schemeClr val="phClr">
+                <a:lumMod val="105000"/>
+                <a:satMod val="103000"/>
+                <a:tint val="73000"/>
+              </a:schemeClr>
+            </a:gs>
+            <a:gs pos="100000">
+              <a:schemeClr val="phClr">
+                <a:lumMod val="105000"/>
+                <a:satMod val="109000"/>
+                <a:tint val="81000"/>
+              </a:schemeClr>
+            </a:gs>
+          </a:gsLst>
+          <a:lin ang="5400000" scaled="0"/>
+        </a:gradFill>
+        <a:gradFill rotWithShape="1">
+          <a:gsLst>
+            <a:gs pos="0">
+              <a:schemeClr val="phClr">
+                <a:satMod val="103000"/>
+                <a:lumMod val="102000"/>
+                <a:tint val="94000"/>
+              </a:schemeClr>
+            </a:gs>
+            <a:gs pos="50000">
+              <a:schemeClr val="phClr">
+                <a:satMod val="110000"/>
+                <a:lumMod val="100000"/>
+                <a:shade val="100000"/>
+              </a:schemeClr>
+            </a:gs>
+            <a:gs pos="100000">
+              <a:schemeClr val="phClr">
+                <a:lumMod val="99000"/>
+                <a:satMod val="120000"/>
+                <a:shade val="78000"/>
+              </a:schemeClr>
+            </a:gs>
+          </a:gsLst>
+          <a:lin ang="5400000" scaled="0"/>
+        </a:gradFill>
+      </a:fillStyleLst>
+      <a:lnStyleLst>
+        <a:ln w="12700" cap="flat" cmpd="sng" algn="ctr">
+          <a:solidFill>
+            <a:schemeClr val="phClr"/>
+          </a:solidFill>
+          <a:prstDash val="solid"/>
+          <a:miter lim="800000"/>
+        </a:ln>
+        <a:ln w="19050" cap="flat" cmpd="sng" algn="ctr">
+          <a:solidFill>
+            <a:schemeClr val="phClr"/>
+          </a:solidFill>
+          <a:prstDash val="solid"/>
+          <a:miter lim="800000"/>
+        </a:ln>
+        <a:ln w="25400" cap="flat" cmpd="sng" algn="ctr">
+          <a:solidFill>
+            <a:schemeClr val="phClr"/>
+          </a:solidFill>
+          <a:prstDash val="solid"/>
+          <a:miter lim="800000"/>
+        </a:ln>
+      </a:lnStyleLst>
+      <a:effectStyleLst>
+        <a:effectStyle>
+          <a:effectLst/>
+        </a:effectStyle>
+        <a:effectStyle>
+          <a:effectLst/>
+        </a:effectStyle>
+        <a:effectStyle>
+          <a:effectLst>
+            <a:outerShdw blurRad="57150" dist="19050" dir="5400000" algn="ctr" rotWithShape="0">
+              <a:srgbClr val="000000">
+                <a:alpha val="63000"/>
+              </a:srgbClr>
+            </a:outerShdw>
+          </a:effectLst>
+        </a:effectStyle>
+      </a:effectStyleLst>
+      <a:bgFillStyleLst>
+        <a:solidFill>
+          <a:schemeClr val="phClr"/>
+        </a:solidFill>
+        <a:solidFill>
+          <a:schemeClr val="phClr">
+            <a:tint val="95000"/>
+            <a:satMod val="170000"/>
+          </a:schemeClr>
+        </a:solidFill>
+        <a:gradFill rotWithShape="1">
+          <a:gsLst>
+            <a:gs pos="0">
+              <a:schemeClr val="phClr">
+                <a:tint val="93000"/>
+                <a:satMod val="150000"/>
+                <a:shade val="98000"/>
+                <a:lumMod val="102000"/>
+              </a:schemeClr>
+            </a:gs>
+            <a:gs pos="50000">
+              <a:schemeClr val="phClr">
+                <a:tint val="98000"/>
+                <a:satMod val="130000"/>
+                <a:shade val="90000"/>
+                <a:lumMod val="103000"/>
+              </a:schemeClr>
+            </a:gs>
+            <a:gs pos="100000">
+              <a:schemeClr val="phClr">
+                <a:shade val="63000"/>
+                <a:satMod val="120000"/>
+              </a:schemeClr>
+            </a:gs>
+          </a:gsLst>
+          <a:lin ang="5400000" scaled="0"/>
+        </a:gradFill>
+      </a:bgFillStyleLst>
+    </a:fmtScheme>
+  </a:themeElements>
+  <a:objectDefaults>
+    <a:lnDef>
+      <a:spPr/>
+      <a:bodyPr/>
+      <a:lstStyle/>
+      <a:style>
+        <a:lnRef idx="2">
+          <a:schemeClr val="accent1"/>
+        </a:lnRef>
+        <a:fillRef idx="0">
+          <a:schemeClr val="accent1"/>
+        </a:fillRef>
+        <a:effectRef idx="1">
+          <a:schemeClr val="accent1"/>
+        </a:effectRef>
+        <a:fontRef idx="minor">
+          <a:schemeClr val="tx1"/>
+        </a:fontRef>
+      </a:style>
+    </a:lnDef>
+  </a:objectDefaults>
+  <a:extraClrSchemeLst/>
+  <a:extLst>
+    <a:ext uri="{05A4C25C-085E-4340-85A3-A5531E510DB2}">
+      <thm15:themeFamily xmlns:thm15="http://schemas.microsoft.com/office/thememl/2012/main" name="Office Theme" id="{2E142A2C-CD16-42D6-873A-C26D2A0506FA}" vid="{1BDDFF52-6CD6-40A5-AB3C-68EB2F1E4D0A}"/>
+    </a:ext>
+  </a:extLst>
+</a:theme>
 </file>
--- a/deck/nailong-shopping-copilot.pptx
+++ b/deck/nailong-shopping-copilot.pptx
@@ -4,9 +4,6 @@
   <p:sldMasterIdLst>
     <p:sldMasterId id="2147483648" r:id="rId1"/>
   </p:sldMasterIdLst>
-  <p:notesMasterIdLst>
-    <p:notesMasterId r:id="rId15"/>
-  </p:notesMasterIdLst>
   <p:sldIdLst>
     <p:sldId id="256" r:id="rId2"/>
     <p:sldId id="257" r:id="rId3"/>
@@ -22,6 +19,9 @@
     <p:sldId id="267" r:id="rId13"/>
     <p:sldId id="268" r:id="rId14"/>
   </p:sldIdLst>
+  <p:notesMasterIdLst>
+    <p:notesMasterId r:id="rId15"/>
+  </p:notesMasterIdLst>
   <p:sldSz cx="12192000" cy="6858000"/>
   <p:notesSz cx="6858000" cy="12192000"/>
   <p:defaultTextStyle>
@@ -116,20 +116,13 @@
       </a:defRPr>
     </a:lvl9pPr>
   </p:defaultTextStyle>
-  <p:extLst>
-    <p:ext uri="{EFAFB233-063F-42B5-8137-9DF3F51BA10A}">
-      <p15:sldGuideLst xmlns:p15="http://schemas.microsoft.com/office/powerpoint/2012/main"/>
-    </p:ext>
-  </p:extLst>
 </p:presentation>
 </file>
 
 <file path=ppt/charts/chart1.xml><?xml version="1.0" encoding="utf-8"?>
-<c:chartSpace xmlns:c="http://schemas.openxmlformats.org/drawingml/2006/chart" xmlns:a="http://schemas.openxmlformats.org/drawingml/2006/main" xmlns:r="http://schemas.openxmlformats.org/officeDocument/2006/relationships" xmlns:c16r2="http://schemas.microsoft.com/office/drawing/2015/06/chart">
+<c:chartSpace xmlns:c="http://schemas.openxmlformats.org/drawingml/2006/chart" xmlns:a="http://schemas.openxmlformats.org/drawingml/2006/main" xmlns:r="http://schemas.openxmlformats.org/officeDocument/2006/relationships">
   <c:date1904 val="0"/>
-  <c:lang val="en-US"/>
   <c:roundedCorners val="1"/>
-  <c:style val="2"/>
   <c:chart>
     <c:autoTitleDeleted val="1"/>
     <c:plotArea>
@@ -159,15 +152,40 @@
             <a:effectLst/>
           </c:spPr>
           <c:invertIfNegative val="0"/>
+          <c:dLbls>
+            <c:numFmt formatCode="0.000" sourceLinked="0"/>
+            <c:txPr>
+              <a:bodyPr/>
+              <a:lstStyle/>
+              <a:p>
+                <a:pPr>
+                  <a:defRPr b="0" i="0" strike="noStrike" sz="1050" u="none">
+                    <a:solidFill>
+                      <a:srgbClr val="0B2027"/>
+                    </a:solidFill>
+                    <a:latin typeface="Calibri"/>
+                  </a:defRPr>
+                </a:pPr>
+              </a:p>
+            </c:txPr>
+            <c:showLegendKey val="0"/>
+            <c:showVal val="1"/>
+            <c:showCatName val="0"/>
+            <c:showSerName val="0"/>
+            <c:showPercent val="0"/>
+            <c:showBubbleSize val="0"/>
+            <c:showLeaderLines val="0"/>
+          </c:dLbls>
           <c:dPt>
             <c:idx val="0"/>
             <c:invertIfNegative val="0"/>
             <c:bubble3D val="0"/>
-            <c:extLst>
-              <c:ext xmlns:c16="http://schemas.microsoft.com/office/drawing/2014/chart" uri="{C3380CC4-5D6E-409C-BE32-E72D297353CC}">
-                <c16:uniqueId val="{00000001-8890-3547-BD20-152DCF5DDCC9}"/>
-              </c:ext>
-            </c:extLst>
+            <c:spPr>
+              <a:solidFill>
+                <a:srgbClr val="028090"/>
+              </a:solidFill>
+              <a:effectLst/>
+            </c:spPr>
           </c:dPt>
           <c:dPt>
             <c:idx val="1"/>
@@ -179,11 +197,6 @@
               </a:solidFill>
               <a:effectLst/>
             </c:spPr>
-            <c:extLst>
-              <c:ext xmlns:c16="http://schemas.microsoft.com/office/drawing/2014/chart" uri="{C3380CC4-5D6E-409C-BE32-E72D297353CC}">
-                <c16:uniqueId val="{00000003-8890-3547-BD20-152DCF5DDCC9}"/>
-              </c:ext>
-            </c:extLst>
           </c:dPt>
           <c:dPt>
             <c:idx val="2"/>
@@ -195,11 +208,6 @@
               </a:solidFill>
               <a:effectLst/>
             </c:spPr>
-            <c:extLst>
-              <c:ext xmlns:c16="http://schemas.microsoft.com/office/drawing/2014/chart" uri="{C3380CC4-5D6E-409C-BE32-E72D297353CC}">
-                <c16:uniqueId val="{00000005-8890-3547-BD20-152DCF5DDCC9}"/>
-              </c:ext>
-            </c:extLst>
           </c:dPt>
           <c:dPt>
             <c:idx val="3"/>
@@ -211,11 +219,6 @@
               </a:solidFill>
               <a:effectLst/>
             </c:spPr>
-            <c:extLst>
-              <c:ext xmlns:c16="http://schemas.microsoft.com/office/drawing/2014/chart" uri="{C3380CC4-5D6E-409C-BE32-E72D297353CC}">
-                <c16:uniqueId val="{00000007-8890-3547-BD20-152DCF5DDCC9}"/>
-              </c:ext>
-            </c:extLst>
           </c:dPt>
           <c:dPt>
             <c:idx val="4"/>
@@ -227,11 +230,6 @@
               </a:solidFill>
               <a:effectLst/>
             </c:spPr>
-            <c:extLst>
-              <c:ext xmlns:c16="http://schemas.microsoft.com/office/drawing/2014/chart" uri="{C3380CC4-5D6E-409C-BE32-E72D297353CC}">
-                <c16:uniqueId val="{00000009-8890-3547-BD20-152DCF5DDCC9}"/>
-              </c:ext>
-            </c:extLst>
           </c:dPt>
           <c:dPt>
             <c:idx val="5"/>
@@ -243,11 +241,6 @@
               </a:solidFill>
               <a:effectLst/>
             </c:spPr>
-            <c:extLst>
-              <c:ext xmlns:c16="http://schemas.microsoft.com/office/drawing/2014/chart" uri="{C3380CC4-5D6E-409C-BE32-E72D297353CC}">
-                <c16:uniqueId val="{0000000B-8890-3547-BD20-152DCF5DDCC9}"/>
-              </c:ext>
-            </c:extLst>
           </c:dPt>
           <c:dPt>
             <c:idx val="6"/>
@@ -259,83 +252,43 @@
               </a:solidFill>
               <a:effectLst/>
             </c:spPr>
-            <c:extLst>
-              <c:ext xmlns:c16="http://schemas.microsoft.com/office/drawing/2014/chart" uri="{C3380CC4-5D6E-409C-BE32-E72D297353CC}">
-                <c16:uniqueId val="{0000000D-8890-3547-BD20-152DCF5DDCC9}"/>
-              </c:ext>
-            </c:extLst>
           </c:dPt>
-          <c:dLbls>
-            <c:numFmt formatCode="0.000" sourceLinked="0"/>
-            <c:spPr>
-              <a:noFill/>
-              <a:ln>
-                <a:noFill/>
-              </a:ln>
-              <a:effectLst/>
-            </c:spPr>
-            <c:txPr>
-              <a:bodyPr/>
-              <a:lstStyle/>
-              <a:p>
-                <a:pPr>
-                  <a:defRPr sz="1050" b="0" i="0" u="none" strike="noStrike">
-                    <a:solidFill>
-                      <a:srgbClr val="0B2027"/>
-                    </a:solidFill>
-                    <a:latin typeface="Calibri"/>
-                  </a:defRPr>
-                </a:pPr>
-                <a:endParaRPr lang="en-US"/>
-              </a:p>
-            </c:txPr>
-            <c:showLegendKey val="0"/>
-            <c:showVal val="1"/>
-            <c:showCatName val="0"/>
-            <c:showSerName val="0"/>
-            <c:showPercent val="0"/>
-            <c:showBubbleSize val="0"/>
-            <c:showLeaderLines val="0"/>
-            <c:extLst>
-              <c:ext xmlns:c15="http://schemas.microsoft.com/office/drawing/2012/chart" uri="{CE6537A1-D6FC-4f65-9D91-7224C49458BB}">
-                <c15:showLeaderLines val="0"/>
-              </c:ext>
-            </c:extLst>
-          </c:dLbls>
           <c:cat>
-            <c:strRef>
+            <c:multiLvlStrRef>
               <c:f>Sheet1!$A$2:$A$8</c:f>
-              <c:strCache>
+              <c:multiLvlStrCache>
                 <c:ptCount val="7"/>
-                <c:pt idx="0">
-                  <c:v>Baseline</c:v>
-                </c:pt>
-                <c:pt idx="1">
-                  <c:v>Working
+                <c:lvl>
+                  <c:pt idx="0">
+                    <c:v>Baseline</c:v>
+                  </c:pt>
+                  <c:pt idx="1">
+                    <c:v>Working
 agent</c:v>
-                </c:pt>
-                <c:pt idx="2">
-                  <c:v>Bucket
+                  </c:pt>
+                  <c:pt idx="2">
+                    <c:v>Bucket
 fix</c:v>
-                </c:pt>
-                <c:pt idx="3">
-                  <c:v>Override
+                  </c:pt>
+                  <c:pt idx="3">
+                    <c:v>Override
 fix</c:v>
-                </c:pt>
-                <c:pt idx="4">
-                  <c:v>Constraint
+                  </c:pt>
+                  <c:pt idx="4">
+                    <c:v>Constraint
 coverage</c:v>
-                </c:pt>
-                <c:pt idx="5">
-                  <c:v>Popularity
+                  </c:pt>
+                  <c:pt idx="5">
+                    <c:v>Popularity
 prior</c:v>
-                </c:pt>
-                <c:pt idx="6">
-                  <c:v>Category
+                  </c:pt>
+                  <c:pt idx="6">
+                    <c:v>Category
 match</c:v>
-                </c:pt>
-              </c:strCache>
-            </c:strRef>
+                  </c:pt>
+                </c:lvl>
+              </c:multiLvlStrCache>
+            </c:multiLvlStrRef>
           </c:cat>
           <c:val>
             <c:numRef>
@@ -347,19 +300,19 @@
                   <c:v>0.107</c:v>
                 </c:pt>
                 <c:pt idx="1">
-                  <c:v>0.56200000000000006</c:v>
+                  <c:v>0.562</c:v>
                 </c:pt>
                 <c:pt idx="2">
-                  <c:v>0.72799999999999998</c:v>
+                  <c:v>0.728</c:v>
                 </c:pt>
                 <c:pt idx="3">
-                  <c:v>0.74399999999999999</c:v>
+                  <c:v>0.744</c:v>
                 </c:pt>
                 <c:pt idx="4">
                   <c:v>0.79</c:v>
                 </c:pt>
                 <c:pt idx="5">
-                  <c:v>0.85899999999999999</c:v>
+                  <c:v>0.859</c:v>
                 </c:pt>
                 <c:pt idx="6">
                   <c:v>0.876</c:v>
@@ -367,23 +320,36 @@
               </c:numCache>
             </c:numRef>
           </c:val>
-          <c:extLst>
-            <c:ext xmlns:c16="http://schemas.microsoft.com/office/drawing/2014/chart" uri="{C3380CC4-5D6E-409C-BE32-E72D297353CC}">
-              <c16:uniqueId val="{0000000E-8890-3547-BD20-152DCF5DDCC9}"/>
-            </c:ext>
-          </c:extLst>
         </c:ser>
         <c:dLbls>
+          <c:numFmt formatCode="0.000" sourceLinked="0"/>
+          <c:txPr>
+            <a:bodyPr/>
+            <a:lstStyle/>
+            <a:p>
+              <a:pPr>
+                <a:defRPr b="0" i="0" strike="noStrike" sz="1050" u="none">
+                  <a:solidFill>
+                    <a:srgbClr val="0B2027"/>
+                  </a:solidFill>
+                  <a:latin typeface="Calibri"/>
+                </a:defRPr>
+              </a:pPr>
+            </a:p>
+          </c:txPr>
           <c:showLegendKey val="0"/>
           <c:showVal val="1"/>
           <c:showCatName val="0"/>
           <c:showSerName val="0"/>
           <c:showPercent val="0"/>
           <c:showBubbleSize val="0"/>
+          <c:showLeaderLines val="0"/>
         </c:dLbls>
         <c:gapWidth val="150"/>
+        <c:overlap val="0"/>
         <c:axId val="2094734554"/>
         <c:axId val="2094734552"/>
+        <c:axId val="2094734556"/>
       </c:barChart>
       <c:catAx>
         <c:axId val="2094734554"/>
@@ -424,7 +390,6 @@
         <c:crosses val="autoZero"/>
         <c:auto val="1"/>
         <c:lblAlgn val="ctr"/>
-        <c:lblOffset val="100"/>
         <c:noMultiLvlLbl val="1"/>
       </c:catAx>
       <c:valAx>
@@ -489,7 +454,6 @@
     </c:plotArea>
     <c:plotVisOnly val="1"/>
     <c:dispBlanksAs val="span"/>
-    <c:showDLblsOverMax val="1"/>
   </c:chart>
   <c:spPr>
     <a:noFill/>
@@ -526,10 +490,234 @@
           <a:chExt cx="0" cy="0"/>
         </a:xfrm>
       </p:grpSpPr>
+      <p:sp>
+        <p:nvSpPr>
+          <p:cNvPr id="2" name="Header Placeholder 1"/>
+          <p:cNvSpPr>
+            <a:spLocks noGrp="1"/>
+          </p:cNvSpPr>
+          <p:nvPr>
+            <p:ph type="hdr" sz="quarter"/>
+          </p:nvPr>
+        </p:nvSpPr>
+        <p:spPr>
+          <a:xfrm>
+            <a:off x="0" y="0"/>
+            <a:ext cx="2971800" cy="458788"/>
+          </a:xfrm>
+          <a:prstGeom prst="rect">
+            <a:avLst/>
+          </a:prstGeom>
+        </p:spPr>
+        <p:txBody>
+          <a:bodyPr vert="horz" lIns="91440" tIns="45720" rIns="91440" bIns="45720" rtlCol="0"/>
+          <a:lstStyle>
+            <a:lvl1pPr algn="l">
+              <a:defRPr sz="1200"/>
+            </a:lvl1pPr>
+          </a:lstStyle>
+          <a:p>
+            <a:endParaRPr lang="en-US"/>
+          </a:p>
+        </p:txBody>
+      </p:sp>
+      <p:sp>
+        <p:nvSpPr>
+          <p:cNvPr id="3" name="Date Placeholder 2"/>
+          <p:cNvSpPr>
+            <a:spLocks noGrp="1"/>
+          </p:cNvSpPr>
+          <p:nvPr>
+            <p:ph type="dt" idx="1"/>
+          </p:nvPr>
+        </p:nvSpPr>
+        <p:spPr>
+          <a:xfrm>
+            <a:off x="3884613" y="0"/>
+            <a:ext cx="2971800" cy="458788"/>
+          </a:xfrm>
+          <a:prstGeom prst="rect">
+            <a:avLst/>
+          </a:prstGeom>
+        </p:spPr>
+        <p:txBody>
+          <a:bodyPr vert="horz" lIns="91440" tIns="45720" rIns="91440" bIns="45720" rtlCol="0"/>
+          <a:lstStyle>
+            <a:lvl1pPr algn="r">
+              <a:defRPr sz="1200"/>
+            </a:lvl1pPr>
+          </a:lstStyle>
+          <a:p>
+            <a:fld id="{5282F153-3F37-0F45-9E97-73ACFA13230C}" type="datetimeFigureOut">
+              <a:rPr lang="en-US"/>
+              <a:t>7/23/19</a:t>
+            </a:fld>
+            <a:endParaRPr lang="en-US"/>
+          </a:p>
+        </p:txBody>
+      </p:sp>
+      <p:sp>
+        <p:nvSpPr>
+          <p:cNvPr id="4" name="Slide Image Placeholder 3"/>
+          <p:cNvSpPr>
+            <a:spLocks noGrp="1" noRot="1" noChangeAspect="1"/>
+          </p:cNvSpPr>
+          <p:nvPr>
+            <p:ph type="sldImg" idx="2"/>
+          </p:nvPr>
+        </p:nvSpPr>
+        <p:spPr>
+          <a:xfrm>
+            <a:off x="685800" y="1143000"/>
+            <a:ext cx="5486400" cy="3086100"/>
+          </a:xfrm>
+          <a:prstGeom prst="rect">
+            <a:avLst/>
+          </a:prstGeom>
+          <a:noFill/>
+          <a:ln w="12700">
+            <a:solidFill>
+              <a:prstClr val="black"/>
+            </a:solidFill>
+          </a:ln>
+        </p:spPr>
+        <p:txBody>
+          <a:bodyPr vert="horz" lIns="91440" tIns="45720" rIns="91440" bIns="45720" rtlCol="0" anchor="ctr"/>
+          <a:lstStyle/>
+          <a:p>
+            <a:endParaRPr lang="en-US"/>
+          </a:p>
+        </p:txBody>
+      </p:sp>
+      <p:sp>
+        <p:nvSpPr>
+          <p:cNvPr id="5" name="Notes Placeholder 4"/>
+          <p:cNvSpPr>
+            <a:spLocks noGrp="1"/>
+          </p:cNvSpPr>
+          <p:nvPr>
+            <p:ph type="body" sz="quarter" idx="3"/>
+          </p:nvPr>
+        </p:nvSpPr>
+        <p:spPr>
+          <a:xfrm>
+            <a:off x="685800" y="4400550"/>
+            <a:ext cx="5486400" cy="3600450"/>
+          </a:xfrm>
+          <a:prstGeom prst="rect">
+            <a:avLst/>
+          </a:prstGeom>
+        </p:spPr>
+        <p:txBody>
+          <a:bodyPr vert="horz" lIns="91440" tIns="45720" rIns="91440" bIns="45720" rtlCol="0"/>
+          <a:lstStyle/>
+          <a:p>
+            <a:pPr lvl="0"/>
+            <a:r>
+              <a:rPr lang="en-US"/>
+              <a:t>Click to edit Master text styles</a:t>
+            </a:r>
+          </a:p>
+          <a:p>
+            <a:pPr lvl="1"/>
+            <a:r>
+              <a:rPr lang="en-US"/>
+              <a:t>Second level</a:t>
+            </a:r>
+          </a:p>
+          <a:p>
+            <a:pPr lvl="2"/>
+            <a:r>
+              <a:rPr lang="en-US"/>
+              <a:t>Third level</a:t>
+            </a:r>
+          </a:p>
+          <a:p>
+            <a:pPr lvl="3"/>
+            <a:r>
+              <a:rPr lang="en-US"/>
+              <a:t>Fourth level</a:t>
+            </a:r>
+          </a:p>
+          <a:p>
+            <a:pPr lvl="4"/>
+            <a:r>
+              <a:rPr lang="en-US"/>
+              <a:t>Fifth level</a:t>
+            </a:r>
+          </a:p>
+        </p:txBody>
+      </p:sp>
+      <p:sp>
+        <p:nvSpPr>
+          <p:cNvPr id="6" name="Footer Placeholder 5"/>
+          <p:cNvSpPr>
+            <a:spLocks noGrp="1"/>
+          </p:cNvSpPr>
+          <p:nvPr>
+            <p:ph type="ftr" sz="quarter" idx="4"/>
+          </p:nvPr>
+        </p:nvSpPr>
+        <p:spPr>
+          <a:xfrm>
+            <a:off x="0" y="8685213"/>
+            <a:ext cx="2971800" cy="458787"/>
+          </a:xfrm>
+          <a:prstGeom prst="rect">
+            <a:avLst/>
+          </a:prstGeom>
+        </p:spPr>
+        <p:txBody>
+          <a:bodyPr vert="horz" lIns="91440" tIns="45720" rIns="91440" bIns="45720" rtlCol="0" anchor="b"/>
+          <a:lstStyle>
+            <a:lvl1pPr algn="l">
+              <a:defRPr sz="1200"/>
+            </a:lvl1pPr>
+          </a:lstStyle>
+          <a:p>
+            <a:endParaRPr lang="en-US"/>
+          </a:p>
+        </p:txBody>
+      </p:sp>
+      <p:sp>
+        <p:nvSpPr>
+          <p:cNvPr id="7" name="Slide Number Placeholder 6"/>
+          <p:cNvSpPr>
+            <a:spLocks noGrp="1"/>
+          </p:cNvSpPr>
+          <p:nvPr>
+            <p:ph type="sldNum" sz="quarter" idx="5"/>
+          </p:nvPr>
+        </p:nvSpPr>
+        <p:spPr>
+          <a:xfrm>
+            <a:off x="3884613" y="8685213"/>
+            <a:ext cx="2971800" cy="458787"/>
+          </a:xfrm>
+          <a:prstGeom prst="rect">
+            <a:avLst/>
+          </a:prstGeom>
+        </p:spPr>
+        <p:txBody>
+          <a:bodyPr vert="horz" lIns="91440" tIns="45720" rIns="91440" bIns="45720" rtlCol="0" anchor="b"/>
+          <a:lstStyle>
+            <a:lvl1pPr algn="r">
+              <a:defRPr sz="1200"/>
+            </a:lvl1pPr>
+          </a:lstStyle>
+          <a:p>
+            <a:fld id="{CE5E9CC1-C706-0F49-92D6-E571CC5EEA8F}" type="slidenum">
+              <a:rPr lang="en-US"/>
+              <a:t>‹#›</a:t>
+            </a:fld>
+            <a:endParaRPr lang="en-US"/>
+          </a:p>
+        </p:txBody>
+      </p:sp>
     </p:spTree>
     <p:extLst>
       <p:ext uri="{BB962C8B-B14F-4D97-AF65-F5344CB8AC3E}">
-        <p14:creationId xmlns:p14="http://schemas.microsoft.com/office/powerpoint/2010/main" val="267695502"/>
+        <p14:creationId xmlns:p14="http://schemas.microsoft.com/office/powerpoint/2010/main" val="1024086991"/>
       </p:ext>
     </p:extLst>
   </p:cSld>
@@ -677,6 +865,7 @@
               <a:rPr lang="en-US" dirty="0"/>
               <a:t>Team nailong. We built a conversational shopping agent for Track 4. The provided BM25 baseline scores 0.107; we reached 0.876, an 8.2x improvement, using no LLM at all. Everything you'll see is deterministic and runs fully offline.</a:t>
             </a:r>
+            <a:endParaRPr lang="en-US" dirty="0"/>
           </a:p>
         </p:txBody>
       </p:sp>
@@ -762,8 +951,9 @@
           <a:p>
             <a:r>
               <a:rPr lang="en-US" dirty="0"/>
-              <a:t>Feasibility was a design constraint, not an afterthought. Zero cost, zero network, standard library only. The submission rules warn that network access may be disabled at scoring time — our score is identical either way.</a:t>
-            </a:r>
+              <a:t>Feasibility was a design constraint, not an afterthought. Zero cost, zero network, standard library only, and anyone can reproduce 0.875866 in one command. The rules warn network access may be disabled at scoring time; our score is identical either way. We also hardened against the 800 sessions we cannot see.</a:t>
+            </a:r>
+            <a:endParaRPr lang="en-US" dirty="0"/>
           </a:p>
         </p:txBody>
       </p:sp>
@@ -851,6 +1041,7 @@
               <a:rPr lang="en-US" dirty="0"/>
               <a:t>We think stating our assumptions is part of the engineering. The popularity prior is the one place our ranking leans on how the benchmark was built, and we say so in the repo rather than hoping nobody checks.</a:t>
             </a:r>
+            <a:endParaRPr lang="en-US" dirty="0"/>
           </a:p>
         </p:txBody>
       </p:sp>
@@ -938,6 +1129,7 @@
               <a:rPr lang="en-US" dirty="0"/>
               <a:t>Our team. We split ownership across dialogue, retrieval, evaluation and integration — but everyone ran the evaluator themselves, which is why every number in this deck is reproducible by any of us.</a:t>
             </a:r>
+            <a:endParaRPr lang="en-US" dirty="0"/>
           </a:p>
         </p:txBody>
       </p:sp>
@@ -1025,6 +1217,7 @@
               <a:rPr lang="en-US" dirty="0"/>
               <a:t>To close: 0.107 to 0.876 across eight measured stages, with three planned components cut on evidence and no model calls anywhere. Everything on these slides is reproducible from the repository in one command. Thank you.</a:t>
             </a:r>
+            <a:endParaRPr lang="en-US" dirty="0"/>
           </a:p>
         </p:txBody>
       </p:sp>
@@ -1112,6 +1305,7 @@
               <a:rPr lang="en-US" dirty="0"/>
               <a:t>The baseline never asked a question, so the simulated customer never disclosed anything, and the agent searched only the latest message. It was structurally incapable of learning. Our first move was to read the evaluator source to understand what information was even obtainable.</a:t>
             </a:r>
+            <a:endParaRPr lang="en-US" dirty="0"/>
           </a:p>
         </p:txBody>
       </p:sp>
@@ -1199,6 +1393,7 @@
               <a:rPr lang="en-US" dirty="0"/>
               <a:t>This is the measurement that shaped everything. With only the opening category, we reach 1.7% of targets. With everything the shopper will disclose, 85%. So the bottleneck was dialogue extraction, not clever ranking — and that let us demote two large planned components before building them.</a:t>
             </a:r>
+            <a:endParaRPr lang="en-US" dirty="0"/>
           </a:p>
         </p:txBody>
       </p:sp>
@@ -1286,6 +1481,7 @@
               <a:rPr lang="en-US" dirty="0"/>
               <a:t>Five stages, all deterministic. The key architectural decision is at the bottom: we return recommendations and a question every single turn, because the evaluator scores recommendations first. That makes asking free, which inverts the usual problem — the question isn't when to ask, it's when to stop.</a:t>
             </a:r>
+            <a:endParaRPr lang="en-US" dirty="0"/>
           </a:p>
         </p:txBody>
       </p:sp>
@@ -1373,6 +1569,7 @@
               <a:rPr lang="en-US" dirty="0"/>
               <a:t>Our method was measure-first. Reproduce, diagnose, isolate one change at a time, sweep the weights, and reject ideas on evidence. Worth calling out: two of our most costly bugs passed every unit test and were only visible when we replayed a full session.</a:t>
             </a:r>
+            <a:endParaRPr lang="en-US" dirty="0"/>
           </a:p>
         </p:txBody>
       </p:sp>
@@ -1460,6 +1657,7 @@
               <a:rPr lang="en-US" dirty="0"/>
               <a:t>Seven measured stages from 0.107 to 0.876. The largest single jump after the initial build was the bucket fix, worth 0.166 on its own — I'll explain that one next.</a:t>
             </a:r>
+            <a:endParaRPr lang="en-US" dirty="0"/>
           </a:p>
         </p:txBody>
       </p:sp>
@@ -1547,6 +1745,7 @@
               <a:rPr lang="en-US" dirty="0"/>
               <a:t>Four decisions did most of the work. The second one — measuring which questions actually yield information — is where most of our turn-efficiency comes from. The third was our largest single bug.</a:t>
             </a:r>
+            <a:endParaRPr lang="en-US" dirty="0"/>
           </a:p>
         </p:txBody>
       </p:sp>
@@ -1634,6 +1833,7 @@
               <a:rPr lang="en-US" dirty="0"/>
               <a:t>This slide matters most to us. All three were in our plan. We built enough of each to measure it honestly and then cut it. The LLM reranker is the clearest case: it helped the sessions we were getting wrong but damaged the ones we were already getting right, netting negative. Our system is offline by evidence, not by default.</a:t>
             </a:r>
+            <a:endParaRPr lang="en-US" dirty="0"/>
           </a:p>
         </p:txBody>
       </p:sp>
@@ -1721,6 +1921,7 @@
               <a:rPr lang="en-US" dirty="0"/>
               <a:t>Final numbers. MTTC averages 1.875 turns, but the distribution matters more than the mean: 60 percent of sessions resolve on the shopper's very first message, and 79 percent by the second. Browsing is perfect at 1.0. Boundary is our weakest at 0.9, but that's only ten sessions so we treat the estimate as noisy rather than tuning against it.</a:t>
             </a:r>
+            <a:endParaRPr lang="en-US" dirty="0"/>
           </a:p>
         </p:txBody>
       </p:sp>
@@ -1793,11 +1994,6 @@
 <file path=ppt/slideMasters/slideMaster1.xml><?xml version="1.0" encoding="utf-8"?>
 <p:sldMaster xmlns:a="http://schemas.openxmlformats.org/drawingml/2006/main" xmlns:r="http://schemas.openxmlformats.org/officeDocument/2006/relationships" xmlns:p="http://schemas.openxmlformats.org/presentationml/2006/main">
   <p:cSld>
-    <p:bg>
-      <p:bgRef idx="1001">
-        <a:schemeClr val="bg1"/>
-      </p:bgRef>
-    </p:bg>
     <p:spTree>
       <p:nvGrpSpPr>
         <p:cNvPr id="1" name=""/>
@@ -2080,7 +2276,6 @@
         <a:solidFill>
           <a:srgbClr val="0B2027"/>
         </a:solidFill>
-        <a:effectLst/>
       </p:bgPr>
     </p:bg>
     <p:spTree>
@@ -2123,13 +2318,6 @@
             <a:prstDash val="solid"/>
           </a:ln>
         </p:spPr>
-        <p:txBody>
-          <a:bodyPr/>
-          <a:lstStyle/>
-          <a:p>
-            <a:endParaRPr lang="en-US"/>
-          </a:p>
-        </p:txBody>
       </p:sp>
       <p:sp>
         <p:nvSpPr>
@@ -2152,7 +2340,7 @@
           <a:bodyPr wrap="square" lIns="0" tIns="0" rIns="0" bIns="0" rtlCol="0" anchor="ctr"/>
           <a:lstStyle/>
           <a:p>
-            <a:pPr marL="0" indent="0" algn="ctr">
+            <a:pPr algn="ctr" indent="0" marL="0">
               <a:buNone/>
             </a:pPr>
             <a:r>
@@ -2191,7 +2379,7 @@
           <a:bodyPr wrap="square" lIns="0" tIns="0" rIns="0" bIns="0" rtlCol="0" anchor="ctr"/>
           <a:lstStyle/>
           <a:p>
-            <a:pPr marL="0" indent="0">
+            <a:pPr indent="0" marL="0">
               <a:buNone/>
             </a:pPr>
             <a:r>
@@ -2230,7 +2418,7 @@
           <a:bodyPr wrap="square" lIns="0" tIns="0" rIns="0" bIns="0" rtlCol="0" anchor="ctr"/>
           <a:lstStyle/>
           <a:p>
-            <a:pPr marL="0" indent="0">
+            <a:pPr indent="0" marL="0">
               <a:buNone/>
             </a:pPr>
             <a:r>
@@ -2269,7 +2457,7 @@
           <a:bodyPr wrap="square" lIns="0" tIns="0" rIns="0" bIns="0" rtlCol="0" anchor="ctr"/>
           <a:lstStyle/>
           <a:p>
-            <a:pPr marL="0" indent="0">
+            <a:pPr indent="0" marL="0">
               <a:buNone/>
             </a:pPr>
             <a:r>
@@ -2308,7 +2496,7 @@
           <a:bodyPr wrap="square" lIns="0" tIns="0" rIns="0" bIns="0" rtlCol="0" anchor="ctr"/>
           <a:lstStyle/>
           <a:p>
-            <a:pPr marL="0" indent="0">
+            <a:pPr indent="0" marL="0">
               <a:buNone/>
             </a:pPr>
             <a:r>
@@ -2347,7 +2535,7 @@
           <a:bodyPr wrap="square" lIns="0" tIns="0" rIns="0" bIns="0" rtlCol="0" anchor="ctr"/>
           <a:lstStyle/>
           <a:p>
-            <a:pPr marL="0" indent="0">
+            <a:pPr indent="0" marL="0">
               <a:buNone/>
             </a:pPr>
             <a:r>
@@ -2386,7 +2574,7 @@
           <a:bodyPr wrap="square" lIns="0" tIns="0" rIns="0" bIns="0" rtlCol="0" anchor="ctr"/>
           <a:lstStyle/>
           <a:p>
-            <a:pPr marL="0" indent="0">
+            <a:pPr indent="0" marL="0">
               <a:buNone/>
             </a:pPr>
             <a:r>
@@ -2425,7 +2613,7 @@
           <a:bodyPr wrap="square" lIns="0" tIns="0" rIns="0" bIns="0" rtlCol="0" anchor="ctr"/>
           <a:lstStyle/>
           <a:p>
-            <a:pPr marL="0" indent="0">
+            <a:pPr indent="0" marL="0">
               <a:buNone/>
             </a:pPr>
             <a:r>
@@ -2464,7 +2652,7 @@
           <a:bodyPr wrap="square" lIns="0" tIns="0" rIns="0" bIns="0" rtlCol="0" anchor="ctr"/>
           <a:lstStyle/>
           <a:p>
-            <a:pPr marL="0" indent="0">
+            <a:pPr indent="0" marL="0">
               <a:buNone/>
             </a:pPr>
             <a:r>
@@ -2503,7 +2691,7 @@
           <a:bodyPr wrap="square" lIns="0" tIns="0" rIns="0" bIns="0" rtlCol="0" anchor="ctr"/>
           <a:lstStyle/>
           <a:p>
-            <a:pPr marL="0" indent="0">
+            <a:pPr indent="0" marL="0">
               <a:buNone/>
             </a:pPr>
             <a:r>
@@ -2537,7 +2725,6 @@
         <a:solidFill>
           <a:srgbClr val="FFFFFF"/>
         </a:solidFill>
-        <a:effectLst/>
       </p:bgPr>
     </p:bg>
     <p:spTree>
@@ -2575,11 +2762,11 @@
           <a:bodyPr wrap="square" lIns="0" tIns="0" rIns="0" bIns="0" rtlCol="0" anchor="ctr"/>
           <a:lstStyle/>
           <a:p>
-            <a:pPr marL="0" indent="0">
-              <a:buNone/>
-            </a:pPr>
-            <a:r>
-              <a:rPr lang="en-US" sz="1200" b="1" kern="0" spc="200" dirty="0">
+            <a:pPr indent="0" marL="0">
+              <a:buNone/>
+            </a:pPr>
+            <a:r>
+              <a:rPr lang="en-US" sz="1200" b="1" spc="200" kern="0" dirty="0">
                 <a:solidFill>
                   <a:srgbClr val="028090"/>
                 </a:solidFill>
@@ -2614,7 +2801,7 @@
           <a:bodyPr wrap="square" lIns="0" tIns="0" rIns="0" bIns="0" rtlCol="0" anchor="ctr"/>
           <a:lstStyle/>
           <a:p>
-            <a:pPr marL="0" indent="0">
+            <a:pPr indent="0" marL="0">
               <a:buNone/>
             </a:pPr>
             <a:r>
@@ -2658,20 +2845,13 @@
             <a:prstDash val="solid"/>
           </a:ln>
           <a:effectLst>
-            <a:outerShdw blurRad="152400" dist="38100" dir="5400000" algn="bl" rotWithShape="0">
+            <a:outerShdw sx="100000" sy="100000" kx="0" ky="0" algn="bl" rotWithShape="0" blurRad="152400" dist="38100" dir="5400000">
               <a:srgbClr val="0B2027">
                 <a:alpha val="16000"/>
               </a:srgbClr>
             </a:outerShdw>
           </a:effectLst>
         </p:spPr>
-        <p:txBody>
-          <a:bodyPr/>
-          <a:lstStyle/>
-          <a:p>
-            <a:endParaRPr lang="en-US"/>
-          </a:p>
-        </p:txBody>
       </p:sp>
       <p:sp>
         <p:nvSpPr>
@@ -2694,7 +2874,7 @@
           <a:bodyPr wrap="square" lIns="0" tIns="0" rIns="0" bIns="0" rtlCol="0" anchor="ctr"/>
           <a:lstStyle/>
           <a:p>
-            <a:pPr marL="0" indent="0">
+            <a:pPr indent="0" marL="0">
               <a:buNone/>
             </a:pPr>
             <a:r>
@@ -2733,7 +2913,7 @@
           <a:bodyPr wrap="square" lIns="0" tIns="0" rIns="0" bIns="0" rtlCol="0" anchor="ctr"/>
           <a:lstStyle/>
           <a:p>
-            <a:pPr marL="0" indent="0">
+            <a:pPr indent="0" marL="0">
               <a:buNone/>
             </a:pPr>
             <a:r>
@@ -2772,7 +2952,7 @@
           <a:bodyPr wrap="square" lIns="0" tIns="0" rIns="0" bIns="0" rtlCol="0" anchor="ctr"/>
           <a:lstStyle/>
           <a:p>
-            <a:pPr marL="0" indent="0">
+            <a:pPr indent="0" marL="0">
               <a:lnSpc>
                 <a:spcPts val="1500"/>
               </a:lnSpc>
@@ -2819,20 +2999,13 @@
             <a:prstDash val="solid"/>
           </a:ln>
           <a:effectLst>
-            <a:outerShdw blurRad="152400" dist="38100" dir="5400000" algn="bl" rotWithShape="0">
+            <a:outerShdw sx="100000" sy="100000" kx="0" ky="0" algn="bl" rotWithShape="0" blurRad="152400" dist="38100" dir="5400000">
               <a:srgbClr val="0B2027">
                 <a:alpha val="16000"/>
               </a:srgbClr>
             </a:outerShdw>
           </a:effectLst>
         </p:spPr>
-        <p:txBody>
-          <a:bodyPr/>
-          <a:lstStyle/>
-          <a:p>
-            <a:endParaRPr lang="en-US"/>
-          </a:p>
-        </p:txBody>
       </p:sp>
       <p:sp>
         <p:nvSpPr>
@@ -2855,7 +3028,7 @@
           <a:bodyPr wrap="square" lIns="0" tIns="0" rIns="0" bIns="0" rtlCol="0" anchor="ctr"/>
           <a:lstStyle/>
           <a:p>
-            <a:pPr marL="0" indent="0">
+            <a:pPr indent="0" marL="0">
               <a:buNone/>
             </a:pPr>
             <a:r>
@@ -2894,7 +3067,7 @@
           <a:bodyPr wrap="square" lIns="0" tIns="0" rIns="0" bIns="0" rtlCol="0" anchor="ctr"/>
           <a:lstStyle/>
           <a:p>
-            <a:pPr marL="0" indent="0">
+            <a:pPr indent="0" marL="0">
               <a:buNone/>
             </a:pPr>
             <a:r>
@@ -2933,7 +3106,7 @@
           <a:bodyPr wrap="square" lIns="0" tIns="0" rIns="0" bIns="0" rtlCol="0" anchor="ctr"/>
           <a:lstStyle/>
           <a:p>
-            <a:pPr marL="0" indent="0">
+            <a:pPr indent="0" marL="0">
               <a:lnSpc>
                 <a:spcPts val="1500"/>
               </a:lnSpc>
@@ -2980,20 +3153,13 @@
             <a:prstDash val="solid"/>
           </a:ln>
           <a:effectLst>
-            <a:outerShdw blurRad="152400" dist="38100" dir="5400000" algn="bl" rotWithShape="0">
+            <a:outerShdw sx="100000" sy="100000" kx="0" ky="0" algn="bl" rotWithShape="0" blurRad="152400" dist="38100" dir="5400000">
               <a:srgbClr val="0B2027">
                 <a:alpha val="16000"/>
               </a:srgbClr>
             </a:outerShdw>
           </a:effectLst>
         </p:spPr>
-        <p:txBody>
-          <a:bodyPr/>
-          <a:lstStyle/>
-          <a:p>
-            <a:endParaRPr lang="en-US"/>
-          </a:p>
-        </p:txBody>
       </p:sp>
       <p:sp>
         <p:nvSpPr>
@@ -3016,7 +3182,7 @@
           <a:bodyPr wrap="square" lIns="0" tIns="0" rIns="0" bIns="0" rtlCol="0" anchor="ctr"/>
           <a:lstStyle/>
           <a:p>
-            <a:pPr marL="0" indent="0">
+            <a:pPr indent="0" marL="0">
               <a:buNone/>
             </a:pPr>
             <a:r>
@@ -3055,7 +3221,7 @@
           <a:bodyPr wrap="square" lIns="0" tIns="0" rIns="0" bIns="0" rtlCol="0" anchor="ctr"/>
           <a:lstStyle/>
           <a:p>
-            <a:pPr marL="0" indent="0">
+            <a:pPr indent="0" marL="0">
               <a:buNone/>
             </a:pPr>
             <a:r>
@@ -3094,7 +3260,7 @@
           <a:bodyPr wrap="square" lIns="0" tIns="0" rIns="0" bIns="0" rtlCol="0" anchor="ctr"/>
           <a:lstStyle/>
           <a:p>
-            <a:pPr marL="0" indent="0">
+            <a:pPr indent="0" marL="0">
               <a:lnSpc>
                 <a:spcPts val="1500"/>
               </a:lnSpc>
@@ -3141,20 +3307,13 @@
             <a:prstDash val="solid"/>
           </a:ln>
           <a:effectLst>
-            <a:outerShdw blurRad="152400" dist="38100" dir="5400000" algn="bl" rotWithShape="0">
+            <a:outerShdw sx="100000" sy="100000" kx="0" ky="0" algn="bl" rotWithShape="0" blurRad="152400" dist="38100" dir="5400000">
               <a:srgbClr val="0B2027">
                 <a:alpha val="16000"/>
               </a:srgbClr>
             </a:outerShdw>
           </a:effectLst>
         </p:spPr>
-        <p:txBody>
-          <a:bodyPr/>
-          <a:lstStyle/>
-          <a:p>
-            <a:endParaRPr lang="en-US"/>
-          </a:p>
-        </p:txBody>
       </p:sp>
       <p:sp>
         <p:nvSpPr>
@@ -3177,7 +3336,7 @@
           <a:bodyPr wrap="square" lIns="0" tIns="0" rIns="0" bIns="0" rtlCol="0" anchor="ctr"/>
           <a:lstStyle/>
           <a:p>
-            <a:pPr marL="0" indent="0">
+            <a:pPr indent="0" marL="0">
               <a:buNone/>
             </a:pPr>
             <a:r>
@@ -3189,7 +3348,7 @@
                 <a:ea typeface="Cambria" pitchFamily="34" charset="-122"/>
                 <a:cs typeface="Cambria" pitchFamily="34" charset="-120"/>
               </a:rPr>
-              <a:t>21</a:t>
+              <a:t>24</a:t>
             </a:r>
             <a:endParaRPr lang="en-US" sz="3200" dirty="0"/>
           </a:p>
@@ -3216,7 +3375,7 @@
           <a:bodyPr wrap="square" lIns="0" tIns="0" rIns="0" bIns="0" rtlCol="0" anchor="ctr"/>
           <a:lstStyle/>
           <a:p>
-            <a:pPr marL="0" indent="0">
+            <a:pPr indent="0" marL="0">
               <a:buNone/>
             </a:pPr>
             <a:r>
@@ -3255,7 +3414,7 @@
           <a:bodyPr wrap="square" lIns="0" tIns="0" rIns="0" bIns="0" rtlCol="0" anchor="ctr"/>
           <a:lstStyle/>
           <a:p>
-            <a:pPr marL="0" indent="0">
+            <a:pPr indent="0" marL="0">
               <a:lnSpc>
                 <a:spcPts val="1500"/>
               </a:lnSpc>
@@ -3270,7 +3429,7 @@
                 <a:ea typeface="Calibri" pitchFamily="34" charset="-122"/>
                 <a:cs typeface="Calibri" pitchFamily="34" charset="-120"/>
               </a:rPr>
-              <a:t>Including regression tests for both bugs that unit tests originally missed.</a:t>
+              <a:t>Including regressions for three bugs that unit tests alone did not catch.</a:t>
             </a:r>
             <a:endParaRPr lang="en-US" sz="1250" dirty="0"/>
           </a:p>
@@ -3297,7 +3456,7 @@
           <a:bodyPr wrap="square" lIns="0" tIns="0" rIns="0" bIns="0" rtlCol="0" anchor="ctr"/>
           <a:lstStyle/>
           <a:p>
-            <a:pPr marL="0" indent="0">
+            <a:pPr indent="0" marL="0">
               <a:buNone/>
             </a:pPr>
             <a:r>
@@ -3309,7 +3468,7 @@
                 <a:ea typeface="Calibri" pitchFamily="34" charset="-122"/>
                 <a:cs typeface="Calibri" pitchFamily="34" charset="-120"/>
               </a:rPr>
-              <a:t>Standard library only — retrieval runs on SQLite FTS5, entirely in memory. Anyone can clone the repo and reproduce 0.875866 in one command.</a:t>
+              <a:t>Hardened for the 800 unseen sessions: no crash on malformed profiles, empty, unicode or 54,000-character messages — and we found a latent bug where one quote character silently returned no results for a turn.</a:t>
             </a:r>
             <a:endParaRPr lang="en-US" sz="1350" dirty="0"/>
           </a:p>
@@ -3331,7 +3490,6 @@
         <a:solidFill>
           <a:srgbClr val="FFFFFF"/>
         </a:solidFill>
-        <a:effectLst/>
       </p:bgPr>
     </p:bg>
     <p:spTree>
@@ -3369,11 +3527,11 @@
           <a:bodyPr wrap="square" lIns="0" tIns="0" rIns="0" bIns="0" rtlCol="0" anchor="ctr"/>
           <a:lstStyle/>
           <a:p>
-            <a:pPr marL="0" indent="0">
-              <a:buNone/>
-            </a:pPr>
-            <a:r>
-              <a:rPr lang="en-US" sz="1200" b="1" kern="0" spc="200" dirty="0">
+            <a:pPr indent="0" marL="0">
+              <a:buNone/>
+            </a:pPr>
+            <a:r>
+              <a:rPr lang="en-US" sz="1200" b="1" spc="200" kern="0" dirty="0">
                 <a:solidFill>
                   <a:srgbClr val="028090"/>
                 </a:solidFill>
@@ -3408,7 +3566,7 @@
           <a:bodyPr wrap="square" lIns="0" tIns="0" rIns="0" bIns="0" rtlCol="0" anchor="ctr"/>
           <a:lstStyle/>
           <a:p>
-            <a:pPr marL="0" indent="0">
+            <a:pPr indent="0" marL="0">
               <a:buNone/>
             </a:pPr>
             <a:r>
@@ -3452,20 +3610,13 @@
             <a:prstDash val="solid"/>
           </a:ln>
           <a:effectLst>
-            <a:outerShdw blurRad="152400" dist="38100" dir="5400000" algn="bl" rotWithShape="0">
+            <a:outerShdw sx="100000" sy="100000" kx="0" ky="0" algn="bl" rotWithShape="0" blurRad="152400" dist="38100" dir="5400000">
               <a:srgbClr val="0B2027">
                 <a:alpha val="16000"/>
               </a:srgbClr>
             </a:outerShdw>
           </a:effectLst>
         </p:spPr>
-        <p:txBody>
-          <a:bodyPr/>
-          <a:lstStyle/>
-          <a:p>
-            <a:endParaRPr lang="en-US"/>
-          </a:p>
-        </p:txBody>
       </p:sp>
       <p:sp>
         <p:nvSpPr>
@@ -3488,7 +3639,7 @@
           <a:bodyPr wrap="square" lIns="0" tIns="0" rIns="0" bIns="0" rtlCol="0" anchor="ctr"/>
           <a:lstStyle/>
           <a:p>
-            <a:pPr marL="0" indent="0">
+            <a:pPr indent="0" marL="0">
               <a:lnSpc>
                 <a:spcPts val="1800"/>
               </a:lnSpc>
@@ -3530,7 +3681,7 @@
           <a:bodyPr wrap="square" lIns="0" tIns="0" rIns="0" bIns="0" rtlCol="0" anchor="ctr"/>
           <a:lstStyle/>
           <a:p>
-            <a:pPr marL="0" indent="0">
+            <a:pPr indent="0" marL="0">
               <a:lnSpc>
                 <a:spcPts val="1500"/>
               </a:lnSpc>
@@ -3577,20 +3728,13 @@
             <a:prstDash val="solid"/>
           </a:ln>
           <a:effectLst>
-            <a:outerShdw blurRad="152400" dist="38100" dir="5400000" algn="bl" rotWithShape="0">
+            <a:outerShdw sx="100000" sy="100000" kx="0" ky="0" algn="bl" rotWithShape="0" blurRad="152400" dist="38100" dir="5400000">
               <a:srgbClr val="0B2027">
                 <a:alpha val="16000"/>
               </a:srgbClr>
             </a:outerShdw>
           </a:effectLst>
         </p:spPr>
-        <p:txBody>
-          <a:bodyPr/>
-          <a:lstStyle/>
-          <a:p>
-            <a:endParaRPr lang="en-US"/>
-          </a:p>
-        </p:txBody>
       </p:sp>
       <p:sp>
         <p:nvSpPr>
@@ -3613,7 +3757,7 @@
           <a:bodyPr wrap="square" lIns="0" tIns="0" rIns="0" bIns="0" rtlCol="0" anchor="ctr"/>
           <a:lstStyle/>
           <a:p>
-            <a:pPr marL="0" indent="0">
+            <a:pPr indent="0" marL="0">
               <a:lnSpc>
                 <a:spcPts val="1800"/>
               </a:lnSpc>
@@ -3655,7 +3799,7 @@
           <a:bodyPr wrap="square" lIns="0" tIns="0" rIns="0" bIns="0" rtlCol="0" anchor="ctr"/>
           <a:lstStyle/>
           <a:p>
-            <a:pPr marL="0" indent="0">
+            <a:pPr indent="0" marL="0">
               <a:lnSpc>
                 <a:spcPts val="1500"/>
               </a:lnSpc>
@@ -3702,20 +3846,13 @@
             <a:prstDash val="solid"/>
           </a:ln>
           <a:effectLst>
-            <a:outerShdw blurRad="152400" dist="38100" dir="5400000" algn="bl" rotWithShape="0">
+            <a:outerShdw sx="100000" sy="100000" kx="0" ky="0" algn="bl" rotWithShape="0" blurRad="152400" dist="38100" dir="5400000">
               <a:srgbClr val="0B2027">
                 <a:alpha val="16000"/>
               </a:srgbClr>
             </a:outerShdw>
           </a:effectLst>
         </p:spPr>
-        <p:txBody>
-          <a:bodyPr/>
-          <a:lstStyle/>
-          <a:p>
-            <a:endParaRPr lang="en-US"/>
-          </a:p>
-        </p:txBody>
       </p:sp>
       <p:sp>
         <p:nvSpPr>
@@ -3738,7 +3875,7 @@
           <a:bodyPr wrap="square" lIns="0" tIns="0" rIns="0" bIns="0" rtlCol="0" anchor="ctr"/>
           <a:lstStyle/>
           <a:p>
-            <a:pPr marL="0" indent="0">
+            <a:pPr indent="0" marL="0">
               <a:lnSpc>
                 <a:spcPts val="1800"/>
               </a:lnSpc>
@@ -3780,7 +3917,7 @@
           <a:bodyPr wrap="square" lIns="0" tIns="0" rIns="0" bIns="0" rtlCol="0" anchor="ctr"/>
           <a:lstStyle/>
           <a:p>
-            <a:pPr marL="0" indent="0">
+            <a:pPr indent="0" marL="0">
               <a:lnSpc>
                 <a:spcPts val="1500"/>
               </a:lnSpc>
@@ -3827,20 +3964,13 @@
             <a:prstDash val="solid"/>
           </a:ln>
           <a:effectLst>
-            <a:outerShdw blurRad="152400" dist="38100" dir="5400000" algn="bl" rotWithShape="0">
+            <a:outerShdw sx="100000" sy="100000" kx="0" ky="0" algn="bl" rotWithShape="0" blurRad="152400" dist="38100" dir="5400000">
               <a:srgbClr val="0B2027">
                 <a:alpha val="16000"/>
               </a:srgbClr>
             </a:outerShdw>
           </a:effectLst>
         </p:spPr>
-        <p:txBody>
-          <a:bodyPr/>
-          <a:lstStyle/>
-          <a:p>
-            <a:endParaRPr lang="en-US"/>
-          </a:p>
-        </p:txBody>
       </p:sp>
       <p:sp>
         <p:nvSpPr>
@@ -3863,7 +3993,7 @@
           <a:bodyPr wrap="square" lIns="0" tIns="0" rIns="0" bIns="0" rtlCol="0" anchor="ctr"/>
           <a:lstStyle/>
           <a:p>
-            <a:pPr marL="0" indent="0">
+            <a:pPr indent="0" marL="0">
               <a:lnSpc>
                 <a:spcPts val="1800"/>
               </a:lnSpc>
@@ -3905,7 +4035,7 @@
           <a:bodyPr wrap="square" lIns="0" tIns="0" rIns="0" bIns="0" rtlCol="0" anchor="ctr"/>
           <a:lstStyle/>
           <a:p>
-            <a:pPr marL="0" indent="0">
+            <a:pPr indent="0" marL="0">
               <a:lnSpc>
                 <a:spcPts val="1500"/>
               </a:lnSpc>
@@ -3947,7 +4077,7 @@
           <a:bodyPr wrap="square" lIns="0" tIns="0" rIns="0" bIns="0" rtlCol="0" anchor="ctr"/>
           <a:lstStyle/>
           <a:p>
-            <a:pPr marL="0" indent="0">
+            <a:pPr indent="0" marL="0">
               <a:buNone/>
             </a:pPr>
             <a:r>
@@ -3981,7 +4111,6 @@
         <a:solidFill>
           <a:srgbClr val="0B2027"/>
         </a:solidFill>
-        <a:effectLst/>
       </p:bgPr>
     </p:bg>
     <p:spTree>
@@ -4019,11 +4148,11 @@
           <a:bodyPr wrap="square" lIns="0" tIns="0" rIns="0" bIns="0" rtlCol="0" anchor="ctr"/>
           <a:lstStyle/>
           <a:p>
-            <a:pPr marL="0" indent="0">
-              <a:buNone/>
-            </a:pPr>
-            <a:r>
-              <a:rPr lang="en-US" sz="1200" b="1" kern="0" spc="200" dirty="0">
+            <a:pPr indent="0" marL="0">
+              <a:buNone/>
+            </a:pPr>
+            <a:r>
+              <a:rPr lang="en-US" sz="1200" b="1" spc="200" kern="0" dirty="0">
                 <a:solidFill>
                   <a:srgbClr val="02C39A"/>
                 </a:solidFill>
@@ -4058,7 +4187,7 @@
           <a:bodyPr wrap="square" lIns="0" tIns="0" rIns="0" bIns="0" rtlCol="0" anchor="ctr"/>
           <a:lstStyle/>
           <a:p>
-            <a:pPr marL="0" indent="0">
+            <a:pPr indent="0" marL="0">
               <a:buNone/>
             </a:pPr>
             <a:r>
@@ -4097,7 +4226,7 @@
           <a:bodyPr wrap="square" lIns="0" tIns="0" rIns="0" bIns="0" rtlCol="0" anchor="ctr"/>
           <a:lstStyle/>
           <a:p>
-            <a:pPr marL="0" indent="0">
+            <a:pPr indent="0" marL="0">
               <a:buNone/>
             </a:pPr>
             <a:r>
@@ -4105,20 +4234,13 @@
                 <a:solidFill>
                   <a:srgbClr val="9FB4B8"/>
                 </a:solidFill>
-                <a:highlight>
-                  <a:srgbClr val="FFFF00"/>
-                </a:highlight>
-                <a:latin typeface="Calibri" pitchFamily="34" charset="0"/>
-                <a:ea typeface="Calibri" pitchFamily="34" charset="-122"/>
-                <a:cs typeface="Calibri" pitchFamily="34" charset="-120"/>
-              </a:rPr>
-              <a:t>PUT PIC + name + NUS major ! </a:t>
-            </a:r>
-            <a:endParaRPr lang="en-US" sz="1500" dirty="0">
-              <a:highlight>
-                <a:srgbClr val="FFFF00"/>
-              </a:highlight>
-            </a:endParaRPr>
+                <a:latin typeface="Calibri" pitchFamily="34" charset="0"/>
+                <a:ea typeface="Calibri" pitchFamily="34" charset="-122"/>
+                <a:cs typeface="Calibri" pitchFamily="34" charset="-120"/>
+              </a:rPr>
+              <a:t>Everyone ran the evaluator. Every claim in this deck is one of us re-running it and getting the same number.</a:t>
+            </a:r>
+            <a:endParaRPr lang="en-US" sz="1500" dirty="0"/>
           </a:p>
         </p:txBody>
       </p:sp>
@@ -4148,13 +4270,6 @@
             <a:prstDash val="solid"/>
           </a:ln>
         </p:spPr>
-        <p:txBody>
-          <a:bodyPr/>
-          <a:lstStyle/>
-          <a:p>
-            <a:endParaRPr lang="en-US"/>
-          </a:p>
-        </p:txBody>
       </p:sp>
       <p:sp>
         <p:nvSpPr>
@@ -4164,33 +4279,65 @@
         </p:nvSpPr>
         <p:spPr>
           <a:xfrm>
-            <a:off x="1303020" y="2244852"/>
-            <a:ext cx="1216152" cy="1216152"/>
+            <a:off x="1344168" y="2286000"/>
+            <a:ext cx="1133856" cy="1133856"/>
           </a:xfrm>
           <a:prstGeom prst="ellipse">
             <a:avLst/>
           </a:prstGeom>
           <a:solidFill>
-            <a:srgbClr val="02C39A"/>
+            <a:srgbClr val="028090"/>
           </a:solidFill>
-          <a:ln w="12700">
+          <a:ln w="25400">
             <a:solidFill>
               <a:srgbClr val="02C39A"/>
             </a:solidFill>
             <a:prstDash val="solid"/>
           </a:ln>
         </p:spPr>
-        <p:txBody>
-          <a:bodyPr/>
-          <a:lstStyle/>
-          <a:p>
-            <a:endParaRPr lang="en-US"/>
-          </a:p>
-        </p:txBody>
-      </p:sp>
-      <p:sp>
-        <p:nvSpPr>
-          <p:cNvPr id="8" name="Text 5"/>
+      </p:sp>
+      <p:sp>
+        <p:nvSpPr>
+          <p:cNvPr id="7" name="Text 5"/>
+          <p:cNvSpPr txBox="1"/>
+          <p:nvPr/>
+        </p:nvSpPr>
+        <p:spPr>
+          <a:xfrm>
+            <a:off x="1344168" y="2286000"/>
+            <a:ext cx="1133856" cy="1133856"/>
+          </a:xfrm>
+          <a:prstGeom prst="rect">
+            <a:avLst/>
+          </a:prstGeom>
+          <a:noFill/>
+          <a:ln/>
+        </p:spPr>
+        <p:txBody>
+          <a:bodyPr wrap="square" lIns="0" tIns="0" rIns="0" bIns="0" rtlCol="0" anchor="ctr"/>
+          <a:lstStyle/>
+          <a:p>
+            <a:pPr algn="ctr" indent="0" marL="0">
+              <a:buNone/>
+            </a:pPr>
+            <a:r>
+              <a:rPr lang="en-US" sz="3400" b="1" dirty="0">
+                <a:solidFill>
+                  <a:srgbClr val="FFFFFF"/>
+                </a:solidFill>
+                <a:latin typeface="Cambria" pitchFamily="34" charset="0"/>
+                <a:ea typeface="Cambria" pitchFamily="34" charset="-122"/>
+                <a:cs typeface="Cambria" pitchFamily="34" charset="-120"/>
+              </a:rPr>
+              <a:t>QE</a:t>
+            </a:r>
+            <a:endParaRPr lang="en-US" sz="3400" dirty="0"/>
+          </a:p>
+        </p:txBody>
+      </p:sp>
+      <p:sp>
+        <p:nvSpPr>
+          <p:cNvPr id="8" name="Text 6"/>
           <p:cNvSpPr txBox="1"/>
           <p:nvPr/>
         </p:nvSpPr>
@@ -4209,7 +4356,7 @@
           <a:bodyPr wrap="square" lIns="0" tIns="0" rIns="0" bIns="0" rtlCol="0" anchor="ctr"/>
           <a:lstStyle/>
           <a:p>
-            <a:pPr marL="0" indent="0" algn="ctr">
+            <a:pPr algn="ctr" indent="0" marL="0">
               <a:buNone/>
             </a:pPr>
             <a:r>
@@ -4229,7 +4376,7 @@
       </p:sp>
       <p:sp>
         <p:nvSpPr>
-          <p:cNvPr id="9" name="Text 6"/>
+          <p:cNvPr id="9" name="Text 7"/>
           <p:cNvSpPr txBox="1"/>
           <p:nvPr/>
         </p:nvSpPr>
@@ -4248,7 +4395,7 @@
           <a:bodyPr wrap="square" lIns="0" tIns="0" rIns="0" bIns="0" rtlCol="0" anchor="ctr"/>
           <a:lstStyle/>
           <a:p>
-            <a:pPr marL="0" indent="0" algn="ctr">
+            <a:pPr algn="ctr" indent="0" marL="0">
               <a:buNone/>
             </a:pPr>
             <a:r>
@@ -4260,7 +4407,7 @@
                 <a:ea typeface="Calibri" pitchFamily="34" charset="-122"/>
                 <a:cs typeface="Calibri" pitchFamily="34" charset="-120"/>
               </a:rPr>
-              <a:t>Dialog &amp; Retrieval</a:t>
+              <a:t>Dialogue</a:t>
             </a:r>
             <a:endParaRPr lang="en-US" sz="1250" dirty="0"/>
           </a:p>
@@ -4268,7 +4415,7 @@
       </p:sp>
       <p:sp>
         <p:nvSpPr>
-          <p:cNvPr id="10" name="Text 7"/>
+          <p:cNvPr id="10" name="Text 8"/>
           <p:cNvSpPr txBox="1"/>
           <p:nvPr/>
         </p:nvSpPr>
@@ -4287,7 +4434,7 @@
           <a:bodyPr wrap="square" lIns="0" tIns="0" rIns="0" bIns="0" rtlCol="0" anchor="ctr"/>
           <a:lstStyle/>
           <a:p>
-            <a:pPr marL="0" indent="0" algn="ctr">
+            <a:pPr algn="ctr" indent="0" marL="0">
               <a:lnSpc>
                 <a:spcPts val="1500"/>
               </a:lnSpc>
@@ -4302,7 +4449,7 @@
                 <a:ea typeface="Calibri" pitchFamily="34" charset="-122"/>
                 <a:cs typeface="Calibri" pitchFamily="34" charset="-120"/>
               </a:rPr>
-              <a:t>State machine, intent routing, and the constraint-coverage ranker.</a:t>
+              <a:t>Slot accumulation, override retraction, and choosing what to ask next.</a:t>
             </a:r>
             <a:endParaRPr lang="en-US" sz="1150" dirty="0"/>
           </a:p>
@@ -4310,7 +4457,7 @@
       </p:sp>
       <p:sp>
         <p:nvSpPr>
-          <p:cNvPr id="11" name="Shape 8"/>
+          <p:cNvPr id="11" name="Shape 9"/>
           <p:cNvSpPr/>
           <p:nvPr/>
         </p:nvSpPr>
@@ -4334,17 +4481,10 @@
             <a:prstDash val="solid"/>
           </a:ln>
         </p:spPr>
-        <p:txBody>
-          <a:bodyPr/>
-          <a:lstStyle/>
-          <a:p>
-            <a:endParaRPr lang="en-US"/>
-          </a:p>
-        </p:txBody>
-      </p:sp>
-      <p:sp>
-        <p:nvSpPr>
-          <p:cNvPr id="12" name="Shape 9"/>
+      </p:sp>
+      <p:sp>
+        <p:nvSpPr>
+          <p:cNvPr id="12" name="Shape 10"/>
           <p:cNvSpPr/>
           <p:nvPr/>
         </p:nvSpPr>
@@ -4366,17 +4506,10 @@
             <a:prstDash val="solid"/>
           </a:ln>
         </p:spPr>
-        <p:txBody>
-          <a:bodyPr/>
-          <a:lstStyle/>
-          <a:p>
-            <a:endParaRPr lang="en-US"/>
-          </a:p>
-        </p:txBody>
-      </p:sp>
-      <p:sp>
-        <p:nvSpPr>
-          <p:cNvPr id="13" name="Text 10"/>
+      </p:sp>
+      <p:sp>
+        <p:nvSpPr>
+          <p:cNvPr id="13" name="Text 11"/>
           <p:cNvSpPr txBox="1"/>
           <p:nvPr/>
         </p:nvSpPr>
@@ -4395,7 +4528,7 @@
           <a:bodyPr wrap="square" lIns="0" tIns="0" rIns="0" bIns="0" rtlCol="0" anchor="ctr"/>
           <a:lstStyle/>
           <a:p>
-            <a:pPr marL="0" indent="0" algn="ctr">
+            <a:pPr algn="ctr" indent="0" marL="0">
               <a:buNone/>
             </a:pPr>
             <a:r>
@@ -4415,7 +4548,7 @@
       </p:sp>
       <p:sp>
         <p:nvSpPr>
-          <p:cNvPr id="14" name="Text 11"/>
+          <p:cNvPr id="14" name="Text 12"/>
           <p:cNvSpPr txBox="1"/>
           <p:nvPr/>
         </p:nvSpPr>
@@ -4434,7 +4567,7 @@
           <a:bodyPr wrap="square" lIns="0" tIns="0" rIns="0" bIns="0" rtlCol="0" anchor="ctr"/>
           <a:lstStyle/>
           <a:p>
-            <a:pPr marL="0" indent="0" algn="ctr">
+            <a:pPr algn="ctr" indent="0" marL="0">
               <a:buNone/>
             </a:pPr>
             <a:r>
@@ -4454,7 +4587,7 @@
       </p:sp>
       <p:sp>
         <p:nvSpPr>
-          <p:cNvPr id="15" name="Text 12"/>
+          <p:cNvPr id="15" name="Text 13"/>
           <p:cNvSpPr txBox="1"/>
           <p:nvPr/>
         </p:nvSpPr>
@@ -4473,7 +4606,7 @@
           <a:bodyPr wrap="square" lIns="0" tIns="0" rIns="0" bIns="0" rtlCol="0" anchor="ctr"/>
           <a:lstStyle/>
           <a:p>
-            <a:pPr marL="0" indent="0" algn="ctr">
+            <a:pPr algn="ctr" indent="0" marL="0">
               <a:buNone/>
             </a:pPr>
             <a:r>
@@ -4493,7 +4626,7 @@
       </p:sp>
       <p:sp>
         <p:nvSpPr>
-          <p:cNvPr id="16" name="Text 13"/>
+          <p:cNvPr id="16" name="Text 14"/>
           <p:cNvSpPr txBox="1"/>
           <p:nvPr/>
         </p:nvSpPr>
@@ -4512,7 +4645,7 @@
           <a:bodyPr wrap="square" lIns="0" tIns="0" rIns="0" bIns="0" rtlCol="0" anchor="ctr"/>
           <a:lstStyle/>
           <a:p>
-            <a:pPr marL="0" indent="0" algn="ctr">
+            <a:pPr algn="ctr" indent="0" marL="0">
               <a:lnSpc>
                 <a:spcPts val="1500"/>
               </a:lnSpc>
@@ -4527,7 +4660,7 @@
                 <a:ea typeface="Calibri" pitchFamily="34" charset="-122"/>
                 <a:cs typeface="Calibri" pitchFamily="34" charset="-120"/>
               </a:rPr>
-              <a:t>Metric analysis, weight sweeps, and the LLM rerank experiment.</a:t>
+              <a:t>Metric analysis, weight sweeps, and the experiments that killed three ideas.</a:t>
             </a:r>
             <a:endParaRPr lang="en-US" sz="1150" dirty="0"/>
           </a:p>
@@ -4535,7 +4668,7 @@
       </p:sp>
       <p:sp>
         <p:nvSpPr>
-          <p:cNvPr id="17" name="Shape 14"/>
+          <p:cNvPr id="17" name="Shape 15"/>
           <p:cNvSpPr/>
           <p:nvPr/>
         </p:nvSpPr>
@@ -4559,17 +4692,10 @@
             <a:prstDash val="solid"/>
           </a:ln>
         </p:spPr>
-        <p:txBody>
-          <a:bodyPr/>
-          <a:lstStyle/>
-          <a:p>
-            <a:endParaRPr lang="en-US"/>
-          </a:p>
-        </p:txBody>
-      </p:sp>
-      <p:sp>
-        <p:nvSpPr>
-          <p:cNvPr id="18" name="Shape 15"/>
+      </p:sp>
+      <p:sp>
+        <p:nvSpPr>
+          <p:cNvPr id="18" name="Shape 16"/>
           <p:cNvSpPr/>
           <p:nvPr/>
         </p:nvSpPr>
@@ -4591,17 +4717,10 @@
             <a:prstDash val="solid"/>
           </a:ln>
         </p:spPr>
-        <p:txBody>
-          <a:bodyPr/>
-          <a:lstStyle/>
-          <a:p>
-            <a:endParaRPr lang="en-US"/>
-          </a:p>
-        </p:txBody>
-      </p:sp>
-      <p:sp>
-        <p:nvSpPr>
-          <p:cNvPr id="19" name="Text 16"/>
+      </p:sp>
+      <p:sp>
+        <p:nvSpPr>
+          <p:cNvPr id="19" name="Text 17"/>
           <p:cNvSpPr txBox="1"/>
           <p:nvPr/>
         </p:nvSpPr>
@@ -4620,7 +4739,7 @@
           <a:bodyPr wrap="square" lIns="0" tIns="0" rIns="0" bIns="0" rtlCol="0" anchor="ctr"/>
           <a:lstStyle/>
           <a:p>
-            <a:pPr marL="0" indent="0" algn="ctr">
+            <a:pPr algn="ctr" indent="0" marL="0">
               <a:buNone/>
             </a:pPr>
             <a:r>
@@ -4640,7 +4759,7 @@
       </p:sp>
       <p:sp>
         <p:nvSpPr>
-          <p:cNvPr id="20" name="Text 17"/>
+          <p:cNvPr id="20" name="Text 18"/>
           <p:cNvSpPr txBox="1"/>
           <p:nvPr/>
         </p:nvSpPr>
@@ -4659,7 +4778,7 @@
           <a:bodyPr wrap="square" lIns="0" tIns="0" rIns="0" bIns="0" rtlCol="0" anchor="ctr"/>
           <a:lstStyle/>
           <a:p>
-            <a:pPr marL="0" indent="0" algn="ctr">
+            <a:pPr algn="ctr" indent="0" marL="0">
               <a:buNone/>
             </a:pPr>
             <a:r>
@@ -4679,7 +4798,7 @@
       </p:sp>
       <p:sp>
         <p:nvSpPr>
-          <p:cNvPr id="21" name="Text 18"/>
+          <p:cNvPr id="21" name="Text 19"/>
           <p:cNvSpPr txBox="1"/>
           <p:nvPr/>
         </p:nvSpPr>
@@ -4698,7 +4817,7 @@
           <a:bodyPr wrap="square" lIns="0" tIns="0" rIns="0" bIns="0" rtlCol="0" anchor="ctr"/>
           <a:lstStyle/>
           <a:p>
-            <a:pPr marL="0" indent="0" algn="ctr">
+            <a:pPr algn="ctr" indent="0" marL="0">
               <a:buNone/>
             </a:pPr>
             <a:r>
@@ -4710,7 +4829,7 @@
                 <a:ea typeface="Calibri" pitchFamily="34" charset="-122"/>
                 <a:cs typeface="Calibri" pitchFamily="34" charset="-120"/>
               </a:rPr>
-              <a:t>Retrieval &amp; Ranking</a:t>
+              <a:t>Retrieval</a:t>
             </a:r>
             <a:endParaRPr lang="en-US" sz="1250" dirty="0"/>
           </a:p>
@@ -4718,7 +4837,7 @@
       </p:sp>
       <p:sp>
         <p:nvSpPr>
-          <p:cNvPr id="22" name="Text 19"/>
+          <p:cNvPr id="22" name="Text 20"/>
           <p:cNvSpPr txBox="1"/>
           <p:nvPr/>
         </p:nvSpPr>
@@ -4737,7 +4856,7 @@
           <a:bodyPr wrap="square" lIns="0" tIns="0" rIns="0" bIns="0" rtlCol="0" anchor="ctr"/>
           <a:lstStyle/>
           <a:p>
-            <a:pPr marL="0" indent="0" algn="ctr">
+            <a:pPr algn="ctr" indent="0" marL="0">
               <a:lnSpc>
                 <a:spcPts val="1500"/>
               </a:lnSpc>
@@ -4752,7 +4871,7 @@
                 <a:ea typeface="Calibri" pitchFamily="34" charset="-122"/>
                 <a:cs typeface="Calibri" pitchFamily="34" charset="-120"/>
               </a:rPr>
-              <a:t>Catalogue index, attribute extraction, popularity and category priors.</a:t>
+              <a:t>Catalogue index, attribute extraction, and the constraint-coverage ranker.</a:t>
             </a:r>
             <a:endParaRPr lang="en-US" sz="1150" dirty="0"/>
           </a:p>
@@ -4760,7 +4879,7 @@
       </p:sp>
       <p:sp>
         <p:nvSpPr>
-          <p:cNvPr id="23" name="Shape 20"/>
+          <p:cNvPr id="23" name="Shape 21"/>
           <p:cNvSpPr/>
           <p:nvPr/>
         </p:nvSpPr>
@@ -4784,17 +4903,10 @@
             <a:prstDash val="solid"/>
           </a:ln>
         </p:spPr>
-        <p:txBody>
-          <a:bodyPr/>
-          <a:lstStyle/>
-          <a:p>
-            <a:endParaRPr lang="en-US"/>
-          </a:p>
-        </p:txBody>
-      </p:sp>
-      <p:sp>
-        <p:nvSpPr>
-          <p:cNvPr id="24" name="Shape 21"/>
+      </p:sp>
+      <p:sp>
+        <p:nvSpPr>
+          <p:cNvPr id="24" name="Shape 22"/>
           <p:cNvSpPr/>
           <p:nvPr/>
         </p:nvSpPr>
@@ -4816,17 +4928,10 @@
             <a:prstDash val="solid"/>
           </a:ln>
         </p:spPr>
-        <p:txBody>
-          <a:bodyPr/>
-          <a:lstStyle/>
-          <a:p>
-            <a:endParaRPr lang="en-US"/>
-          </a:p>
-        </p:txBody>
-      </p:sp>
-      <p:sp>
-        <p:nvSpPr>
-          <p:cNvPr id="25" name="Text 22"/>
+      </p:sp>
+      <p:sp>
+        <p:nvSpPr>
+          <p:cNvPr id="25" name="Text 23"/>
           <p:cNvSpPr txBox="1"/>
           <p:nvPr/>
         </p:nvSpPr>
@@ -4845,7 +4950,7 @@
           <a:bodyPr wrap="square" lIns="0" tIns="0" rIns="0" bIns="0" rtlCol="0" anchor="ctr"/>
           <a:lstStyle/>
           <a:p>
-            <a:pPr marL="0" indent="0" algn="ctr">
+            <a:pPr algn="ctr" indent="0" marL="0">
               <a:buNone/>
             </a:pPr>
             <a:r>
@@ -4865,7 +4970,7 @@
       </p:sp>
       <p:sp>
         <p:nvSpPr>
-          <p:cNvPr id="26" name="Text 23"/>
+          <p:cNvPr id="26" name="Text 24"/>
           <p:cNvSpPr txBox="1"/>
           <p:nvPr/>
         </p:nvSpPr>
@@ -4884,7 +4989,7 @@
           <a:bodyPr wrap="square" lIns="0" tIns="0" rIns="0" bIns="0" rtlCol="0" anchor="ctr"/>
           <a:lstStyle/>
           <a:p>
-            <a:pPr marL="0" indent="0" algn="ctr">
+            <a:pPr algn="ctr" indent="0" marL="0">
               <a:buNone/>
             </a:pPr>
             <a:r>
@@ -4904,7 +5009,7 @@
       </p:sp>
       <p:sp>
         <p:nvSpPr>
-          <p:cNvPr id="27" name="Text 24"/>
+          <p:cNvPr id="27" name="Text 25"/>
           <p:cNvSpPr txBox="1"/>
           <p:nvPr/>
         </p:nvSpPr>
@@ -4923,7 +5028,7 @@
           <a:bodyPr wrap="square" lIns="0" tIns="0" rIns="0" bIns="0" rtlCol="0" anchor="ctr"/>
           <a:lstStyle/>
           <a:p>
-            <a:pPr marL="0" indent="0" algn="ctr">
+            <a:pPr algn="ctr" indent="0" marL="0">
               <a:buNone/>
             </a:pPr>
             <a:r>
@@ -4943,7 +5048,7 @@
       </p:sp>
       <p:sp>
         <p:nvSpPr>
-          <p:cNvPr id="28" name="Text 25"/>
+          <p:cNvPr id="28" name="Text 26"/>
           <p:cNvSpPr txBox="1"/>
           <p:nvPr/>
         </p:nvSpPr>
@@ -4962,7 +5067,7 @@
           <a:bodyPr wrap="square" lIns="0" tIns="0" rIns="0" bIns="0" rtlCol="0" anchor="ctr"/>
           <a:lstStyle/>
           <a:p>
-            <a:pPr marL="0" indent="0" algn="ctr">
+            <a:pPr algn="ctr" indent="0" marL="0">
               <a:lnSpc>
                 <a:spcPts val="1500"/>
               </a:lnSpc>
@@ -4977,7 +5082,7 @@
                 <a:ea typeface="Calibri" pitchFamily="34" charset="-122"/>
                 <a:cs typeface="Calibri" pitchFamily="34" charset="-120"/>
               </a:rPr>
-              <a:t>Agent glue, API contract conformance, tests, and submission.</a:t>
+              <a:t>Agent glue, contract conformance, 24 tests, and the submission package.</a:t>
             </a:r>
             <a:endParaRPr lang="en-US" sz="1150" dirty="0"/>
           </a:p>
@@ -4985,46 +5090,40 @@
       </p:sp>
       <p:sp>
         <p:nvSpPr>
-          <p:cNvPr id="31" name="Text 10">
-            <a:extLst>
-              <a:ext uri="{FF2B5EF4-FFF2-40B4-BE49-F238E27FC236}">
-                <a16:creationId xmlns:a16="http://schemas.microsoft.com/office/drawing/2014/main" id="{CDAE1661-0E11-0A37-18D6-C4095F1B4C98}"/>
-              </a:ext>
-            </a:extLst>
-          </p:cNvPr>
-          <p:cNvSpPr txBox="1"/>
-          <p:nvPr/>
-        </p:nvSpPr>
-        <p:spPr>
-          <a:xfrm>
-            <a:off x="1347216" y="2322576"/>
-            <a:ext cx="1133856" cy="1133856"/>
-          </a:xfrm>
-          <a:prstGeom prst="rect">
-            <a:avLst/>
-          </a:prstGeom>
-          <a:noFill/>
-          <a:ln/>
-        </p:spPr>
-        <p:txBody>
-          <a:bodyPr wrap="square" lIns="0" tIns="0" rIns="0" bIns="0" rtlCol="0" anchor="ctr"/>
-          <a:lstStyle/>
-          <a:p>
-            <a:pPr marL="0" indent="0" algn="ctr">
-              <a:buNone/>
-            </a:pPr>
-            <a:r>
-              <a:rPr lang="en-US" sz="3400" b="1" dirty="0">
-                <a:solidFill>
-                  <a:srgbClr val="FFFFFF"/>
-                </a:solidFill>
-                <a:latin typeface="Cambria" pitchFamily="34" charset="0"/>
-                <a:ea typeface="Cambria" pitchFamily="34" charset="-122"/>
-                <a:cs typeface="Cambria" pitchFamily="34" charset="-120"/>
-              </a:rPr>
-              <a:t>T1</a:t>
-            </a:r>
-            <a:endParaRPr lang="en-US" sz="3400" dirty="0"/>
+          <p:cNvPr id="29" name="Text 27"/>
+          <p:cNvSpPr txBox="1"/>
+          <p:nvPr/>
+        </p:nvSpPr>
+        <p:spPr>
+          <a:xfrm>
+            <a:off x="566928" y="5541264"/>
+            <a:ext cx="11064240" cy="402336"/>
+          </a:xfrm>
+          <a:prstGeom prst="rect">
+            <a:avLst/>
+          </a:prstGeom>
+          <a:noFill/>
+          <a:ln/>
+        </p:spPr>
+        <p:txBody>
+          <a:bodyPr wrap="square" lIns="0" tIns="0" rIns="0" bIns="0" rtlCol="0" anchor="ctr"/>
+          <a:lstStyle/>
+          <a:p>
+            <a:pPr indent="0" marL="0">
+              <a:buNone/>
+            </a:pPr>
+            <a:r>
+              <a:rPr lang="en-US" sz="1350" i="1" dirty="0">
+                <a:solidFill>
+                  <a:srgbClr val="9FB4B8"/>
+                </a:solidFill>
+                <a:latin typeface="Calibri" pitchFamily="34" charset="0"/>
+                <a:ea typeface="Calibri" pitchFamily="34" charset="-122"/>
+                <a:cs typeface="Calibri" pitchFamily="34" charset="-120"/>
+              </a:rPr>
+              <a:t>No one owned a silo. The two costliest bugs were found by replaying sessions together, not by reading each other's diffs.</a:t>
+            </a:r>
+            <a:endParaRPr lang="en-US" sz="1350" dirty="0"/>
           </a:p>
         </p:txBody>
       </p:sp>
@@ -5044,7 +5143,6 @@
         <a:solidFill>
           <a:srgbClr val="0B2027"/>
         </a:solidFill>
-        <a:effectLst/>
       </p:bgPr>
     </p:bg>
     <p:spTree>
@@ -5087,13 +5185,6 @@
             <a:prstDash val="solid"/>
           </a:ln>
         </p:spPr>
-        <p:txBody>
-          <a:bodyPr/>
-          <a:lstStyle/>
-          <a:p>
-            <a:endParaRPr lang="en-US"/>
-          </a:p>
-        </p:txBody>
       </p:sp>
       <p:sp>
         <p:nvSpPr>
@@ -5116,7 +5207,7 @@
           <a:bodyPr wrap="square" lIns="0" tIns="0" rIns="0" bIns="0" rtlCol="0" anchor="ctr"/>
           <a:lstStyle/>
           <a:p>
-            <a:pPr marL="0" indent="0" algn="ctr">
+            <a:pPr algn="ctr" indent="0" marL="0">
               <a:buNone/>
             </a:pPr>
             <a:r>
@@ -5155,7 +5246,7 @@
           <a:bodyPr wrap="square" lIns="0" tIns="0" rIns="0" bIns="0" rtlCol="0" anchor="ctr"/>
           <a:lstStyle/>
           <a:p>
-            <a:pPr marL="0" indent="0">
+            <a:pPr indent="0" marL="0">
               <a:buNone/>
             </a:pPr>
             <a:r>
@@ -5194,7 +5285,7 @@
           <a:bodyPr wrap="square" lIns="0" tIns="0" rIns="0" bIns="0" rtlCol="0" anchor="ctr"/>
           <a:lstStyle/>
           <a:p>
-            <a:pPr marL="0" indent="0">
+            <a:pPr indent="0" marL="0">
               <a:buNone/>
             </a:pPr>
             <a:r>
@@ -5233,7 +5324,7 @@
           <a:bodyPr wrap="square" lIns="0" tIns="0" rIns="0" bIns="0" rtlCol="0" anchor="ctr"/>
           <a:lstStyle/>
           <a:p>
-            <a:pPr marL="0" indent="0">
+            <a:pPr indent="0" marL="0">
               <a:buNone/>
             </a:pPr>
             <a:r>
@@ -5272,7 +5363,7 @@
           <a:bodyPr wrap="square" lIns="0" tIns="0" rIns="0" bIns="0" rtlCol="0" anchor="ctr"/>
           <a:lstStyle/>
           <a:p>
-            <a:pPr marL="0" indent="0">
+            <a:pPr indent="0" marL="0">
               <a:lnSpc>
                 <a:spcPts val="1700"/>
               </a:lnSpc>
@@ -5314,7 +5405,7 @@
           <a:bodyPr wrap="square" lIns="0" tIns="0" rIns="0" bIns="0" rtlCol="0" anchor="ctr"/>
           <a:lstStyle/>
           <a:p>
-            <a:pPr marL="0" indent="0">
+            <a:pPr indent="0" marL="0">
               <a:buNone/>
             </a:pPr>
             <a:r>
@@ -5353,7 +5444,7 @@
           <a:bodyPr wrap="square" lIns="0" tIns="0" rIns="0" bIns="0" rtlCol="0" anchor="ctr"/>
           <a:lstStyle/>
           <a:p>
-            <a:pPr marL="0" indent="0">
+            <a:pPr indent="0" marL="0">
               <a:lnSpc>
                 <a:spcPts val="1700"/>
               </a:lnSpc>
@@ -5395,7 +5486,7 @@
           <a:bodyPr wrap="square" lIns="0" tIns="0" rIns="0" bIns="0" rtlCol="0" anchor="ctr"/>
           <a:lstStyle/>
           <a:p>
-            <a:pPr marL="0" indent="0">
+            <a:pPr indent="0" marL="0">
               <a:buNone/>
             </a:pPr>
             <a:r>
@@ -5434,7 +5525,7 @@
           <a:bodyPr wrap="square" lIns="0" tIns="0" rIns="0" bIns="0" rtlCol="0" anchor="ctr"/>
           <a:lstStyle/>
           <a:p>
-            <a:pPr marL="0" indent="0">
+            <a:pPr indent="0" marL="0">
               <a:lnSpc>
                 <a:spcPts val="1700"/>
               </a:lnSpc>
@@ -5476,7 +5567,7 @@
           <a:bodyPr wrap="square" lIns="0" tIns="0" rIns="0" bIns="0" rtlCol="0" anchor="ctr"/>
           <a:lstStyle/>
           <a:p>
-            <a:pPr marL="0" indent="0">
+            <a:pPr indent="0" marL="0">
               <a:buNone/>
             </a:pPr>
             <a:r>
@@ -5510,7 +5601,6 @@
         <a:solidFill>
           <a:srgbClr val="FFFFFF"/>
         </a:solidFill>
-        <a:effectLst/>
       </p:bgPr>
     </p:bg>
     <p:spTree>
@@ -5548,11 +5638,11 @@
           <a:bodyPr wrap="square" lIns="0" tIns="0" rIns="0" bIns="0" rtlCol="0" anchor="ctr"/>
           <a:lstStyle/>
           <a:p>
-            <a:pPr marL="0" indent="0">
-              <a:buNone/>
-            </a:pPr>
-            <a:r>
-              <a:rPr lang="en-US" sz="1200" b="1" kern="0" spc="200" dirty="0">
+            <a:pPr indent="0" marL="0">
+              <a:buNone/>
+            </a:pPr>
+            <a:r>
+              <a:rPr lang="en-US" sz="1200" b="1" spc="200" kern="0" dirty="0">
                 <a:solidFill>
                   <a:srgbClr val="028090"/>
                 </a:solidFill>
@@ -5587,7 +5677,7 @@
           <a:bodyPr wrap="square" lIns="0" tIns="0" rIns="0" bIns="0" rtlCol="0" anchor="ctr"/>
           <a:lstStyle/>
           <a:p>
-            <a:pPr marL="0" indent="0">
+            <a:pPr indent="0" marL="0">
               <a:buNone/>
             </a:pPr>
             <a:r>
@@ -5631,20 +5721,13 @@
             <a:prstDash val="solid"/>
           </a:ln>
           <a:effectLst>
-            <a:outerShdw blurRad="152400" dist="38100" dir="5400000" algn="bl" rotWithShape="0">
+            <a:outerShdw sx="100000" sy="100000" kx="0" ky="0" algn="bl" rotWithShape="0" blurRad="152400" dist="38100" dir="5400000">
               <a:srgbClr val="0B2027">
                 <a:alpha val="16000"/>
               </a:srgbClr>
             </a:outerShdw>
           </a:effectLst>
         </p:spPr>
-        <p:txBody>
-          <a:bodyPr/>
-          <a:lstStyle/>
-          <a:p>
-            <a:endParaRPr lang="en-US"/>
-          </a:p>
-        </p:txBody>
       </p:sp>
       <p:sp>
         <p:nvSpPr>
@@ -5667,7 +5750,7 @@
           <a:bodyPr wrap="square" lIns="0" tIns="0" rIns="0" bIns="0" rtlCol="0" anchor="ctr"/>
           <a:lstStyle/>
           <a:p>
-            <a:pPr marL="0" indent="0">
+            <a:pPr indent="0" marL="0">
               <a:buNone/>
             </a:pPr>
             <a:r>
@@ -5802,20 +5885,13 @@
             <a:prstDash val="solid"/>
           </a:ln>
           <a:effectLst>
-            <a:outerShdw blurRad="152400" dist="38100" dir="5400000" algn="bl" rotWithShape="0">
+            <a:outerShdw sx="100000" sy="100000" kx="0" ky="0" algn="bl" rotWithShape="0" blurRad="152400" dist="38100" dir="5400000">
               <a:srgbClr val="0B2027">
                 <a:alpha val="16000"/>
               </a:srgbClr>
             </a:outerShdw>
           </a:effectLst>
         </p:spPr>
-        <p:txBody>
-          <a:bodyPr/>
-          <a:lstStyle/>
-          <a:p>
-            <a:endParaRPr lang="en-US"/>
-          </a:p>
-        </p:txBody>
       </p:sp>
       <p:sp>
         <p:nvSpPr>
@@ -5838,7 +5914,7 @@
           <a:bodyPr wrap="square" lIns="0" tIns="0" rIns="0" bIns="0" rtlCol="0" anchor="ctr"/>
           <a:lstStyle/>
           <a:p>
-            <a:pPr marL="0" indent="0">
+            <a:pPr indent="0" marL="0">
               <a:buNone/>
             </a:pPr>
             <a:r>
@@ -5877,7 +5953,7 @@
           <a:bodyPr wrap="square" lIns="0" tIns="0" rIns="0" bIns="0" rtlCol="0" anchor="ctr"/>
           <a:lstStyle/>
           <a:p>
-            <a:pPr marL="0" indent="0" algn="r">
+            <a:pPr algn="r" indent="0" marL="0">
               <a:buNone/>
             </a:pPr>
             <a:r>
@@ -5921,20 +5997,13 @@
             <a:prstDash val="solid"/>
           </a:ln>
           <a:effectLst>
-            <a:outerShdw blurRad="152400" dist="38100" dir="5400000" algn="bl" rotWithShape="0">
+            <a:outerShdw sx="100000" sy="100000" kx="0" ky="0" algn="bl" rotWithShape="0" blurRad="152400" dist="38100" dir="5400000">
               <a:srgbClr val="0B2027">
                 <a:alpha val="16000"/>
               </a:srgbClr>
             </a:outerShdw>
           </a:effectLst>
         </p:spPr>
-        <p:txBody>
-          <a:bodyPr/>
-          <a:lstStyle/>
-          <a:p>
-            <a:endParaRPr lang="en-US"/>
-          </a:p>
-        </p:txBody>
       </p:sp>
       <p:sp>
         <p:nvSpPr>
@@ -5957,7 +6026,7 @@
           <a:bodyPr wrap="square" lIns="0" tIns="0" rIns="0" bIns="0" rtlCol="0" anchor="ctr"/>
           <a:lstStyle/>
           <a:p>
-            <a:pPr marL="0" indent="0">
+            <a:pPr indent="0" marL="0">
               <a:buNone/>
             </a:pPr>
             <a:r>
@@ -5996,7 +6065,7 @@
           <a:bodyPr wrap="square" lIns="0" tIns="0" rIns="0" bIns="0" rtlCol="0" anchor="ctr"/>
           <a:lstStyle/>
           <a:p>
-            <a:pPr marL="0" indent="0" algn="r">
+            <a:pPr algn="r" indent="0" marL="0">
               <a:buNone/>
             </a:pPr>
             <a:r>
@@ -6040,20 +6109,13 @@
             <a:prstDash val="solid"/>
           </a:ln>
           <a:effectLst>
-            <a:outerShdw blurRad="152400" dist="38100" dir="5400000" algn="bl" rotWithShape="0">
+            <a:outerShdw sx="100000" sy="100000" kx="0" ky="0" algn="bl" rotWithShape="0" blurRad="152400" dist="38100" dir="5400000">
               <a:srgbClr val="0B2027">
                 <a:alpha val="16000"/>
               </a:srgbClr>
             </a:outerShdw>
           </a:effectLst>
         </p:spPr>
-        <p:txBody>
-          <a:bodyPr/>
-          <a:lstStyle/>
-          <a:p>
-            <a:endParaRPr lang="en-US"/>
-          </a:p>
-        </p:txBody>
       </p:sp>
       <p:sp>
         <p:nvSpPr>
@@ -6076,7 +6138,7 @@
           <a:bodyPr wrap="square" lIns="0" tIns="0" rIns="0" bIns="0" rtlCol="0" anchor="ctr"/>
           <a:lstStyle/>
           <a:p>
-            <a:pPr marL="0" indent="0">
+            <a:pPr indent="0" marL="0">
               <a:buNone/>
             </a:pPr>
             <a:r>
@@ -6115,7 +6177,7 @@
           <a:bodyPr wrap="square" lIns="0" tIns="0" rIns="0" bIns="0" rtlCol="0" anchor="ctr"/>
           <a:lstStyle/>
           <a:p>
-            <a:pPr marL="0" indent="0" algn="r">
+            <a:pPr algn="r" indent="0" marL="0">
               <a:buNone/>
             </a:pPr>
             <a:r>
@@ -6154,7 +6216,7 @@
           <a:bodyPr wrap="square" lIns="0" tIns="0" rIns="0" bIns="0" rtlCol="0" anchor="ctr"/>
           <a:lstStyle/>
           <a:p>
-            <a:pPr marL="0" indent="0">
+            <a:pPr indent="0" marL="0">
               <a:buNone/>
             </a:pPr>
             <a:r>
@@ -6193,7 +6255,7 @@
           <a:bodyPr wrap="square" lIns="0" tIns="0" rIns="0" bIns="0" rtlCol="0" anchor="ctr"/>
           <a:lstStyle/>
           <a:p>
-            <a:pPr marL="0" indent="0">
+            <a:pPr indent="0" marL="0">
               <a:buNone/>
             </a:pPr>
             <a:r>
@@ -6227,7 +6289,6 @@
         <a:solidFill>
           <a:srgbClr val="FFFFFF"/>
         </a:solidFill>
-        <a:effectLst/>
       </p:bgPr>
     </p:bg>
     <p:spTree>
@@ -6265,11 +6326,11 @@
           <a:bodyPr wrap="square" lIns="0" tIns="0" rIns="0" bIns="0" rtlCol="0" anchor="ctr"/>
           <a:lstStyle/>
           <a:p>
-            <a:pPr marL="0" indent="0">
-              <a:buNone/>
-            </a:pPr>
-            <a:r>
-              <a:rPr lang="en-US" sz="1200" b="1" kern="0" spc="200" dirty="0">
+            <a:pPr indent="0" marL="0">
+              <a:buNone/>
+            </a:pPr>
+            <a:r>
+              <a:rPr lang="en-US" sz="1200" b="1" spc="200" kern="0" dirty="0">
                 <a:solidFill>
                   <a:srgbClr val="028090"/>
                 </a:solidFill>
@@ -6304,7 +6365,7 @@
           <a:bodyPr wrap="square" lIns="0" tIns="0" rIns="0" bIns="0" rtlCol="0" anchor="ctr"/>
           <a:lstStyle/>
           <a:p>
-            <a:pPr marL="0" indent="0">
+            <a:pPr indent="0" marL="0">
               <a:buNone/>
             </a:pPr>
             <a:r>
@@ -6343,7 +6404,7 @@
           <a:bodyPr wrap="square" lIns="0" tIns="0" rIns="0" bIns="0" rtlCol="0" anchor="ctr"/>
           <a:lstStyle/>
           <a:p>
-            <a:pPr marL="0" indent="0">
+            <a:pPr indent="0" marL="0">
               <a:buNone/>
             </a:pPr>
             <a:r>
@@ -6387,20 +6448,13 @@
             <a:prstDash val="solid"/>
           </a:ln>
           <a:effectLst>
-            <a:outerShdw blurRad="152400" dist="38100" dir="5400000" algn="bl" rotWithShape="0">
+            <a:outerShdw sx="100000" sy="100000" kx="0" ky="0" algn="bl" rotWithShape="0" blurRad="152400" dist="38100" dir="5400000">
               <a:srgbClr val="0B2027">
                 <a:alpha val="16000"/>
               </a:srgbClr>
             </a:outerShdw>
           </a:effectLst>
         </p:spPr>
-        <p:txBody>
-          <a:bodyPr/>
-          <a:lstStyle/>
-          <a:p>
-            <a:endParaRPr lang="en-US"/>
-          </a:p>
-        </p:txBody>
       </p:sp>
       <p:sp>
         <p:nvSpPr>
@@ -6423,7 +6477,7 @@
           <a:bodyPr wrap="square" lIns="0" tIns="0" rIns="0" bIns="0" rtlCol="0" anchor="ctr"/>
           <a:lstStyle/>
           <a:p>
-            <a:pPr marL="0" indent="0">
+            <a:pPr indent="0" marL="0">
               <a:buNone/>
             </a:pPr>
             <a:r>
@@ -6462,7 +6516,7 @@
           <a:bodyPr wrap="square" lIns="0" tIns="0" rIns="0" bIns="0" rtlCol="0" anchor="ctr"/>
           <a:lstStyle/>
           <a:p>
-            <a:pPr marL="0" indent="0">
+            <a:pPr indent="0" marL="0">
               <a:buNone/>
             </a:pPr>
             <a:r>
@@ -6506,20 +6560,13 @@
             <a:prstDash val="solid"/>
           </a:ln>
           <a:effectLst>
-            <a:outerShdw blurRad="152400" dist="38100" dir="5400000" algn="bl" rotWithShape="0">
+            <a:outerShdw sx="100000" sy="100000" kx="0" ky="0" algn="bl" rotWithShape="0" blurRad="152400" dist="38100" dir="5400000">
               <a:srgbClr val="0B2027">
                 <a:alpha val="16000"/>
               </a:srgbClr>
             </a:outerShdw>
           </a:effectLst>
         </p:spPr>
-        <p:txBody>
-          <a:bodyPr/>
-          <a:lstStyle/>
-          <a:p>
-            <a:endParaRPr lang="en-US"/>
-          </a:p>
-        </p:txBody>
       </p:sp>
       <p:sp>
         <p:nvSpPr>
@@ -6542,7 +6589,7 @@
           <a:bodyPr wrap="square" lIns="0" tIns="0" rIns="0" bIns="0" rtlCol="0" anchor="ctr"/>
           <a:lstStyle/>
           <a:p>
-            <a:pPr marL="0" indent="0">
+            <a:pPr indent="0" marL="0">
               <a:buNone/>
             </a:pPr>
             <a:r>
@@ -6581,7 +6628,7 @@
           <a:bodyPr wrap="square" lIns="0" tIns="0" rIns="0" bIns="0" rtlCol="0" anchor="ctr"/>
           <a:lstStyle/>
           <a:p>
-            <a:pPr marL="0" indent="0">
+            <a:pPr indent="0" marL="0">
               <a:buNone/>
             </a:pPr>
             <a:r>
@@ -6620,7 +6667,7 @@
           <a:bodyPr wrap="square" lIns="0" tIns="0" rIns="0" bIns="0" rtlCol="0" anchor="ctr"/>
           <a:lstStyle/>
           <a:p>
-            <a:pPr marL="0" indent="0">
+            <a:pPr indent="0" marL="0">
               <a:lnSpc>
                 <a:spcPts val="2600"/>
               </a:lnSpc>
@@ -6662,7 +6709,7 @@
           <a:bodyPr wrap="square" lIns="0" tIns="0" rIns="0" bIns="0" rtlCol="0" anchor="ctr"/>
           <a:lstStyle/>
           <a:p>
-            <a:pPr marL="0" indent="0">
+            <a:pPr indent="0" marL="0">
               <a:lnSpc>
                 <a:spcPts val="1900"/>
               </a:lnSpc>
@@ -6699,7 +6746,6 @@
         <a:solidFill>
           <a:srgbClr val="FFFFFF"/>
         </a:solidFill>
-        <a:effectLst/>
       </p:bgPr>
     </p:bg>
     <p:spTree>
@@ -6737,11 +6783,11 @@
           <a:bodyPr wrap="square" lIns="0" tIns="0" rIns="0" bIns="0" rtlCol="0" anchor="ctr"/>
           <a:lstStyle/>
           <a:p>
-            <a:pPr marL="0" indent="0">
-              <a:buNone/>
-            </a:pPr>
-            <a:r>
-              <a:rPr lang="en-US" sz="1200" b="1" kern="0" spc="200" dirty="0">
+            <a:pPr indent="0" marL="0">
+              <a:buNone/>
+            </a:pPr>
+            <a:r>
+              <a:rPr lang="en-US" sz="1200" b="1" spc="200" kern="0" dirty="0">
                 <a:solidFill>
                   <a:srgbClr val="028090"/>
                 </a:solidFill>
@@ -6776,7 +6822,7 @@
           <a:bodyPr wrap="square" lIns="0" tIns="0" rIns="0" bIns="0" rtlCol="0" anchor="ctr"/>
           <a:lstStyle/>
           <a:p>
-            <a:pPr marL="0" indent="0">
+            <a:pPr indent="0" marL="0">
               <a:buNone/>
             </a:pPr>
             <a:r>
@@ -6820,20 +6866,13 @@
             <a:prstDash val="solid"/>
           </a:ln>
           <a:effectLst>
-            <a:outerShdw blurRad="152400" dist="38100" dir="5400000" algn="bl" rotWithShape="0">
+            <a:outerShdw sx="100000" sy="100000" kx="0" ky="0" algn="bl" rotWithShape="0" blurRad="152400" dist="38100" dir="5400000">
               <a:srgbClr val="0B2027">
                 <a:alpha val="16000"/>
               </a:srgbClr>
             </a:outerShdw>
           </a:effectLst>
         </p:spPr>
-        <p:txBody>
-          <a:bodyPr/>
-          <a:lstStyle/>
-          <a:p>
-            <a:endParaRPr lang="en-US"/>
-          </a:p>
-        </p:txBody>
       </p:sp>
       <p:sp>
         <p:nvSpPr>
@@ -6861,13 +6900,6 @@
             <a:prstDash val="solid"/>
           </a:ln>
         </p:spPr>
-        <p:txBody>
-          <a:bodyPr/>
-          <a:lstStyle/>
-          <a:p>
-            <a:endParaRPr lang="en-US"/>
-          </a:p>
-        </p:txBody>
       </p:sp>
       <p:sp>
         <p:nvSpPr>
@@ -6890,7 +6922,7 @@
           <a:bodyPr wrap="square" lIns="0" tIns="0" rIns="0" bIns="0" rtlCol="0" anchor="ctr"/>
           <a:lstStyle/>
           <a:p>
-            <a:pPr marL="0" indent="0" algn="ctr">
+            <a:pPr algn="ctr" indent="0" marL="0">
               <a:buNone/>
             </a:pPr>
             <a:r>
@@ -6929,7 +6961,7 @@
           <a:bodyPr wrap="square" lIns="0" tIns="0" rIns="0" bIns="0" rtlCol="0" anchor="ctr"/>
           <a:lstStyle/>
           <a:p>
-            <a:pPr marL="0" indent="0">
+            <a:pPr indent="0" marL="0">
               <a:buNone/>
             </a:pPr>
             <a:r>
@@ -6968,7 +7000,7 @@
           <a:bodyPr wrap="square" lIns="0" tIns="0" rIns="0" bIns="0" rtlCol="0" anchor="ctr"/>
           <a:lstStyle/>
           <a:p>
-            <a:pPr marL="0" indent="0">
+            <a:pPr indent="0" marL="0">
               <a:lnSpc>
                 <a:spcPts val="1400"/>
               </a:lnSpc>
@@ -6988,7 +7020,7 @@
             <a:endParaRPr lang="en-US" sz="1150" dirty="0"/>
           </a:p>
           <a:p>
-            <a:pPr marL="0" indent="0">
+            <a:pPr indent="0" marL="0">
               <a:lnSpc>
                 <a:spcPts val="1400"/>
               </a:lnSpc>
@@ -7008,7 +7040,7 @@
             <a:endParaRPr lang="en-US" sz="1150" dirty="0"/>
           </a:p>
           <a:p>
-            <a:pPr marL="0" indent="0">
+            <a:pPr indent="0" marL="0">
               <a:lnSpc>
                 <a:spcPts val="1400"/>
               </a:lnSpc>
@@ -7050,7 +7082,7 @@
           <a:bodyPr wrap="square" lIns="0" tIns="0" rIns="0" bIns="0" rtlCol="0" anchor="ctr"/>
           <a:lstStyle/>
           <a:p>
-            <a:pPr marL="0" indent="0" algn="ctr">
+            <a:pPr algn="ctr" indent="0" marL="0">
               <a:buNone/>
             </a:pPr>
             <a:r>
@@ -7094,20 +7126,13 @@
             <a:prstDash val="solid"/>
           </a:ln>
           <a:effectLst>
-            <a:outerShdw blurRad="152400" dist="38100" dir="5400000" algn="bl" rotWithShape="0">
+            <a:outerShdw sx="100000" sy="100000" kx="0" ky="0" algn="bl" rotWithShape="0" blurRad="152400" dist="38100" dir="5400000">
               <a:srgbClr val="0B2027">
                 <a:alpha val="16000"/>
               </a:srgbClr>
             </a:outerShdw>
           </a:effectLst>
         </p:spPr>
-        <p:txBody>
-          <a:bodyPr/>
-          <a:lstStyle/>
-          <a:p>
-            <a:endParaRPr lang="en-US"/>
-          </a:p>
-        </p:txBody>
       </p:sp>
       <p:sp>
         <p:nvSpPr>
@@ -7135,13 +7160,6 @@
             <a:prstDash val="solid"/>
           </a:ln>
         </p:spPr>
-        <p:txBody>
-          <a:bodyPr/>
-          <a:lstStyle/>
-          <a:p>
-            <a:endParaRPr lang="en-US"/>
-          </a:p>
-        </p:txBody>
       </p:sp>
       <p:sp>
         <p:nvSpPr>
@@ -7164,7 +7182,7 @@
           <a:bodyPr wrap="square" lIns="0" tIns="0" rIns="0" bIns="0" rtlCol="0" anchor="ctr"/>
           <a:lstStyle/>
           <a:p>
-            <a:pPr marL="0" indent="0" algn="ctr">
+            <a:pPr algn="ctr" indent="0" marL="0">
               <a:buNone/>
             </a:pPr>
             <a:r>
@@ -7203,7 +7221,7 @@
           <a:bodyPr wrap="square" lIns="0" tIns="0" rIns="0" bIns="0" rtlCol="0" anchor="ctr"/>
           <a:lstStyle/>
           <a:p>
-            <a:pPr marL="0" indent="0">
+            <a:pPr indent="0" marL="0">
               <a:buNone/>
             </a:pPr>
             <a:r>
@@ -7242,7 +7260,7 @@
           <a:bodyPr wrap="square" lIns="0" tIns="0" rIns="0" bIns="0" rtlCol="0" anchor="ctr"/>
           <a:lstStyle/>
           <a:p>
-            <a:pPr marL="0" indent="0">
+            <a:pPr indent="0" marL="0">
               <a:lnSpc>
                 <a:spcPts val="1400"/>
               </a:lnSpc>
@@ -7262,7 +7280,7 @@
             <a:endParaRPr lang="en-US" sz="1150" dirty="0"/>
           </a:p>
           <a:p>
-            <a:pPr marL="0" indent="0">
+            <a:pPr indent="0" marL="0">
               <a:lnSpc>
                 <a:spcPts val="1400"/>
               </a:lnSpc>
@@ -7304,7 +7322,7 @@
           <a:bodyPr wrap="square" lIns="0" tIns="0" rIns="0" bIns="0" rtlCol="0" anchor="ctr"/>
           <a:lstStyle/>
           <a:p>
-            <a:pPr marL="0" indent="0" algn="ctr">
+            <a:pPr algn="ctr" indent="0" marL="0">
               <a:buNone/>
             </a:pPr>
             <a:r>
@@ -7348,20 +7366,13 @@
             <a:prstDash val="solid"/>
           </a:ln>
           <a:effectLst>
-            <a:outerShdw blurRad="152400" dist="38100" dir="5400000" algn="bl" rotWithShape="0">
+            <a:outerShdw sx="100000" sy="100000" kx="0" ky="0" algn="bl" rotWithShape="0" blurRad="152400" dist="38100" dir="5400000">
               <a:srgbClr val="0B2027">
                 <a:alpha val="16000"/>
               </a:srgbClr>
             </a:outerShdw>
           </a:effectLst>
         </p:spPr>
-        <p:txBody>
-          <a:bodyPr/>
-          <a:lstStyle/>
-          <a:p>
-            <a:endParaRPr lang="en-US"/>
-          </a:p>
-        </p:txBody>
       </p:sp>
       <p:sp>
         <p:nvSpPr>
@@ -7389,13 +7400,6 @@
             <a:prstDash val="solid"/>
           </a:ln>
         </p:spPr>
-        <p:txBody>
-          <a:bodyPr/>
-          <a:lstStyle/>
-          <a:p>
-            <a:endParaRPr lang="en-US"/>
-          </a:p>
-        </p:txBody>
       </p:sp>
       <p:sp>
         <p:nvSpPr>
@@ -7418,7 +7422,7 @@
           <a:bodyPr wrap="square" lIns="0" tIns="0" rIns="0" bIns="0" rtlCol="0" anchor="ctr"/>
           <a:lstStyle/>
           <a:p>
-            <a:pPr marL="0" indent="0" algn="ctr">
+            <a:pPr algn="ctr" indent="0" marL="0">
               <a:buNone/>
             </a:pPr>
             <a:r>
@@ -7457,7 +7461,7 @@
           <a:bodyPr wrap="square" lIns="0" tIns="0" rIns="0" bIns="0" rtlCol="0" anchor="ctr"/>
           <a:lstStyle/>
           <a:p>
-            <a:pPr marL="0" indent="0">
+            <a:pPr indent="0" marL="0">
               <a:buNone/>
             </a:pPr>
             <a:r>
@@ -7496,7 +7500,7 @@
           <a:bodyPr wrap="square" lIns="0" tIns="0" rIns="0" bIns="0" rtlCol="0" anchor="ctr"/>
           <a:lstStyle/>
           <a:p>
-            <a:pPr marL="0" indent="0">
+            <a:pPr indent="0" marL="0">
               <a:lnSpc>
                 <a:spcPts val="1400"/>
               </a:lnSpc>
@@ -7516,7 +7520,7 @@
             <a:endParaRPr lang="en-US" sz="1150" dirty="0"/>
           </a:p>
           <a:p>
-            <a:pPr marL="0" indent="0">
+            <a:pPr indent="0" marL="0">
               <a:lnSpc>
                 <a:spcPts val="1400"/>
               </a:lnSpc>
@@ -7536,7 +7540,7 @@
             <a:endParaRPr lang="en-US" sz="1150" dirty="0"/>
           </a:p>
           <a:p>
-            <a:pPr marL="0" indent="0">
+            <a:pPr indent="0" marL="0">
               <a:lnSpc>
                 <a:spcPts val="1400"/>
               </a:lnSpc>
@@ -7578,7 +7582,7 @@
           <a:bodyPr wrap="square" lIns="0" tIns="0" rIns="0" bIns="0" rtlCol="0" anchor="ctr"/>
           <a:lstStyle/>
           <a:p>
-            <a:pPr marL="0" indent="0" algn="ctr">
+            <a:pPr algn="ctr" indent="0" marL="0">
               <a:buNone/>
             </a:pPr>
             <a:r>
@@ -7622,20 +7626,13 @@
             <a:prstDash val="solid"/>
           </a:ln>
           <a:effectLst>
-            <a:outerShdw blurRad="152400" dist="38100" dir="5400000" algn="bl" rotWithShape="0">
+            <a:outerShdw sx="100000" sy="100000" kx="0" ky="0" algn="bl" rotWithShape="0" blurRad="152400" dist="38100" dir="5400000">
               <a:srgbClr val="0B2027">
                 <a:alpha val="16000"/>
               </a:srgbClr>
             </a:outerShdw>
           </a:effectLst>
         </p:spPr>
-        <p:txBody>
-          <a:bodyPr/>
-          <a:lstStyle/>
-          <a:p>
-            <a:endParaRPr lang="en-US"/>
-          </a:p>
-        </p:txBody>
       </p:sp>
       <p:sp>
         <p:nvSpPr>
@@ -7663,13 +7660,6 @@
             <a:prstDash val="solid"/>
           </a:ln>
         </p:spPr>
-        <p:txBody>
-          <a:bodyPr/>
-          <a:lstStyle/>
-          <a:p>
-            <a:endParaRPr lang="en-US"/>
-          </a:p>
-        </p:txBody>
       </p:sp>
       <p:sp>
         <p:nvSpPr>
@@ -7692,7 +7682,7 @@
           <a:bodyPr wrap="square" lIns="0" tIns="0" rIns="0" bIns="0" rtlCol="0" anchor="ctr"/>
           <a:lstStyle/>
           <a:p>
-            <a:pPr marL="0" indent="0" algn="ctr">
+            <a:pPr algn="ctr" indent="0" marL="0">
               <a:buNone/>
             </a:pPr>
             <a:r>
@@ -7731,7 +7721,7 @@
           <a:bodyPr wrap="square" lIns="0" tIns="0" rIns="0" bIns="0" rtlCol="0" anchor="ctr"/>
           <a:lstStyle/>
           <a:p>
-            <a:pPr marL="0" indent="0">
+            <a:pPr indent="0" marL="0">
               <a:buNone/>
             </a:pPr>
             <a:r>
@@ -7770,7 +7760,7 @@
           <a:bodyPr wrap="square" lIns="0" tIns="0" rIns="0" bIns="0" rtlCol="0" anchor="ctr"/>
           <a:lstStyle/>
           <a:p>
-            <a:pPr marL="0" indent="0">
+            <a:pPr indent="0" marL="0">
               <a:lnSpc>
                 <a:spcPts val="1400"/>
               </a:lnSpc>
@@ -7790,7 +7780,7 @@
             <a:endParaRPr lang="en-US" sz="1150" dirty="0"/>
           </a:p>
           <a:p>
-            <a:pPr marL="0" indent="0">
+            <a:pPr indent="0" marL="0">
               <a:lnSpc>
                 <a:spcPts val="1400"/>
               </a:lnSpc>
@@ -7810,7 +7800,7 @@
             <a:endParaRPr lang="en-US" sz="1150" dirty="0"/>
           </a:p>
           <a:p>
-            <a:pPr marL="0" indent="0">
+            <a:pPr indent="0" marL="0">
               <a:lnSpc>
                 <a:spcPts val="1400"/>
               </a:lnSpc>
@@ -7852,7 +7842,7 @@
           <a:bodyPr wrap="square" lIns="0" tIns="0" rIns="0" bIns="0" rtlCol="0" anchor="ctr"/>
           <a:lstStyle/>
           <a:p>
-            <a:pPr marL="0" indent="0" algn="ctr">
+            <a:pPr algn="ctr" indent="0" marL="0">
               <a:buNone/>
             </a:pPr>
             <a:r>
@@ -7896,20 +7886,13 @@
             <a:prstDash val="solid"/>
           </a:ln>
           <a:effectLst>
-            <a:outerShdw blurRad="152400" dist="38100" dir="5400000" algn="bl" rotWithShape="0">
+            <a:outerShdw sx="100000" sy="100000" kx="0" ky="0" algn="bl" rotWithShape="0" blurRad="152400" dist="38100" dir="5400000">
               <a:srgbClr val="0B2027">
                 <a:alpha val="16000"/>
               </a:srgbClr>
             </a:outerShdw>
           </a:effectLst>
         </p:spPr>
-        <p:txBody>
-          <a:bodyPr/>
-          <a:lstStyle/>
-          <a:p>
-            <a:endParaRPr lang="en-US"/>
-          </a:p>
-        </p:txBody>
       </p:sp>
       <p:sp>
         <p:nvSpPr>
@@ -7937,13 +7920,6 @@
             <a:prstDash val="solid"/>
           </a:ln>
         </p:spPr>
-        <p:txBody>
-          <a:bodyPr/>
-          <a:lstStyle/>
-          <a:p>
-            <a:endParaRPr lang="en-US"/>
-          </a:p>
-        </p:txBody>
       </p:sp>
       <p:sp>
         <p:nvSpPr>
@@ -7966,7 +7942,7 @@
           <a:bodyPr wrap="square" lIns="0" tIns="0" rIns="0" bIns="0" rtlCol="0" anchor="ctr"/>
           <a:lstStyle/>
           <a:p>
-            <a:pPr marL="0" indent="0" algn="ctr">
+            <a:pPr algn="ctr" indent="0" marL="0">
               <a:buNone/>
             </a:pPr>
             <a:r>
@@ -8005,7 +7981,7 @@
           <a:bodyPr wrap="square" lIns="0" tIns="0" rIns="0" bIns="0" rtlCol="0" anchor="ctr"/>
           <a:lstStyle/>
           <a:p>
-            <a:pPr marL="0" indent="0">
+            <a:pPr indent="0" marL="0">
               <a:buNone/>
             </a:pPr>
             <a:r>
@@ -8044,7 +8020,7 @@
           <a:bodyPr wrap="square" lIns="0" tIns="0" rIns="0" bIns="0" rtlCol="0" anchor="ctr"/>
           <a:lstStyle/>
           <a:p>
-            <a:pPr marL="0" indent="0">
+            <a:pPr indent="0" marL="0">
               <a:lnSpc>
                 <a:spcPts val="1400"/>
               </a:lnSpc>
@@ -8064,7 +8040,7 @@
             <a:endParaRPr lang="en-US" sz="1150" dirty="0"/>
           </a:p>
           <a:p>
-            <a:pPr marL="0" indent="0">
+            <a:pPr indent="0" marL="0">
               <a:lnSpc>
                 <a:spcPts val="1400"/>
               </a:lnSpc>
@@ -8111,20 +8087,13 @@
             <a:prstDash val="solid"/>
           </a:ln>
           <a:effectLst>
-            <a:outerShdw blurRad="152400" dist="38100" dir="5400000" algn="bl" rotWithShape="0">
+            <a:outerShdw sx="100000" sy="100000" kx="0" ky="0" algn="bl" rotWithShape="0" blurRad="152400" dist="38100" dir="5400000">
               <a:srgbClr val="0B2027">
                 <a:alpha val="16000"/>
               </a:srgbClr>
             </a:outerShdw>
           </a:effectLst>
         </p:spPr>
-        <p:txBody>
-          <a:bodyPr/>
-          <a:lstStyle/>
-          <a:p>
-            <a:endParaRPr lang="en-US"/>
-          </a:p>
-        </p:txBody>
       </p:sp>
       <p:sp>
         <p:nvSpPr>
@@ -8147,7 +8116,7 @@
           <a:bodyPr wrap="square" lIns="0" tIns="0" rIns="0" bIns="0" rtlCol="0" anchor="ctr"/>
           <a:lstStyle/>
           <a:p>
-            <a:pPr marL="0" indent="0">
+            <a:pPr indent="0" marL="0">
               <a:buNone/>
             </a:pPr>
             <a:r>
@@ -8186,7 +8155,7 @@
           <a:bodyPr wrap="square" lIns="0" tIns="0" rIns="0" bIns="0" rtlCol="0" anchor="ctr"/>
           <a:lstStyle/>
           <a:p>
-            <a:pPr marL="0" indent="0">
+            <a:pPr indent="0" marL="0">
               <a:buNone/>
             </a:pPr>
             <a:r>
@@ -8225,7 +8194,7 @@
           <a:bodyPr wrap="square" lIns="0" tIns="0" rIns="0" bIns="0" rtlCol="0" anchor="ctr"/>
           <a:lstStyle/>
           <a:p>
-            <a:pPr marL="0" indent="0">
+            <a:pPr indent="0" marL="0">
               <a:buNone/>
             </a:pPr>
             <a:r>
@@ -8259,7 +8228,6 @@
         <a:solidFill>
           <a:srgbClr val="FFFFFF"/>
         </a:solidFill>
-        <a:effectLst/>
       </p:bgPr>
     </p:bg>
     <p:spTree>
@@ -8297,11 +8265,11 @@
           <a:bodyPr wrap="square" lIns="0" tIns="0" rIns="0" bIns="0" rtlCol="0" anchor="ctr"/>
           <a:lstStyle/>
           <a:p>
-            <a:pPr marL="0" indent="0">
-              <a:buNone/>
-            </a:pPr>
-            <a:r>
-              <a:rPr lang="en-US" sz="1200" b="1" kern="0" spc="200" dirty="0">
+            <a:pPr indent="0" marL="0">
+              <a:buNone/>
+            </a:pPr>
+            <a:r>
+              <a:rPr lang="en-US" sz="1200" b="1" spc="200" kern="0" dirty="0">
                 <a:solidFill>
                   <a:srgbClr val="028090"/>
                 </a:solidFill>
@@ -8336,7 +8304,7 @@
           <a:bodyPr wrap="square" lIns="0" tIns="0" rIns="0" bIns="0" rtlCol="0" anchor="ctr"/>
           <a:lstStyle/>
           <a:p>
-            <a:pPr marL="0" indent="0">
+            <a:pPr indent="0" marL="0">
               <a:buNone/>
             </a:pPr>
             <a:r>
@@ -8375,7 +8343,7 @@
           <a:bodyPr wrap="square" lIns="0" tIns="0" rIns="0" bIns="0" rtlCol="0" anchor="ctr"/>
           <a:lstStyle/>
           <a:p>
-            <a:pPr marL="0" indent="0">
+            <a:pPr indent="0" marL="0">
               <a:buNone/>
             </a:pPr>
             <a:r>
@@ -8419,20 +8387,13 @@
             <a:prstDash val="solid"/>
           </a:ln>
           <a:effectLst>
-            <a:outerShdw blurRad="152400" dist="38100" dir="5400000" algn="bl" rotWithShape="0">
+            <a:outerShdw sx="100000" sy="100000" kx="0" ky="0" algn="bl" rotWithShape="0" blurRad="152400" dist="38100" dir="5400000">
               <a:srgbClr val="0B2027">
                 <a:alpha val="16000"/>
               </a:srgbClr>
             </a:outerShdw>
           </a:effectLst>
         </p:spPr>
-        <p:txBody>
-          <a:bodyPr/>
-          <a:lstStyle/>
-          <a:p>
-            <a:endParaRPr lang="en-US"/>
-          </a:p>
-        </p:txBody>
       </p:sp>
       <p:sp>
         <p:nvSpPr>
@@ -8460,13 +8421,6 @@
             <a:prstDash val="solid"/>
           </a:ln>
         </p:spPr>
-        <p:txBody>
-          <a:bodyPr/>
-          <a:lstStyle/>
-          <a:p>
-            <a:endParaRPr lang="en-US"/>
-          </a:p>
-        </p:txBody>
       </p:sp>
       <p:sp>
         <p:nvSpPr>
@@ -8489,7 +8443,7 @@
           <a:bodyPr wrap="square" lIns="0" tIns="0" rIns="0" bIns="0" rtlCol="0" anchor="ctr"/>
           <a:lstStyle/>
           <a:p>
-            <a:pPr marL="0" indent="0" algn="ctr">
+            <a:pPr algn="ctr" indent="0" marL="0">
               <a:buNone/>
             </a:pPr>
             <a:r>
@@ -8528,7 +8482,7 @@
           <a:bodyPr wrap="square" lIns="0" tIns="0" rIns="0" bIns="0" rtlCol="0" anchor="ctr"/>
           <a:lstStyle/>
           <a:p>
-            <a:pPr marL="0" indent="0">
+            <a:pPr indent="0" marL="0">
               <a:buNone/>
             </a:pPr>
             <a:r>
@@ -8567,7 +8521,7 @@
           <a:bodyPr wrap="square" lIns="0" tIns="0" rIns="0" bIns="0" rtlCol="0" anchor="ctr"/>
           <a:lstStyle/>
           <a:p>
-            <a:pPr marL="0" indent="0">
+            <a:pPr indent="0" marL="0">
               <a:buNone/>
             </a:pPr>
             <a:r>
@@ -8611,20 +8565,13 @@
             <a:prstDash val="solid"/>
           </a:ln>
           <a:effectLst>
-            <a:outerShdw blurRad="152400" dist="38100" dir="5400000" algn="bl" rotWithShape="0">
+            <a:outerShdw sx="100000" sy="100000" kx="0" ky="0" algn="bl" rotWithShape="0" blurRad="152400" dist="38100" dir="5400000">
               <a:srgbClr val="0B2027">
                 <a:alpha val="16000"/>
               </a:srgbClr>
             </a:outerShdw>
           </a:effectLst>
         </p:spPr>
-        <p:txBody>
-          <a:bodyPr/>
-          <a:lstStyle/>
-          <a:p>
-            <a:endParaRPr lang="en-US"/>
-          </a:p>
-        </p:txBody>
       </p:sp>
       <p:sp>
         <p:nvSpPr>
@@ -8652,13 +8599,6 @@
             <a:prstDash val="solid"/>
           </a:ln>
         </p:spPr>
-        <p:txBody>
-          <a:bodyPr/>
-          <a:lstStyle/>
-          <a:p>
-            <a:endParaRPr lang="en-US"/>
-          </a:p>
-        </p:txBody>
       </p:sp>
       <p:sp>
         <p:nvSpPr>
@@ -8681,7 +8621,7 @@
           <a:bodyPr wrap="square" lIns="0" tIns="0" rIns="0" bIns="0" rtlCol="0" anchor="ctr"/>
           <a:lstStyle/>
           <a:p>
-            <a:pPr marL="0" indent="0" algn="ctr">
+            <a:pPr algn="ctr" indent="0" marL="0">
               <a:buNone/>
             </a:pPr>
             <a:r>
@@ -8720,7 +8660,7 @@
           <a:bodyPr wrap="square" lIns="0" tIns="0" rIns="0" bIns="0" rtlCol="0" anchor="ctr"/>
           <a:lstStyle/>
           <a:p>
-            <a:pPr marL="0" indent="0">
+            <a:pPr indent="0" marL="0">
               <a:buNone/>
             </a:pPr>
             <a:r>
@@ -8759,7 +8699,7 @@
           <a:bodyPr wrap="square" lIns="0" tIns="0" rIns="0" bIns="0" rtlCol="0" anchor="ctr"/>
           <a:lstStyle/>
           <a:p>
-            <a:pPr marL="0" indent="0">
+            <a:pPr indent="0" marL="0">
               <a:buNone/>
             </a:pPr>
             <a:r>
@@ -8803,20 +8743,13 @@
             <a:prstDash val="solid"/>
           </a:ln>
           <a:effectLst>
-            <a:outerShdw blurRad="152400" dist="38100" dir="5400000" algn="bl" rotWithShape="0">
+            <a:outerShdw sx="100000" sy="100000" kx="0" ky="0" algn="bl" rotWithShape="0" blurRad="152400" dist="38100" dir="5400000">
               <a:srgbClr val="0B2027">
                 <a:alpha val="16000"/>
               </a:srgbClr>
             </a:outerShdw>
           </a:effectLst>
         </p:spPr>
-        <p:txBody>
-          <a:bodyPr/>
-          <a:lstStyle/>
-          <a:p>
-            <a:endParaRPr lang="en-US"/>
-          </a:p>
-        </p:txBody>
       </p:sp>
       <p:sp>
         <p:nvSpPr>
@@ -8844,13 +8777,6 @@
             <a:prstDash val="solid"/>
           </a:ln>
         </p:spPr>
-        <p:txBody>
-          <a:bodyPr/>
-          <a:lstStyle/>
-          <a:p>
-            <a:endParaRPr lang="en-US"/>
-          </a:p>
-        </p:txBody>
       </p:sp>
       <p:sp>
         <p:nvSpPr>
@@ -8873,7 +8799,7 @@
           <a:bodyPr wrap="square" lIns="0" tIns="0" rIns="0" bIns="0" rtlCol="0" anchor="ctr"/>
           <a:lstStyle/>
           <a:p>
-            <a:pPr marL="0" indent="0" algn="ctr">
+            <a:pPr algn="ctr" indent="0" marL="0">
               <a:buNone/>
             </a:pPr>
             <a:r>
@@ -8912,7 +8838,7 @@
           <a:bodyPr wrap="square" lIns="0" tIns="0" rIns="0" bIns="0" rtlCol="0" anchor="ctr"/>
           <a:lstStyle/>
           <a:p>
-            <a:pPr marL="0" indent="0">
+            <a:pPr indent="0" marL="0">
               <a:buNone/>
             </a:pPr>
             <a:r>
@@ -8951,7 +8877,7 @@
           <a:bodyPr wrap="square" lIns="0" tIns="0" rIns="0" bIns="0" rtlCol="0" anchor="ctr"/>
           <a:lstStyle/>
           <a:p>
-            <a:pPr marL="0" indent="0">
+            <a:pPr indent="0" marL="0">
               <a:buNone/>
             </a:pPr>
             <a:r>
@@ -8995,20 +8921,13 @@
             <a:prstDash val="solid"/>
           </a:ln>
           <a:effectLst>
-            <a:outerShdw blurRad="152400" dist="38100" dir="5400000" algn="bl" rotWithShape="0">
+            <a:outerShdw sx="100000" sy="100000" kx="0" ky="0" algn="bl" rotWithShape="0" blurRad="152400" dist="38100" dir="5400000">
               <a:srgbClr val="0B2027">
                 <a:alpha val="16000"/>
               </a:srgbClr>
             </a:outerShdw>
           </a:effectLst>
         </p:spPr>
-        <p:txBody>
-          <a:bodyPr/>
-          <a:lstStyle/>
-          <a:p>
-            <a:endParaRPr lang="en-US"/>
-          </a:p>
-        </p:txBody>
       </p:sp>
       <p:sp>
         <p:nvSpPr>
@@ -9036,13 +8955,6 @@
             <a:prstDash val="solid"/>
           </a:ln>
         </p:spPr>
-        <p:txBody>
-          <a:bodyPr/>
-          <a:lstStyle/>
-          <a:p>
-            <a:endParaRPr lang="en-US"/>
-          </a:p>
-        </p:txBody>
       </p:sp>
       <p:sp>
         <p:nvSpPr>
@@ -9065,7 +8977,7 @@
           <a:bodyPr wrap="square" lIns="0" tIns="0" rIns="0" bIns="0" rtlCol="0" anchor="ctr"/>
           <a:lstStyle/>
           <a:p>
-            <a:pPr marL="0" indent="0" algn="ctr">
+            <a:pPr algn="ctr" indent="0" marL="0">
               <a:buNone/>
             </a:pPr>
             <a:r>
@@ -9104,7 +9016,7 @@
           <a:bodyPr wrap="square" lIns="0" tIns="0" rIns="0" bIns="0" rtlCol="0" anchor="ctr"/>
           <a:lstStyle/>
           <a:p>
-            <a:pPr marL="0" indent="0">
+            <a:pPr indent="0" marL="0">
               <a:buNone/>
             </a:pPr>
             <a:r>
@@ -9143,7 +9055,7 @@
           <a:bodyPr wrap="square" lIns="0" tIns="0" rIns="0" bIns="0" rtlCol="0" anchor="ctr"/>
           <a:lstStyle/>
           <a:p>
-            <a:pPr marL="0" indent="0">
+            <a:pPr indent="0" marL="0">
               <a:buNone/>
             </a:pPr>
             <a:r>
@@ -9187,20 +9099,13 @@
             <a:prstDash val="solid"/>
           </a:ln>
           <a:effectLst>
-            <a:outerShdw blurRad="152400" dist="38100" dir="5400000" algn="bl" rotWithShape="0">
+            <a:outerShdw sx="100000" sy="100000" kx="0" ky="0" algn="bl" rotWithShape="0" blurRad="152400" dist="38100" dir="5400000">
               <a:srgbClr val="0B2027">
                 <a:alpha val="16000"/>
               </a:srgbClr>
             </a:outerShdw>
           </a:effectLst>
         </p:spPr>
-        <p:txBody>
-          <a:bodyPr/>
-          <a:lstStyle/>
-          <a:p>
-            <a:endParaRPr lang="en-US"/>
-          </a:p>
-        </p:txBody>
       </p:sp>
       <p:sp>
         <p:nvSpPr>
@@ -9228,13 +9133,6 @@
             <a:prstDash val="solid"/>
           </a:ln>
         </p:spPr>
-        <p:txBody>
-          <a:bodyPr/>
-          <a:lstStyle/>
-          <a:p>
-            <a:endParaRPr lang="en-US"/>
-          </a:p>
-        </p:txBody>
       </p:sp>
       <p:sp>
         <p:nvSpPr>
@@ -9257,7 +9155,7 @@
           <a:bodyPr wrap="square" lIns="0" tIns="0" rIns="0" bIns="0" rtlCol="0" anchor="ctr"/>
           <a:lstStyle/>
           <a:p>
-            <a:pPr marL="0" indent="0" algn="ctr">
+            <a:pPr algn="ctr" indent="0" marL="0">
               <a:buNone/>
             </a:pPr>
             <a:r>
@@ -9296,7 +9194,7 @@
           <a:bodyPr wrap="square" lIns="0" tIns="0" rIns="0" bIns="0" rtlCol="0" anchor="ctr"/>
           <a:lstStyle/>
           <a:p>
-            <a:pPr marL="0" indent="0">
+            <a:pPr indent="0" marL="0">
               <a:buNone/>
             </a:pPr>
             <a:r>
@@ -9335,7 +9233,7 @@
           <a:bodyPr wrap="square" lIns="0" tIns="0" rIns="0" bIns="0" rtlCol="0" anchor="ctr"/>
           <a:lstStyle/>
           <a:p>
-            <a:pPr marL="0" indent="0">
+            <a:pPr indent="0" marL="0">
               <a:buNone/>
             </a:pPr>
             <a:r>
@@ -9374,7 +9272,7 @@
           <a:bodyPr wrap="square" lIns="0" tIns="0" rIns="0" bIns="0" rtlCol="0" anchor="ctr"/>
           <a:lstStyle/>
           <a:p>
-            <a:pPr marL="0" indent="0">
+            <a:pPr indent="0" marL="0">
               <a:buNone/>
             </a:pPr>
             <a:r>
@@ -9408,7 +9306,6 @@
         <a:solidFill>
           <a:srgbClr val="FFFFFF"/>
         </a:solidFill>
-        <a:effectLst/>
       </p:bgPr>
     </p:bg>
     <p:spTree>
@@ -9446,11 +9343,11 @@
           <a:bodyPr wrap="square" lIns="0" tIns="0" rIns="0" bIns="0" rtlCol="0" anchor="ctr"/>
           <a:lstStyle/>
           <a:p>
-            <a:pPr marL="0" indent="0">
-              <a:buNone/>
-            </a:pPr>
-            <a:r>
-              <a:rPr lang="en-US" sz="1200" b="1" kern="0" spc="200" dirty="0">
+            <a:pPr indent="0" marL="0">
+              <a:buNone/>
+            </a:pPr>
+            <a:r>
+              <a:rPr lang="en-US" sz="1200" b="1" spc="200" kern="0" dirty="0">
                 <a:solidFill>
                   <a:srgbClr val="028090"/>
                 </a:solidFill>
@@ -9485,7 +9382,7 @@
           <a:bodyPr wrap="square" lIns="0" tIns="0" rIns="0" bIns="0" rtlCol="0" anchor="ctr"/>
           <a:lstStyle/>
           <a:p>
-            <a:pPr marL="0" indent="0">
+            <a:pPr indent="0" marL="0">
               <a:buNone/>
             </a:pPr>
             <a:r>
@@ -9505,7 +9402,7 @@
       </p:sp>
       <p:graphicFrame>
         <p:nvGraphicFramePr>
-          <p:cNvPr id="4" name="Chart 0"/>
+          <p:cNvPr id="4" name="Chart 0" descr=""/>
           <p:cNvGraphicFramePr/>
           <p:nvPr/>
         </p:nvGraphicFramePr>
@@ -9513,9 +9410,9 @@
           <a:off x="566928" y="1572768"/>
           <a:ext cx="7452360" cy="4224528"/>
         </p:xfrm>
-        <a:graphic>
+        <a:graphic xmlns:a="http://schemas.openxmlformats.org/drawingml/2006/main">
           <a:graphicData uri="http://schemas.openxmlformats.org/drawingml/2006/chart">
-            <c:chart xmlns:c="http://schemas.openxmlformats.org/drawingml/2006/chart" xmlns:r="http://schemas.openxmlformats.org/officeDocument/2006/relationships" r:id="rId3"/>
+            <c:chart xmlns:c="http://schemas.openxmlformats.org/drawingml/2006/chart" r:id="rId1"/>
           </a:graphicData>
         </a:graphic>
       </p:graphicFrame>
@@ -9545,20 +9442,13 @@
             <a:prstDash val="solid"/>
           </a:ln>
           <a:effectLst>
-            <a:outerShdw blurRad="152400" dist="38100" dir="5400000" algn="bl" rotWithShape="0">
+            <a:outerShdw sx="100000" sy="100000" kx="0" ky="0" algn="bl" rotWithShape="0" blurRad="152400" dist="38100" dir="5400000">
               <a:srgbClr val="0B2027">
                 <a:alpha val="16000"/>
               </a:srgbClr>
             </a:outerShdw>
           </a:effectLst>
         </p:spPr>
-        <p:txBody>
-          <a:bodyPr/>
-          <a:lstStyle/>
-          <a:p>
-            <a:endParaRPr lang="en-US"/>
-          </a:p>
-        </p:txBody>
       </p:sp>
       <p:sp>
         <p:nvSpPr>
@@ -9581,7 +9471,7 @@
           <a:bodyPr wrap="square" lIns="0" tIns="0" rIns="0" bIns="0" rtlCol="0" anchor="ctr"/>
           <a:lstStyle/>
           <a:p>
-            <a:pPr marL="0" indent="0">
+            <a:pPr indent="0" marL="0">
               <a:buNone/>
             </a:pPr>
             <a:r>
@@ -9620,7 +9510,7 @@
           <a:bodyPr wrap="square" lIns="0" tIns="0" rIns="0" bIns="0" rtlCol="0" anchor="ctr"/>
           <a:lstStyle/>
           <a:p>
-            <a:pPr marL="0" indent="0">
+            <a:pPr indent="0" marL="0">
               <a:buNone/>
             </a:pPr>
             <a:r>
@@ -9659,7 +9549,7 @@
           <a:bodyPr wrap="square" lIns="0" tIns="0" rIns="0" bIns="0" rtlCol="0" anchor="ctr"/>
           <a:lstStyle/>
           <a:p>
-            <a:pPr marL="0" indent="0">
+            <a:pPr indent="0" marL="0">
               <a:lnSpc>
                 <a:spcPts val="1300"/>
               </a:lnSpc>
@@ -9706,20 +9596,13 @@
             <a:prstDash val="solid"/>
           </a:ln>
           <a:effectLst>
-            <a:outerShdw blurRad="152400" dist="38100" dir="5400000" algn="bl" rotWithShape="0">
+            <a:outerShdw sx="100000" sy="100000" kx="0" ky="0" algn="bl" rotWithShape="0" blurRad="152400" dist="38100" dir="5400000">
               <a:srgbClr val="0B2027">
                 <a:alpha val="16000"/>
               </a:srgbClr>
             </a:outerShdw>
           </a:effectLst>
         </p:spPr>
-        <p:txBody>
-          <a:bodyPr/>
-          <a:lstStyle/>
-          <a:p>
-            <a:endParaRPr lang="en-US"/>
-          </a:p>
-        </p:txBody>
       </p:sp>
       <p:sp>
         <p:nvSpPr>
@@ -9742,7 +9625,7 @@
           <a:bodyPr wrap="square" lIns="0" tIns="0" rIns="0" bIns="0" rtlCol="0" anchor="ctr"/>
           <a:lstStyle/>
           <a:p>
-            <a:pPr marL="0" indent="0">
+            <a:pPr indent="0" marL="0">
               <a:buNone/>
             </a:pPr>
             <a:r>
@@ -9781,7 +9664,7 @@
           <a:bodyPr wrap="square" lIns="0" tIns="0" rIns="0" bIns="0" rtlCol="0" anchor="ctr"/>
           <a:lstStyle/>
           <a:p>
-            <a:pPr marL="0" indent="0">
+            <a:pPr indent="0" marL="0">
               <a:buNone/>
             </a:pPr>
             <a:r>
@@ -9820,7 +9703,7 @@
           <a:bodyPr wrap="square" lIns="0" tIns="0" rIns="0" bIns="0" rtlCol="0" anchor="ctr"/>
           <a:lstStyle/>
           <a:p>
-            <a:pPr marL="0" indent="0">
+            <a:pPr indent="0" marL="0">
               <a:lnSpc>
                 <a:spcPts val="1300"/>
               </a:lnSpc>
@@ -9867,20 +9750,13 @@
             <a:prstDash val="solid"/>
           </a:ln>
           <a:effectLst>
-            <a:outerShdw blurRad="152400" dist="38100" dir="5400000" algn="bl" rotWithShape="0">
+            <a:outerShdw sx="100000" sy="100000" kx="0" ky="0" algn="bl" rotWithShape="0" blurRad="152400" dist="38100" dir="5400000">
               <a:srgbClr val="0B2027">
                 <a:alpha val="16000"/>
               </a:srgbClr>
             </a:outerShdw>
           </a:effectLst>
         </p:spPr>
-        <p:txBody>
-          <a:bodyPr/>
-          <a:lstStyle/>
-          <a:p>
-            <a:endParaRPr lang="en-US"/>
-          </a:p>
-        </p:txBody>
       </p:sp>
       <p:sp>
         <p:nvSpPr>
@@ -9903,7 +9779,7 @@
           <a:bodyPr wrap="square" lIns="0" tIns="0" rIns="0" bIns="0" rtlCol="0" anchor="ctr"/>
           <a:lstStyle/>
           <a:p>
-            <a:pPr marL="0" indent="0">
+            <a:pPr indent="0" marL="0">
               <a:buNone/>
             </a:pPr>
             <a:r>
@@ -9942,7 +9818,7 @@
           <a:bodyPr wrap="square" lIns="0" tIns="0" rIns="0" bIns="0" rtlCol="0" anchor="ctr"/>
           <a:lstStyle/>
           <a:p>
-            <a:pPr marL="0" indent="0">
+            <a:pPr indent="0" marL="0">
               <a:buNone/>
             </a:pPr>
             <a:r>
@@ -9981,7 +9857,7 @@
           <a:bodyPr wrap="square" lIns="0" tIns="0" rIns="0" bIns="0" rtlCol="0" anchor="ctr"/>
           <a:lstStyle/>
           <a:p>
-            <a:pPr marL="0" indent="0">
+            <a:pPr indent="0" marL="0">
               <a:lnSpc>
                 <a:spcPts val="1300"/>
               </a:lnSpc>
@@ -10023,7 +9899,7 @@
           <a:bodyPr wrap="square" lIns="0" tIns="0" rIns="0" bIns="0" rtlCol="0" anchor="ctr"/>
           <a:lstStyle/>
           <a:p>
-            <a:pPr marL="0" indent="0">
+            <a:pPr indent="0" marL="0">
               <a:buNone/>
             </a:pPr>
             <a:r>
@@ -10057,7 +9933,6 @@
         <a:solidFill>
           <a:srgbClr val="FFFFFF"/>
         </a:solidFill>
-        <a:effectLst/>
       </p:bgPr>
     </p:bg>
     <p:spTree>
@@ -10095,11 +9970,11 @@
           <a:bodyPr wrap="square" lIns="0" tIns="0" rIns="0" bIns="0" rtlCol="0" anchor="ctr"/>
           <a:lstStyle/>
           <a:p>
-            <a:pPr marL="0" indent="0">
-              <a:buNone/>
-            </a:pPr>
-            <a:r>
-              <a:rPr lang="en-US" sz="1200" b="1" kern="0" spc="200" dirty="0">
+            <a:pPr indent="0" marL="0">
+              <a:buNone/>
+            </a:pPr>
+            <a:r>
+              <a:rPr lang="en-US" sz="1200" b="1" spc="200" kern="0" dirty="0">
                 <a:solidFill>
                   <a:srgbClr val="028090"/>
                 </a:solidFill>
@@ -10134,7 +10009,7 @@
           <a:bodyPr wrap="square" lIns="0" tIns="0" rIns="0" bIns="0" rtlCol="0" anchor="ctr"/>
           <a:lstStyle/>
           <a:p>
-            <a:pPr marL="0" indent="0">
+            <a:pPr indent="0" marL="0">
               <a:buNone/>
             </a:pPr>
             <a:r>
@@ -10178,20 +10053,13 @@
             <a:prstDash val="solid"/>
           </a:ln>
           <a:effectLst>
-            <a:outerShdw blurRad="152400" dist="38100" dir="5400000" algn="bl" rotWithShape="0">
+            <a:outerShdw sx="100000" sy="100000" kx="0" ky="0" algn="bl" rotWithShape="0" blurRad="152400" dist="38100" dir="5400000">
               <a:srgbClr val="0B2027">
                 <a:alpha val="16000"/>
               </a:srgbClr>
             </a:outerShdw>
           </a:effectLst>
         </p:spPr>
-        <p:txBody>
-          <a:bodyPr/>
-          <a:lstStyle/>
-          <a:p>
-            <a:endParaRPr lang="en-US"/>
-          </a:p>
-        </p:txBody>
       </p:sp>
       <p:sp>
         <p:nvSpPr>
@@ -10219,13 +10087,6 @@
             <a:prstDash val="solid"/>
           </a:ln>
         </p:spPr>
-        <p:txBody>
-          <a:bodyPr/>
-          <a:lstStyle/>
-          <a:p>
-            <a:endParaRPr lang="en-US"/>
-          </a:p>
-        </p:txBody>
       </p:sp>
       <p:sp>
         <p:nvSpPr>
@@ -10248,7 +10109,7 @@
           <a:bodyPr wrap="square" lIns="0" tIns="0" rIns="0" bIns="0" rtlCol="0" anchor="ctr"/>
           <a:lstStyle/>
           <a:p>
-            <a:pPr marL="0" indent="0" algn="ctr">
+            <a:pPr algn="ctr" indent="0" marL="0">
               <a:buNone/>
             </a:pPr>
             <a:r>
@@ -10287,7 +10148,7 @@
           <a:bodyPr wrap="square" lIns="0" tIns="0" rIns="0" bIns="0" rtlCol="0" anchor="ctr"/>
           <a:lstStyle/>
           <a:p>
-            <a:pPr marL="0" indent="0">
+            <a:pPr indent="0" marL="0">
               <a:buNone/>
             </a:pPr>
             <a:r>
@@ -10326,7 +10187,7 @@
           <a:bodyPr wrap="square" lIns="0" tIns="0" rIns="0" bIns="0" rtlCol="0" anchor="ctr"/>
           <a:lstStyle/>
           <a:p>
-            <a:pPr marL="0" indent="0">
+            <a:pPr indent="0" marL="0">
               <a:lnSpc>
                 <a:spcPts val="1500"/>
               </a:lnSpc>
@@ -10373,20 +10234,13 @@
             <a:prstDash val="solid"/>
           </a:ln>
           <a:effectLst>
-            <a:outerShdw blurRad="152400" dist="38100" dir="5400000" algn="bl" rotWithShape="0">
+            <a:outerShdw sx="100000" sy="100000" kx="0" ky="0" algn="bl" rotWithShape="0" blurRad="152400" dist="38100" dir="5400000">
               <a:srgbClr val="0B2027">
                 <a:alpha val="16000"/>
               </a:srgbClr>
             </a:outerShdw>
           </a:effectLst>
         </p:spPr>
-        <p:txBody>
-          <a:bodyPr/>
-          <a:lstStyle/>
-          <a:p>
-            <a:endParaRPr lang="en-US"/>
-          </a:p>
-        </p:txBody>
       </p:sp>
       <p:sp>
         <p:nvSpPr>
@@ -10414,13 +10268,6 @@
             <a:prstDash val="solid"/>
           </a:ln>
         </p:spPr>
-        <p:txBody>
-          <a:bodyPr/>
-          <a:lstStyle/>
-          <a:p>
-            <a:endParaRPr lang="en-US"/>
-          </a:p>
-        </p:txBody>
       </p:sp>
       <p:sp>
         <p:nvSpPr>
@@ -10443,7 +10290,7 @@
           <a:bodyPr wrap="square" lIns="0" tIns="0" rIns="0" bIns="0" rtlCol="0" anchor="ctr"/>
           <a:lstStyle/>
           <a:p>
-            <a:pPr marL="0" indent="0" algn="ctr">
+            <a:pPr algn="ctr" indent="0" marL="0">
               <a:buNone/>
             </a:pPr>
             <a:r>
@@ -10482,7 +10329,7 @@
           <a:bodyPr wrap="square" lIns="0" tIns="0" rIns="0" bIns="0" rtlCol="0" anchor="ctr"/>
           <a:lstStyle/>
           <a:p>
-            <a:pPr marL="0" indent="0">
+            <a:pPr indent="0" marL="0">
               <a:buNone/>
             </a:pPr>
             <a:r>
@@ -10521,7 +10368,7 @@
           <a:bodyPr wrap="square" lIns="0" tIns="0" rIns="0" bIns="0" rtlCol="0" anchor="ctr"/>
           <a:lstStyle/>
           <a:p>
-            <a:pPr marL="0" indent="0">
+            <a:pPr indent="0" marL="0">
               <a:lnSpc>
                 <a:spcPts val="1500"/>
               </a:lnSpc>
@@ -10568,20 +10415,13 @@
             <a:prstDash val="solid"/>
           </a:ln>
           <a:effectLst>
-            <a:outerShdw blurRad="152400" dist="38100" dir="5400000" algn="bl" rotWithShape="0">
+            <a:outerShdw sx="100000" sy="100000" kx="0" ky="0" algn="bl" rotWithShape="0" blurRad="152400" dist="38100" dir="5400000">
               <a:srgbClr val="0B2027">
                 <a:alpha val="16000"/>
               </a:srgbClr>
             </a:outerShdw>
           </a:effectLst>
         </p:spPr>
-        <p:txBody>
-          <a:bodyPr/>
-          <a:lstStyle/>
-          <a:p>
-            <a:endParaRPr lang="en-US"/>
-          </a:p>
-        </p:txBody>
       </p:sp>
       <p:sp>
         <p:nvSpPr>
@@ -10609,13 +10449,6 @@
             <a:prstDash val="solid"/>
           </a:ln>
         </p:spPr>
-        <p:txBody>
-          <a:bodyPr/>
-          <a:lstStyle/>
-          <a:p>
-            <a:endParaRPr lang="en-US"/>
-          </a:p>
-        </p:txBody>
       </p:sp>
       <p:sp>
         <p:nvSpPr>
@@ -10638,7 +10471,7 @@
           <a:bodyPr wrap="square" lIns="0" tIns="0" rIns="0" bIns="0" rtlCol="0" anchor="ctr"/>
           <a:lstStyle/>
           <a:p>
-            <a:pPr marL="0" indent="0" algn="ctr">
+            <a:pPr algn="ctr" indent="0" marL="0">
               <a:buNone/>
             </a:pPr>
             <a:r>
@@ -10677,7 +10510,7 @@
           <a:bodyPr wrap="square" lIns="0" tIns="0" rIns="0" bIns="0" rtlCol="0" anchor="ctr"/>
           <a:lstStyle/>
           <a:p>
-            <a:pPr marL="0" indent="0">
+            <a:pPr indent="0" marL="0">
               <a:buNone/>
             </a:pPr>
             <a:r>
@@ -10716,7 +10549,7 @@
           <a:bodyPr wrap="square" lIns="0" tIns="0" rIns="0" bIns="0" rtlCol="0" anchor="ctr"/>
           <a:lstStyle/>
           <a:p>
-            <a:pPr marL="0" indent="0">
+            <a:pPr indent="0" marL="0">
               <a:lnSpc>
                 <a:spcPts val="1500"/>
               </a:lnSpc>
@@ -10763,20 +10596,13 @@
             <a:prstDash val="solid"/>
           </a:ln>
           <a:effectLst>
-            <a:outerShdw blurRad="152400" dist="38100" dir="5400000" algn="bl" rotWithShape="0">
+            <a:outerShdw sx="100000" sy="100000" kx="0" ky="0" algn="bl" rotWithShape="0" blurRad="152400" dist="38100" dir="5400000">
               <a:srgbClr val="0B2027">
                 <a:alpha val="16000"/>
               </a:srgbClr>
             </a:outerShdw>
           </a:effectLst>
         </p:spPr>
-        <p:txBody>
-          <a:bodyPr/>
-          <a:lstStyle/>
-          <a:p>
-            <a:endParaRPr lang="en-US"/>
-          </a:p>
-        </p:txBody>
       </p:sp>
       <p:sp>
         <p:nvSpPr>
@@ -10804,13 +10630,6 @@
             <a:prstDash val="solid"/>
           </a:ln>
         </p:spPr>
-        <p:txBody>
-          <a:bodyPr/>
-          <a:lstStyle/>
-          <a:p>
-            <a:endParaRPr lang="en-US"/>
-          </a:p>
-        </p:txBody>
       </p:sp>
       <p:sp>
         <p:nvSpPr>
@@ -10833,7 +10652,7 @@
           <a:bodyPr wrap="square" lIns="0" tIns="0" rIns="0" bIns="0" rtlCol="0" anchor="ctr"/>
           <a:lstStyle/>
           <a:p>
-            <a:pPr marL="0" indent="0" algn="ctr">
+            <a:pPr algn="ctr" indent="0" marL="0">
               <a:buNone/>
             </a:pPr>
             <a:r>
@@ -10872,7 +10691,7 @@
           <a:bodyPr wrap="square" lIns="0" tIns="0" rIns="0" bIns="0" rtlCol="0" anchor="ctr"/>
           <a:lstStyle/>
           <a:p>
-            <a:pPr marL="0" indent="0">
+            <a:pPr indent="0" marL="0">
               <a:buNone/>
             </a:pPr>
             <a:r>
@@ -10911,7 +10730,7 @@
           <a:bodyPr wrap="square" lIns="0" tIns="0" rIns="0" bIns="0" rtlCol="0" anchor="ctr"/>
           <a:lstStyle/>
           <a:p>
-            <a:pPr marL="0" indent="0">
+            <a:pPr indent="0" marL="0">
               <a:lnSpc>
                 <a:spcPts val="1500"/>
               </a:lnSpc>
@@ -10953,7 +10772,7 @@
           <a:bodyPr wrap="square" lIns="0" tIns="0" rIns="0" bIns="0" rtlCol="0" anchor="ctr"/>
           <a:lstStyle/>
           <a:p>
-            <a:pPr marL="0" indent="0">
+            <a:pPr indent="0" marL="0">
               <a:buNone/>
             </a:pPr>
             <a:r>
@@ -10987,7 +10806,6 @@
         <a:solidFill>
           <a:srgbClr val="0B2027"/>
         </a:solidFill>
-        <a:effectLst/>
       </p:bgPr>
     </p:bg>
     <p:spTree>
@@ -11025,11 +10843,11 @@
           <a:bodyPr wrap="square" lIns="0" tIns="0" rIns="0" bIns="0" rtlCol="0" anchor="ctr"/>
           <a:lstStyle/>
           <a:p>
-            <a:pPr marL="0" indent="0">
-              <a:buNone/>
-            </a:pPr>
-            <a:r>
-              <a:rPr lang="en-US" sz="1200" b="1" kern="0" spc="200" dirty="0">
+            <a:pPr indent="0" marL="0">
+              <a:buNone/>
+            </a:pPr>
+            <a:r>
+              <a:rPr lang="en-US" sz="1200" b="1" spc="200" kern="0" dirty="0">
                 <a:solidFill>
                   <a:srgbClr val="02C39A"/>
                 </a:solidFill>
@@ -11064,7 +10882,7 @@
           <a:bodyPr wrap="square" lIns="0" tIns="0" rIns="0" bIns="0" rtlCol="0" anchor="ctr"/>
           <a:lstStyle/>
           <a:p>
-            <a:pPr marL="0" indent="0">
+            <a:pPr indent="0" marL="0">
               <a:buNone/>
             </a:pPr>
             <a:r>
@@ -11103,7 +10921,7 @@
           <a:bodyPr wrap="square" lIns="0" tIns="0" rIns="0" bIns="0" rtlCol="0" anchor="ctr"/>
           <a:lstStyle/>
           <a:p>
-            <a:pPr marL="0" indent="0">
+            <a:pPr indent="0" marL="0">
               <a:buNone/>
             </a:pPr>
             <a:r>
@@ -11115,7 +10933,7 @@
                 <a:ea typeface="Calibri" pitchFamily="34" charset="-122"/>
                 <a:cs typeface="Calibri" pitchFamily="34" charset="-120"/>
               </a:rPr>
-              <a:t>All three were in our original plan. We built enough of each to measure it, then cut it.</a:t>
+              <a:t>All four were in our original plan. We built enough of each to measure it, then cut it.</a:t>
             </a:r>
             <a:endParaRPr lang="en-US" sz="1500" dirty="0"/>
           </a:p>
@@ -11130,11 +10948,11 @@
         <p:spPr>
           <a:xfrm>
             <a:off x="566928" y="2011680"/>
-            <a:ext cx="3538728" cy="2962656"/>
+            <a:ext cx="2624328" cy="2962656"/>
           </a:xfrm>
           <a:prstGeom prst="roundRect">
             <a:avLst>
-              <a:gd name="adj" fmla="val 1852"/>
+              <a:gd name="adj" fmla="val 2091"/>
             </a:avLst>
           </a:prstGeom>
           <a:solidFill>
@@ -11147,13 +10965,6 @@
             <a:prstDash val="solid"/>
           </a:ln>
         </p:spPr>
-        <p:txBody>
-          <a:bodyPr/>
-          <a:lstStyle/>
-          <a:p>
-            <a:endParaRPr lang="en-US"/>
-          </a:p>
-        </p:txBody>
       </p:sp>
       <p:sp>
         <p:nvSpPr>
@@ -11163,24 +10974,24 @@
         </p:nvSpPr>
         <p:spPr>
           <a:xfrm>
-            <a:off x="841248" y="2231136"/>
-            <a:ext cx="3017520" cy="329184"/>
-          </a:xfrm>
-          <a:prstGeom prst="rect">
-            <a:avLst/>
-          </a:prstGeom>
-          <a:noFill/>
-          <a:ln/>
-        </p:spPr>
-        <p:txBody>
-          <a:bodyPr wrap="square" lIns="0" tIns="0" rIns="0" bIns="0" rtlCol="0" anchor="ctr"/>
-          <a:lstStyle/>
-          <a:p>
-            <a:pPr marL="0" indent="0">
-              <a:buNone/>
-            </a:pPr>
-            <a:r>
-              <a:rPr lang="en-US" sz="1550" b="1" dirty="0">
+            <a:off x="804672" y="2212848"/>
+            <a:ext cx="2194560" cy="329184"/>
+          </a:xfrm>
+          <a:prstGeom prst="rect">
+            <a:avLst/>
+          </a:prstGeom>
+          <a:noFill/>
+          <a:ln/>
+        </p:spPr>
+        <p:txBody>
+          <a:bodyPr wrap="square" lIns="0" tIns="0" rIns="0" bIns="0" rtlCol="0" anchor="ctr"/>
+          <a:lstStyle/>
+          <a:p>
+            <a:pPr indent="0" marL="0">
+              <a:buNone/>
+            </a:pPr>
+            <a:r>
+              <a:rPr lang="en-US" sz="1450" b="1" dirty="0">
                 <a:solidFill>
                   <a:srgbClr val="FFFFFF"/>
                 </a:solidFill>
@@ -11190,7 +11001,7 @@
               </a:rPr>
               <a:t>LLM reranker</a:t>
             </a:r>
-            <a:endParaRPr lang="en-US" sz="1550" dirty="0"/>
+            <a:endParaRPr lang="en-US" sz="1450" dirty="0"/>
           </a:p>
         </p:txBody>
       </p:sp>
@@ -11202,24 +11013,24 @@
         </p:nvSpPr>
         <p:spPr>
           <a:xfrm>
-            <a:off x="841248" y="2615184"/>
-            <a:ext cx="3017520" cy="548640"/>
-          </a:xfrm>
-          <a:prstGeom prst="rect">
-            <a:avLst/>
-          </a:prstGeom>
-          <a:noFill/>
-          <a:ln/>
-        </p:spPr>
-        <p:txBody>
-          <a:bodyPr wrap="square" lIns="0" tIns="0" rIns="0" bIns="0" rtlCol="0" anchor="ctr"/>
-          <a:lstStyle/>
-          <a:p>
-            <a:pPr marL="0" indent="0">
-              <a:buNone/>
-            </a:pPr>
-            <a:r>
-              <a:rPr lang="en-US" sz="3000" b="1" dirty="0">
+            <a:off x="804672" y="2578608"/>
+            <a:ext cx="2194560" cy="530352"/>
+          </a:xfrm>
+          <a:prstGeom prst="rect">
+            <a:avLst/>
+          </a:prstGeom>
+          <a:noFill/>
+          <a:ln/>
+        </p:spPr>
+        <p:txBody>
+          <a:bodyPr wrap="square" lIns="0" tIns="0" rIns="0" bIns="0" rtlCol="0" anchor="ctr"/>
+          <a:lstStyle/>
+          <a:p>
+            <a:pPr indent="0" marL="0">
+              <a:buNone/>
+            </a:pPr>
+            <a:r>
+              <a:rPr lang="en-US" sz="2600" b="1" dirty="0">
                 <a:solidFill>
                   <a:srgbClr val="FF8A80"/>
                 </a:solidFill>
@@ -11229,7 +11040,7 @@
               </a:rPr>
               <a:t>-0.011</a:t>
             </a:r>
-            <a:endParaRPr lang="en-US" sz="3000" dirty="0"/>
+            <a:endParaRPr lang="en-US" sz="2600" dirty="0"/>
           </a:p>
         </p:txBody>
       </p:sp>
@@ -11241,27 +11052,27 @@
         </p:nvSpPr>
         <p:spPr>
           <a:xfrm>
-            <a:off x="841248" y="3255264"/>
-            <a:ext cx="3017520" cy="1554480"/>
-          </a:xfrm>
-          <a:prstGeom prst="rect">
-            <a:avLst/>
-          </a:prstGeom>
-          <a:noFill/>
-          <a:ln/>
-        </p:spPr>
-        <p:txBody>
-          <a:bodyPr wrap="square" lIns="0" tIns="0" rIns="0" bIns="0" rtlCol="0" anchor="ctr"/>
-          <a:lstStyle/>
-          <a:p>
-            <a:pPr marL="0" indent="0">
+            <a:off x="804672" y="3182112"/>
+            <a:ext cx="2176272" cy="1664208"/>
+          </a:xfrm>
+          <a:prstGeom prst="rect">
+            <a:avLst/>
+          </a:prstGeom>
+          <a:noFill/>
+          <a:ln/>
+        </p:spPr>
+        <p:txBody>
+          <a:bodyPr wrap="square" lIns="0" tIns="0" rIns="0" bIns="0" rtlCol="0" anchor="ctr"/>
+          <a:lstStyle/>
+          <a:p>
+            <a:pPr indent="0" marL="0">
               <a:lnSpc>
-                <a:spcPts val="1500"/>
+                <a:spcPts val="1400"/>
               </a:lnSpc>
               <a:buNone/>
             </a:pPr>
             <a:r>
-              <a:rPr lang="en-US" sz="1200" dirty="0">
+              <a:rPr lang="en-US" sz="1100" dirty="0">
                 <a:solidFill>
                   <a:srgbClr val="9FB4B8"/>
                 </a:solidFill>
@@ -11269,9 +11080,9 @@
                 <a:ea typeface="Calibri" pitchFamily="34" charset="-122"/>
                 <a:cs typeface="Calibri" pitchFamily="34" charset="-120"/>
               </a:rPr>
-              <a:t>Tested on 40 real sessions. It lifted ambiguous cases (+0.041 MRR) but demoted already-correct ones (-0.107). 104 of 200 sessions are already rank-1 and can only lose.</a:t>
-            </a:r>
-            <a:endParaRPr lang="en-US" sz="1200" dirty="0"/>
+              <a:t>Tested on 40 real sessions. Lifted ambiguous cases (+0.041 MRR) but demoted already-correct ones (-0.107). Half our sessions are already rank-1 and can only lose.</a:t>
+            </a:r>
+            <a:endParaRPr lang="en-US" sz="1100" dirty="0"/>
           </a:p>
         </p:txBody>
       </p:sp>
@@ -11283,12 +11094,12 @@
         </p:nvSpPr>
         <p:spPr>
           <a:xfrm>
-            <a:off x="4343400" y="2011680"/>
-            <a:ext cx="3538728" cy="2962656"/>
+            <a:off x="3392424" y="2011680"/>
+            <a:ext cx="2624328" cy="2962656"/>
           </a:xfrm>
           <a:prstGeom prst="roundRect">
             <a:avLst>
-              <a:gd name="adj" fmla="val 1852"/>
+              <a:gd name="adj" fmla="val 2091"/>
             </a:avLst>
           </a:prstGeom>
           <a:solidFill>
@@ -11301,13 +11112,6 @@
             <a:prstDash val="solid"/>
           </a:ln>
         </p:spPr>
-        <p:txBody>
-          <a:bodyPr/>
-          <a:lstStyle/>
-          <a:p>
-            <a:endParaRPr lang="en-US"/>
-          </a:p>
-        </p:txBody>
       </p:sp>
       <p:sp>
         <p:nvSpPr>
@@ -11317,24 +11121,24 @@
         </p:nvSpPr>
         <p:spPr>
           <a:xfrm>
-            <a:off x="4617720" y="2231136"/>
-            <a:ext cx="3017520" cy="329184"/>
-          </a:xfrm>
-          <a:prstGeom prst="rect">
-            <a:avLst/>
-          </a:prstGeom>
-          <a:noFill/>
-          <a:ln/>
-        </p:spPr>
-        <p:txBody>
-          <a:bodyPr wrap="square" lIns="0" tIns="0" rIns="0" bIns="0" rtlCol="0" anchor="ctr"/>
-          <a:lstStyle/>
-          <a:p>
-            <a:pPr marL="0" indent="0">
-              <a:buNone/>
-            </a:pPr>
-            <a:r>
-              <a:rPr lang="en-US" sz="1550" b="1" dirty="0">
+            <a:off x="3630168" y="2212848"/>
+            <a:ext cx="2194560" cy="329184"/>
+          </a:xfrm>
+          <a:prstGeom prst="rect">
+            <a:avLst/>
+          </a:prstGeom>
+          <a:noFill/>
+          <a:ln/>
+        </p:spPr>
+        <p:txBody>
+          <a:bodyPr wrap="square" lIns="0" tIns="0" rIns="0" bIns="0" rtlCol="0" anchor="ctr"/>
+          <a:lstStyle/>
+          <a:p>
+            <a:pPr indent="0" marL="0">
+              <a:buNone/>
+            </a:pPr>
+            <a:r>
+              <a:rPr lang="en-US" sz="1450" b="1" dirty="0">
                 <a:solidFill>
                   <a:srgbClr val="FFFFFF"/>
                 </a:solidFill>
@@ -11344,7 +11148,7 @@
               </a:rPr>
               <a:t>Profile boosting</a:t>
             </a:r>
-            <a:endParaRPr lang="en-US" sz="1550" dirty="0"/>
+            <a:endParaRPr lang="en-US" sz="1450" dirty="0"/>
           </a:p>
         </p:txBody>
       </p:sp>
@@ -11356,24 +11160,24 @@
         </p:nvSpPr>
         <p:spPr>
           <a:xfrm>
-            <a:off x="4617720" y="2615184"/>
-            <a:ext cx="3017520" cy="548640"/>
-          </a:xfrm>
-          <a:prstGeom prst="rect">
-            <a:avLst/>
-          </a:prstGeom>
-          <a:noFill/>
-          <a:ln/>
-        </p:spPr>
-        <p:txBody>
-          <a:bodyPr wrap="square" lIns="0" tIns="0" rIns="0" bIns="0" rtlCol="0" anchor="ctr"/>
-          <a:lstStyle/>
-          <a:p>
-            <a:pPr marL="0" indent="0">
-              <a:buNone/>
-            </a:pPr>
-            <a:r>
-              <a:rPr lang="en-US" sz="3000" b="1" dirty="0">
+            <a:off x="3630168" y="2578608"/>
+            <a:ext cx="2194560" cy="530352"/>
+          </a:xfrm>
+          <a:prstGeom prst="rect">
+            <a:avLst/>
+          </a:prstGeom>
+          <a:noFill/>
+          <a:ln/>
+        </p:spPr>
+        <p:txBody>
+          <a:bodyPr wrap="square" lIns="0" tIns="0" rIns="0" bIns="0" rtlCol="0" anchor="ctr"/>
+          <a:lstStyle/>
+          <a:p>
+            <a:pPr indent="0" marL="0">
+              <a:buNone/>
+            </a:pPr>
+            <a:r>
+              <a:rPr lang="en-US" sz="2600" b="1" dirty="0">
                 <a:solidFill>
                   <a:srgbClr val="FF8A80"/>
                 </a:solidFill>
@@ -11383,7 +11187,7 @@
               </a:rPr>
               <a:t>-0.036</a:t>
             </a:r>
-            <a:endParaRPr lang="en-US" sz="3000" dirty="0"/>
+            <a:endParaRPr lang="en-US" sz="2600" dirty="0"/>
           </a:p>
         </p:txBody>
       </p:sp>
@@ -11395,27 +11199,27 @@
         </p:nvSpPr>
         <p:spPr>
           <a:xfrm>
-            <a:off x="4617720" y="3255264"/>
-            <a:ext cx="3017520" cy="1554480"/>
-          </a:xfrm>
-          <a:prstGeom prst="rect">
-            <a:avLst/>
-          </a:prstGeom>
-          <a:noFill/>
-          <a:ln/>
-        </p:spPr>
-        <p:txBody>
-          <a:bodyPr wrap="square" lIns="0" tIns="0" rIns="0" bIns="0" rtlCol="0" anchor="ctr"/>
-          <a:lstStyle/>
-          <a:p>
-            <a:pPr marL="0" indent="0">
+            <a:off x="3630168" y="3182112"/>
+            <a:ext cx="2176272" cy="1664208"/>
+          </a:xfrm>
+          <a:prstGeom prst="rect">
+            <a:avLst/>
+          </a:prstGeom>
+          <a:noFill/>
+          <a:ln/>
+        </p:spPr>
+        <p:txBody>
+          <a:bodyPr wrap="square" lIns="0" tIns="0" rIns="0" bIns="0" rtlCol="0" anchor="ctr"/>
+          <a:lstStyle/>
+          <a:p>
+            <a:pPr indent="0" marL="0">
               <a:lnSpc>
-                <a:spcPts val="1500"/>
+                <a:spcPts val="1400"/>
               </a:lnSpc>
               <a:buNone/>
             </a:pPr>
             <a:r>
-              <a:rPr lang="en-US" sz="1200" dirty="0">
+              <a:rPr lang="en-US" sz="1100" dirty="0">
                 <a:solidFill>
                   <a:srgbClr val="9FB4B8"/>
                 </a:solidFill>
@@ -11423,9 +11227,9 @@
                 <a:ea typeface="Calibri" pitchFamily="34" charset="-122"/>
                 <a:cs typeface="Calibri" pitchFamily="34" charset="-120"/>
               </a:rPr>
-              <a:t>preference_tags match the target 1.72x more than a random product — but only 1.12x against the candidates actually competing. Real lift against the wrong baseline.</a:t>
-            </a:r>
-            <a:endParaRPr lang="en-US" sz="1200" dirty="0"/>
+              <a:t>preference_tags match the target 1.72x more than a random product — but only 1.12x against the candidates actually competing.</a:t>
+            </a:r>
+            <a:endParaRPr lang="en-US" sz="1100" dirty="0"/>
           </a:p>
         </p:txBody>
       </p:sp>
@@ -11437,12 +11241,12 @@
         </p:nvSpPr>
         <p:spPr>
           <a:xfrm>
-            <a:off x="8119872" y="2011680"/>
-            <a:ext cx="3538728" cy="2962656"/>
+            <a:off x="6217920" y="2011680"/>
+            <a:ext cx="2624328" cy="2962656"/>
           </a:xfrm>
           <a:prstGeom prst="roundRect">
             <a:avLst>
-              <a:gd name="adj" fmla="val 1852"/>
+              <a:gd name="adj" fmla="val 2091"/>
             </a:avLst>
           </a:prstGeom>
           <a:solidFill>
@@ -11455,13 +11259,6 @@
             <a:prstDash val="solid"/>
           </a:ln>
         </p:spPr>
-        <p:txBody>
-          <a:bodyPr/>
-          <a:lstStyle/>
-          <a:p>
-            <a:endParaRPr lang="en-US"/>
-          </a:p>
-        </p:txBody>
       </p:sp>
       <p:sp>
         <p:nvSpPr>
@@ -11471,24 +11268,24 @@
         </p:nvSpPr>
         <p:spPr>
           <a:xfrm>
-            <a:off x="8394192" y="2231136"/>
-            <a:ext cx="3017520" cy="329184"/>
-          </a:xfrm>
-          <a:prstGeom prst="rect">
-            <a:avLst/>
-          </a:prstGeom>
-          <a:noFill/>
-          <a:ln/>
-        </p:spPr>
-        <p:txBody>
-          <a:bodyPr wrap="square" lIns="0" tIns="0" rIns="0" bIns="0" rtlCol="0" anchor="ctr"/>
-          <a:lstStyle/>
-          <a:p>
-            <a:pPr marL="0" indent="0">
-              <a:buNone/>
-            </a:pPr>
-            <a:r>
-              <a:rPr lang="en-US" sz="1550" b="1" dirty="0">
+            <a:off x="6455664" y="2212848"/>
+            <a:ext cx="2194560" cy="329184"/>
+          </a:xfrm>
+          <a:prstGeom prst="rect">
+            <a:avLst/>
+          </a:prstGeom>
+          <a:noFill/>
+          <a:ln/>
+        </p:spPr>
+        <p:txBody>
+          <a:bodyPr wrap="square" lIns="0" tIns="0" rIns="0" bIns="0" rtlCol="0" anchor="ctr"/>
+          <a:lstStyle/>
+          <a:p>
+            <a:pPr indent="0" marL="0">
+              <a:buNone/>
+            </a:pPr>
+            <a:r>
+              <a:rPr lang="en-US" sz="1450" b="1" dirty="0">
                 <a:solidFill>
                   <a:srgbClr val="FFFFFF"/>
                 </a:solidFill>
@@ -11496,9 +11293,9 @@
                 <a:ea typeface="Calibri" pitchFamily="34" charset="-122"/>
                 <a:cs typeface="Calibri" pitchFamily="34" charset="-120"/>
               </a:rPr>
-              <a:t>Dense retrieval</a:t>
-            </a:r>
-            <a:endParaRPr lang="en-US" sz="1550" dirty="0"/>
+              <a:t>Title weighting</a:t>
+            </a:r>
+            <a:endParaRPr lang="en-US" sz="1450" dirty="0"/>
           </a:p>
         </p:txBody>
       </p:sp>
@@ -11510,24 +11307,24 @@
         </p:nvSpPr>
         <p:spPr>
           <a:xfrm>
-            <a:off x="8394192" y="2615184"/>
-            <a:ext cx="3017520" cy="548640"/>
-          </a:xfrm>
-          <a:prstGeom prst="rect">
-            <a:avLst/>
-          </a:prstGeom>
-          <a:noFill/>
-          <a:ln/>
-        </p:spPr>
-        <p:txBody>
-          <a:bodyPr wrap="square" lIns="0" tIns="0" rIns="0" bIns="0" rtlCol="0" anchor="ctr"/>
-          <a:lstStyle/>
-          <a:p>
-            <a:pPr marL="0" indent="0">
-              <a:buNone/>
-            </a:pPr>
-            <a:r>
-              <a:rPr lang="en-US" sz="3000" b="1" dirty="0">
+            <a:off x="6455664" y="2578608"/>
+            <a:ext cx="2194560" cy="530352"/>
+          </a:xfrm>
+          <a:prstGeom prst="rect">
+            <a:avLst/>
+          </a:prstGeom>
+          <a:noFill/>
+          <a:ln/>
+        </p:spPr>
+        <p:txBody>
+          <a:bodyPr wrap="square" lIns="0" tIns="0" rIns="0" bIns="0" rtlCol="0" anchor="ctr"/>
+          <a:lstStyle/>
+          <a:p>
+            <a:pPr indent="0" marL="0">
+              <a:buNone/>
+            </a:pPr>
+            <a:r>
+              <a:rPr lang="en-US" sz="2600" b="1" dirty="0">
                 <a:solidFill>
                   <a:srgbClr val="FF8A80"/>
                 </a:solidFill>
@@ -11535,9 +11332,9 @@
                 <a:ea typeface="Cambria" pitchFamily="34" charset="-122"/>
                 <a:cs typeface="Cambria" pitchFamily="34" charset="-120"/>
               </a:rPr>
-              <a:t>no gain</a:t>
-            </a:r>
-            <a:endParaRPr lang="en-US" sz="3000" dirty="0"/>
+              <a:t>-0.022</a:t>
+            </a:r>
+            <a:endParaRPr lang="en-US" sz="2600" dirty="0"/>
           </a:p>
         </p:txBody>
       </p:sp>
@@ -11549,27 +11346,27 @@
         </p:nvSpPr>
         <p:spPr>
           <a:xfrm>
-            <a:off x="8394192" y="3255264"/>
-            <a:ext cx="3017520" cy="1554480"/>
-          </a:xfrm>
-          <a:prstGeom prst="rect">
-            <a:avLst/>
-          </a:prstGeom>
-          <a:noFill/>
-          <a:ln/>
-        </p:spPr>
-        <p:txBody>
-          <a:bodyPr wrap="square" lIns="0" tIns="0" rIns="0" bIns="0" rtlCol="0" anchor="ctr"/>
-          <a:lstStyle/>
-          <a:p>
-            <a:pPr marL="0" indent="0">
+            <a:off x="6455664" y="3182112"/>
+            <a:ext cx="2176272" cy="1664208"/>
+          </a:xfrm>
+          <a:prstGeom prst="rect">
+            <a:avLst/>
+          </a:prstGeom>
+          <a:noFill/>
+          <a:ln/>
+        </p:spPr>
+        <p:txBody>
+          <a:bodyPr wrap="square" lIns="0" tIns="0" rIns="0" bIns="0" rtlCol="0" anchor="ctr"/>
+          <a:lstStyle/>
+          <a:p>
+            <a:pPr indent="0" marL="0">
               <a:lnSpc>
-                <a:spcPts val="1500"/>
+                <a:spcPts val="1400"/>
               </a:lnSpc>
               <a:buNone/>
             </a:pPr>
             <a:r>
-              <a:rPr lang="en-US" sz="1200" dirty="0">
+              <a:rPr lang="en-US" sz="1100" dirty="0">
                 <a:solidFill>
                   <a:srgbClr val="9FB4B8"/>
                 </a:solidFill>
@@ -11577,45 +11374,192 @@
                 <a:ea typeface="Calibri" pitchFamily="34" charset="-122"/>
                 <a:cs typeface="Calibri" pitchFamily="34" charset="-120"/>
               </a:rPr>
-              <a:t>Retrieval saturated at 197/200. The three remaining failures are ranking misses, not coverage misses, so a second route has nothing to add.</a:t>
-            </a:r>
-            <a:endParaRPr lang="en-US" sz="1200" dirty="0"/>
-          </a:p>
-        </p:txBody>
-      </p:sp>
-      <p:sp>
-        <p:nvSpPr>
-          <p:cNvPr id="17" name="Text 15"/>
-          <p:cNvSpPr txBox="1"/>
-          <p:nvPr/>
-        </p:nvSpPr>
-        <p:spPr>
-          <a:xfrm>
-            <a:off x="566928" y="5230368"/>
-            <a:ext cx="11064240" cy="402336"/>
-          </a:xfrm>
-          <a:prstGeom prst="rect">
-            <a:avLst/>
-          </a:prstGeom>
-          <a:noFill/>
-          <a:ln/>
-        </p:spPr>
-        <p:txBody>
-          <a:bodyPr wrap="square" lIns="0" tIns="0" rIns="0" bIns="0" rtlCol="0" anchor="ctr"/>
-          <a:lstStyle/>
-          <a:p>
-            <a:pPr marL="0" indent="0">
-              <a:buNone/>
-            </a:pPr>
-            <a:r>
-              <a:rPr lang="en-US" sz="1900" b="1" dirty="0">
-                <a:solidFill>
-                  <a:srgbClr val="02C39A"/>
+              <a:t>Rewarding a requirement named in the title. Principled, but constraints come from the features and details fields, not titles.</a:t>
+            </a:r>
+            <a:endParaRPr lang="en-US" sz="1100" dirty="0"/>
+          </a:p>
+        </p:txBody>
+      </p:sp>
+      <p:sp>
+        <p:nvSpPr>
+          <p:cNvPr id="17" name="Shape 15"/>
+          <p:cNvSpPr/>
+          <p:nvPr/>
+        </p:nvSpPr>
+        <p:spPr>
+          <a:xfrm>
+            <a:off x="9043416" y="2011680"/>
+            <a:ext cx="2624328" cy="2962656"/>
+          </a:xfrm>
+          <a:prstGeom prst="roundRect">
+            <a:avLst>
+              <a:gd name="adj" fmla="val 2091"/>
+            </a:avLst>
+          </a:prstGeom>
+          <a:solidFill>
+            <a:srgbClr val="13323B"/>
+          </a:solidFill>
+          <a:ln w="12700">
+            <a:solidFill>
+              <a:srgbClr val="13323B"/>
+            </a:solidFill>
+            <a:prstDash val="solid"/>
+          </a:ln>
+        </p:spPr>
+      </p:sp>
+      <p:sp>
+        <p:nvSpPr>
+          <p:cNvPr id="18" name="Text 16"/>
+          <p:cNvSpPr txBox="1"/>
+          <p:nvPr/>
+        </p:nvSpPr>
+        <p:spPr>
+          <a:xfrm>
+            <a:off x="9281160" y="2212848"/>
+            <a:ext cx="2194560" cy="329184"/>
+          </a:xfrm>
+          <a:prstGeom prst="rect">
+            <a:avLst/>
+          </a:prstGeom>
+          <a:noFill/>
+          <a:ln/>
+        </p:spPr>
+        <p:txBody>
+          <a:bodyPr wrap="square" lIns="0" tIns="0" rIns="0" bIns="0" rtlCol="0" anchor="ctr"/>
+          <a:lstStyle/>
+          <a:p>
+            <a:pPr indent="0" marL="0">
+              <a:buNone/>
+            </a:pPr>
+            <a:r>
+              <a:rPr lang="en-US" sz="1450" b="1" dirty="0">
+                <a:solidFill>
+                  <a:srgbClr val="FFFFFF"/>
+                </a:solidFill>
+                <a:latin typeface="Calibri" pitchFamily="34" charset="0"/>
+                <a:ea typeface="Calibri" pitchFamily="34" charset="-122"/>
+                <a:cs typeface="Calibri" pitchFamily="34" charset="-120"/>
+              </a:rPr>
+              <a:t>Dense retrieval</a:t>
+            </a:r>
+            <a:endParaRPr lang="en-US" sz="1450" dirty="0"/>
+          </a:p>
+        </p:txBody>
+      </p:sp>
+      <p:sp>
+        <p:nvSpPr>
+          <p:cNvPr id="19" name="Text 17"/>
+          <p:cNvSpPr txBox="1"/>
+          <p:nvPr/>
+        </p:nvSpPr>
+        <p:spPr>
+          <a:xfrm>
+            <a:off x="9281160" y="2578608"/>
+            <a:ext cx="2194560" cy="530352"/>
+          </a:xfrm>
+          <a:prstGeom prst="rect">
+            <a:avLst/>
+          </a:prstGeom>
+          <a:noFill/>
+          <a:ln/>
+        </p:spPr>
+        <p:txBody>
+          <a:bodyPr wrap="square" lIns="0" tIns="0" rIns="0" bIns="0" rtlCol="0" anchor="ctr"/>
+          <a:lstStyle/>
+          <a:p>
+            <a:pPr indent="0" marL="0">
+              <a:buNone/>
+            </a:pPr>
+            <a:r>
+              <a:rPr lang="en-US" sz="2600" b="1" dirty="0">
+                <a:solidFill>
+                  <a:srgbClr val="FF8A80"/>
                 </a:solidFill>
                 <a:latin typeface="Cambria" pitchFamily="34" charset="0"/>
                 <a:ea typeface="Cambria" pitchFamily="34" charset="-122"/>
                 <a:cs typeface="Cambria" pitchFamily="34" charset="-120"/>
               </a:rPr>
+              <a:t>no gain</a:t>
+            </a:r>
+            <a:endParaRPr lang="en-US" sz="2600" dirty="0"/>
+          </a:p>
+        </p:txBody>
+      </p:sp>
+      <p:sp>
+        <p:nvSpPr>
+          <p:cNvPr id="20" name="Text 18"/>
+          <p:cNvSpPr txBox="1"/>
+          <p:nvPr/>
+        </p:nvSpPr>
+        <p:spPr>
+          <a:xfrm>
+            <a:off x="9281160" y="3182112"/>
+            <a:ext cx="2176272" cy="1664208"/>
+          </a:xfrm>
+          <a:prstGeom prst="rect">
+            <a:avLst/>
+          </a:prstGeom>
+          <a:noFill/>
+          <a:ln/>
+        </p:spPr>
+        <p:txBody>
+          <a:bodyPr wrap="square" lIns="0" tIns="0" rIns="0" bIns="0" rtlCol="0" anchor="ctr"/>
+          <a:lstStyle/>
+          <a:p>
+            <a:pPr indent="0" marL="0">
+              <a:lnSpc>
+                <a:spcPts val="1400"/>
+              </a:lnSpc>
+              <a:buNone/>
+            </a:pPr>
+            <a:r>
+              <a:rPr lang="en-US" sz="1100" dirty="0">
+                <a:solidFill>
+                  <a:srgbClr val="9FB4B8"/>
+                </a:solidFill>
+                <a:latin typeface="Calibri" pitchFamily="34" charset="0"/>
+                <a:ea typeface="Calibri" pitchFamily="34" charset="-122"/>
+                <a:cs typeface="Calibri" pitchFamily="34" charset="-120"/>
+              </a:rPr>
+              <a:t>Retrieval saturated at 197/200. The three failures are ranking misses, not coverage misses, so a second route adds nothing.</a:t>
+            </a:r>
+            <a:endParaRPr lang="en-US" sz="1100" dirty="0"/>
+          </a:p>
+        </p:txBody>
+      </p:sp>
+      <p:sp>
+        <p:nvSpPr>
+          <p:cNvPr id="21" name="Text 19"/>
+          <p:cNvSpPr txBox="1"/>
+          <p:nvPr/>
+        </p:nvSpPr>
+        <p:spPr>
+          <a:xfrm>
+            <a:off x="566928" y="5230368"/>
+            <a:ext cx="11064240" cy="402336"/>
+          </a:xfrm>
+          <a:prstGeom prst="rect">
+            <a:avLst/>
+          </a:prstGeom>
+          <a:noFill/>
+          <a:ln/>
+        </p:spPr>
+        <p:txBody>
+          <a:bodyPr wrap="square" lIns="0" tIns="0" rIns="0" bIns="0" rtlCol="0" anchor="ctr"/>
+          <a:lstStyle/>
+          <a:p>
+            <a:pPr indent="0" marL="0">
+              <a:buNone/>
+            </a:pPr>
+            <a:r>
+              <a:rPr lang="en-US" sz="1900" b="1" dirty="0">
+                <a:solidFill>
+                  <a:srgbClr val="02C39A"/>
+                </a:solidFill>
+                <a:latin typeface="Cambria" pitchFamily="34" charset="0"/>
+                <a:ea typeface="Cambria" pitchFamily="34" charset="-122"/>
+                <a:cs typeface="Cambria" pitchFamily="34" charset="-120"/>
+              </a:rPr>
               <a:t>A feature with real lift against a random baseline can be worthless against a strong one.</a:t>
             </a:r>
             <a:endParaRPr lang="en-US" sz="1900" dirty="0"/>
@@ -11624,7 +11568,7 @@
       </p:sp>
       <p:sp>
         <p:nvSpPr>
-          <p:cNvPr id="18" name="Text 16"/>
+          <p:cNvPr id="22" name="Text 20"/>
           <p:cNvSpPr txBox="1"/>
           <p:nvPr/>
         </p:nvSpPr>
@@ -11643,7 +11587,7 @@
           <a:bodyPr wrap="square" lIns="0" tIns="0" rIns="0" bIns="0" rtlCol="0" anchor="ctr"/>
           <a:lstStyle/>
           <a:p>
-            <a:pPr marL="0" indent="0">
+            <a:pPr indent="0" marL="0">
               <a:buNone/>
             </a:pPr>
             <a:r>
@@ -11677,7 +11621,6 @@
         <a:solidFill>
           <a:srgbClr val="FFFFFF"/>
         </a:solidFill>
-        <a:effectLst/>
       </p:bgPr>
     </p:bg>
     <p:spTree>
@@ -11715,11 +11658,11 @@
           <a:bodyPr wrap="square" lIns="0" tIns="0" rIns="0" bIns="0" rtlCol="0" anchor="ctr"/>
           <a:lstStyle/>
           <a:p>
-            <a:pPr marL="0" indent="0">
-              <a:buNone/>
-            </a:pPr>
-            <a:r>
-              <a:rPr lang="en-US" sz="1200" b="1" kern="0" spc="200" dirty="0">
+            <a:pPr indent="0" marL="0">
+              <a:buNone/>
+            </a:pPr>
+            <a:r>
+              <a:rPr lang="en-US" sz="1200" b="1" spc="200" kern="0" dirty="0">
                 <a:solidFill>
                   <a:srgbClr val="028090"/>
                 </a:solidFill>
@@ -11754,7 +11697,7 @@
           <a:bodyPr wrap="square" lIns="0" tIns="0" rIns="0" bIns="0" rtlCol="0" anchor="ctr"/>
           <a:lstStyle/>
           <a:p>
-            <a:pPr marL="0" indent="0">
+            <a:pPr indent="0" marL="0">
               <a:buNone/>
             </a:pPr>
             <a:r>
@@ -11798,20 +11741,13 @@
             <a:prstDash val="solid"/>
           </a:ln>
           <a:effectLst>
-            <a:outerShdw blurRad="152400" dist="38100" dir="5400000" algn="bl" rotWithShape="0">
+            <a:outerShdw sx="100000" sy="100000" kx="0" ky="0" algn="bl" rotWithShape="0" blurRad="152400" dist="38100" dir="5400000">
               <a:srgbClr val="0B2027">
                 <a:alpha val="16000"/>
               </a:srgbClr>
             </a:outerShdw>
           </a:effectLst>
         </p:spPr>
-        <p:txBody>
-          <a:bodyPr/>
-          <a:lstStyle/>
-          <a:p>
-            <a:endParaRPr lang="en-US"/>
-          </a:p>
-        </p:txBody>
       </p:sp>
       <p:sp>
         <p:nvSpPr>
@@ -11834,7 +11770,7 @@
           <a:bodyPr wrap="square" lIns="0" tIns="0" rIns="0" bIns="0" rtlCol="0" anchor="ctr"/>
           <a:lstStyle/>
           <a:p>
-            <a:pPr marL="0" indent="0">
+            <a:pPr indent="0" marL="0">
               <a:buNone/>
             </a:pPr>
             <a:r>
@@ -11873,7 +11809,7 @@
           <a:bodyPr wrap="square" lIns="0" tIns="0" rIns="0" bIns="0" rtlCol="0" anchor="ctr"/>
           <a:lstStyle/>
           <a:p>
-            <a:pPr marL="0" indent="0">
+            <a:pPr indent="0" marL="0">
               <a:buNone/>
             </a:pPr>
             <a:r>
@@ -11912,7 +11848,7 @@
           <a:bodyPr wrap="square" lIns="0" tIns="0" rIns="0" bIns="0" rtlCol="0" anchor="ctr"/>
           <a:lstStyle/>
           <a:p>
-            <a:pPr marL="0" indent="0">
+            <a:pPr indent="0" marL="0">
               <a:buNone/>
             </a:pPr>
             <a:r>
@@ -11956,20 +11892,13 @@
             <a:prstDash val="solid"/>
           </a:ln>
           <a:effectLst>
-            <a:outerShdw blurRad="152400" dist="38100" dir="5400000" algn="bl" rotWithShape="0">
+            <a:outerShdw sx="100000" sy="100000" kx="0" ky="0" algn="bl" rotWithShape="0" blurRad="152400" dist="38100" dir="5400000">
               <a:srgbClr val="0B2027">
                 <a:alpha val="16000"/>
               </a:srgbClr>
             </a:outerShdw>
           </a:effectLst>
         </p:spPr>
-        <p:txBody>
-          <a:bodyPr/>
-          <a:lstStyle/>
-          <a:p>
-            <a:endParaRPr lang="en-US"/>
-          </a:p>
-        </p:txBody>
       </p:sp>
       <p:sp>
         <p:nvSpPr>
@@ -11992,7 +11921,7 @@
           <a:bodyPr wrap="square" lIns="0" tIns="0" rIns="0" bIns="0" rtlCol="0" anchor="ctr"/>
           <a:lstStyle/>
           <a:p>
-            <a:pPr marL="0" indent="0">
+            <a:pPr indent="0" marL="0">
               <a:buNone/>
             </a:pPr>
             <a:r>
@@ -12031,7 +11960,7 @@
           <a:bodyPr wrap="square" lIns="0" tIns="0" rIns="0" bIns="0" rtlCol="0" anchor="ctr"/>
           <a:lstStyle/>
           <a:p>
-            <a:pPr marL="0" indent="0">
+            <a:pPr indent="0" marL="0">
               <a:buNone/>
             </a:pPr>
             <a:r>
@@ -12070,7 +11999,7 @@
           <a:bodyPr wrap="square" lIns="0" tIns="0" rIns="0" bIns="0" rtlCol="0" anchor="ctr"/>
           <a:lstStyle/>
           <a:p>
-            <a:pPr marL="0" indent="0">
+            <a:pPr indent="0" marL="0">
               <a:buNone/>
             </a:pPr>
             <a:r>
@@ -12114,20 +12043,13 @@
             <a:prstDash val="solid"/>
           </a:ln>
           <a:effectLst>
-            <a:outerShdw blurRad="152400" dist="38100" dir="5400000" algn="bl" rotWithShape="0">
+            <a:outerShdw sx="100000" sy="100000" kx="0" ky="0" algn="bl" rotWithShape="0" blurRad="152400" dist="38100" dir="5400000">
               <a:srgbClr val="0B2027">
                 <a:alpha val="16000"/>
               </a:srgbClr>
             </a:outerShdw>
           </a:effectLst>
         </p:spPr>
-        <p:txBody>
-          <a:bodyPr/>
-          <a:lstStyle/>
-          <a:p>
-            <a:endParaRPr lang="en-US"/>
-          </a:p>
-        </p:txBody>
       </p:sp>
       <p:sp>
         <p:nvSpPr>
@@ -12150,7 +12072,7 @@
           <a:bodyPr wrap="square" lIns="0" tIns="0" rIns="0" bIns="0" rtlCol="0" anchor="ctr"/>
           <a:lstStyle/>
           <a:p>
-            <a:pPr marL="0" indent="0">
+            <a:pPr indent="0" marL="0">
               <a:buNone/>
             </a:pPr>
             <a:r>
@@ -12189,7 +12111,7 @@
           <a:bodyPr wrap="square" lIns="0" tIns="0" rIns="0" bIns="0" rtlCol="0" anchor="ctr"/>
           <a:lstStyle/>
           <a:p>
-            <a:pPr marL="0" indent="0">
+            <a:pPr indent="0" marL="0">
               <a:buNone/>
             </a:pPr>
             <a:r>
@@ -12228,7 +12150,7 @@
           <a:bodyPr wrap="square" lIns="0" tIns="0" rIns="0" bIns="0" rtlCol="0" anchor="ctr"/>
           <a:lstStyle/>
           <a:p>
-            <a:pPr marL="0" indent="0">
+            <a:pPr indent="0" marL="0">
               <a:buNone/>
             </a:pPr>
             <a:r>
@@ -12272,20 +12194,13 @@
             <a:prstDash val="solid"/>
           </a:ln>
           <a:effectLst>
-            <a:outerShdw blurRad="152400" dist="38100" dir="5400000" algn="bl" rotWithShape="0">
+            <a:outerShdw sx="100000" sy="100000" kx="0" ky="0" algn="bl" rotWithShape="0" blurRad="152400" dist="38100" dir="5400000">
               <a:srgbClr val="0B2027">
                 <a:alpha val="16000"/>
               </a:srgbClr>
             </a:outerShdw>
           </a:effectLst>
         </p:spPr>
-        <p:txBody>
-          <a:bodyPr/>
-          <a:lstStyle/>
-          <a:p>
-            <a:endParaRPr lang="en-US"/>
-          </a:p>
-        </p:txBody>
       </p:sp>
       <p:sp>
         <p:nvSpPr>
@@ -12308,7 +12223,7 @@
           <a:bodyPr wrap="square" lIns="0" tIns="0" rIns="0" bIns="0" rtlCol="0" anchor="ctr"/>
           <a:lstStyle/>
           <a:p>
-            <a:pPr marL="0" indent="0">
+            <a:pPr indent="0" marL="0">
               <a:buNone/>
             </a:pPr>
             <a:r>
@@ -12347,7 +12262,7 @@
           <a:bodyPr wrap="square" lIns="0" tIns="0" rIns="0" bIns="0" rtlCol="0" anchor="ctr"/>
           <a:lstStyle/>
           <a:p>
-            <a:pPr marL="0" indent="0">
+            <a:pPr indent="0" marL="0">
               <a:buNone/>
             </a:pPr>
             <a:r>
@@ -12386,7 +12301,7 @@
           <a:bodyPr wrap="square" lIns="0" tIns="0" rIns="0" bIns="0" rtlCol="0" anchor="ctr"/>
           <a:lstStyle/>
           <a:p>
-            <a:pPr marL="0" indent="0">
+            <a:pPr indent="0" marL="0">
               <a:buNone/>
             </a:pPr>
             <a:r>
@@ -12425,7 +12340,7 @@
           <a:bodyPr wrap="square" lIns="0" tIns="0" rIns="0" bIns="0" rtlCol="0" anchor="ctr"/>
           <a:lstStyle/>
           <a:p>
-            <a:pPr marL="0" indent="0">
+            <a:pPr indent="0" marL="0">
               <a:buNone/>
             </a:pPr>
             <a:r>
@@ -12464,7 +12379,7 @@
           <a:bodyPr wrap="square" lIns="0" tIns="0" rIns="0" bIns="0" rtlCol="0" anchor="ctr"/>
           <a:lstStyle/>
           <a:p>
-            <a:pPr marL="0" indent="0">
+            <a:pPr indent="0" marL="0">
               <a:buNone/>
             </a:pPr>
             <a:r>
@@ -12508,13 +12423,6 @@
             <a:prstDash val="solid"/>
           </a:ln>
         </p:spPr>
-        <p:txBody>
-          <a:bodyPr/>
-          <a:lstStyle/>
-          <a:p>
-            <a:endParaRPr lang="en-US"/>
-          </a:p>
-        </p:txBody>
       </p:sp>
       <p:sp>
         <p:nvSpPr>
@@ -12542,13 +12450,6 @@
             <a:prstDash val="solid"/>
           </a:ln>
         </p:spPr>
-        <p:txBody>
-          <a:bodyPr/>
-          <a:lstStyle/>
-          <a:p>
-            <a:endParaRPr lang="en-US"/>
-          </a:p>
-        </p:txBody>
       </p:sp>
       <p:sp>
         <p:nvSpPr>
@@ -12571,7 +12472,7 @@
           <a:bodyPr wrap="square" lIns="0" tIns="0" rIns="0" bIns="0" rtlCol="0" anchor="ctr"/>
           <a:lstStyle/>
           <a:p>
-            <a:pPr marL="0" indent="0">
+            <a:pPr indent="0" marL="0">
               <a:buNone/>
             </a:pPr>
             <a:r>
@@ -12610,7 +12511,7 @@
           <a:bodyPr wrap="square" lIns="0" tIns="0" rIns="0" bIns="0" rtlCol="0" anchor="ctr"/>
           <a:lstStyle/>
           <a:p>
-            <a:pPr marL="0" indent="0">
+            <a:pPr indent="0" marL="0">
               <a:buNone/>
             </a:pPr>
             <a:r>
@@ -12649,7 +12550,7 @@
           <a:bodyPr wrap="square" lIns="0" tIns="0" rIns="0" bIns="0" rtlCol="0" anchor="ctr"/>
           <a:lstStyle/>
           <a:p>
-            <a:pPr marL="0" indent="0">
+            <a:pPr indent="0" marL="0">
               <a:buNone/>
             </a:pPr>
             <a:r>
@@ -12693,13 +12594,6 @@
             <a:prstDash val="solid"/>
           </a:ln>
         </p:spPr>
-        <p:txBody>
-          <a:bodyPr/>
-          <a:lstStyle/>
-          <a:p>
-            <a:endParaRPr lang="en-US"/>
-          </a:p>
-        </p:txBody>
       </p:sp>
       <p:sp>
         <p:nvSpPr>
@@ -12727,13 +12621,6 @@
             <a:prstDash val="solid"/>
           </a:ln>
         </p:spPr>
-        <p:txBody>
-          <a:bodyPr/>
-          <a:lstStyle/>
-          <a:p>
-            <a:endParaRPr lang="en-US"/>
-          </a:p>
-        </p:txBody>
       </p:sp>
       <p:sp>
         <p:nvSpPr>
@@ -12756,7 +12643,7 @@
           <a:bodyPr wrap="square" lIns="0" tIns="0" rIns="0" bIns="0" rtlCol="0" anchor="ctr"/>
           <a:lstStyle/>
           <a:p>
-            <a:pPr marL="0" indent="0">
+            <a:pPr indent="0" marL="0">
               <a:buNone/>
             </a:pPr>
             <a:r>
@@ -12795,7 +12682,7 @@
           <a:bodyPr wrap="square" lIns="0" tIns="0" rIns="0" bIns="0" rtlCol="0" anchor="ctr"/>
           <a:lstStyle/>
           <a:p>
-            <a:pPr marL="0" indent="0">
+            <a:pPr indent="0" marL="0">
               <a:buNone/>
             </a:pPr>
             <a:r>
@@ -12834,7 +12721,7 @@
           <a:bodyPr wrap="square" lIns="0" tIns="0" rIns="0" bIns="0" rtlCol="0" anchor="ctr"/>
           <a:lstStyle/>
           <a:p>
-            <a:pPr marL="0" indent="0">
+            <a:pPr indent="0" marL="0">
               <a:buNone/>
             </a:pPr>
             <a:r>
@@ -12878,13 +12765,6 @@
             <a:prstDash val="solid"/>
           </a:ln>
         </p:spPr>
-        <p:txBody>
-          <a:bodyPr/>
-          <a:lstStyle/>
-          <a:p>
-            <a:endParaRPr lang="en-US"/>
-          </a:p>
-        </p:txBody>
       </p:sp>
       <p:sp>
         <p:nvSpPr>
@@ -12912,13 +12792,6 @@
             <a:prstDash val="solid"/>
           </a:ln>
         </p:spPr>
-        <p:txBody>
-          <a:bodyPr/>
-          <a:lstStyle/>
-          <a:p>
-            <a:endParaRPr lang="en-US"/>
-          </a:p>
-        </p:txBody>
       </p:sp>
       <p:sp>
         <p:nvSpPr>
@@ -12941,7 +12814,7 @@
           <a:bodyPr wrap="square" lIns="0" tIns="0" rIns="0" bIns="0" rtlCol="0" anchor="ctr"/>
           <a:lstStyle/>
           <a:p>
-            <a:pPr marL="0" indent="0">
+            <a:pPr indent="0" marL="0">
               <a:buNone/>
             </a:pPr>
             <a:r>
@@ -12980,7 +12853,7 @@
           <a:bodyPr wrap="square" lIns="0" tIns="0" rIns="0" bIns="0" rtlCol="0" anchor="ctr"/>
           <a:lstStyle/>
           <a:p>
-            <a:pPr marL="0" indent="0">
+            <a:pPr indent="0" marL="0">
               <a:buNone/>
             </a:pPr>
             <a:r>
@@ -13019,7 +12892,7 @@
           <a:bodyPr wrap="square" lIns="0" tIns="0" rIns="0" bIns="0" rtlCol="0" anchor="ctr"/>
           <a:lstStyle/>
           <a:p>
-            <a:pPr marL="0" indent="0">
+            <a:pPr indent="0" marL="0">
               <a:buNone/>
             </a:pPr>
             <a:r>
@@ -13063,13 +12936,6 @@
             <a:prstDash val="solid"/>
           </a:ln>
         </p:spPr>
-        <p:txBody>
-          <a:bodyPr/>
-          <a:lstStyle/>
-          <a:p>
-            <a:endParaRPr lang="en-US"/>
-          </a:p>
-        </p:txBody>
       </p:sp>
       <p:sp>
         <p:nvSpPr>
@@ -13097,13 +12963,6 @@
             <a:prstDash val="solid"/>
           </a:ln>
         </p:spPr>
-        <p:txBody>
-          <a:bodyPr/>
-          <a:lstStyle/>
-          <a:p>
-            <a:endParaRPr lang="en-US"/>
-          </a:p>
-        </p:txBody>
       </p:sp>
       <p:sp>
         <p:nvSpPr>
@@ -13126,7 +12985,7 @@
           <a:bodyPr wrap="square" lIns="0" tIns="0" rIns="0" bIns="0" rtlCol="0" anchor="ctr"/>
           <a:lstStyle/>
           <a:p>
-            <a:pPr marL="0" indent="0">
+            <a:pPr indent="0" marL="0">
               <a:buNone/>
             </a:pPr>
             <a:r>
@@ -13165,7 +13024,7 @@
           <a:bodyPr wrap="square" lIns="0" tIns="0" rIns="0" bIns="0" rtlCol="0" anchor="ctr"/>
           <a:lstStyle/>
           <a:p>
-            <a:pPr marL="0" indent="0">
+            <a:pPr indent="0" marL="0">
               <a:buNone/>
             </a:pPr>
             <a:r>
@@ -13484,319 +13343,4 @@
     </a:ext>
   </a:extLst>
 </a:theme>
-</file>
-
-<file path=ppt/theme/theme2.xml><?xml version="1.0" encoding="utf-8"?>
-<a:theme xmlns:a="http://schemas.openxmlformats.org/drawingml/2006/main" name="Office Theme">
-  <a:themeElements>
-    <a:clrScheme name="Office">
-      <a:dk1>
-        <a:sysClr val="windowText" lastClr="000000"/>
-      </a:dk1>
-      <a:lt1>
-        <a:sysClr val="window" lastClr="FFFFFF"/>
-      </a:lt1>
-      <a:dk2>
-        <a:srgbClr val="0E2841"/>
-      </a:dk2>
-      <a:lt2>
-        <a:srgbClr val="E8E8E8"/>
-      </a:lt2>
-      <a:accent1>
-        <a:srgbClr val="156082"/>
-      </a:accent1>
-      <a:accent2>
-        <a:srgbClr val="E97132"/>
-      </a:accent2>
-      <a:accent3>
-        <a:srgbClr val="196B24"/>
-      </a:accent3>
-      <a:accent4>
-        <a:srgbClr val="0F9ED5"/>
-      </a:accent4>
-      <a:accent5>
-        <a:srgbClr val="A02B93"/>
-      </a:accent5>
-      <a:accent6>
-        <a:srgbClr val="4EA72E"/>
-      </a:accent6>
-      <a:hlink>
-        <a:srgbClr val="467886"/>
-      </a:hlink>
-      <a:folHlink>
-        <a:srgbClr val="96607D"/>
-      </a:folHlink>
-    </a:clrScheme>
-    <a:fontScheme name="Office">
-      <a:majorFont>
-        <a:latin typeface="Aptos Display" panose="02110004020202020204"/>
-        <a:ea typeface=""/>
-        <a:cs typeface=""/>
-        <a:font script="Jpan" typeface="游ゴシック Light"/>
-        <a:font script="Hang" typeface="맑은 고딕"/>
-        <a:font script="Hans" typeface="等线 Light"/>
-        <a:font script="Hant" typeface="新細明體"/>
-        <a:font script="Arab" typeface="Times New Roman"/>
-        <a:font script="Hebr" typeface="Times New Roman"/>
-        <a:font script="Thai" typeface="Angsana New"/>
-        <a:font script="Ethi" typeface="Nyala"/>
-        <a:font script="Beng" typeface="Vrinda"/>
-        <a:font script="Gujr" typeface="Shruti"/>
-        <a:font script="Khmr" typeface="MoolBoran"/>
-        <a:font script="Knda" typeface="Tunga"/>
-        <a:font script="Guru" typeface="Raavi"/>
-        <a:font script="Cans" typeface="Euphemia"/>
-        <a:font script="Cher" typeface="Plantagenet Cherokee"/>
-        <a:font script="Yiii" typeface="Microsoft Yi Baiti"/>
-        <a:font script="Tibt" typeface="Microsoft Himalaya"/>
-        <a:font script="Thaa" typeface="MV Boli"/>
-        <a:font script="Deva" typeface="Mangal"/>
-        <a:font script="Telu" typeface="Gautami"/>
-        <a:font script="Taml" typeface="Latha"/>
-        <a:font script="Syrc" typeface="Estrangelo Edessa"/>
-        <a:font script="Orya" typeface="Kalinga"/>
-        <a:font script="Mlym" typeface="Kartika"/>
-        <a:font script="Laoo" typeface="DokChampa"/>
-        <a:font script="Sinh" typeface="Iskoola Pota"/>
-        <a:font script="Mong" typeface="Mongolian Baiti"/>
-        <a:font script="Viet" typeface="Times New Roman"/>
-        <a:font script="Uigh" typeface="Microsoft Uighur"/>
-        <a:font script="Geor" typeface="Sylfaen"/>
-        <a:font script="Armn" typeface="Arial"/>
-        <a:font script="Bugi" typeface="Leelawadee UI"/>
-        <a:font script="Bopo" typeface="Microsoft JhengHei"/>
-        <a:font script="Java" typeface="Javanese Text"/>
-        <a:font script="Lisu" typeface="Segoe UI"/>
-        <a:font script="Mymr" typeface="Myanmar Text"/>
-        <a:font script="Nkoo" typeface="Ebrima"/>
-        <a:font script="Olck" typeface="Nirmala UI"/>
-        <a:font script="Osma" typeface="Ebrima"/>
-        <a:font script="Phag" typeface="Phagspa"/>
-        <a:font script="Syrn" typeface="Estrangelo Edessa"/>
-        <a:font script="Syrj" typeface="Estrangelo Edessa"/>
-        <a:font script="Syre" typeface="Estrangelo Edessa"/>
-        <a:font script="Sora" typeface="Nirmala UI"/>
-        <a:font script="Tale" typeface="Microsoft Tai Le"/>
-        <a:font script="Talu" typeface="Microsoft New Tai Lue"/>
-        <a:font script="Tfng" typeface="Ebrima"/>
-      </a:majorFont>
-      <a:minorFont>
-        <a:latin typeface="Aptos" panose="02110004020202020204"/>
-        <a:ea typeface=""/>
-        <a:cs typeface=""/>
-        <a:font script="Jpan" typeface="游ゴシック"/>
-        <a:font script="Hang" typeface="맑은 고딕"/>
-        <a:font script="Hans" typeface="等线"/>
-        <a:font script="Hant" typeface="新細明體"/>
-        <a:font script="Arab" typeface="Arial"/>
-        <a:font script="Hebr" typeface="Arial"/>
-        <a:font script="Thai" typeface="Cordia New"/>
-        <a:font script="Ethi" typeface="Nyala"/>
-        <a:font script="Beng" typeface="Vrinda"/>
-        <a:font script="Gujr" typeface="Shruti"/>
-        <a:font script="Khmr" typeface="DaunPenh"/>
-        <a:font script="Knda" typeface="Tunga"/>
-        <a:font script="Guru" typeface="Raavi"/>
-        <a:font script="Cans" typeface="Euphemia"/>
-        <a:font script="Cher" typeface="Plantagenet Cherokee"/>
-        <a:font script="Yiii" typeface="Microsoft Yi Baiti"/>
-        <a:font script="Tibt" typeface="Microsoft Himalaya"/>
-        <a:font script="Thaa" typeface="MV Boli"/>
-        <a:font script="Deva" typeface="Mangal"/>
-        <a:font script="Telu" typeface="Gautami"/>
-        <a:font script="Taml" typeface="Latha"/>
-        <a:font script="Syrc" typeface="Estrangelo Edessa"/>
-        <a:font script="Orya" typeface="Kalinga"/>
-        <a:font script="Mlym" typeface="Kartika"/>
-        <a:font script="Laoo" typeface="DokChampa"/>
-        <a:font script="Sinh" typeface="Iskoola Pota"/>
-        <a:font script="Mong" typeface="Mongolian Baiti"/>
-        <a:font script="Viet" typeface="Arial"/>
-        <a:font script="Uigh" typeface="Microsoft Uighur"/>
-        <a:font script="Geor" typeface="Sylfaen"/>
-        <a:font script="Armn" typeface="Arial"/>
-        <a:font script="Bugi" typeface="Leelawadee UI"/>
-        <a:font script="Bopo" typeface="Microsoft JhengHei"/>
-        <a:font script="Java" typeface="Javanese Text"/>
-        <a:font script="Lisu" typeface="Segoe UI"/>
-        <a:font script="Mymr" typeface="Myanmar Text"/>
-        <a:font script="Nkoo" typeface="Ebrima"/>
-        <a:font script="Olck" typeface="Nirmala UI"/>
-        <a:font script="Osma" typeface="Ebrima"/>
-        <a:font script="Phag" typeface="Phagspa"/>
-        <a:font script="Syrn" typeface="Estrangelo Edessa"/>
-        <a:font script="Syrj" typeface="Estrangelo Edessa"/>
-        <a:font script="Syre" typeface="Estrangelo Edessa"/>
-        <a:font script="Sora" typeface="Nirmala UI"/>
-        <a:font script="Tale" typeface="Microsoft Tai Le"/>
-        <a:font script="Talu" typeface="Microsoft New Tai Lue"/>
-        <a:font script="Tfng" typeface="Ebrima"/>
-      </a:minorFont>
-    </a:fontScheme>
-    <a:fmtScheme name="Office">
-      <a:fillStyleLst>
-        <a:solidFill>
-          <a:schemeClr val="phClr"/>
-        </a:solidFill>
-        <a:gradFill rotWithShape="1">
-          <a:gsLst>
-            <a:gs pos="0">
-              <a:schemeClr val="phClr">
-                <a:lumMod val="110000"/>
-                <a:satMod val="105000"/>
-                <a:tint val="67000"/>
-              </a:schemeClr>
-            </a:gs>
-            <a:gs pos="50000">
-              <a:schemeClr val="phClr">
-                <a:lumMod val="105000"/>
-                <a:satMod val="103000"/>
-                <a:tint val="73000"/>
-              </a:schemeClr>
-            </a:gs>
-            <a:gs pos="100000">
-              <a:schemeClr val="phClr">
-                <a:lumMod val="105000"/>
-                <a:satMod val="109000"/>
-                <a:tint val="81000"/>
-              </a:schemeClr>
-            </a:gs>
-          </a:gsLst>
-          <a:lin ang="5400000" scaled="0"/>
-        </a:gradFill>
-        <a:gradFill rotWithShape="1">
-          <a:gsLst>
-            <a:gs pos="0">
-              <a:schemeClr val="phClr">
-                <a:satMod val="103000"/>
-                <a:lumMod val="102000"/>
-                <a:tint val="94000"/>
-              </a:schemeClr>
-            </a:gs>
-            <a:gs pos="50000">
-              <a:schemeClr val="phClr">
-                <a:satMod val="110000"/>
-                <a:lumMod val="100000"/>
-                <a:shade val="100000"/>
-              </a:schemeClr>
-            </a:gs>
-            <a:gs pos="100000">
-              <a:schemeClr val="phClr">
-                <a:lumMod val="99000"/>
-                <a:satMod val="120000"/>
-                <a:shade val="78000"/>
-              </a:schemeClr>
-            </a:gs>
-          </a:gsLst>
-          <a:lin ang="5400000" scaled="0"/>
-        </a:gradFill>
-      </a:fillStyleLst>
-      <a:lnStyleLst>
-        <a:ln w="12700" cap="flat" cmpd="sng" algn="ctr">
-          <a:solidFill>
-            <a:schemeClr val="phClr"/>
-          </a:solidFill>
-          <a:prstDash val="solid"/>
-          <a:miter lim="800000"/>
-        </a:ln>
-        <a:ln w="19050" cap="flat" cmpd="sng" algn="ctr">
-          <a:solidFill>
-            <a:schemeClr val="phClr"/>
-          </a:solidFill>
-          <a:prstDash val="solid"/>
-          <a:miter lim="800000"/>
-        </a:ln>
-        <a:ln w="25400" cap="flat" cmpd="sng" algn="ctr">
-          <a:solidFill>
-            <a:schemeClr val="phClr"/>
-          </a:solidFill>
-          <a:prstDash val="solid"/>
-          <a:miter lim="800000"/>
-        </a:ln>
-      </a:lnStyleLst>
-      <a:effectStyleLst>
-        <a:effectStyle>
-          <a:effectLst/>
-        </a:effectStyle>
-        <a:effectStyle>
-          <a:effectLst/>
-        </a:effectStyle>
-        <a:effectStyle>
-          <a:effectLst>
-            <a:outerShdw blurRad="57150" dist="19050" dir="5400000" algn="ctr" rotWithShape="0">
-              <a:srgbClr val="000000">
-                <a:alpha val="63000"/>
-              </a:srgbClr>
-            </a:outerShdw>
-          </a:effectLst>
-        </a:effectStyle>
-      </a:effectStyleLst>
-      <a:bgFillStyleLst>
-        <a:solidFill>
-          <a:schemeClr val="phClr"/>
-        </a:solidFill>
-        <a:solidFill>
-          <a:schemeClr val="phClr">
-            <a:tint val="95000"/>
-            <a:satMod val="170000"/>
-          </a:schemeClr>
-        </a:solidFill>
-        <a:gradFill rotWithShape="1">
-          <a:gsLst>
-            <a:gs pos="0">
-              <a:schemeClr val="phClr">
-                <a:tint val="93000"/>
-                <a:satMod val="150000"/>
-                <a:shade val="98000"/>
-                <a:lumMod val="102000"/>
-              </a:schemeClr>
-            </a:gs>
-            <a:gs pos="50000">
-              <a:schemeClr val="phClr">
-                <a:tint val="98000"/>
-                <a:satMod val="130000"/>
-                <a:shade val="90000"/>
-                <a:lumMod val="103000"/>
-              </a:schemeClr>
-            </a:gs>
-            <a:gs pos="100000">
-              <a:schemeClr val="phClr">
-                <a:shade val="63000"/>
-                <a:satMod val="120000"/>
-              </a:schemeClr>
-            </a:gs>
-          </a:gsLst>
-          <a:lin ang="5400000" scaled="0"/>
-        </a:gradFill>
-      </a:bgFillStyleLst>
-    </a:fmtScheme>
-  </a:themeElements>
-  <a:objectDefaults>
-    <a:lnDef>
-      <a:spPr/>
-      <a:bodyPr/>
-      <a:lstStyle/>
-      <a:style>
-        <a:lnRef idx="2">
-          <a:schemeClr val="accent1"/>
-        </a:lnRef>
-        <a:fillRef idx="0">
-          <a:schemeClr val="accent1"/>
-        </a:fillRef>
-        <a:effectRef idx="1">
-          <a:schemeClr val="accent1"/>
-        </a:effectRef>
-        <a:fontRef idx="minor">
-          <a:schemeClr val="tx1"/>
-        </a:fontRef>
-      </a:style>
-    </a:lnDef>
-  </a:objectDefaults>
-  <a:extraClrSchemeLst/>
-  <a:extLst>
-    <a:ext uri="{05A4C25C-085E-4340-85A3-A5531E510DB2}">
-      <thm15:themeFamily xmlns:thm15="http://schemas.microsoft.com/office/thememl/2012/main" name="Office Theme" id="{2E142A2C-CD16-42D6-873A-C26D2A0506FA}" vid="{1BDDFF52-6CD6-40A5-AB3C-68EB2F1E4D0A}"/>
-    </a:ext>
-  </a:extLst>
-</a:theme>
 </file>